--- a/capacitaciones/impuestos/Capacitacion-Impuestos-Agentes-Inmobiliarios.pptx
+++ b/capacitaciones/impuestos/Capacitacion-Impuestos-Agentes-Inmobiliarios.pptx
@@ -17,9 +17,10 @@
     <p:sldId id="265" r:id="rId11"/>
     <p:sldId id="266" r:id="rId12"/>
     <p:sldId id="267" r:id="rId13"/>
+    <p:sldId id="268" r:id="rId14"/>
   </p:sldIdLst>
   <p:notesMasterIdLst>
-    <p:notesMasterId r:id="rId14"/>
+    <p:notesMasterId r:id="rId15"/>
   </p:notesMasterIdLst>
   <p:sldSz cx="9144000" cy="5143500"/>
   <p:notesSz cx="5143500" cy="9144000"/>
@@ -601,7 +602,7 @@
           <a:p>
             <a:r>
               <a:rPr lang="en-US" dirty="0"/>
-              <a:t>Para el agente esto sirve en dos momentos: al tasar, porque la valuación fiscal y las boletas dicen mucho del inmueble; y al asesorar sobre qué gastos corren por cuenta del propietario y cuáles del inquilino. Para leer cualquier boleta —ARBA, AGIP o municipal— buscar siempre lo mismo: qué impuesto es, número de partida o padrón, período, importe y fecha de vencimiento.</a:t>
+              <a:t>Sellos es el impuesto más propio del negocio inmobiliario y el que más se olvida al presupuestar una operación. Regla de oro del manual: siempre pedir el contrato de alquiler sellado. Sin sellado no hay fecha cierta y, ante un conflicto o una inspección, el contrato pierde valor probatorio frente al fisco y frente a terceros.</a:t>
             </a:r>
             <a:endParaRPr lang="en-US" dirty="0"/>
           </a:p>
@@ -689,7 +690,7 @@
           <a:p>
             <a:r>
               <a:rPr lang="en-US" dirty="0"/>
-              <a:t>Cierre operativo de la capacitación: estos controles son el 90% del trabajo diario. Recordar además qué hacer ante una fiscalización: verificar la notificación en el Domicilio Fiscal Electrónico, identificar qué período y qué impuesto revisan, reunir la documentación y avisar al estudio contable ANTES de entregar o responder nada. Nunca entregar documentación a un inspector sin que el contador esté al tanto.</a:t>
+              <a:t>Para el agente esto sirve en dos momentos: al tasar, porque la valuación fiscal y las boletas dicen mucho del inmueble; y al asesorar sobre qué gastos corren por cuenta del propietario y cuáles del inquilino. Para leer cualquier boleta —ARBA, AGIP o municipal— buscar siempre lo mismo: qué impuesto es, número de partida o padrón, período, importe y fecha de vencimiento.</a:t>
             </a:r>
             <a:endParaRPr lang="en-US" dirty="0"/>
           </a:p>
@@ -777,7 +778,7 @@
           <a:p>
             <a:r>
               <a:rPr lang="en-US" dirty="0"/>
-              <a:t>Cierre. El manual completo —40 puntos, glosario, preguntas frecuentes y modelos de mensajes para proveedores— queda disponible como material de consulta. Es un documento vivo: cuando cambie una normativa relevante o aparezca un caso nuevo, se actualiza.</a:t>
+              <a:t>Cierre operativo de la capacitación: estos controles son el 90% del trabajo diario. Recordar además qué hacer ante una fiscalización: verificar la notificación en el Domicilio Fiscal Electrónico, identificar qué período y qué impuesto revisan, reunir la documentación y avisar al estudio contable ANTES de entregar o responder nada. Nunca entregar documentación a un inspector sin que el contador esté al tanto.</a:t>
             </a:r>
             <a:endParaRPr lang="en-US" dirty="0"/>
           </a:p>
@@ -801,6 +802,94 @@
             <a:fld id="{F7021451-1387-4CA6-816F-3879F97B5CBC}" type="slidenum">
               <a:rPr lang="en-US"/>
               <a:t>12</a:t>
+            </a:fld>
+            <a:endParaRPr lang="en-US"/>
+          </a:p>
+        </p:txBody>
+      </p:sp>
+    </p:spTree>
+    <p:extLst>
+      <p:ext uri="{BB962C8B-B14F-4D97-AF65-F5344CB8AC3E}">
+        <p14:creationId xmlns:p14="http://schemas.microsoft.com/office/powerpoint/2010/main" val="1024086991"/>
+      </p:ext>
+    </p:extLst>
+  </p:cSld>
+  <p:clrMapOvr>
+    <a:masterClrMapping/>
+  </p:clrMapOvr>
+</p:notes>
+</file>
+
+<file path=ppt/notesSlides/notesSlide13.xml><?xml version="1.0" encoding="utf-8"?>
+<p:notes xmlns:a="http://schemas.openxmlformats.org/drawingml/2006/main" xmlns:r="http://schemas.openxmlformats.org/officeDocument/2006/relationships" xmlns:p="http://schemas.openxmlformats.org/presentationml/2006/main">
+  <p:cSld>
+    <p:spTree>
+      <p:nvGrpSpPr>
+        <p:cNvPr id="1" name=""/>
+        <p:cNvGrpSpPr/>
+        <p:nvPr/>
+      </p:nvGrpSpPr>
+      <p:grpSpPr>
+        <a:xfrm>
+          <a:off x="0" y="0"/>
+          <a:ext cx="0" cy="0"/>
+          <a:chOff x="0" y="0"/>
+          <a:chExt cx="0" cy="0"/>
+        </a:xfrm>
+      </p:grpSpPr>
+      <p:sp>
+        <p:nvSpPr>
+          <p:cNvPr id="2" name="Slide Image Placeholder 1"/>
+          <p:cNvSpPr>
+            <a:spLocks noGrp="1" noRot="1" noChangeAspect="1"/>
+          </p:cNvSpPr>
+          <p:nvPr>
+            <p:ph type="sldImg"/>
+          </p:nvPr>
+        </p:nvSpPr>
+        <p:spPr/>
+      </p:sp>
+      <p:sp>
+        <p:nvSpPr>
+          <p:cNvPr id="3" name="Notes Placeholder 2"/>
+          <p:cNvSpPr>
+            <a:spLocks noGrp="1"/>
+          </p:cNvSpPr>
+          <p:nvPr>
+            <p:ph type="body" idx="1"/>
+          </p:nvPr>
+        </p:nvSpPr>
+        <p:spPr/>
+        <p:txBody>
+          <a:bodyPr/>
+          <a:lstStyle/>
+          <a:p>
+            <a:r>
+              <a:rPr lang="en-US" dirty="0"/>
+              <a:t>Cierre. El manual completo —40 puntos, glosario, preguntas frecuentes y modelos de mensajes para proveedores— queda disponible como material de consulta. Es un documento vivo: cuando cambie una normativa relevante o aparezca un caso nuevo, se actualiza.</a:t>
+            </a:r>
+            <a:endParaRPr lang="en-US" dirty="0"/>
+          </a:p>
+        </p:txBody>
+      </p:sp>
+      <p:sp>
+        <p:nvSpPr>
+          <p:cNvPr id="4" name="Slide Number Placeholder 3"/>
+          <p:cNvSpPr>
+            <a:spLocks noGrp="1"/>
+          </p:cNvSpPr>
+          <p:nvPr>
+            <p:ph type="sldNum" sz="quarter" idx="10"/>
+          </p:nvPr>
+        </p:nvSpPr>
+        <p:spPr/>
+        <p:txBody>
+          <a:bodyPr/>
+          <a:lstStyle/>
+          <a:p>
+            <a:fld id="{F7021451-1387-4CA6-816F-3879F97B5CBC}" type="slidenum">
+              <a:rPr lang="en-US"/>
+              <a:t>13</a:t>
             </a:fld>
             <a:endParaRPr lang="en-US"/>
           </a:p>
@@ -1393,7 +1482,7 @@
           <a:p>
             <a:r>
               <a:rPr lang="en-US" dirty="0"/>
-              <a:t>IIBB es el impuesto que más impacta el margen del negocio inmobiliario, porque se calcula sobre la comisión bruta y no sobre lo que queda. Al presupuestar hay que netear IIBB antes de calcular el margen real. Y sí: se paga aunque el período cierre en pérdida. Sobre retenciones: para retener hay que estar designado agente de retención por el organismo, no se le retiene a cualquiera.</a:t>
+              <a:t>Ganancias no es una alícuota única, y esa es la confusión más común. En sociedades son tres tramos (25%, 30% y 35%) que se aplican solo sobre el excedente de cada uno, más un 7% si la utilidad se distribuye como dividendo; si se reinvierte, ese 7% no se paga. En personas humanas es una escala de nueve tramos del 5% al 35%. Lo más útil para el equipo es el tercer bloque: al vender un inmueble, la fecha de compra define todo. Hasta el 31/12/2017 corresponde ITI, 1,5% sobre el precio de venta, se haya ganado o perdido. Desde el 1/1/2018 es el impuesto cedular del 15%, pero sobre la ganancia real. Y la casa-habitación —vivienda única de residencia permanente— está exenta en los dos casos. Los montos de los tramos en pesos se actualizan por IPC todos los años, así que nunca hay que citarlos de memoria.</a:t>
             </a:r>
             <a:endParaRPr lang="en-US" dirty="0"/>
           </a:p>
@@ -1481,7 +1570,7 @@
           <a:p>
             <a:r>
               <a:rPr lang="en-US" dirty="0"/>
-              <a:t>Sellos es el impuesto más propio del negocio inmobiliario y el que más se olvida al presupuestar una operación. Regla de oro del manual: siempre pedir el contrato de alquiler sellado. Sin sellado no hay fecha cierta y, ante un conflicto o una inspección, el contrato pierde valor probatorio frente al fisco y frente a terceros.</a:t>
+              <a:t>IIBB es el impuesto que más impacta el margen del negocio inmobiliario, porque se calcula sobre la comisión bruta y no sobre lo que queda. Al presupuestar hay que netear IIBB antes de calcular el margen real. Y sí: se paga aunque el período cierre en pérdida. Sobre retenciones: para retener hay que estar designado agente de retención por el organismo, no se le retiene a cualquiera.</a:t>
             </a:r>
             <a:endParaRPr lang="en-US" dirty="0"/>
           </a:p>
@@ -1863,7 +1952,7 @@
       </p:grpSpPr>
       <p:pic>
         <p:nvPicPr>
-          <p:cNvPr id="2" name="Image 0" descr="/tmp/claude-0/-home-user-KrakRealEstate/26f90231-47e0-5521-93d0-854de4e1add2/scratchpad/brand/logo_white.png">    </p:cNvPr>
+          <p:cNvPr id="2" name="Image 0" descr="/home/user/KrakRealEstate/capacitaciones/impuestos/brand/logo_white.png">    </p:cNvPr>
           <p:cNvPicPr>
             <a:picLocks noChangeAspect="1"/>
           </p:cNvPicPr>
@@ -2057,7 +2146,7 @@
       </p:sp>
       <p:pic>
         <p:nvPicPr>
-          <p:cNvPr id="4" name="Image 0" descr="/tmp/claude-0/-home-user-KrakRealEstate/26f90231-47e0-5521-93d0-854de4e1add2/scratchpad/brand/iso_white.png">    </p:cNvPr>
+          <p:cNvPr id="4" name="Image 0" descr="/home/user/KrakRealEstate/capacitaciones/impuestos/brand/iso_white.png">    </p:cNvPr>
           <p:cNvPicPr>
             <a:picLocks noChangeAspect="1"/>
           </p:cNvPicPr>
@@ -2112,7 +2201,7 @@
                 <a:ea typeface="Arial" pitchFamily="34" charset="-122"/>
                 <a:cs typeface="Arial" pitchFamily="34" charset="-120"/>
               </a:rPr>
-              <a:t>Los impuestos del inmueble</a:t>
+              <a:t>Sellos: el impuesto de la firma</a:t>
             </a:r>
             <a:endParaRPr lang="en-US" sz="2700" dirty="0"/>
           </a:p>
@@ -2151,7 +2240,7 @@
                 <a:ea typeface="Arial" pitchFamily="34" charset="-122"/>
                 <a:cs typeface="Arial" pitchFamily="34" charset="-120"/>
               </a:rPr>
-              <a:t>Lo que paga el propietario — y lo que hay que saber leer para tasar y asesorar.</a:t>
+              <a:t>Impuesto provincial sobre la instrumentación de actos y contratos.</a:t>
             </a:r>
             <a:endParaRPr lang="en-US" sz="1200" dirty="0"/>
           </a:p>
@@ -2166,11 +2255,11 @@
         <p:spPr>
           <a:xfrm>
             <a:off x="603504" y="1188720"/>
-            <a:ext cx="1883664" cy="2606040"/>
+            <a:ext cx="3200400" cy="3246120"/>
           </a:xfrm>
           <a:prstGeom prst="roundRect">
             <a:avLst>
-              <a:gd name="adj" fmla="val 4369"/>
+              <a:gd name="adj" fmla="val 2571"/>
             </a:avLst>
           </a:prstGeom>
           <a:solidFill>
@@ -2192,8 +2281,8 @@
         </p:nvSpPr>
         <p:spPr>
           <a:xfrm>
-            <a:off x="804672" y="1353312"/>
-            <a:ext cx="1536192" cy="548640"/>
+            <a:off x="859536" y="1417320"/>
+            <a:ext cx="2697480" cy="1005840"/>
           </a:xfrm>
           <a:prstGeom prst="rect">
             <a:avLst/>
@@ -2203,6 +2292,48 @@
         </p:spPr>
         <p:txBody>
           <a:bodyPr wrap="square" lIns="0" tIns="0" rIns="0" bIns="0" rtlCol="0" anchor="t"/>
+          <a:lstStyle/>
+          <a:p>
+            <a:pPr indent="0" marL="0">
+              <a:lnSpc>
+                <a:spcPts val="2300"/>
+              </a:lnSpc>
+              <a:buNone/>
+            </a:pPr>
+            <a:r>
+              <a:rPr lang="en-US" sz="1700" b="1" dirty="0">
+                <a:solidFill>
+                  <a:srgbClr val="FFFFFF"/>
+                </a:solidFill>
+                <a:latin typeface="Arial" pitchFamily="34" charset="0"/>
+                <a:ea typeface="Arial" pitchFamily="34" charset="-122"/>
+                <a:cs typeface="Arial" pitchFamily="34" charset="-120"/>
+              </a:rPr>
+              <a:t>Se paga una sola vez, al firmar, sobre el valor total del acto.</a:t>
+            </a:r>
+            <a:endParaRPr lang="en-US" sz="1700" dirty="0"/>
+          </a:p>
+        </p:txBody>
+      </p:sp>
+      <p:sp>
+        <p:nvSpPr>
+          <p:cNvPr id="9" name="Text 6"/>
+          <p:cNvSpPr/>
+          <p:nvPr/>
+        </p:nvSpPr>
+        <p:spPr>
+          <a:xfrm>
+            <a:off x="859536" y="2514600"/>
+            <a:ext cx="2697480" cy="1737360"/>
+          </a:xfrm>
+          <a:prstGeom prst="rect">
+            <a:avLst/>
+          </a:prstGeom>
+          <a:noFill/>
+          <a:ln/>
+        </p:spPr>
+        <p:txBody>
+          <a:bodyPr wrap="square" lIns="0" tIns="0" rIns="0" bIns="0" rtlCol="0" anchor="ctr"/>
           <a:lstStyle/>
           <a:p>
             <a:pPr indent="0" marL="0">
@@ -2212,123 +2343,71 @@
               <a:buNone/>
             </a:pPr>
             <a:r>
-              <a:rPr lang="en-US" sz="1350" b="1" dirty="0">
-                <a:solidFill>
-                  <a:srgbClr val="FFFFFF"/>
-                </a:solidFill>
-                <a:latin typeface="Arial" pitchFamily="34" charset="0"/>
-                <a:ea typeface="Arial" pitchFamily="34" charset="-122"/>
-                <a:cs typeface="Arial" pitchFamily="34" charset="-120"/>
-              </a:rPr>
-              <a:t>Impuesto Inmobiliario</a:t>
-            </a:r>
-            <a:endParaRPr lang="en-US" sz="1350" dirty="0"/>
-          </a:p>
-        </p:txBody>
-      </p:sp>
-      <p:sp>
-        <p:nvSpPr>
-          <p:cNvPr id="9" name="Text 6"/>
-          <p:cNvSpPr/>
-          <p:nvPr/>
-        </p:nvSpPr>
-        <p:spPr>
-          <a:xfrm>
-            <a:off x="804672" y="1938528"/>
-            <a:ext cx="1554480" cy="201168"/>
-          </a:xfrm>
-          <a:prstGeom prst="rect">
-            <a:avLst/>
-          </a:prstGeom>
-          <a:noFill/>
-          <a:ln/>
-        </p:spPr>
-        <p:txBody>
-          <a:bodyPr wrap="square" lIns="0" tIns="0" rIns="0" bIns="0" rtlCol="0" anchor="ctr"/>
-          <a:lstStyle/>
-          <a:p>
-            <a:pPr indent="0" marL="0">
-              <a:buNone/>
-            </a:pPr>
-            <a:r>
-              <a:rPr lang="en-US" sz="850" b="1" spc="80" kern="0" dirty="0">
-                <a:solidFill>
-                  <a:srgbClr val="C9D6E6"/>
-                </a:solidFill>
-                <a:latin typeface="Arial" pitchFamily="34" charset="0"/>
-                <a:ea typeface="Arial" pitchFamily="34" charset="-122"/>
-                <a:cs typeface="Arial" pitchFamily="34" charset="-120"/>
-              </a:rPr>
-              <a:t>ARBA (PBA)</a:t>
-            </a:r>
-            <a:endParaRPr lang="en-US" sz="850" dirty="0"/>
-          </a:p>
-        </p:txBody>
-      </p:sp>
-      <p:sp>
-        <p:nvSpPr>
-          <p:cNvPr id="10" name="Text 7"/>
-          <p:cNvSpPr/>
-          <p:nvPr/>
-        </p:nvSpPr>
-        <p:spPr>
-          <a:xfrm>
-            <a:off x="804672" y="2231136"/>
-            <a:ext cx="1554480" cy="1417320"/>
-          </a:xfrm>
-          <a:prstGeom prst="rect">
-            <a:avLst/>
-          </a:prstGeom>
-          <a:noFill/>
-          <a:ln/>
-        </p:spPr>
-        <p:txBody>
-          <a:bodyPr wrap="square" lIns="0" tIns="0" rIns="0" bIns="0" rtlCol="0" anchor="ctr"/>
-          <a:lstStyle/>
+              <a:rPr lang="en-US" sz="1100" dirty="0">
+                <a:solidFill>
+                  <a:srgbClr val="DCE6F2"/>
+                </a:solidFill>
+                <a:latin typeface="Arial" pitchFamily="34" charset="0"/>
+                <a:ea typeface="Arial" pitchFamily="34" charset="-122"/>
+                <a:cs typeface="Arial" pitchFamily="34" charset="-120"/>
+              </a:rPr>
+              <a:t>Alcanza alquileres, boletos de compraventa y contratos comerciales o societarios.</a:t>
+            </a:r>
+            <a:endParaRPr lang="en-US" sz="1100" dirty="0"/>
+          </a:p>
           <a:p>
             <a:pPr indent="0" marL="0">
               <a:lnSpc>
-                <a:spcPts val="1200"/>
+                <a:spcPts val="1600"/>
               </a:lnSpc>
               <a:buNone/>
             </a:pPr>
-            <a:r>
-              <a:rPr lang="en-US" sz="950" dirty="0">
-                <a:solidFill>
-                  <a:srgbClr val="EAEFF5"/>
-                </a:solidFill>
-                <a:latin typeface="Arial" pitchFamily="34" charset="0"/>
-                <a:ea typeface="Arial" pitchFamily="34" charset="-122"/>
-                <a:cs typeface="Arial" pitchFamily="34" charset="-120"/>
-              </a:rPr>
-              <a:t>Sobre la titularidad del inmueble, calculado sobre la valuación fiscal. Vencimientos bimestrales o trimestrales. En CABA no existe por separado: va dentro del ABL.</a:t>
-            </a:r>
-            <a:endParaRPr lang="en-US" sz="950" dirty="0"/>
-          </a:p>
-        </p:txBody>
-      </p:sp>
-      <p:sp>
-        <p:nvSpPr>
-          <p:cNvPr id="11" name="Shape 8"/>
-          <p:cNvSpPr/>
-          <p:nvPr/>
-        </p:nvSpPr>
-        <p:spPr>
-          <a:xfrm>
-            <a:off x="2670048" y="1188720"/>
-            <a:ext cx="1883664" cy="2606040"/>
+            <a:endParaRPr lang="en-US" sz="1100" dirty="0"/>
+          </a:p>
+          <a:p>
+            <a:pPr indent="0" marL="0">
+              <a:lnSpc>
+                <a:spcPts val="1600"/>
+              </a:lnSpc>
+              <a:buNone/>
+            </a:pPr>
+            <a:r>
+              <a:rPr lang="en-US" sz="1100" dirty="0">
+                <a:solidFill>
+                  <a:srgbClr val="DCE6F2"/>
+                </a:solidFill>
+                <a:latin typeface="Arial" pitchFamily="34" charset="0"/>
+                <a:ea typeface="Arial" pitchFamily="34" charset="-122"/>
+                <a:cs typeface="Arial" pitchFamily="34" charset="-120"/>
+              </a:rPr>
+              <a:t>A diferencia de Ingresos Brutos, que se liquida mes a mes, Sellos es un pago único al momento de la firma.</a:t>
+            </a:r>
+            <a:endParaRPr lang="en-US" sz="1100" dirty="0"/>
+          </a:p>
+        </p:txBody>
+      </p:sp>
+      <p:sp>
+        <p:nvSpPr>
+          <p:cNvPr id="10" name="Shape 7"/>
+          <p:cNvSpPr/>
+          <p:nvPr/>
+        </p:nvSpPr>
+        <p:spPr>
+          <a:xfrm>
+            <a:off x="4005072" y="1188720"/>
+            <a:ext cx="4681728" cy="731520"/>
           </a:xfrm>
           <a:prstGeom prst="roundRect">
             <a:avLst>
-              <a:gd name="adj" fmla="val 4369"/>
+              <a:gd name="adj" fmla="val 11250"/>
             </a:avLst>
           </a:prstGeom>
           <a:solidFill>
-            <a:srgbClr val="7C8594"/>
+            <a:srgbClr val="F2F4F7"/>
           </a:solidFill>
           <a:ln w="12700">
             <a:solidFill>
-              <a:srgbClr val="7C8594"/>
+              <a:srgbClr val="F2F4F7"/>
             </a:solidFill>
             <a:prstDash val="solid"/>
           </a:ln>
@@ -2336,141 +2415,18 @@
       </p:sp>
       <p:sp>
         <p:nvSpPr>
-          <p:cNvPr id="12" name="Text 9"/>
-          <p:cNvSpPr/>
-          <p:nvPr/>
-        </p:nvSpPr>
-        <p:spPr>
-          <a:xfrm>
-            <a:off x="2871216" y="1353312"/>
-            <a:ext cx="1536192" cy="548640"/>
-          </a:xfrm>
-          <a:prstGeom prst="rect">
-            <a:avLst/>
-          </a:prstGeom>
-          <a:noFill/>
-          <a:ln/>
-        </p:spPr>
-        <p:txBody>
-          <a:bodyPr wrap="square" lIns="0" tIns="0" rIns="0" bIns="0" rtlCol="0" anchor="t"/>
-          <a:lstStyle/>
-          <a:p>
-            <a:pPr indent="0" marL="0">
-              <a:lnSpc>
-                <a:spcPts val="1600"/>
-              </a:lnSpc>
-              <a:buNone/>
-            </a:pPr>
-            <a:r>
-              <a:rPr lang="en-US" sz="1350" b="1" dirty="0">
-                <a:solidFill>
-                  <a:srgbClr val="FFFFFF"/>
-                </a:solidFill>
-                <a:latin typeface="Arial" pitchFamily="34" charset="0"/>
-                <a:ea typeface="Arial" pitchFamily="34" charset="-122"/>
-                <a:cs typeface="Arial" pitchFamily="34" charset="-120"/>
-              </a:rPr>
-              <a:t>ABL / TSU</a:t>
-            </a:r>
-            <a:endParaRPr lang="en-US" sz="1350" dirty="0"/>
-          </a:p>
-        </p:txBody>
-      </p:sp>
-      <p:sp>
-        <p:nvSpPr>
-          <p:cNvPr id="13" name="Text 10"/>
-          <p:cNvSpPr/>
-          <p:nvPr/>
-        </p:nvSpPr>
-        <p:spPr>
-          <a:xfrm>
-            <a:off x="2871216" y="1938528"/>
-            <a:ext cx="1554480" cy="201168"/>
-          </a:xfrm>
-          <a:prstGeom prst="rect">
-            <a:avLst/>
-          </a:prstGeom>
-          <a:noFill/>
-          <a:ln/>
-        </p:spPr>
-        <p:txBody>
-          <a:bodyPr wrap="square" lIns="0" tIns="0" rIns="0" bIns="0" rtlCol="0" anchor="ctr"/>
-          <a:lstStyle/>
-          <a:p>
-            <a:pPr indent="0" marL="0">
-              <a:buNone/>
-            </a:pPr>
-            <a:r>
-              <a:rPr lang="en-US" sz="850" b="1" spc="80" kern="0" dirty="0">
-                <a:solidFill>
-                  <a:srgbClr val="C9D6E6"/>
-                </a:solidFill>
-                <a:latin typeface="Arial" pitchFamily="34" charset="0"/>
-                <a:ea typeface="Arial" pitchFamily="34" charset="-122"/>
-                <a:cs typeface="Arial" pitchFamily="34" charset="-120"/>
-              </a:rPr>
-              <a:t>AGIP · MUNICIPIO</a:t>
-            </a:r>
-            <a:endParaRPr lang="en-US" sz="850" dirty="0"/>
-          </a:p>
-        </p:txBody>
-      </p:sp>
-      <p:sp>
-        <p:nvSpPr>
-          <p:cNvPr id="14" name="Text 11"/>
-          <p:cNvSpPr/>
-          <p:nvPr/>
-        </p:nvSpPr>
-        <p:spPr>
-          <a:xfrm>
-            <a:off x="2871216" y="2231136"/>
-            <a:ext cx="1554480" cy="1417320"/>
-          </a:xfrm>
-          <a:prstGeom prst="rect">
-            <a:avLst/>
-          </a:prstGeom>
-          <a:noFill/>
-          <a:ln/>
-        </p:spPr>
-        <p:txBody>
-          <a:bodyPr wrap="square" lIns="0" tIns="0" rIns="0" bIns="0" rtlCol="0" anchor="ctr"/>
-          <a:lstStyle/>
-          <a:p>
-            <a:pPr indent="0" marL="0">
-              <a:lnSpc>
-                <a:spcPts val="1200"/>
-              </a:lnSpc>
-              <a:buNone/>
-            </a:pPr>
-            <a:r>
-              <a:rPr lang="en-US" sz="950" dirty="0">
-                <a:solidFill>
-                  <a:srgbClr val="EAEFF5"/>
-                </a:solidFill>
-                <a:latin typeface="Arial" pitchFamily="34" charset="0"/>
-                <a:ea typeface="Arial" pitchFamily="34" charset="-122"/>
-                <a:cs typeface="Arial" pitchFamily="34" charset="-120"/>
-              </a:rPr>
-              <a:t>Alumbrado, Barrido y Limpieza en CABA; fuera, cada municipio tiene su Tasa de Servicios Urbanos. Retribuye servicios urbanos sobre el inmueble.</a:t>
-            </a:r>
-            <a:endParaRPr lang="en-US" sz="950" dirty="0"/>
-          </a:p>
-        </p:txBody>
-      </p:sp>
-      <p:sp>
-        <p:nvSpPr>
-          <p:cNvPr id="15" name="Shape 12"/>
-          <p:cNvSpPr/>
-          <p:nvPr/>
-        </p:nvSpPr>
-        <p:spPr>
-          <a:xfrm>
-            <a:off x="4736592" y="1188720"/>
-            <a:ext cx="1883664" cy="2606040"/>
+          <p:cNvPr id="11" name="Shape 8"/>
+          <p:cNvSpPr/>
+          <p:nvPr/>
+        </p:nvSpPr>
+        <p:spPr>
+          <a:xfrm>
+            <a:off x="4206240" y="1389888"/>
+            <a:ext cx="329184" cy="329184"/>
           </a:xfrm>
           <a:prstGeom prst="roundRect">
             <a:avLst>
-              <a:gd name="adj" fmla="val 4369"/>
+              <a:gd name="adj" fmla="val 138889"/>
             </a:avLst>
           </a:prstGeom>
           <a:solidFill>
@@ -2486,33 +2442,30 @@
       </p:sp>
       <p:sp>
         <p:nvSpPr>
-          <p:cNvPr id="16" name="Text 13"/>
-          <p:cNvSpPr/>
-          <p:nvPr/>
-        </p:nvSpPr>
-        <p:spPr>
-          <a:xfrm>
-            <a:off x="4937760" y="1353312"/>
-            <a:ext cx="1536192" cy="548640"/>
-          </a:xfrm>
-          <a:prstGeom prst="rect">
-            <a:avLst/>
-          </a:prstGeom>
-          <a:noFill/>
-          <a:ln/>
-        </p:spPr>
-        <p:txBody>
-          <a:bodyPr wrap="square" lIns="0" tIns="0" rIns="0" bIns="0" rtlCol="0" anchor="t"/>
-          <a:lstStyle/>
-          <a:p>
-            <a:pPr indent="0" marL="0">
-              <a:lnSpc>
-                <a:spcPts val="1600"/>
-              </a:lnSpc>
-              <a:buNone/>
-            </a:pPr>
-            <a:r>
-              <a:rPr lang="en-US" sz="1350" b="1" dirty="0">
+          <p:cNvPr id="12" name="Text 9"/>
+          <p:cNvSpPr/>
+          <p:nvPr/>
+        </p:nvSpPr>
+        <p:spPr>
+          <a:xfrm>
+            <a:off x="4206240" y="1389888"/>
+            <a:ext cx="329184" cy="329184"/>
+          </a:xfrm>
+          <a:prstGeom prst="rect">
+            <a:avLst/>
+          </a:prstGeom>
+          <a:noFill/>
+          <a:ln/>
+        </p:spPr>
+        <p:txBody>
+          <a:bodyPr wrap="square" lIns="0" tIns="0" rIns="0" bIns="0" rtlCol="0" anchor="ctr"/>
+          <a:lstStyle/>
+          <a:p>
+            <a:pPr algn="ctr" indent="0" marL="0">
+              <a:buNone/>
+            </a:pPr>
+            <a:r>
+              <a:rPr lang="en-US" sz="1050" b="1" dirty="0">
                 <a:solidFill>
                   <a:srgbClr val="FFFFFF"/>
                 </a:solidFill>
@@ -2520,61 +2473,61 @@
                 <a:ea typeface="Arial" pitchFamily="34" charset="-122"/>
                 <a:cs typeface="Arial" pitchFamily="34" charset="-120"/>
               </a:rPr>
-              <a:t>Patentes</a:t>
-            </a:r>
-            <a:endParaRPr lang="en-US" sz="1350" dirty="0"/>
-          </a:p>
-        </p:txBody>
-      </p:sp>
-      <p:sp>
-        <p:nvSpPr>
-          <p:cNvPr id="17" name="Text 14"/>
-          <p:cNvSpPr/>
-          <p:nvPr/>
-        </p:nvSpPr>
-        <p:spPr>
-          <a:xfrm>
-            <a:off x="4937760" y="1938528"/>
-            <a:ext cx="1554480" cy="201168"/>
-          </a:xfrm>
-          <a:prstGeom prst="rect">
-            <a:avLst/>
-          </a:prstGeom>
-          <a:noFill/>
-          <a:ln/>
-        </p:spPr>
-        <p:txBody>
-          <a:bodyPr wrap="square" lIns="0" tIns="0" rIns="0" bIns="0" rtlCol="0" anchor="ctr"/>
-          <a:lstStyle/>
-          <a:p>
-            <a:pPr indent="0" marL="0">
-              <a:buNone/>
-            </a:pPr>
-            <a:r>
-              <a:rPr lang="en-US" sz="850" b="1" spc="80" kern="0" dirty="0">
-                <a:solidFill>
-                  <a:srgbClr val="C9D6E6"/>
-                </a:solidFill>
-                <a:latin typeface="Arial" pitchFamily="34" charset="0"/>
-                <a:ea typeface="Arial" pitchFamily="34" charset="-122"/>
-                <a:cs typeface="Arial" pitchFamily="34" charset="-120"/>
-              </a:rPr>
-              <a:t>ARBA · AGIP</a:t>
-            </a:r>
-            <a:endParaRPr lang="en-US" sz="850" dirty="0"/>
-          </a:p>
-        </p:txBody>
-      </p:sp>
-      <p:sp>
-        <p:nvSpPr>
-          <p:cNvPr id="18" name="Text 15"/>
-          <p:cNvSpPr/>
-          <p:nvPr/>
-        </p:nvSpPr>
-        <p:spPr>
-          <a:xfrm>
-            <a:off x="4937760" y="2231136"/>
-            <a:ext cx="1554480" cy="1417320"/>
+              <a:t>1</a:t>
+            </a:r>
+            <a:endParaRPr lang="en-US" sz="1050" dirty="0"/>
+          </a:p>
+        </p:txBody>
+      </p:sp>
+      <p:sp>
+        <p:nvSpPr>
+          <p:cNvPr id="13" name="Text 10"/>
+          <p:cNvSpPr/>
+          <p:nvPr/>
+        </p:nvSpPr>
+        <p:spPr>
+          <a:xfrm>
+            <a:off x="4663440" y="1280160"/>
+            <a:ext cx="3913632" cy="237744"/>
+          </a:xfrm>
+          <a:prstGeom prst="rect">
+            <a:avLst/>
+          </a:prstGeom>
+          <a:noFill/>
+          <a:ln/>
+        </p:spPr>
+        <p:txBody>
+          <a:bodyPr wrap="square" lIns="0" tIns="0" rIns="0" bIns="0" rtlCol="0" anchor="ctr"/>
+          <a:lstStyle/>
+          <a:p>
+            <a:pPr indent="0" marL="0">
+              <a:buNone/>
+            </a:pPr>
+            <a:r>
+              <a:rPr lang="en-US" sz="1150" b="1" dirty="0">
+                <a:solidFill>
+                  <a:srgbClr val="08407C"/>
+                </a:solidFill>
+                <a:latin typeface="Arial" pitchFamily="34" charset="0"/>
+                <a:ea typeface="Arial" pitchFamily="34" charset="-122"/>
+                <a:cs typeface="Arial" pitchFamily="34" charset="-120"/>
+              </a:rPr>
+              <a:t>La base es el valor total del acto</a:t>
+            </a:r>
+            <a:endParaRPr lang="en-US" sz="1150" dirty="0"/>
+          </a:p>
+        </p:txBody>
+      </p:sp>
+      <p:sp>
+        <p:nvSpPr>
+          <p:cNvPr id="14" name="Text 11"/>
+          <p:cNvSpPr/>
+          <p:nvPr/>
+        </p:nvSpPr>
+        <p:spPr>
+          <a:xfrm>
+            <a:off x="4663440" y="1527048"/>
+            <a:ext cx="3913632" cy="329184"/>
           </a:xfrm>
           <a:prstGeom prst="rect">
             <a:avLst/>
@@ -2595,13 +2548,13 @@
             <a:r>
               <a:rPr lang="en-US" sz="950" dirty="0">
                 <a:solidFill>
-                  <a:srgbClr val="EAEFF5"/>
-                </a:solidFill>
-                <a:latin typeface="Arial" pitchFamily="34" charset="0"/>
-                <a:ea typeface="Arial" pitchFamily="34" charset="-122"/>
-                <a:cs typeface="Arial" pitchFamily="34" charset="-120"/>
-              </a:rPr>
-              <a:t>Sobre la titularidad de un vehículo, según valuación fiscal por marca, modelo y año. En PBA se cobra habitualmente en cinco cuotas anuales.</a:t>
+                  <a:srgbClr val="2E4258"/>
+                </a:solidFill>
+                <a:latin typeface="Arial" pitchFamily="34" charset="0"/>
+                <a:ea typeface="Arial" pitchFamily="34" charset="-122"/>
+                <a:cs typeface="Arial" pitchFamily="34" charset="-120"/>
+              </a:rPr>
+              <a:t>En un alquiler, la suma de todos los meses del contrato — no un mes suelto.</a:t>
             </a:r>
             <a:endParaRPr lang="en-US" sz="950" dirty="0"/>
           </a:p>
@@ -2609,26 +2562,26 @@
       </p:sp>
       <p:sp>
         <p:nvSpPr>
-          <p:cNvPr id="19" name="Shape 16"/>
-          <p:cNvSpPr/>
-          <p:nvPr/>
-        </p:nvSpPr>
-        <p:spPr>
-          <a:xfrm>
-            <a:off x="6803136" y="1188720"/>
-            <a:ext cx="1883664" cy="2606040"/>
+          <p:cNvPr id="15" name="Shape 12"/>
+          <p:cNvSpPr/>
+          <p:nvPr/>
+        </p:nvSpPr>
+        <p:spPr>
+          <a:xfrm>
+            <a:off x="4005072" y="2029968"/>
+            <a:ext cx="4681728" cy="731520"/>
           </a:xfrm>
           <a:prstGeom prst="roundRect">
             <a:avLst>
-              <a:gd name="adj" fmla="val 4369"/>
+              <a:gd name="adj" fmla="val 11250"/>
             </a:avLst>
           </a:prstGeom>
           <a:solidFill>
-            <a:srgbClr val="7C8594"/>
+            <a:srgbClr val="F2F4F7"/>
           </a:solidFill>
           <a:ln w="12700">
             <a:solidFill>
-              <a:srgbClr val="7C8594"/>
+              <a:srgbClr val="F2F4F7"/>
             </a:solidFill>
             <a:prstDash val="solid"/>
           </a:ln>
@@ -2636,141 +2589,18 @@
       </p:sp>
       <p:sp>
         <p:nvSpPr>
-          <p:cNvPr id="20" name="Text 17"/>
-          <p:cNvSpPr/>
-          <p:nvPr/>
-        </p:nvSpPr>
-        <p:spPr>
-          <a:xfrm>
-            <a:off x="7004304" y="1353312"/>
-            <a:ext cx="1536192" cy="548640"/>
-          </a:xfrm>
-          <a:prstGeom prst="rect">
-            <a:avLst/>
-          </a:prstGeom>
-          <a:noFill/>
-          <a:ln/>
-        </p:spPr>
-        <p:txBody>
-          <a:bodyPr wrap="square" lIns="0" tIns="0" rIns="0" bIns="0" rtlCol="0" anchor="t"/>
-          <a:lstStyle/>
-          <a:p>
-            <a:pPr indent="0" marL="0">
-              <a:lnSpc>
-                <a:spcPts val="1600"/>
-              </a:lnSpc>
-              <a:buNone/>
-            </a:pPr>
-            <a:r>
-              <a:rPr lang="en-US" sz="1350" b="1" dirty="0">
-                <a:solidFill>
-                  <a:srgbClr val="FFFFFF"/>
-                </a:solidFill>
-                <a:latin typeface="Arial" pitchFamily="34" charset="0"/>
-                <a:ea typeface="Arial" pitchFamily="34" charset="-122"/>
-                <a:cs typeface="Arial" pitchFamily="34" charset="-120"/>
-              </a:rPr>
-              <a:t>Seguridad e Higiene</a:t>
-            </a:r>
-            <a:endParaRPr lang="en-US" sz="1350" dirty="0"/>
-          </a:p>
-        </p:txBody>
-      </p:sp>
-      <p:sp>
-        <p:nvSpPr>
-          <p:cNvPr id="21" name="Text 18"/>
-          <p:cNvSpPr/>
-          <p:nvPr/>
-        </p:nvSpPr>
-        <p:spPr>
-          <a:xfrm>
-            <a:off x="7004304" y="1938528"/>
-            <a:ext cx="1554480" cy="201168"/>
-          </a:xfrm>
-          <a:prstGeom prst="rect">
-            <a:avLst/>
-          </a:prstGeom>
-          <a:noFill/>
-          <a:ln/>
-        </p:spPr>
-        <p:txBody>
-          <a:bodyPr wrap="square" lIns="0" tIns="0" rIns="0" bIns="0" rtlCol="0" anchor="ctr"/>
-          <a:lstStyle/>
-          <a:p>
-            <a:pPr indent="0" marL="0">
-              <a:buNone/>
-            </a:pPr>
-            <a:r>
-              <a:rPr lang="en-US" sz="850" b="1" spc="80" kern="0" dirty="0">
-                <a:solidFill>
-                  <a:srgbClr val="C9D6E6"/>
-                </a:solidFill>
-                <a:latin typeface="Arial" pitchFamily="34" charset="0"/>
-                <a:ea typeface="Arial" pitchFamily="34" charset="-122"/>
-                <a:cs typeface="Arial" pitchFamily="34" charset="-120"/>
-              </a:rPr>
-              <a:t>MUNICIPIO</a:t>
-            </a:r>
-            <a:endParaRPr lang="en-US" sz="850" dirty="0"/>
-          </a:p>
-        </p:txBody>
-      </p:sp>
-      <p:sp>
-        <p:nvSpPr>
-          <p:cNvPr id="22" name="Text 19"/>
-          <p:cNvSpPr/>
-          <p:nvPr/>
-        </p:nvSpPr>
-        <p:spPr>
-          <a:xfrm>
-            <a:off x="7004304" y="2231136"/>
-            <a:ext cx="1554480" cy="1417320"/>
-          </a:xfrm>
-          <a:prstGeom prst="rect">
-            <a:avLst/>
-          </a:prstGeom>
-          <a:noFill/>
-          <a:ln/>
-        </p:spPr>
-        <p:txBody>
-          <a:bodyPr wrap="square" lIns="0" tIns="0" rIns="0" bIns="0" rtlCol="0" anchor="ctr"/>
-          <a:lstStyle/>
-          <a:p>
-            <a:pPr indent="0" marL="0">
-              <a:lnSpc>
-                <a:spcPts val="1200"/>
-              </a:lnSpc>
-              <a:buNone/>
-            </a:pPr>
-            <a:r>
-              <a:rPr lang="en-US" sz="950" dirty="0">
-                <a:solidFill>
-                  <a:srgbClr val="EAEFF5"/>
-                </a:solidFill>
-                <a:latin typeface="Arial" pitchFamily="34" charset="0"/>
-                <a:ea typeface="Arial" pitchFamily="34" charset="-122"/>
-                <a:cs typeface="Arial" pitchFamily="34" charset="-120"/>
-              </a:rPr>
-              <a:t>Tasa municipal por desarrollar actividad comercial en un local. Base variable: ingresos, superficie o ambas. Va de la mano de la habilitación.</a:t>
-            </a:r>
-            <a:endParaRPr lang="en-US" sz="950" dirty="0"/>
-          </a:p>
-        </p:txBody>
-      </p:sp>
-      <p:sp>
-        <p:nvSpPr>
-          <p:cNvPr id="23" name="Shape 20"/>
-          <p:cNvSpPr/>
-          <p:nvPr/>
-        </p:nvSpPr>
-        <p:spPr>
-          <a:xfrm>
-            <a:off x="603504" y="4005072"/>
-            <a:ext cx="8083296" cy="658368"/>
+          <p:cNvPr id="16" name="Shape 13"/>
+          <p:cNvSpPr/>
+          <p:nvPr/>
+        </p:nvSpPr>
+        <p:spPr>
+          <a:xfrm>
+            <a:off x="4206240" y="2231136"/>
+            <a:ext cx="329184" cy="329184"/>
           </a:xfrm>
           <a:prstGeom prst="roundRect">
             <a:avLst>
-              <a:gd name="adj" fmla="val 12500"/>
+              <a:gd name="adj" fmla="val 138889"/>
             </a:avLst>
           </a:prstGeom>
           <a:solidFill>
@@ -2786,30 +2616,378 @@
       </p:sp>
       <p:sp>
         <p:nvSpPr>
+          <p:cNvPr id="17" name="Text 14"/>
+          <p:cNvSpPr/>
+          <p:nvPr/>
+        </p:nvSpPr>
+        <p:spPr>
+          <a:xfrm>
+            <a:off x="4206240" y="2231136"/>
+            <a:ext cx="329184" cy="329184"/>
+          </a:xfrm>
+          <a:prstGeom prst="rect">
+            <a:avLst/>
+          </a:prstGeom>
+          <a:noFill/>
+          <a:ln/>
+        </p:spPr>
+        <p:txBody>
+          <a:bodyPr wrap="square" lIns="0" tIns="0" rIns="0" bIns="0" rtlCol="0" anchor="ctr"/>
+          <a:lstStyle/>
+          <a:p>
+            <a:pPr algn="ctr" indent="0" marL="0">
+              <a:buNone/>
+            </a:pPr>
+            <a:r>
+              <a:rPr lang="en-US" sz="1050" b="1" dirty="0">
+                <a:solidFill>
+                  <a:srgbClr val="FFFFFF"/>
+                </a:solidFill>
+                <a:latin typeface="Arial" pitchFamily="34" charset="0"/>
+                <a:ea typeface="Arial" pitchFamily="34" charset="-122"/>
+                <a:cs typeface="Arial" pitchFamily="34" charset="-120"/>
+              </a:rPr>
+              <a:t>2</a:t>
+            </a:r>
+            <a:endParaRPr lang="en-US" sz="1050" dirty="0"/>
+          </a:p>
+        </p:txBody>
+      </p:sp>
+      <p:sp>
+        <p:nvSpPr>
+          <p:cNvPr id="18" name="Text 15"/>
+          <p:cNvSpPr/>
+          <p:nvPr/>
+        </p:nvSpPr>
+        <p:spPr>
+          <a:xfrm>
+            <a:off x="4663440" y="2121408"/>
+            <a:ext cx="3913632" cy="237744"/>
+          </a:xfrm>
+          <a:prstGeom prst="rect">
+            <a:avLst/>
+          </a:prstGeom>
+          <a:noFill/>
+          <a:ln/>
+        </p:spPr>
+        <p:txBody>
+          <a:bodyPr wrap="square" lIns="0" tIns="0" rIns="0" bIns="0" rtlCol="0" anchor="ctr"/>
+          <a:lstStyle/>
+          <a:p>
+            <a:pPr indent="0" marL="0">
+              <a:buNone/>
+            </a:pPr>
+            <a:r>
+              <a:rPr lang="en-US" sz="1150" b="1" dirty="0">
+                <a:solidFill>
+                  <a:srgbClr val="08407C"/>
+                </a:solidFill>
+                <a:latin typeface="Arial" pitchFamily="34" charset="0"/>
+                <a:ea typeface="Arial" pitchFamily="34" charset="-122"/>
+                <a:cs typeface="Arial" pitchFamily="34" charset="-120"/>
+              </a:rPr>
+              <a:t>Impacta la rentabilidad neta</a:t>
+            </a:r>
+            <a:endParaRPr lang="en-US" sz="1150" dirty="0"/>
+          </a:p>
+        </p:txBody>
+      </p:sp>
+      <p:sp>
+        <p:nvSpPr>
+          <p:cNvPr id="19" name="Text 16"/>
+          <p:cNvSpPr/>
+          <p:nvPr/>
+        </p:nvSpPr>
+        <p:spPr>
+          <a:xfrm>
+            <a:off x="4663440" y="2368296"/>
+            <a:ext cx="3913632" cy="329184"/>
+          </a:xfrm>
+          <a:prstGeom prst="rect">
+            <a:avLst/>
+          </a:prstGeom>
+          <a:noFill/>
+          <a:ln/>
+        </p:spPr>
+        <p:txBody>
+          <a:bodyPr wrap="square" lIns="0" tIns="0" rIns="0" bIns="0" rtlCol="0" anchor="ctr"/>
+          <a:lstStyle/>
+          <a:p>
+            <a:pPr indent="0" marL="0">
+              <a:lnSpc>
+                <a:spcPts val="1200"/>
+              </a:lnSpc>
+              <a:buNone/>
+            </a:pPr>
+            <a:r>
+              <a:rPr lang="en-US" sz="950" dirty="0">
+                <a:solidFill>
+                  <a:srgbClr val="2E4258"/>
+                </a:solidFill>
+                <a:latin typeface="Arial" pitchFamily="34" charset="0"/>
+                <a:ea typeface="Arial" pitchFamily="34" charset="-122"/>
+                <a:cs typeface="Arial" pitchFamily="34" charset="-120"/>
+              </a:rPr>
+              <a:t>Sellos es un costo de la operación: hay que sumarlo al cálculo, no mirar solo la comisión.</a:t>
+            </a:r>
+            <a:endParaRPr lang="en-US" sz="950" dirty="0"/>
+          </a:p>
+        </p:txBody>
+      </p:sp>
+      <p:sp>
+        <p:nvSpPr>
+          <p:cNvPr id="20" name="Shape 17"/>
+          <p:cNvSpPr/>
+          <p:nvPr/>
+        </p:nvSpPr>
+        <p:spPr>
+          <a:xfrm>
+            <a:off x="4005072" y="2871216"/>
+            <a:ext cx="4681728" cy="731520"/>
+          </a:xfrm>
+          <a:prstGeom prst="roundRect">
+            <a:avLst>
+              <a:gd name="adj" fmla="val 11250"/>
+            </a:avLst>
+          </a:prstGeom>
+          <a:solidFill>
+            <a:srgbClr val="F2F4F7"/>
+          </a:solidFill>
+          <a:ln w="12700">
+            <a:solidFill>
+              <a:srgbClr val="F2F4F7"/>
+            </a:solidFill>
+            <a:prstDash val="solid"/>
+          </a:ln>
+        </p:spPr>
+      </p:sp>
+      <p:sp>
+        <p:nvSpPr>
+          <p:cNvPr id="21" name="Shape 18"/>
+          <p:cNvSpPr/>
+          <p:nvPr/>
+        </p:nvSpPr>
+        <p:spPr>
+          <a:xfrm>
+            <a:off x="4206240" y="3072384"/>
+            <a:ext cx="329184" cy="329184"/>
+          </a:xfrm>
+          <a:prstGeom prst="roundRect">
+            <a:avLst>
+              <a:gd name="adj" fmla="val 138889"/>
+            </a:avLst>
+          </a:prstGeom>
+          <a:solidFill>
+            <a:srgbClr val="08407C"/>
+          </a:solidFill>
+          <a:ln w="12700">
+            <a:solidFill>
+              <a:srgbClr val="08407C"/>
+            </a:solidFill>
+            <a:prstDash val="solid"/>
+          </a:ln>
+        </p:spPr>
+      </p:sp>
+      <p:sp>
+        <p:nvSpPr>
+          <p:cNvPr id="22" name="Text 19"/>
+          <p:cNvSpPr/>
+          <p:nvPr/>
+        </p:nvSpPr>
+        <p:spPr>
+          <a:xfrm>
+            <a:off x="4206240" y="3072384"/>
+            <a:ext cx="329184" cy="329184"/>
+          </a:xfrm>
+          <a:prstGeom prst="rect">
+            <a:avLst/>
+          </a:prstGeom>
+          <a:noFill/>
+          <a:ln/>
+        </p:spPr>
+        <p:txBody>
+          <a:bodyPr wrap="square" lIns="0" tIns="0" rIns="0" bIns="0" rtlCol="0" anchor="ctr"/>
+          <a:lstStyle/>
+          <a:p>
+            <a:pPr algn="ctr" indent="0" marL="0">
+              <a:buNone/>
+            </a:pPr>
+            <a:r>
+              <a:rPr lang="en-US" sz="1050" b="1" dirty="0">
+                <a:solidFill>
+                  <a:srgbClr val="FFFFFF"/>
+                </a:solidFill>
+                <a:latin typeface="Arial" pitchFamily="34" charset="0"/>
+                <a:ea typeface="Arial" pitchFamily="34" charset="-122"/>
+                <a:cs typeface="Arial" pitchFamily="34" charset="-120"/>
+              </a:rPr>
+              <a:t>3</a:t>
+            </a:r>
+            <a:endParaRPr lang="en-US" sz="1050" dirty="0"/>
+          </a:p>
+        </p:txBody>
+      </p:sp>
+      <p:sp>
+        <p:nvSpPr>
+          <p:cNvPr id="23" name="Text 20"/>
+          <p:cNvSpPr/>
+          <p:nvPr/>
+        </p:nvSpPr>
+        <p:spPr>
+          <a:xfrm>
+            <a:off x="4663440" y="2962656"/>
+            <a:ext cx="3913632" cy="237744"/>
+          </a:xfrm>
+          <a:prstGeom prst="rect">
+            <a:avLst/>
+          </a:prstGeom>
+          <a:noFill/>
+          <a:ln/>
+        </p:spPr>
+        <p:txBody>
+          <a:bodyPr wrap="square" lIns="0" tIns="0" rIns="0" bIns="0" rtlCol="0" anchor="ctr"/>
+          <a:lstStyle/>
+          <a:p>
+            <a:pPr indent="0" marL="0">
+              <a:buNone/>
+            </a:pPr>
+            <a:r>
+              <a:rPr lang="en-US" sz="1150" b="1" dirty="0">
+                <a:solidFill>
+                  <a:srgbClr val="08407C"/>
+                </a:solidFill>
+                <a:latin typeface="Arial" pitchFamily="34" charset="0"/>
+                <a:ea typeface="Arial" pitchFamily="34" charset="-122"/>
+                <a:cs typeface="Arial" pitchFamily="34" charset="-120"/>
+              </a:rPr>
+              <a:t>El sellado da fecha cierta</a:t>
+            </a:r>
+            <a:endParaRPr lang="en-US" sz="1150" dirty="0"/>
+          </a:p>
+        </p:txBody>
+      </p:sp>
+      <p:sp>
+        <p:nvSpPr>
           <p:cNvPr id="24" name="Text 21"/>
           <p:cNvSpPr/>
           <p:nvPr/>
         </p:nvSpPr>
         <p:spPr>
           <a:xfrm>
-            <a:off x="841248" y="4078224"/>
-            <a:ext cx="7626096" cy="201168"/>
-          </a:xfrm>
-          <a:prstGeom prst="rect">
-            <a:avLst/>
-          </a:prstGeom>
-          <a:noFill/>
-          <a:ln/>
-        </p:spPr>
-        <p:txBody>
-          <a:bodyPr wrap="square" lIns="0" tIns="0" rIns="0" bIns="0" rtlCol="0" anchor="ctr"/>
-          <a:lstStyle/>
-          <a:p>
-            <a:pPr indent="0" marL="0">
-              <a:buNone/>
-            </a:pPr>
-            <a:r>
-              <a:rPr lang="en-US" sz="950" b="1" spc="120" kern="0" dirty="0">
+            <a:off x="4663440" y="3209544"/>
+            <a:ext cx="3913632" cy="329184"/>
+          </a:xfrm>
+          <a:prstGeom prst="rect">
+            <a:avLst/>
+          </a:prstGeom>
+          <a:noFill/>
+          <a:ln/>
+        </p:spPr>
+        <p:txBody>
+          <a:bodyPr wrap="square" lIns="0" tIns="0" rIns="0" bIns="0" rtlCol="0" anchor="ctr"/>
+          <a:lstStyle/>
+          <a:p>
+            <a:pPr indent="0" marL="0">
+              <a:lnSpc>
+                <a:spcPts val="1200"/>
+              </a:lnSpc>
+              <a:buNone/>
+            </a:pPr>
+            <a:r>
+              <a:rPr lang="en-US" sz="950" dirty="0">
+                <a:solidFill>
+                  <a:srgbClr val="2E4258"/>
+                </a:solidFill>
+                <a:latin typeface="Arial" pitchFamily="34" charset="0"/>
+                <a:ea typeface="Arial" pitchFamily="34" charset="-122"/>
+                <a:cs typeface="Arial" pitchFamily="34" charset="-120"/>
+              </a:rPr>
+              <a:t>Sin sellar, el contrato pierde fuerza probatoria ante el fisco y ante la contraparte.</a:t>
+            </a:r>
+            <a:endParaRPr lang="en-US" sz="950" dirty="0"/>
+          </a:p>
+        </p:txBody>
+      </p:sp>
+      <p:sp>
+        <p:nvSpPr>
+          <p:cNvPr id="25" name="Shape 22"/>
+          <p:cNvSpPr/>
+          <p:nvPr/>
+        </p:nvSpPr>
+        <p:spPr>
+          <a:xfrm>
+            <a:off x="4005072" y="3712464"/>
+            <a:ext cx="4681728" cy="731520"/>
+          </a:xfrm>
+          <a:prstGeom prst="roundRect">
+            <a:avLst>
+              <a:gd name="adj" fmla="val 11250"/>
+            </a:avLst>
+          </a:prstGeom>
+          <a:solidFill>
+            <a:srgbClr val="F2F4F7"/>
+          </a:solidFill>
+          <a:ln w="12700">
+            <a:solidFill>
+              <a:srgbClr val="F2F4F7"/>
+            </a:solidFill>
+            <a:prstDash val="solid"/>
+          </a:ln>
+        </p:spPr>
+      </p:sp>
+      <p:sp>
+        <p:nvSpPr>
+          <p:cNvPr id="26" name="Shape 23"/>
+          <p:cNvSpPr/>
+          <p:nvPr/>
+        </p:nvSpPr>
+        <p:spPr>
+          <a:xfrm>
+            <a:off x="4206240" y="3913632"/>
+            <a:ext cx="329184" cy="329184"/>
+          </a:xfrm>
+          <a:prstGeom prst="roundRect">
+            <a:avLst>
+              <a:gd name="adj" fmla="val 138889"/>
+            </a:avLst>
+          </a:prstGeom>
+          <a:solidFill>
+            <a:srgbClr val="08407C"/>
+          </a:solidFill>
+          <a:ln w="12700">
+            <a:solidFill>
+              <a:srgbClr val="08407C"/>
+            </a:solidFill>
+            <a:prstDash val="solid"/>
+          </a:ln>
+        </p:spPr>
+      </p:sp>
+      <p:sp>
+        <p:nvSpPr>
+          <p:cNvPr id="27" name="Text 24"/>
+          <p:cNvSpPr/>
+          <p:nvPr/>
+        </p:nvSpPr>
+        <p:spPr>
+          <a:xfrm>
+            <a:off x="4206240" y="3913632"/>
+            <a:ext cx="329184" cy="329184"/>
+          </a:xfrm>
+          <a:prstGeom prst="rect">
+            <a:avLst/>
+          </a:prstGeom>
+          <a:noFill/>
+          <a:ln/>
+        </p:spPr>
+        <p:txBody>
+          <a:bodyPr wrap="square" lIns="0" tIns="0" rIns="0" bIns="0" rtlCol="0" anchor="ctr"/>
+          <a:lstStyle/>
+          <a:p>
+            <a:pPr algn="ctr" indent="0" marL="0">
+              <a:buNone/>
+            </a:pPr>
+            <a:r>
+              <a:rPr lang="en-US" sz="1050" b="1" dirty="0">
                 <a:solidFill>
                   <a:srgbClr val="FFFFFF"/>
                 </a:solidFill>
@@ -2817,51 +2995,90 @@
                 <a:ea typeface="Arial" pitchFamily="34" charset="-122"/>
                 <a:cs typeface="Arial" pitchFamily="34" charset="-120"/>
               </a:rPr>
-              <a:t>IMPUESTO NO ES LO MISMO QUE TASA</a:t>
+              <a:t>4</a:t>
+            </a:r>
+            <a:endParaRPr lang="en-US" sz="1050" dirty="0"/>
+          </a:p>
+        </p:txBody>
+      </p:sp>
+      <p:sp>
+        <p:nvSpPr>
+          <p:cNvPr id="28" name="Text 25"/>
+          <p:cNvSpPr/>
+          <p:nvPr/>
+        </p:nvSpPr>
+        <p:spPr>
+          <a:xfrm>
+            <a:off x="4663440" y="3803904"/>
+            <a:ext cx="3913632" cy="237744"/>
+          </a:xfrm>
+          <a:prstGeom prst="rect">
+            <a:avLst/>
+          </a:prstGeom>
+          <a:noFill/>
+          <a:ln/>
+        </p:spPr>
+        <p:txBody>
+          <a:bodyPr wrap="square" lIns="0" tIns="0" rIns="0" bIns="0" rtlCol="0" anchor="ctr"/>
+          <a:lstStyle/>
+          <a:p>
+            <a:pPr indent="0" marL="0">
+              <a:buNone/>
+            </a:pPr>
+            <a:r>
+              <a:rPr lang="en-US" sz="1150" b="1" dirty="0">
+                <a:solidFill>
+                  <a:srgbClr val="08407C"/>
+                </a:solidFill>
+                <a:latin typeface="Arial" pitchFamily="34" charset="0"/>
+                <a:ea typeface="Arial" pitchFamily="34" charset="-122"/>
+                <a:cs typeface="Arial" pitchFamily="34" charset="-120"/>
+              </a:rPr>
+              <a:t>Se coordina antes de firmar</a:t>
+            </a:r>
+            <a:endParaRPr lang="en-US" sz="1150" dirty="0"/>
+          </a:p>
+        </p:txBody>
+      </p:sp>
+      <p:sp>
+        <p:nvSpPr>
+          <p:cNvPr id="29" name="Text 26"/>
+          <p:cNvSpPr/>
+          <p:nvPr/>
+        </p:nvSpPr>
+        <p:spPr>
+          <a:xfrm>
+            <a:off x="4663440" y="4050792"/>
+            <a:ext cx="3913632" cy="329184"/>
+          </a:xfrm>
+          <a:prstGeom prst="rect">
+            <a:avLst/>
+          </a:prstGeom>
+          <a:noFill/>
+          <a:ln/>
+        </p:spPr>
+        <p:txBody>
+          <a:bodyPr wrap="square" lIns="0" tIns="0" rIns="0" bIns="0" rtlCol="0" anchor="ctr"/>
+          <a:lstStyle/>
+          <a:p>
+            <a:pPr indent="0" marL="0">
+              <a:lnSpc>
+                <a:spcPts val="1200"/>
+              </a:lnSpc>
+              <a:buNone/>
+            </a:pPr>
+            <a:r>
+              <a:rPr lang="en-US" sz="950" dirty="0">
+                <a:solidFill>
+                  <a:srgbClr val="2E4258"/>
+                </a:solidFill>
+                <a:latin typeface="Arial" pitchFamily="34" charset="0"/>
+                <a:ea typeface="Arial" pitchFamily="34" charset="-122"/>
+                <a:cs typeface="Arial" pitchFamily="34" charset="-120"/>
+              </a:rPr>
+              <a:t>Conviene resolver el trámite ante ARBA o AGIP para no atrasar la firma.</a:t>
             </a:r>
             <a:endParaRPr lang="en-US" sz="950" dirty="0"/>
-          </a:p>
-        </p:txBody>
-      </p:sp>
-      <p:sp>
-        <p:nvSpPr>
-          <p:cNvPr id="25" name="Text 22"/>
-          <p:cNvSpPr/>
-          <p:nvPr/>
-        </p:nvSpPr>
-        <p:spPr>
-          <a:xfrm>
-            <a:off x="841248" y="4270248"/>
-            <a:ext cx="7607808" cy="329184"/>
-          </a:xfrm>
-          <a:prstGeom prst="rect">
-            <a:avLst/>
-          </a:prstGeom>
-          <a:noFill/>
-          <a:ln/>
-        </p:spPr>
-        <p:txBody>
-          <a:bodyPr wrap="square" lIns="0" tIns="0" rIns="0" bIns="0" rtlCol="0" anchor="ctr"/>
-          <a:lstStyle/>
-          <a:p>
-            <a:pPr indent="0" marL="0">
-              <a:lnSpc>
-                <a:spcPts val="1400"/>
-              </a:lnSpc>
-              <a:buNone/>
-            </a:pPr>
-            <a:r>
-              <a:rPr lang="en-US" sz="1150" dirty="0">
-                <a:solidFill>
-                  <a:srgbClr val="FFFFFF"/>
-                </a:solidFill>
-                <a:latin typeface="Arial" pitchFamily="34" charset="0"/>
-                <a:ea typeface="Arial" pitchFamily="34" charset="-122"/>
-                <a:cs typeface="Arial" pitchFamily="34" charset="-120"/>
-              </a:rPr>
-              <a:t>El impuesto no tiene contraprestación directa (Ganancias, IVA). La tasa siempre retribuye un servicio concreto: alumbrado, inspecciones, habilitación.</a:t>
-            </a:r>
-            <a:endParaRPr lang="en-US" sz="1150" dirty="0"/>
           </a:p>
         </p:txBody>
       </p:sp>
@@ -2956,7 +3173,7 @@
       </p:sp>
       <p:pic>
         <p:nvPicPr>
-          <p:cNvPr id="4" name="Image 0" descr="/tmp/claude-0/-home-user-KrakRealEstate/26f90231-47e0-5521-93d0-854de4e1add2/scratchpad/brand/iso_white.png">    </p:cNvPr>
+          <p:cNvPr id="4" name="Image 0" descr="/home/user/KrakRealEstate/capacitaciones/impuestos/brand/iso_white.png">    </p:cNvPr>
           <p:cNvPicPr>
             <a:picLocks noChangeAspect="1"/>
           </p:cNvPicPr>
@@ -3011,7 +3228,7 @@
                 <a:ea typeface="Arial" pitchFamily="34" charset="-122"/>
                 <a:cs typeface="Arial" pitchFamily="34" charset="-120"/>
               </a:rPr>
-              <a:t>El control de todos los días</a:t>
+              <a:t>Los impuestos del inmueble</a:t>
             </a:r>
             <a:endParaRPr lang="en-US" sz="2700" dirty="0"/>
           </a:p>
@@ -3050,7 +3267,7 @@
                 <a:ea typeface="Arial" pitchFamily="34" charset="-122"/>
                 <a:cs typeface="Arial" pitchFamily="34" charset="-120"/>
               </a:rPr>
-              <a:t>Qué verificar antes de pagar, y qué errores salen más caros.</a:t>
+              <a:t>Lo que paga el propietario — y lo que hay que saber leer para tasar y asesorar.</a:t>
             </a:r>
             <a:endParaRPr lang="en-US" sz="1200" dirty="0"/>
           </a:p>
@@ -3065,1223 +3282,11 @@
         <p:spPr>
           <a:xfrm>
             <a:off x="603504" y="1188720"/>
-            <a:ext cx="3950208" cy="475488"/>
+            <a:ext cx="1883664" cy="2606040"/>
           </a:xfrm>
           <a:prstGeom prst="roundRect">
             <a:avLst>
-              <a:gd name="adj" fmla="val 17308"/>
-            </a:avLst>
-          </a:prstGeom>
-          <a:solidFill>
-            <a:srgbClr val="26AE60"/>
-          </a:solidFill>
-          <a:ln w="12700">
-            <a:solidFill>
-              <a:srgbClr val="26AE60"/>
-            </a:solidFill>
-            <a:prstDash val="solid"/>
-          </a:ln>
-        </p:spPr>
-      </p:sp>
-      <p:sp>
-        <p:nvSpPr>
-          <p:cNvPr id="8" name="Text 5"/>
-          <p:cNvSpPr/>
-          <p:nvPr/>
-        </p:nvSpPr>
-        <p:spPr>
-          <a:xfrm>
-            <a:off x="877824" y="1188720"/>
-            <a:ext cx="3566160" cy="475488"/>
-          </a:xfrm>
-          <a:prstGeom prst="rect">
-            <a:avLst/>
-          </a:prstGeom>
-          <a:noFill/>
-          <a:ln/>
-        </p:spPr>
-        <p:txBody>
-          <a:bodyPr wrap="square" lIns="0" tIns="0" rIns="0" bIns="0" rtlCol="0" anchor="ctr"/>
-          <a:lstStyle/>
-          <a:p>
-            <a:pPr indent="0" marL="0">
-              <a:buNone/>
-            </a:pPr>
-            <a:r>
-              <a:rPr lang="en-US" sz="1150" b="1" spc="100" kern="0" dirty="0">
-                <a:solidFill>
-                  <a:srgbClr val="FFFFFF"/>
-                </a:solidFill>
-                <a:latin typeface="Arial" pitchFamily="34" charset="0"/>
-                <a:ea typeface="Arial" pitchFamily="34" charset="-122"/>
-                <a:cs typeface="Arial" pitchFamily="34" charset="-120"/>
-              </a:rPr>
-              <a:t>SÍ — CONTROLAR SIEMPRE</a:t>
-            </a:r>
-            <a:endParaRPr lang="en-US" sz="1150" dirty="0"/>
-          </a:p>
-        </p:txBody>
-      </p:sp>
-      <p:sp>
-        <p:nvSpPr>
-          <p:cNvPr id="9" name="Shape 6"/>
-          <p:cNvSpPr/>
-          <p:nvPr/>
-        </p:nvSpPr>
-        <p:spPr>
-          <a:xfrm>
-            <a:off x="4736592" y="1188720"/>
-            <a:ext cx="3950208" cy="475488"/>
-          </a:xfrm>
-          <a:prstGeom prst="roundRect">
-            <a:avLst>
-              <a:gd name="adj" fmla="val 17308"/>
-            </a:avLst>
-          </a:prstGeom>
-          <a:solidFill>
-            <a:srgbClr val="E74B3C"/>
-          </a:solidFill>
-          <a:ln w="12700">
-            <a:solidFill>
-              <a:srgbClr val="E74B3C"/>
-            </a:solidFill>
-            <a:prstDash val="solid"/>
-          </a:ln>
-        </p:spPr>
-      </p:sp>
-      <p:sp>
-        <p:nvSpPr>
-          <p:cNvPr id="10" name="Text 7"/>
-          <p:cNvSpPr/>
-          <p:nvPr/>
-        </p:nvSpPr>
-        <p:spPr>
-          <a:xfrm>
-            <a:off x="5010912" y="1188720"/>
-            <a:ext cx="3566160" cy="475488"/>
-          </a:xfrm>
-          <a:prstGeom prst="rect">
-            <a:avLst/>
-          </a:prstGeom>
-          <a:noFill/>
-          <a:ln/>
-        </p:spPr>
-        <p:txBody>
-          <a:bodyPr wrap="square" lIns="0" tIns="0" rIns="0" bIns="0" rtlCol="0" anchor="ctr"/>
-          <a:lstStyle/>
-          <a:p>
-            <a:pPr indent="0" marL="0">
-              <a:buNone/>
-            </a:pPr>
-            <a:r>
-              <a:rPr lang="en-US" sz="1150" b="1" spc="100" kern="0" dirty="0">
-                <a:solidFill>
-                  <a:srgbClr val="FFFFFF"/>
-                </a:solidFill>
-                <a:latin typeface="Arial" pitchFamily="34" charset="0"/>
-                <a:ea typeface="Arial" pitchFamily="34" charset="-122"/>
-                <a:cs typeface="Arial" pitchFamily="34" charset="-120"/>
-              </a:rPr>
-              <a:t>NO — ERRORES QUE SALEN CAROS</a:t>
-            </a:r>
-            <a:endParaRPr lang="en-US" sz="1150" dirty="0"/>
-          </a:p>
-        </p:txBody>
-      </p:sp>
-      <p:sp>
-        <p:nvSpPr>
-          <p:cNvPr id="11" name="Shape 8"/>
-          <p:cNvSpPr/>
-          <p:nvPr/>
-        </p:nvSpPr>
-        <p:spPr>
-          <a:xfrm>
-            <a:off x="603504" y="1828800"/>
-            <a:ext cx="310896" cy="310896"/>
-          </a:xfrm>
-          <a:prstGeom prst="roundRect">
-            <a:avLst>
-              <a:gd name="adj" fmla="val 147059"/>
-            </a:avLst>
-          </a:prstGeom>
-          <a:solidFill>
-            <a:srgbClr val="26AE60"/>
-          </a:solidFill>
-          <a:ln w="12700">
-            <a:solidFill>
-              <a:srgbClr val="26AE60"/>
-            </a:solidFill>
-            <a:prstDash val="solid"/>
-          </a:ln>
-        </p:spPr>
-      </p:sp>
-      <p:sp>
-        <p:nvSpPr>
-          <p:cNvPr id="12" name="Text 9"/>
-          <p:cNvSpPr/>
-          <p:nvPr/>
-        </p:nvSpPr>
-        <p:spPr>
-          <a:xfrm>
-            <a:off x="603504" y="1828800"/>
-            <a:ext cx="310896" cy="310896"/>
-          </a:xfrm>
-          <a:prstGeom prst="rect">
-            <a:avLst/>
-          </a:prstGeom>
-          <a:noFill/>
-          <a:ln/>
-        </p:spPr>
-        <p:txBody>
-          <a:bodyPr wrap="square" lIns="0" tIns="0" rIns="0" bIns="0" rtlCol="0" anchor="ctr"/>
-          <a:lstStyle/>
-          <a:p>
-            <a:pPr algn="ctr" indent="0" marL="0">
-              <a:buNone/>
-            </a:pPr>
-            <a:r>
-              <a:rPr lang="en-US" sz="1200" b="1" dirty="0">
-                <a:solidFill>
-                  <a:srgbClr val="FFFFFF"/>
-                </a:solidFill>
-                <a:latin typeface="Arial" pitchFamily="34" charset="0"/>
-                <a:ea typeface="Arial" pitchFamily="34" charset="-122"/>
-                <a:cs typeface="Arial" pitchFamily="34" charset="-120"/>
-              </a:rPr>
-              <a:t>✓</a:t>
-            </a:r>
-            <a:endParaRPr lang="en-US" sz="1200" dirty="0"/>
-          </a:p>
-        </p:txBody>
-      </p:sp>
-      <p:sp>
-        <p:nvSpPr>
-          <p:cNvPr id="13" name="Text 10"/>
-          <p:cNvSpPr/>
-          <p:nvPr/>
-        </p:nvSpPr>
-        <p:spPr>
-          <a:xfrm>
-            <a:off x="1042416" y="1810512"/>
-            <a:ext cx="3511296" cy="365760"/>
-          </a:xfrm>
-          <a:prstGeom prst="rect">
-            <a:avLst/>
-          </a:prstGeom>
-          <a:noFill/>
-          <a:ln/>
-        </p:spPr>
-        <p:txBody>
-          <a:bodyPr wrap="square" lIns="0" tIns="0" rIns="0" bIns="0" rtlCol="0" anchor="ctr"/>
-          <a:lstStyle/>
-          <a:p>
-            <a:pPr indent="0" marL="0">
-              <a:lnSpc>
-                <a:spcPts val="1300"/>
-              </a:lnSpc>
-              <a:buNone/>
-            </a:pPr>
-            <a:r>
-              <a:rPr lang="en-US" sz="1050" dirty="0">
-                <a:solidFill>
-                  <a:srgbClr val="2E4258"/>
-                </a:solidFill>
-                <a:latin typeface="Arial" pitchFamily="34" charset="0"/>
-                <a:ea typeface="Arial" pitchFamily="34" charset="-122"/>
-                <a:cs typeface="Arial" pitchFamily="34" charset="-120"/>
-              </a:rPr>
-              <a:t>Que el CUIT esté activo y no dado de baja.</a:t>
-            </a:r>
-            <a:endParaRPr lang="en-US" sz="1050" dirty="0"/>
-          </a:p>
-        </p:txBody>
-      </p:sp>
-      <p:sp>
-        <p:nvSpPr>
-          <p:cNvPr id="14" name="Shape 11"/>
-          <p:cNvSpPr/>
-          <p:nvPr/>
-        </p:nvSpPr>
-        <p:spPr>
-          <a:xfrm>
-            <a:off x="603504" y="2340864"/>
-            <a:ext cx="310896" cy="310896"/>
-          </a:xfrm>
-          <a:prstGeom prst="roundRect">
-            <a:avLst>
-              <a:gd name="adj" fmla="val 147059"/>
-            </a:avLst>
-          </a:prstGeom>
-          <a:solidFill>
-            <a:srgbClr val="26AE60"/>
-          </a:solidFill>
-          <a:ln w="12700">
-            <a:solidFill>
-              <a:srgbClr val="26AE60"/>
-            </a:solidFill>
-            <a:prstDash val="solid"/>
-          </a:ln>
-        </p:spPr>
-      </p:sp>
-      <p:sp>
-        <p:nvSpPr>
-          <p:cNvPr id="15" name="Text 12"/>
-          <p:cNvSpPr/>
-          <p:nvPr/>
-        </p:nvSpPr>
-        <p:spPr>
-          <a:xfrm>
-            <a:off x="603504" y="2340864"/>
-            <a:ext cx="310896" cy="310896"/>
-          </a:xfrm>
-          <a:prstGeom prst="rect">
-            <a:avLst/>
-          </a:prstGeom>
-          <a:noFill/>
-          <a:ln/>
-        </p:spPr>
-        <p:txBody>
-          <a:bodyPr wrap="square" lIns="0" tIns="0" rIns="0" bIns="0" rtlCol="0" anchor="ctr"/>
-          <a:lstStyle/>
-          <a:p>
-            <a:pPr algn="ctr" indent="0" marL="0">
-              <a:buNone/>
-            </a:pPr>
-            <a:r>
-              <a:rPr lang="en-US" sz="1200" b="1" dirty="0">
-                <a:solidFill>
-                  <a:srgbClr val="FFFFFF"/>
-                </a:solidFill>
-                <a:latin typeface="Arial" pitchFamily="34" charset="0"/>
-                <a:ea typeface="Arial" pitchFamily="34" charset="-122"/>
-                <a:cs typeface="Arial" pitchFamily="34" charset="-120"/>
-              </a:rPr>
-              <a:t>✓</a:t>
-            </a:r>
-            <a:endParaRPr lang="en-US" sz="1200" dirty="0"/>
-          </a:p>
-        </p:txBody>
-      </p:sp>
-      <p:sp>
-        <p:nvSpPr>
-          <p:cNvPr id="16" name="Text 13"/>
-          <p:cNvSpPr/>
-          <p:nvPr/>
-        </p:nvSpPr>
-        <p:spPr>
-          <a:xfrm>
-            <a:off x="1042416" y="2322576"/>
-            <a:ext cx="3511296" cy="365760"/>
-          </a:xfrm>
-          <a:prstGeom prst="rect">
-            <a:avLst/>
-          </a:prstGeom>
-          <a:noFill/>
-          <a:ln/>
-        </p:spPr>
-        <p:txBody>
-          <a:bodyPr wrap="square" lIns="0" tIns="0" rIns="0" bIns="0" rtlCol="0" anchor="ctr"/>
-          <a:lstStyle/>
-          <a:p>
-            <a:pPr indent="0" marL="0">
-              <a:lnSpc>
-                <a:spcPts val="1300"/>
-              </a:lnSpc>
-              <a:buNone/>
-            </a:pPr>
-            <a:r>
-              <a:rPr lang="en-US" sz="1050" dirty="0">
-                <a:solidFill>
-                  <a:srgbClr val="2E4258"/>
-                </a:solidFill>
-                <a:latin typeface="Arial" pitchFamily="34" charset="0"/>
-                <a:ea typeface="Arial" pitchFamily="34" charset="-122"/>
-                <a:cs typeface="Arial" pitchFamily="34" charset="-120"/>
-              </a:rPr>
-              <a:t>Que la condición de IVA de la constancia coincida con el tipo de factura.</a:t>
-            </a:r>
-            <a:endParaRPr lang="en-US" sz="1050" dirty="0"/>
-          </a:p>
-        </p:txBody>
-      </p:sp>
-      <p:sp>
-        <p:nvSpPr>
-          <p:cNvPr id="17" name="Shape 14"/>
-          <p:cNvSpPr/>
-          <p:nvPr/>
-        </p:nvSpPr>
-        <p:spPr>
-          <a:xfrm>
-            <a:off x="603504" y="2852928"/>
-            <a:ext cx="310896" cy="310896"/>
-          </a:xfrm>
-          <a:prstGeom prst="roundRect">
-            <a:avLst>
-              <a:gd name="adj" fmla="val 147059"/>
-            </a:avLst>
-          </a:prstGeom>
-          <a:solidFill>
-            <a:srgbClr val="26AE60"/>
-          </a:solidFill>
-          <a:ln w="12700">
-            <a:solidFill>
-              <a:srgbClr val="26AE60"/>
-            </a:solidFill>
-            <a:prstDash val="solid"/>
-          </a:ln>
-        </p:spPr>
-      </p:sp>
-      <p:sp>
-        <p:nvSpPr>
-          <p:cNvPr id="18" name="Text 15"/>
-          <p:cNvSpPr/>
-          <p:nvPr/>
-        </p:nvSpPr>
-        <p:spPr>
-          <a:xfrm>
-            <a:off x="603504" y="2852928"/>
-            <a:ext cx="310896" cy="310896"/>
-          </a:xfrm>
-          <a:prstGeom prst="rect">
-            <a:avLst/>
-          </a:prstGeom>
-          <a:noFill/>
-          <a:ln/>
-        </p:spPr>
-        <p:txBody>
-          <a:bodyPr wrap="square" lIns="0" tIns="0" rIns="0" bIns="0" rtlCol="0" anchor="ctr"/>
-          <a:lstStyle/>
-          <a:p>
-            <a:pPr algn="ctr" indent="0" marL="0">
-              <a:buNone/>
-            </a:pPr>
-            <a:r>
-              <a:rPr lang="en-US" sz="1200" b="1" dirty="0">
-                <a:solidFill>
-                  <a:srgbClr val="FFFFFF"/>
-                </a:solidFill>
-                <a:latin typeface="Arial" pitchFamily="34" charset="0"/>
-                <a:ea typeface="Arial" pitchFamily="34" charset="-122"/>
-                <a:cs typeface="Arial" pitchFamily="34" charset="-120"/>
-              </a:rPr>
-              <a:t>✓</a:t>
-            </a:r>
-            <a:endParaRPr lang="en-US" sz="1200" dirty="0"/>
-          </a:p>
-        </p:txBody>
-      </p:sp>
-      <p:sp>
-        <p:nvSpPr>
-          <p:cNvPr id="19" name="Text 16"/>
-          <p:cNvSpPr/>
-          <p:nvPr/>
-        </p:nvSpPr>
-        <p:spPr>
-          <a:xfrm>
-            <a:off x="1042416" y="2834640"/>
-            <a:ext cx="3511296" cy="365760"/>
-          </a:xfrm>
-          <a:prstGeom prst="rect">
-            <a:avLst/>
-          </a:prstGeom>
-          <a:noFill/>
-          <a:ln/>
-        </p:spPr>
-        <p:txBody>
-          <a:bodyPr wrap="square" lIns="0" tIns="0" rIns="0" bIns="0" rtlCol="0" anchor="ctr"/>
-          <a:lstStyle/>
-          <a:p>
-            <a:pPr indent="0" marL="0">
-              <a:lnSpc>
-                <a:spcPts val="1300"/>
-              </a:lnSpc>
-              <a:buNone/>
-            </a:pPr>
-            <a:r>
-              <a:rPr lang="en-US" sz="1050" dirty="0">
-                <a:solidFill>
-                  <a:srgbClr val="2E4258"/>
-                </a:solidFill>
-                <a:latin typeface="Arial" pitchFamily="34" charset="0"/>
-                <a:ea typeface="Arial" pitchFamily="34" charset="-122"/>
-                <a:cs typeface="Arial" pitchFamily="34" charset="-120"/>
-              </a:rPr>
-              <a:t>Que el comprobante tenga CAE vigente.</a:t>
-            </a:r>
-            <a:endParaRPr lang="en-US" sz="1050" dirty="0"/>
-          </a:p>
-        </p:txBody>
-      </p:sp>
-      <p:sp>
-        <p:nvSpPr>
-          <p:cNvPr id="20" name="Shape 17"/>
-          <p:cNvSpPr/>
-          <p:nvPr/>
-        </p:nvSpPr>
-        <p:spPr>
-          <a:xfrm>
-            <a:off x="603504" y="3364992"/>
-            <a:ext cx="310896" cy="310896"/>
-          </a:xfrm>
-          <a:prstGeom prst="roundRect">
-            <a:avLst>
-              <a:gd name="adj" fmla="val 147059"/>
-            </a:avLst>
-          </a:prstGeom>
-          <a:solidFill>
-            <a:srgbClr val="26AE60"/>
-          </a:solidFill>
-          <a:ln w="12700">
-            <a:solidFill>
-              <a:srgbClr val="26AE60"/>
-            </a:solidFill>
-            <a:prstDash val="solid"/>
-          </a:ln>
-        </p:spPr>
-      </p:sp>
-      <p:sp>
-        <p:nvSpPr>
-          <p:cNvPr id="21" name="Text 18"/>
-          <p:cNvSpPr/>
-          <p:nvPr/>
-        </p:nvSpPr>
-        <p:spPr>
-          <a:xfrm>
-            <a:off x="603504" y="3364992"/>
-            <a:ext cx="310896" cy="310896"/>
-          </a:xfrm>
-          <a:prstGeom prst="rect">
-            <a:avLst/>
-          </a:prstGeom>
-          <a:noFill/>
-          <a:ln/>
-        </p:spPr>
-        <p:txBody>
-          <a:bodyPr wrap="square" lIns="0" tIns="0" rIns="0" bIns="0" rtlCol="0" anchor="ctr"/>
-          <a:lstStyle/>
-          <a:p>
-            <a:pPr algn="ctr" indent="0" marL="0">
-              <a:buNone/>
-            </a:pPr>
-            <a:r>
-              <a:rPr lang="en-US" sz="1200" b="1" dirty="0">
-                <a:solidFill>
-                  <a:srgbClr val="FFFFFF"/>
-                </a:solidFill>
-                <a:latin typeface="Arial" pitchFamily="34" charset="0"/>
-                <a:ea typeface="Arial" pitchFamily="34" charset="-122"/>
-                <a:cs typeface="Arial" pitchFamily="34" charset="-120"/>
-              </a:rPr>
-              <a:t>✓</a:t>
-            </a:r>
-            <a:endParaRPr lang="en-US" sz="1200" dirty="0"/>
-          </a:p>
-        </p:txBody>
-      </p:sp>
-      <p:sp>
-        <p:nvSpPr>
-          <p:cNvPr id="22" name="Text 19"/>
-          <p:cNvSpPr/>
-          <p:nvPr/>
-        </p:nvSpPr>
-        <p:spPr>
-          <a:xfrm>
-            <a:off x="1042416" y="3346704"/>
-            <a:ext cx="3511296" cy="365760"/>
-          </a:xfrm>
-          <a:prstGeom prst="rect">
-            <a:avLst/>
-          </a:prstGeom>
-          <a:noFill/>
-          <a:ln/>
-        </p:spPr>
-        <p:txBody>
-          <a:bodyPr wrap="square" lIns="0" tIns="0" rIns="0" bIns="0" rtlCol="0" anchor="ctr"/>
-          <a:lstStyle/>
-          <a:p>
-            <a:pPr indent="0" marL="0">
-              <a:lnSpc>
-                <a:spcPts val="1300"/>
-              </a:lnSpc>
-              <a:buNone/>
-            </a:pPr>
-            <a:r>
-              <a:rPr lang="en-US" sz="1050" dirty="0">
-                <a:solidFill>
-                  <a:srgbClr val="2E4258"/>
-                </a:solidFill>
-                <a:latin typeface="Arial" pitchFamily="34" charset="0"/>
-                <a:ea typeface="Arial" pitchFamily="34" charset="-122"/>
-                <a:cs typeface="Arial" pitchFamily="34" charset="-120"/>
-              </a:rPr>
-              <a:t>Que el CBU esté a nombre del mismo CUIT que factura.</a:t>
-            </a:r>
-            <a:endParaRPr lang="en-US" sz="1050" dirty="0"/>
-          </a:p>
-        </p:txBody>
-      </p:sp>
-      <p:sp>
-        <p:nvSpPr>
-          <p:cNvPr id="23" name="Shape 20"/>
-          <p:cNvSpPr/>
-          <p:nvPr/>
-        </p:nvSpPr>
-        <p:spPr>
-          <a:xfrm>
-            <a:off x="603504" y="3877056"/>
-            <a:ext cx="310896" cy="310896"/>
-          </a:xfrm>
-          <a:prstGeom prst="roundRect">
-            <a:avLst>
-              <a:gd name="adj" fmla="val 147059"/>
-            </a:avLst>
-          </a:prstGeom>
-          <a:solidFill>
-            <a:srgbClr val="26AE60"/>
-          </a:solidFill>
-          <a:ln w="12700">
-            <a:solidFill>
-              <a:srgbClr val="26AE60"/>
-            </a:solidFill>
-            <a:prstDash val="solid"/>
-          </a:ln>
-        </p:spPr>
-      </p:sp>
-      <p:sp>
-        <p:nvSpPr>
-          <p:cNvPr id="24" name="Text 21"/>
-          <p:cNvSpPr/>
-          <p:nvPr/>
-        </p:nvSpPr>
-        <p:spPr>
-          <a:xfrm>
-            <a:off x="603504" y="3877056"/>
-            <a:ext cx="310896" cy="310896"/>
-          </a:xfrm>
-          <a:prstGeom prst="rect">
-            <a:avLst/>
-          </a:prstGeom>
-          <a:noFill/>
-          <a:ln/>
-        </p:spPr>
-        <p:txBody>
-          <a:bodyPr wrap="square" lIns="0" tIns="0" rIns="0" bIns="0" rtlCol="0" anchor="ctr"/>
-          <a:lstStyle/>
-          <a:p>
-            <a:pPr algn="ctr" indent="0" marL="0">
-              <a:buNone/>
-            </a:pPr>
-            <a:r>
-              <a:rPr lang="en-US" sz="1200" b="1" dirty="0">
-                <a:solidFill>
-                  <a:srgbClr val="FFFFFF"/>
-                </a:solidFill>
-                <a:latin typeface="Arial" pitchFamily="34" charset="0"/>
-                <a:ea typeface="Arial" pitchFamily="34" charset="-122"/>
-                <a:cs typeface="Arial" pitchFamily="34" charset="-120"/>
-              </a:rPr>
-              <a:t>✓</a:t>
-            </a:r>
-            <a:endParaRPr lang="en-US" sz="1200" dirty="0"/>
-          </a:p>
-        </p:txBody>
-      </p:sp>
-      <p:sp>
-        <p:nvSpPr>
-          <p:cNvPr id="25" name="Text 22"/>
-          <p:cNvSpPr/>
-          <p:nvPr/>
-        </p:nvSpPr>
-        <p:spPr>
-          <a:xfrm>
-            <a:off x="1042416" y="3858768"/>
-            <a:ext cx="3511296" cy="365760"/>
-          </a:xfrm>
-          <a:prstGeom prst="rect">
-            <a:avLst/>
-          </a:prstGeom>
-          <a:noFill/>
-          <a:ln/>
-        </p:spPr>
-        <p:txBody>
-          <a:bodyPr wrap="square" lIns="0" tIns="0" rIns="0" bIns="0" rtlCol="0" anchor="ctr"/>
-          <a:lstStyle/>
-          <a:p>
-            <a:pPr indent="0" marL="0">
-              <a:lnSpc>
-                <a:spcPts val="1300"/>
-              </a:lnSpc>
-              <a:buNone/>
-            </a:pPr>
-            <a:r>
-              <a:rPr lang="en-US" sz="1050" dirty="0">
-                <a:solidFill>
-                  <a:srgbClr val="2E4258"/>
-                </a:solidFill>
-                <a:latin typeface="Arial" pitchFamily="34" charset="0"/>
-                <a:ea typeface="Arial" pitchFamily="34" charset="-122"/>
-                <a:cs typeface="Arial" pitchFamily="34" charset="-120"/>
-              </a:rPr>
-              <a:t>Que el contrato de alquiler esté sellado antes de firmar.</a:t>
-            </a:r>
-            <a:endParaRPr lang="en-US" sz="1050" dirty="0"/>
-          </a:p>
-        </p:txBody>
-      </p:sp>
-      <p:sp>
-        <p:nvSpPr>
-          <p:cNvPr id="26" name="Shape 23"/>
-          <p:cNvSpPr/>
-          <p:nvPr/>
-        </p:nvSpPr>
-        <p:spPr>
-          <a:xfrm>
-            <a:off x="4736592" y="1828800"/>
-            <a:ext cx="310896" cy="310896"/>
-          </a:xfrm>
-          <a:prstGeom prst="roundRect">
-            <a:avLst>
-              <a:gd name="adj" fmla="val 147059"/>
-            </a:avLst>
-          </a:prstGeom>
-          <a:solidFill>
-            <a:srgbClr val="E74B3C"/>
-          </a:solidFill>
-          <a:ln w="12700">
-            <a:solidFill>
-              <a:srgbClr val="E74B3C"/>
-            </a:solidFill>
-            <a:prstDash val="solid"/>
-          </a:ln>
-        </p:spPr>
-      </p:sp>
-      <p:sp>
-        <p:nvSpPr>
-          <p:cNvPr id="27" name="Text 24"/>
-          <p:cNvSpPr/>
-          <p:nvPr/>
-        </p:nvSpPr>
-        <p:spPr>
-          <a:xfrm>
-            <a:off x="4736592" y="1828800"/>
-            <a:ext cx="310896" cy="310896"/>
-          </a:xfrm>
-          <a:prstGeom prst="rect">
-            <a:avLst/>
-          </a:prstGeom>
-          <a:noFill/>
-          <a:ln/>
-        </p:spPr>
-        <p:txBody>
-          <a:bodyPr wrap="square" lIns="0" tIns="0" rIns="0" bIns="0" rtlCol="0" anchor="ctr"/>
-          <a:lstStyle/>
-          <a:p>
-            <a:pPr algn="ctr" indent="0" marL="0">
-              <a:buNone/>
-            </a:pPr>
-            <a:r>
-              <a:rPr lang="en-US" sz="1100" b="1" dirty="0">
-                <a:solidFill>
-                  <a:srgbClr val="FFFFFF"/>
-                </a:solidFill>
-                <a:latin typeface="Arial" pitchFamily="34" charset="0"/>
-                <a:ea typeface="Arial" pitchFamily="34" charset="-122"/>
-                <a:cs typeface="Arial" pitchFamily="34" charset="-120"/>
-              </a:rPr>
-              <a:t>✕</a:t>
-            </a:r>
-            <a:endParaRPr lang="en-US" sz="1100" dirty="0"/>
-          </a:p>
-        </p:txBody>
-      </p:sp>
-      <p:sp>
-        <p:nvSpPr>
-          <p:cNvPr id="28" name="Text 25"/>
-          <p:cNvSpPr/>
-          <p:nvPr/>
-        </p:nvSpPr>
-        <p:spPr>
-          <a:xfrm>
-            <a:off x="5175504" y="1810512"/>
-            <a:ext cx="3511296" cy="365760"/>
-          </a:xfrm>
-          <a:prstGeom prst="rect">
-            <a:avLst/>
-          </a:prstGeom>
-          <a:noFill/>
-          <a:ln/>
-        </p:spPr>
-        <p:txBody>
-          <a:bodyPr wrap="square" lIns="0" tIns="0" rIns="0" bIns="0" rtlCol="0" anchor="ctr"/>
-          <a:lstStyle/>
-          <a:p>
-            <a:pPr indent="0" marL="0">
-              <a:lnSpc>
-                <a:spcPts val="1300"/>
-              </a:lnSpc>
-              <a:buNone/>
-            </a:pPr>
-            <a:r>
-              <a:rPr lang="en-US" sz="1050" dirty="0">
-                <a:solidFill>
-                  <a:srgbClr val="2E4258"/>
-                </a:solidFill>
-                <a:latin typeface="Arial" pitchFamily="34" charset="0"/>
-                <a:ea typeface="Arial" pitchFamily="34" charset="-122"/>
-                <a:cs typeface="Arial" pitchFamily="34" charset="-120"/>
-              </a:rPr>
-              <a:t>Pagar una factura sin verificar el CAE.</a:t>
-            </a:r>
-            <a:endParaRPr lang="en-US" sz="1050" dirty="0"/>
-          </a:p>
-        </p:txBody>
-      </p:sp>
-      <p:sp>
-        <p:nvSpPr>
-          <p:cNvPr id="29" name="Shape 26"/>
-          <p:cNvSpPr/>
-          <p:nvPr/>
-        </p:nvSpPr>
-        <p:spPr>
-          <a:xfrm>
-            <a:off x="4736592" y="2340864"/>
-            <a:ext cx="310896" cy="310896"/>
-          </a:xfrm>
-          <a:prstGeom prst="roundRect">
-            <a:avLst>
-              <a:gd name="adj" fmla="val 147059"/>
-            </a:avLst>
-          </a:prstGeom>
-          <a:solidFill>
-            <a:srgbClr val="E74B3C"/>
-          </a:solidFill>
-          <a:ln w="12700">
-            <a:solidFill>
-              <a:srgbClr val="E74B3C"/>
-            </a:solidFill>
-            <a:prstDash val="solid"/>
-          </a:ln>
-        </p:spPr>
-      </p:sp>
-      <p:sp>
-        <p:nvSpPr>
-          <p:cNvPr id="30" name="Text 27"/>
-          <p:cNvSpPr/>
-          <p:nvPr/>
-        </p:nvSpPr>
-        <p:spPr>
-          <a:xfrm>
-            <a:off x="4736592" y="2340864"/>
-            <a:ext cx="310896" cy="310896"/>
-          </a:xfrm>
-          <a:prstGeom prst="rect">
-            <a:avLst/>
-          </a:prstGeom>
-          <a:noFill/>
-          <a:ln/>
-        </p:spPr>
-        <p:txBody>
-          <a:bodyPr wrap="square" lIns="0" tIns="0" rIns="0" bIns="0" rtlCol="0" anchor="ctr"/>
-          <a:lstStyle/>
-          <a:p>
-            <a:pPr algn="ctr" indent="0" marL="0">
-              <a:buNone/>
-            </a:pPr>
-            <a:r>
-              <a:rPr lang="en-US" sz="1100" b="1" dirty="0">
-                <a:solidFill>
-                  <a:srgbClr val="FFFFFF"/>
-                </a:solidFill>
-                <a:latin typeface="Arial" pitchFamily="34" charset="0"/>
-                <a:ea typeface="Arial" pitchFamily="34" charset="-122"/>
-                <a:cs typeface="Arial" pitchFamily="34" charset="-120"/>
-              </a:rPr>
-              <a:t>✕</a:t>
-            </a:r>
-            <a:endParaRPr lang="en-US" sz="1100" dirty="0"/>
-          </a:p>
-        </p:txBody>
-      </p:sp>
-      <p:sp>
-        <p:nvSpPr>
-          <p:cNvPr id="31" name="Text 28"/>
-          <p:cNvSpPr/>
-          <p:nvPr/>
-        </p:nvSpPr>
-        <p:spPr>
-          <a:xfrm>
-            <a:off x="5175504" y="2322576"/>
-            <a:ext cx="3511296" cy="365760"/>
-          </a:xfrm>
-          <a:prstGeom prst="rect">
-            <a:avLst/>
-          </a:prstGeom>
-          <a:noFill/>
-          <a:ln/>
-        </p:spPr>
-        <p:txBody>
-          <a:bodyPr wrap="square" lIns="0" tIns="0" rIns="0" bIns="0" rtlCol="0" anchor="ctr"/>
-          <a:lstStyle/>
-          <a:p>
-            <a:pPr indent="0" marL="0">
-              <a:lnSpc>
-                <a:spcPts val="1300"/>
-              </a:lnSpc>
-              <a:buNone/>
-            </a:pPr>
-            <a:r>
-              <a:rPr lang="en-US" sz="1050" dirty="0">
-                <a:solidFill>
-                  <a:srgbClr val="2E4258"/>
-                </a:solidFill>
-                <a:latin typeface="Arial" pitchFamily="34" charset="0"/>
-                <a:ea typeface="Arial" pitchFamily="34" charset="-122"/>
-                <a:cs typeface="Arial" pitchFamily="34" charset="-120"/>
-              </a:rPr>
-              <a:t>No presentar la DDJJ por no tener actividad en el período.</a:t>
-            </a:r>
-            <a:endParaRPr lang="en-US" sz="1050" dirty="0"/>
-          </a:p>
-        </p:txBody>
-      </p:sp>
-      <p:sp>
-        <p:nvSpPr>
-          <p:cNvPr id="32" name="Shape 29"/>
-          <p:cNvSpPr/>
-          <p:nvPr/>
-        </p:nvSpPr>
-        <p:spPr>
-          <a:xfrm>
-            <a:off x="4736592" y="2852928"/>
-            <a:ext cx="310896" cy="310896"/>
-          </a:xfrm>
-          <a:prstGeom prst="roundRect">
-            <a:avLst>
-              <a:gd name="adj" fmla="val 147059"/>
-            </a:avLst>
-          </a:prstGeom>
-          <a:solidFill>
-            <a:srgbClr val="E74B3C"/>
-          </a:solidFill>
-          <a:ln w="12700">
-            <a:solidFill>
-              <a:srgbClr val="E74B3C"/>
-            </a:solidFill>
-            <a:prstDash val="solid"/>
-          </a:ln>
-        </p:spPr>
-      </p:sp>
-      <p:sp>
-        <p:nvSpPr>
-          <p:cNvPr id="33" name="Text 30"/>
-          <p:cNvSpPr/>
-          <p:nvPr/>
-        </p:nvSpPr>
-        <p:spPr>
-          <a:xfrm>
-            <a:off x="4736592" y="2852928"/>
-            <a:ext cx="310896" cy="310896"/>
-          </a:xfrm>
-          <a:prstGeom prst="rect">
-            <a:avLst/>
-          </a:prstGeom>
-          <a:noFill/>
-          <a:ln/>
-        </p:spPr>
-        <p:txBody>
-          <a:bodyPr wrap="square" lIns="0" tIns="0" rIns="0" bIns="0" rtlCol="0" anchor="ctr"/>
-          <a:lstStyle/>
-          <a:p>
-            <a:pPr algn="ctr" indent="0" marL="0">
-              <a:buNone/>
-            </a:pPr>
-            <a:r>
-              <a:rPr lang="en-US" sz="1100" b="1" dirty="0">
-                <a:solidFill>
-                  <a:srgbClr val="FFFFFF"/>
-                </a:solidFill>
-                <a:latin typeface="Arial" pitchFamily="34" charset="0"/>
-                <a:ea typeface="Arial" pitchFamily="34" charset="-122"/>
-                <a:cs typeface="Arial" pitchFamily="34" charset="-120"/>
-              </a:rPr>
-              <a:t>✕</a:t>
-            </a:r>
-            <a:endParaRPr lang="en-US" sz="1100" dirty="0"/>
-          </a:p>
-        </p:txBody>
-      </p:sp>
-      <p:sp>
-        <p:nvSpPr>
-          <p:cNvPr id="34" name="Text 31"/>
-          <p:cNvSpPr/>
-          <p:nvPr/>
-        </p:nvSpPr>
-        <p:spPr>
-          <a:xfrm>
-            <a:off x="5175504" y="2834640"/>
-            <a:ext cx="3511296" cy="365760"/>
-          </a:xfrm>
-          <a:prstGeom prst="rect">
-            <a:avLst/>
-          </a:prstGeom>
-          <a:noFill/>
-          <a:ln/>
-        </p:spPr>
-        <p:txBody>
-          <a:bodyPr wrap="square" lIns="0" tIns="0" rIns="0" bIns="0" rtlCol="0" anchor="ctr"/>
-          <a:lstStyle/>
-          <a:p>
-            <a:pPr indent="0" marL="0">
-              <a:lnSpc>
-                <a:spcPts val="1300"/>
-              </a:lnSpc>
-              <a:buNone/>
-            </a:pPr>
-            <a:r>
-              <a:rPr lang="en-US" sz="1050" dirty="0">
-                <a:solidFill>
-                  <a:srgbClr val="2E4258"/>
-                </a:solidFill>
-                <a:latin typeface="Arial" pitchFamily="34" charset="0"/>
-                <a:ea typeface="Arial" pitchFamily="34" charset="-122"/>
-                <a:cs typeface="Arial" pitchFamily="34" charset="-120"/>
-              </a:rPr>
-              <a:t>No recategorizar el Monotributo en febrero y agosto.</a:t>
-            </a:r>
-            <a:endParaRPr lang="en-US" sz="1050" dirty="0"/>
-          </a:p>
-        </p:txBody>
-      </p:sp>
-      <p:sp>
-        <p:nvSpPr>
-          <p:cNvPr id="35" name="Shape 32"/>
-          <p:cNvSpPr/>
-          <p:nvPr/>
-        </p:nvSpPr>
-        <p:spPr>
-          <a:xfrm>
-            <a:off x="4736592" y="3364992"/>
-            <a:ext cx="310896" cy="310896"/>
-          </a:xfrm>
-          <a:prstGeom prst="roundRect">
-            <a:avLst>
-              <a:gd name="adj" fmla="val 147059"/>
-            </a:avLst>
-          </a:prstGeom>
-          <a:solidFill>
-            <a:srgbClr val="E74B3C"/>
-          </a:solidFill>
-          <a:ln w="12700">
-            <a:solidFill>
-              <a:srgbClr val="E74B3C"/>
-            </a:solidFill>
-            <a:prstDash val="solid"/>
-          </a:ln>
-        </p:spPr>
-      </p:sp>
-      <p:sp>
-        <p:nvSpPr>
-          <p:cNvPr id="36" name="Text 33"/>
-          <p:cNvSpPr/>
-          <p:nvPr/>
-        </p:nvSpPr>
-        <p:spPr>
-          <a:xfrm>
-            <a:off x="4736592" y="3364992"/>
-            <a:ext cx="310896" cy="310896"/>
-          </a:xfrm>
-          <a:prstGeom prst="rect">
-            <a:avLst/>
-          </a:prstGeom>
-          <a:noFill/>
-          <a:ln/>
-        </p:spPr>
-        <p:txBody>
-          <a:bodyPr wrap="square" lIns="0" tIns="0" rIns="0" bIns="0" rtlCol="0" anchor="ctr"/>
-          <a:lstStyle/>
-          <a:p>
-            <a:pPr algn="ctr" indent="0" marL="0">
-              <a:buNone/>
-            </a:pPr>
-            <a:r>
-              <a:rPr lang="en-US" sz="1100" b="1" dirty="0">
-                <a:solidFill>
-                  <a:srgbClr val="FFFFFF"/>
-                </a:solidFill>
-                <a:latin typeface="Arial" pitchFamily="34" charset="0"/>
-                <a:ea typeface="Arial" pitchFamily="34" charset="-122"/>
-                <a:cs typeface="Arial" pitchFamily="34" charset="-120"/>
-              </a:rPr>
-              <a:t>✕</a:t>
-            </a:r>
-            <a:endParaRPr lang="en-US" sz="1100" dirty="0"/>
-          </a:p>
-        </p:txBody>
-      </p:sp>
-      <p:sp>
-        <p:nvSpPr>
-          <p:cNvPr id="37" name="Text 34"/>
-          <p:cNvSpPr/>
-          <p:nvPr/>
-        </p:nvSpPr>
-        <p:spPr>
-          <a:xfrm>
-            <a:off x="5175504" y="3346704"/>
-            <a:ext cx="3511296" cy="365760"/>
-          </a:xfrm>
-          <a:prstGeom prst="rect">
-            <a:avLst/>
-          </a:prstGeom>
-          <a:noFill/>
-          <a:ln/>
-        </p:spPr>
-        <p:txBody>
-          <a:bodyPr wrap="square" lIns="0" tIns="0" rIns="0" bIns="0" rtlCol="0" anchor="ctr"/>
-          <a:lstStyle/>
-          <a:p>
-            <a:pPr indent="0" marL="0">
-              <a:lnSpc>
-                <a:spcPts val="1300"/>
-              </a:lnSpc>
-              <a:buNone/>
-            </a:pPr>
-            <a:r>
-              <a:rPr lang="en-US" sz="1050" dirty="0">
-                <a:solidFill>
-                  <a:srgbClr val="2E4258"/>
-                </a:solidFill>
-                <a:latin typeface="Arial" pitchFamily="34" charset="0"/>
-                <a:ea typeface="Arial" pitchFamily="34" charset="-122"/>
-                <a:cs typeface="Arial" pitchFamily="34" charset="-120"/>
-              </a:rPr>
-              <a:t>Operar con un proveedor de alto riesgo fiscal.</a:t>
-            </a:r>
-            <a:endParaRPr lang="en-US" sz="1050" dirty="0"/>
-          </a:p>
-        </p:txBody>
-      </p:sp>
-      <p:sp>
-        <p:nvSpPr>
-          <p:cNvPr id="38" name="Shape 35"/>
-          <p:cNvSpPr/>
-          <p:nvPr/>
-        </p:nvSpPr>
-        <p:spPr>
-          <a:xfrm>
-            <a:off x="4736592" y="3877056"/>
-            <a:ext cx="310896" cy="310896"/>
-          </a:xfrm>
-          <a:prstGeom prst="roundRect">
-            <a:avLst>
-              <a:gd name="adj" fmla="val 147059"/>
-            </a:avLst>
-          </a:prstGeom>
-          <a:solidFill>
-            <a:srgbClr val="E74B3C"/>
-          </a:solidFill>
-          <a:ln w="12700">
-            <a:solidFill>
-              <a:srgbClr val="E74B3C"/>
-            </a:solidFill>
-            <a:prstDash val="solid"/>
-          </a:ln>
-        </p:spPr>
-      </p:sp>
-      <p:sp>
-        <p:nvSpPr>
-          <p:cNvPr id="39" name="Text 36"/>
-          <p:cNvSpPr/>
-          <p:nvPr/>
-        </p:nvSpPr>
-        <p:spPr>
-          <a:xfrm>
-            <a:off x="4736592" y="3877056"/>
-            <a:ext cx="310896" cy="310896"/>
-          </a:xfrm>
-          <a:prstGeom prst="rect">
-            <a:avLst/>
-          </a:prstGeom>
-          <a:noFill/>
-          <a:ln/>
-        </p:spPr>
-        <p:txBody>
-          <a:bodyPr wrap="square" lIns="0" tIns="0" rIns="0" bIns="0" rtlCol="0" anchor="ctr"/>
-          <a:lstStyle/>
-          <a:p>
-            <a:pPr algn="ctr" indent="0" marL="0">
-              <a:buNone/>
-            </a:pPr>
-            <a:r>
-              <a:rPr lang="en-US" sz="1100" b="1" dirty="0">
-                <a:solidFill>
-                  <a:srgbClr val="FFFFFF"/>
-                </a:solidFill>
-                <a:latin typeface="Arial" pitchFamily="34" charset="0"/>
-                <a:ea typeface="Arial" pitchFamily="34" charset="-122"/>
-                <a:cs typeface="Arial" pitchFamily="34" charset="-120"/>
-              </a:rPr>
-              <a:t>✕</a:t>
-            </a:r>
-            <a:endParaRPr lang="en-US" sz="1100" dirty="0"/>
-          </a:p>
-        </p:txBody>
-      </p:sp>
-      <p:sp>
-        <p:nvSpPr>
-          <p:cNvPr id="40" name="Text 37"/>
-          <p:cNvSpPr/>
-          <p:nvPr/>
-        </p:nvSpPr>
-        <p:spPr>
-          <a:xfrm>
-            <a:off x="5175504" y="3858768"/>
-            <a:ext cx="3511296" cy="365760"/>
-          </a:xfrm>
-          <a:prstGeom prst="rect">
-            <a:avLst/>
-          </a:prstGeom>
-          <a:noFill/>
-          <a:ln/>
-        </p:spPr>
-        <p:txBody>
-          <a:bodyPr wrap="square" lIns="0" tIns="0" rIns="0" bIns="0" rtlCol="0" anchor="ctr"/>
-          <a:lstStyle/>
-          <a:p>
-            <a:pPr indent="0" marL="0">
-              <a:lnSpc>
-                <a:spcPts val="1300"/>
-              </a:lnSpc>
-              <a:buNone/>
-            </a:pPr>
-            <a:r>
-              <a:rPr lang="en-US" sz="1050" dirty="0">
-                <a:solidFill>
-                  <a:srgbClr val="2E4258"/>
-                </a:solidFill>
-                <a:latin typeface="Arial" pitchFamily="34" charset="0"/>
-                <a:ea typeface="Arial" pitchFamily="34" charset="-122"/>
-                <a:cs typeface="Arial" pitchFamily="34" charset="-120"/>
-              </a:rPr>
-              <a:t>Firmar un contrato de alquiler sin sellar.</a:t>
-            </a:r>
-            <a:endParaRPr lang="en-US" sz="1050" dirty="0"/>
-          </a:p>
-        </p:txBody>
-      </p:sp>
-      <p:sp>
-        <p:nvSpPr>
-          <p:cNvPr id="41" name="Shape 38"/>
-          <p:cNvSpPr/>
-          <p:nvPr/>
-        </p:nvSpPr>
-        <p:spPr>
-          <a:xfrm>
-            <a:off x="603504" y="4352544"/>
-            <a:ext cx="8083296" cy="658368"/>
-          </a:xfrm>
-          <a:prstGeom prst="roundRect">
-            <a:avLst>
-              <a:gd name="adj" fmla="val 12500"/>
+              <a:gd name="adj" fmla="val 4369"/>
             </a:avLst>
           </a:prstGeom>
           <a:solidFill>
@@ -4297,13 +3302,613 @@
       </p:sp>
       <p:sp>
         <p:nvSpPr>
-          <p:cNvPr id="42" name="Text 39"/>
-          <p:cNvSpPr/>
-          <p:nvPr/>
-        </p:nvSpPr>
-        <p:spPr>
-          <a:xfrm>
-            <a:off x="841248" y="4425696"/>
+          <p:cNvPr id="8" name="Text 5"/>
+          <p:cNvSpPr/>
+          <p:nvPr/>
+        </p:nvSpPr>
+        <p:spPr>
+          <a:xfrm>
+            <a:off x="804672" y="1353312"/>
+            <a:ext cx="1536192" cy="548640"/>
+          </a:xfrm>
+          <a:prstGeom prst="rect">
+            <a:avLst/>
+          </a:prstGeom>
+          <a:noFill/>
+          <a:ln/>
+        </p:spPr>
+        <p:txBody>
+          <a:bodyPr wrap="square" lIns="0" tIns="0" rIns="0" bIns="0" rtlCol="0" anchor="t"/>
+          <a:lstStyle/>
+          <a:p>
+            <a:pPr indent="0" marL="0">
+              <a:lnSpc>
+                <a:spcPts val="1600"/>
+              </a:lnSpc>
+              <a:buNone/>
+            </a:pPr>
+            <a:r>
+              <a:rPr lang="en-US" sz="1350" b="1" dirty="0">
+                <a:solidFill>
+                  <a:srgbClr val="FFFFFF"/>
+                </a:solidFill>
+                <a:latin typeface="Arial" pitchFamily="34" charset="0"/>
+                <a:ea typeface="Arial" pitchFamily="34" charset="-122"/>
+                <a:cs typeface="Arial" pitchFamily="34" charset="-120"/>
+              </a:rPr>
+              <a:t>Impuesto Inmobiliario</a:t>
+            </a:r>
+            <a:endParaRPr lang="en-US" sz="1350" dirty="0"/>
+          </a:p>
+        </p:txBody>
+      </p:sp>
+      <p:sp>
+        <p:nvSpPr>
+          <p:cNvPr id="9" name="Text 6"/>
+          <p:cNvSpPr/>
+          <p:nvPr/>
+        </p:nvSpPr>
+        <p:spPr>
+          <a:xfrm>
+            <a:off x="804672" y="1938528"/>
+            <a:ext cx="1554480" cy="201168"/>
+          </a:xfrm>
+          <a:prstGeom prst="rect">
+            <a:avLst/>
+          </a:prstGeom>
+          <a:noFill/>
+          <a:ln/>
+        </p:spPr>
+        <p:txBody>
+          <a:bodyPr wrap="square" lIns="0" tIns="0" rIns="0" bIns="0" rtlCol="0" anchor="ctr"/>
+          <a:lstStyle/>
+          <a:p>
+            <a:pPr indent="0" marL="0">
+              <a:buNone/>
+            </a:pPr>
+            <a:r>
+              <a:rPr lang="en-US" sz="850" b="1" spc="80" kern="0" dirty="0">
+                <a:solidFill>
+                  <a:srgbClr val="C9D6E6"/>
+                </a:solidFill>
+                <a:latin typeface="Arial" pitchFamily="34" charset="0"/>
+                <a:ea typeface="Arial" pitchFamily="34" charset="-122"/>
+                <a:cs typeface="Arial" pitchFamily="34" charset="-120"/>
+              </a:rPr>
+              <a:t>ARBA (PBA)</a:t>
+            </a:r>
+            <a:endParaRPr lang="en-US" sz="850" dirty="0"/>
+          </a:p>
+        </p:txBody>
+      </p:sp>
+      <p:sp>
+        <p:nvSpPr>
+          <p:cNvPr id="10" name="Text 7"/>
+          <p:cNvSpPr/>
+          <p:nvPr/>
+        </p:nvSpPr>
+        <p:spPr>
+          <a:xfrm>
+            <a:off x="804672" y="2231136"/>
+            <a:ext cx="1554480" cy="1417320"/>
+          </a:xfrm>
+          <a:prstGeom prst="rect">
+            <a:avLst/>
+          </a:prstGeom>
+          <a:noFill/>
+          <a:ln/>
+        </p:spPr>
+        <p:txBody>
+          <a:bodyPr wrap="square" lIns="0" tIns="0" rIns="0" bIns="0" rtlCol="0" anchor="ctr"/>
+          <a:lstStyle/>
+          <a:p>
+            <a:pPr indent="0" marL="0">
+              <a:lnSpc>
+                <a:spcPts val="1200"/>
+              </a:lnSpc>
+              <a:buNone/>
+            </a:pPr>
+            <a:r>
+              <a:rPr lang="en-US" sz="950" dirty="0">
+                <a:solidFill>
+                  <a:srgbClr val="EAEFF5"/>
+                </a:solidFill>
+                <a:latin typeface="Arial" pitchFamily="34" charset="0"/>
+                <a:ea typeface="Arial" pitchFamily="34" charset="-122"/>
+                <a:cs typeface="Arial" pitchFamily="34" charset="-120"/>
+              </a:rPr>
+              <a:t>Sobre la titularidad del inmueble, calculado sobre la valuación fiscal. Vencimientos bimestrales o trimestrales. En CABA no existe por separado: va dentro del ABL.</a:t>
+            </a:r>
+            <a:endParaRPr lang="en-US" sz="950" dirty="0"/>
+          </a:p>
+        </p:txBody>
+      </p:sp>
+      <p:sp>
+        <p:nvSpPr>
+          <p:cNvPr id="11" name="Shape 8"/>
+          <p:cNvSpPr/>
+          <p:nvPr/>
+        </p:nvSpPr>
+        <p:spPr>
+          <a:xfrm>
+            <a:off x="2670048" y="1188720"/>
+            <a:ext cx="1883664" cy="2606040"/>
+          </a:xfrm>
+          <a:prstGeom prst="roundRect">
+            <a:avLst>
+              <a:gd name="adj" fmla="val 4369"/>
+            </a:avLst>
+          </a:prstGeom>
+          <a:solidFill>
+            <a:srgbClr val="7C8594"/>
+          </a:solidFill>
+          <a:ln w="12700">
+            <a:solidFill>
+              <a:srgbClr val="7C8594"/>
+            </a:solidFill>
+            <a:prstDash val="solid"/>
+          </a:ln>
+        </p:spPr>
+      </p:sp>
+      <p:sp>
+        <p:nvSpPr>
+          <p:cNvPr id="12" name="Text 9"/>
+          <p:cNvSpPr/>
+          <p:nvPr/>
+        </p:nvSpPr>
+        <p:spPr>
+          <a:xfrm>
+            <a:off x="2871216" y="1353312"/>
+            <a:ext cx="1536192" cy="548640"/>
+          </a:xfrm>
+          <a:prstGeom prst="rect">
+            <a:avLst/>
+          </a:prstGeom>
+          <a:noFill/>
+          <a:ln/>
+        </p:spPr>
+        <p:txBody>
+          <a:bodyPr wrap="square" lIns="0" tIns="0" rIns="0" bIns="0" rtlCol="0" anchor="t"/>
+          <a:lstStyle/>
+          <a:p>
+            <a:pPr indent="0" marL="0">
+              <a:lnSpc>
+                <a:spcPts val="1600"/>
+              </a:lnSpc>
+              <a:buNone/>
+            </a:pPr>
+            <a:r>
+              <a:rPr lang="en-US" sz="1350" b="1" dirty="0">
+                <a:solidFill>
+                  <a:srgbClr val="FFFFFF"/>
+                </a:solidFill>
+                <a:latin typeface="Arial" pitchFamily="34" charset="0"/>
+                <a:ea typeface="Arial" pitchFamily="34" charset="-122"/>
+                <a:cs typeface="Arial" pitchFamily="34" charset="-120"/>
+              </a:rPr>
+              <a:t>ABL / TSU</a:t>
+            </a:r>
+            <a:endParaRPr lang="en-US" sz="1350" dirty="0"/>
+          </a:p>
+        </p:txBody>
+      </p:sp>
+      <p:sp>
+        <p:nvSpPr>
+          <p:cNvPr id="13" name="Text 10"/>
+          <p:cNvSpPr/>
+          <p:nvPr/>
+        </p:nvSpPr>
+        <p:spPr>
+          <a:xfrm>
+            <a:off x="2871216" y="1938528"/>
+            <a:ext cx="1554480" cy="201168"/>
+          </a:xfrm>
+          <a:prstGeom prst="rect">
+            <a:avLst/>
+          </a:prstGeom>
+          <a:noFill/>
+          <a:ln/>
+        </p:spPr>
+        <p:txBody>
+          <a:bodyPr wrap="square" lIns="0" tIns="0" rIns="0" bIns="0" rtlCol="0" anchor="ctr"/>
+          <a:lstStyle/>
+          <a:p>
+            <a:pPr indent="0" marL="0">
+              <a:buNone/>
+            </a:pPr>
+            <a:r>
+              <a:rPr lang="en-US" sz="850" b="1" spc="80" kern="0" dirty="0">
+                <a:solidFill>
+                  <a:srgbClr val="C9D6E6"/>
+                </a:solidFill>
+                <a:latin typeface="Arial" pitchFamily="34" charset="0"/>
+                <a:ea typeface="Arial" pitchFamily="34" charset="-122"/>
+                <a:cs typeface="Arial" pitchFamily="34" charset="-120"/>
+              </a:rPr>
+              <a:t>AGIP · MUNICIPIO</a:t>
+            </a:r>
+            <a:endParaRPr lang="en-US" sz="850" dirty="0"/>
+          </a:p>
+        </p:txBody>
+      </p:sp>
+      <p:sp>
+        <p:nvSpPr>
+          <p:cNvPr id="14" name="Text 11"/>
+          <p:cNvSpPr/>
+          <p:nvPr/>
+        </p:nvSpPr>
+        <p:spPr>
+          <a:xfrm>
+            <a:off x="2871216" y="2231136"/>
+            <a:ext cx="1554480" cy="1417320"/>
+          </a:xfrm>
+          <a:prstGeom prst="rect">
+            <a:avLst/>
+          </a:prstGeom>
+          <a:noFill/>
+          <a:ln/>
+        </p:spPr>
+        <p:txBody>
+          <a:bodyPr wrap="square" lIns="0" tIns="0" rIns="0" bIns="0" rtlCol="0" anchor="ctr"/>
+          <a:lstStyle/>
+          <a:p>
+            <a:pPr indent="0" marL="0">
+              <a:lnSpc>
+                <a:spcPts val="1200"/>
+              </a:lnSpc>
+              <a:buNone/>
+            </a:pPr>
+            <a:r>
+              <a:rPr lang="en-US" sz="950" dirty="0">
+                <a:solidFill>
+                  <a:srgbClr val="EAEFF5"/>
+                </a:solidFill>
+                <a:latin typeface="Arial" pitchFamily="34" charset="0"/>
+                <a:ea typeface="Arial" pitchFamily="34" charset="-122"/>
+                <a:cs typeface="Arial" pitchFamily="34" charset="-120"/>
+              </a:rPr>
+              <a:t>Alumbrado, Barrido y Limpieza en CABA; fuera, cada municipio tiene su Tasa de Servicios Urbanos. Retribuye servicios urbanos sobre el inmueble.</a:t>
+            </a:r>
+            <a:endParaRPr lang="en-US" sz="950" dirty="0"/>
+          </a:p>
+        </p:txBody>
+      </p:sp>
+      <p:sp>
+        <p:nvSpPr>
+          <p:cNvPr id="15" name="Shape 12"/>
+          <p:cNvSpPr/>
+          <p:nvPr/>
+        </p:nvSpPr>
+        <p:spPr>
+          <a:xfrm>
+            <a:off x="4736592" y="1188720"/>
+            <a:ext cx="1883664" cy="2606040"/>
+          </a:xfrm>
+          <a:prstGeom prst="roundRect">
+            <a:avLst>
+              <a:gd name="adj" fmla="val 4369"/>
+            </a:avLst>
+          </a:prstGeom>
+          <a:solidFill>
+            <a:srgbClr val="08407C"/>
+          </a:solidFill>
+          <a:ln w="12700">
+            <a:solidFill>
+              <a:srgbClr val="08407C"/>
+            </a:solidFill>
+            <a:prstDash val="solid"/>
+          </a:ln>
+        </p:spPr>
+      </p:sp>
+      <p:sp>
+        <p:nvSpPr>
+          <p:cNvPr id="16" name="Text 13"/>
+          <p:cNvSpPr/>
+          <p:nvPr/>
+        </p:nvSpPr>
+        <p:spPr>
+          <a:xfrm>
+            <a:off x="4937760" y="1353312"/>
+            <a:ext cx="1536192" cy="548640"/>
+          </a:xfrm>
+          <a:prstGeom prst="rect">
+            <a:avLst/>
+          </a:prstGeom>
+          <a:noFill/>
+          <a:ln/>
+        </p:spPr>
+        <p:txBody>
+          <a:bodyPr wrap="square" lIns="0" tIns="0" rIns="0" bIns="0" rtlCol="0" anchor="t"/>
+          <a:lstStyle/>
+          <a:p>
+            <a:pPr indent="0" marL="0">
+              <a:lnSpc>
+                <a:spcPts val="1600"/>
+              </a:lnSpc>
+              <a:buNone/>
+            </a:pPr>
+            <a:r>
+              <a:rPr lang="en-US" sz="1350" b="1" dirty="0">
+                <a:solidFill>
+                  <a:srgbClr val="FFFFFF"/>
+                </a:solidFill>
+                <a:latin typeface="Arial" pitchFamily="34" charset="0"/>
+                <a:ea typeface="Arial" pitchFamily="34" charset="-122"/>
+                <a:cs typeface="Arial" pitchFamily="34" charset="-120"/>
+              </a:rPr>
+              <a:t>Patentes</a:t>
+            </a:r>
+            <a:endParaRPr lang="en-US" sz="1350" dirty="0"/>
+          </a:p>
+        </p:txBody>
+      </p:sp>
+      <p:sp>
+        <p:nvSpPr>
+          <p:cNvPr id="17" name="Text 14"/>
+          <p:cNvSpPr/>
+          <p:nvPr/>
+        </p:nvSpPr>
+        <p:spPr>
+          <a:xfrm>
+            <a:off x="4937760" y="1938528"/>
+            <a:ext cx="1554480" cy="201168"/>
+          </a:xfrm>
+          <a:prstGeom prst="rect">
+            <a:avLst/>
+          </a:prstGeom>
+          <a:noFill/>
+          <a:ln/>
+        </p:spPr>
+        <p:txBody>
+          <a:bodyPr wrap="square" lIns="0" tIns="0" rIns="0" bIns="0" rtlCol="0" anchor="ctr"/>
+          <a:lstStyle/>
+          <a:p>
+            <a:pPr indent="0" marL="0">
+              <a:buNone/>
+            </a:pPr>
+            <a:r>
+              <a:rPr lang="en-US" sz="850" b="1" spc="80" kern="0" dirty="0">
+                <a:solidFill>
+                  <a:srgbClr val="C9D6E6"/>
+                </a:solidFill>
+                <a:latin typeface="Arial" pitchFamily="34" charset="0"/>
+                <a:ea typeface="Arial" pitchFamily="34" charset="-122"/>
+                <a:cs typeface="Arial" pitchFamily="34" charset="-120"/>
+              </a:rPr>
+              <a:t>ARBA · AGIP</a:t>
+            </a:r>
+            <a:endParaRPr lang="en-US" sz="850" dirty="0"/>
+          </a:p>
+        </p:txBody>
+      </p:sp>
+      <p:sp>
+        <p:nvSpPr>
+          <p:cNvPr id="18" name="Text 15"/>
+          <p:cNvSpPr/>
+          <p:nvPr/>
+        </p:nvSpPr>
+        <p:spPr>
+          <a:xfrm>
+            <a:off x="4937760" y="2231136"/>
+            <a:ext cx="1554480" cy="1417320"/>
+          </a:xfrm>
+          <a:prstGeom prst="rect">
+            <a:avLst/>
+          </a:prstGeom>
+          <a:noFill/>
+          <a:ln/>
+        </p:spPr>
+        <p:txBody>
+          <a:bodyPr wrap="square" lIns="0" tIns="0" rIns="0" bIns="0" rtlCol="0" anchor="ctr"/>
+          <a:lstStyle/>
+          <a:p>
+            <a:pPr indent="0" marL="0">
+              <a:lnSpc>
+                <a:spcPts val="1200"/>
+              </a:lnSpc>
+              <a:buNone/>
+            </a:pPr>
+            <a:r>
+              <a:rPr lang="en-US" sz="950" dirty="0">
+                <a:solidFill>
+                  <a:srgbClr val="EAEFF5"/>
+                </a:solidFill>
+                <a:latin typeface="Arial" pitchFamily="34" charset="0"/>
+                <a:ea typeface="Arial" pitchFamily="34" charset="-122"/>
+                <a:cs typeface="Arial" pitchFamily="34" charset="-120"/>
+              </a:rPr>
+              <a:t>Sobre la titularidad de un vehículo, según valuación fiscal por marca, modelo y año. En PBA se cobra habitualmente en cinco cuotas anuales.</a:t>
+            </a:r>
+            <a:endParaRPr lang="en-US" sz="950" dirty="0"/>
+          </a:p>
+        </p:txBody>
+      </p:sp>
+      <p:sp>
+        <p:nvSpPr>
+          <p:cNvPr id="19" name="Shape 16"/>
+          <p:cNvSpPr/>
+          <p:nvPr/>
+        </p:nvSpPr>
+        <p:spPr>
+          <a:xfrm>
+            <a:off x="6803136" y="1188720"/>
+            <a:ext cx="1883664" cy="2606040"/>
+          </a:xfrm>
+          <a:prstGeom prst="roundRect">
+            <a:avLst>
+              <a:gd name="adj" fmla="val 4369"/>
+            </a:avLst>
+          </a:prstGeom>
+          <a:solidFill>
+            <a:srgbClr val="7C8594"/>
+          </a:solidFill>
+          <a:ln w="12700">
+            <a:solidFill>
+              <a:srgbClr val="7C8594"/>
+            </a:solidFill>
+            <a:prstDash val="solid"/>
+          </a:ln>
+        </p:spPr>
+      </p:sp>
+      <p:sp>
+        <p:nvSpPr>
+          <p:cNvPr id="20" name="Text 17"/>
+          <p:cNvSpPr/>
+          <p:nvPr/>
+        </p:nvSpPr>
+        <p:spPr>
+          <a:xfrm>
+            <a:off x="7004304" y="1353312"/>
+            <a:ext cx="1536192" cy="548640"/>
+          </a:xfrm>
+          <a:prstGeom prst="rect">
+            <a:avLst/>
+          </a:prstGeom>
+          <a:noFill/>
+          <a:ln/>
+        </p:spPr>
+        <p:txBody>
+          <a:bodyPr wrap="square" lIns="0" tIns="0" rIns="0" bIns="0" rtlCol="0" anchor="t"/>
+          <a:lstStyle/>
+          <a:p>
+            <a:pPr indent="0" marL="0">
+              <a:lnSpc>
+                <a:spcPts val="1600"/>
+              </a:lnSpc>
+              <a:buNone/>
+            </a:pPr>
+            <a:r>
+              <a:rPr lang="en-US" sz="1350" b="1" dirty="0">
+                <a:solidFill>
+                  <a:srgbClr val="FFFFFF"/>
+                </a:solidFill>
+                <a:latin typeface="Arial" pitchFamily="34" charset="0"/>
+                <a:ea typeface="Arial" pitchFamily="34" charset="-122"/>
+                <a:cs typeface="Arial" pitchFamily="34" charset="-120"/>
+              </a:rPr>
+              <a:t>Seguridad e Higiene</a:t>
+            </a:r>
+            <a:endParaRPr lang="en-US" sz="1350" dirty="0"/>
+          </a:p>
+        </p:txBody>
+      </p:sp>
+      <p:sp>
+        <p:nvSpPr>
+          <p:cNvPr id="21" name="Text 18"/>
+          <p:cNvSpPr/>
+          <p:nvPr/>
+        </p:nvSpPr>
+        <p:spPr>
+          <a:xfrm>
+            <a:off x="7004304" y="1938528"/>
+            <a:ext cx="1554480" cy="201168"/>
+          </a:xfrm>
+          <a:prstGeom prst="rect">
+            <a:avLst/>
+          </a:prstGeom>
+          <a:noFill/>
+          <a:ln/>
+        </p:spPr>
+        <p:txBody>
+          <a:bodyPr wrap="square" lIns="0" tIns="0" rIns="0" bIns="0" rtlCol="0" anchor="ctr"/>
+          <a:lstStyle/>
+          <a:p>
+            <a:pPr indent="0" marL="0">
+              <a:buNone/>
+            </a:pPr>
+            <a:r>
+              <a:rPr lang="en-US" sz="850" b="1" spc="80" kern="0" dirty="0">
+                <a:solidFill>
+                  <a:srgbClr val="C9D6E6"/>
+                </a:solidFill>
+                <a:latin typeface="Arial" pitchFamily="34" charset="0"/>
+                <a:ea typeface="Arial" pitchFamily="34" charset="-122"/>
+                <a:cs typeface="Arial" pitchFamily="34" charset="-120"/>
+              </a:rPr>
+              <a:t>MUNICIPIO</a:t>
+            </a:r>
+            <a:endParaRPr lang="en-US" sz="850" dirty="0"/>
+          </a:p>
+        </p:txBody>
+      </p:sp>
+      <p:sp>
+        <p:nvSpPr>
+          <p:cNvPr id="22" name="Text 19"/>
+          <p:cNvSpPr/>
+          <p:nvPr/>
+        </p:nvSpPr>
+        <p:spPr>
+          <a:xfrm>
+            <a:off x="7004304" y="2231136"/>
+            <a:ext cx="1554480" cy="1417320"/>
+          </a:xfrm>
+          <a:prstGeom prst="rect">
+            <a:avLst/>
+          </a:prstGeom>
+          <a:noFill/>
+          <a:ln/>
+        </p:spPr>
+        <p:txBody>
+          <a:bodyPr wrap="square" lIns="0" tIns="0" rIns="0" bIns="0" rtlCol="0" anchor="ctr"/>
+          <a:lstStyle/>
+          <a:p>
+            <a:pPr indent="0" marL="0">
+              <a:lnSpc>
+                <a:spcPts val="1200"/>
+              </a:lnSpc>
+              <a:buNone/>
+            </a:pPr>
+            <a:r>
+              <a:rPr lang="en-US" sz="950" dirty="0">
+                <a:solidFill>
+                  <a:srgbClr val="EAEFF5"/>
+                </a:solidFill>
+                <a:latin typeface="Arial" pitchFamily="34" charset="0"/>
+                <a:ea typeface="Arial" pitchFamily="34" charset="-122"/>
+                <a:cs typeface="Arial" pitchFamily="34" charset="-120"/>
+              </a:rPr>
+              <a:t>Tasa municipal por desarrollar actividad comercial en un local. Base variable: ingresos, superficie o ambas. Va de la mano de la habilitación.</a:t>
+            </a:r>
+            <a:endParaRPr lang="en-US" sz="950" dirty="0"/>
+          </a:p>
+        </p:txBody>
+      </p:sp>
+      <p:sp>
+        <p:nvSpPr>
+          <p:cNvPr id="23" name="Shape 20"/>
+          <p:cNvSpPr/>
+          <p:nvPr/>
+        </p:nvSpPr>
+        <p:spPr>
+          <a:xfrm>
+            <a:off x="603504" y="4005072"/>
+            <a:ext cx="8083296" cy="658368"/>
+          </a:xfrm>
+          <a:prstGeom prst="roundRect">
+            <a:avLst>
+              <a:gd name="adj" fmla="val 12500"/>
+            </a:avLst>
+          </a:prstGeom>
+          <a:solidFill>
+            <a:srgbClr val="08407C"/>
+          </a:solidFill>
+          <a:ln w="12700">
+            <a:solidFill>
+              <a:srgbClr val="08407C"/>
+            </a:solidFill>
+            <a:prstDash val="solid"/>
+          </a:ln>
+        </p:spPr>
+      </p:sp>
+      <p:sp>
+        <p:nvSpPr>
+          <p:cNvPr id="24" name="Text 21"/>
+          <p:cNvSpPr/>
+          <p:nvPr/>
+        </p:nvSpPr>
+        <p:spPr>
+          <a:xfrm>
+            <a:off x="841248" y="4078224"/>
             <a:ext cx="7626096" cy="201168"/>
           </a:xfrm>
           <a:prstGeom prst="rect">
@@ -4328,7 +3933,7 @@
                 <a:ea typeface="Arial" pitchFamily="34" charset="-122"/>
                 <a:cs typeface="Arial" pitchFamily="34" charset="-120"/>
               </a:rPr>
-              <a:t>PARA DAR DE ALTA A UN PROVEEDOR</a:t>
+              <a:t>IMPUESTO NO ES LO MISMO QUE TASA</a:t>
             </a:r>
             <a:endParaRPr lang="en-US" sz="950" dirty="0"/>
           </a:p>
@@ -4336,13 +3941,13 @@
       </p:sp>
       <p:sp>
         <p:nvSpPr>
-          <p:cNvPr id="43" name="Text 40"/>
-          <p:cNvSpPr/>
-          <p:nvPr/>
-        </p:nvSpPr>
-        <p:spPr>
-          <a:xfrm>
-            <a:off x="841248" y="4617720"/>
+          <p:cNvPr id="25" name="Text 22"/>
+          <p:cNvSpPr/>
+          <p:nvPr/>
+        </p:nvSpPr>
+        <p:spPr>
+          <a:xfrm>
+            <a:off x="841248" y="4270248"/>
             <a:ext cx="7607808" cy="329184"/>
           </a:xfrm>
           <a:prstGeom prst="rect">
@@ -4370,7 +3975,7 @@
                 <a:ea typeface="Arial" pitchFamily="34" charset="-122"/>
                 <a:cs typeface="Arial" pitchFamily="34" charset="-120"/>
               </a:rPr>
-              <a:t>Constancia de inscripción actualizada, CBU a nombre del mismo CUIT, condición frente al IVA y certificado de ART vigente si tiene personal a cargo.</a:t>
+              <a:t>El impuesto no tiene contraprestación directa (Ganancias, IVA). La tasa siempre retribuye un servicio concreto: alumbrado, inspecciones, habilitación.</a:t>
             </a:r>
             <a:endParaRPr lang="en-US" sz="1150" dirty="0"/>
           </a:p>
@@ -4415,9 +4020,1520 @@
           <a:chExt cx="0" cy="0"/>
         </a:xfrm>
       </p:grpSpPr>
+      <p:sp>
+        <p:nvSpPr>
+          <p:cNvPr id="2" name="Shape 0"/>
+          <p:cNvSpPr/>
+          <p:nvPr/>
+        </p:nvSpPr>
+        <p:spPr>
+          <a:xfrm>
+            <a:off x="0" y="0"/>
+            <a:ext cx="411480" cy="5143500"/>
+          </a:xfrm>
+          <a:prstGeom prst="rect">
+            <a:avLst/>
+          </a:prstGeom>
+          <a:solidFill>
+            <a:srgbClr val="4E586E"/>
+          </a:solidFill>
+          <a:ln w="12700">
+            <a:solidFill>
+              <a:srgbClr val="4E586E"/>
+            </a:solidFill>
+            <a:prstDash val="solid"/>
+          </a:ln>
+        </p:spPr>
+      </p:sp>
+      <p:sp>
+        <p:nvSpPr>
+          <p:cNvPr id="3" name="Shape 1"/>
+          <p:cNvSpPr/>
+          <p:nvPr/>
+        </p:nvSpPr>
+        <p:spPr>
+          <a:xfrm>
+            <a:off x="0" y="0"/>
+            <a:ext cx="411480" cy="402336"/>
+          </a:xfrm>
+          <a:prstGeom prst="rect">
+            <a:avLst/>
+          </a:prstGeom>
+          <a:solidFill>
+            <a:srgbClr val="08407C"/>
+          </a:solidFill>
+          <a:ln w="12700">
+            <a:solidFill>
+              <a:srgbClr val="08407C"/>
+            </a:solidFill>
+            <a:prstDash val="solid"/>
+          </a:ln>
+        </p:spPr>
+      </p:sp>
       <p:pic>
         <p:nvPicPr>
-          <p:cNvPr id="2" name="Image 0" descr="/tmp/claude-0/-home-user-KrakRealEstate/26f90231-47e0-5521-93d0-854de4e1add2/scratchpad/brand/logo_stack.png">    </p:cNvPr>
+          <p:cNvPr id="4" name="Image 0" descr="/home/user/KrakRealEstate/capacitaciones/impuestos/brand/iso_white.png">    </p:cNvPr>
+          <p:cNvPicPr>
+            <a:picLocks noChangeAspect="1"/>
+          </p:cNvPicPr>
+          <p:nvPr/>
+        </p:nvPicPr>
+        <p:blipFill>
+          <a:blip r:embed="rId2"/>
+          <a:stretch>
+            <a:fillRect/>
+          </a:stretch>
+        </p:blipFill>
+        <p:spPr>
+          <a:xfrm>
+            <a:off x="123444" y="68580"/>
+            <a:ext cx="164592" cy="217627"/>
+          </a:xfrm>
+          <a:prstGeom prst="rect">
+            <a:avLst/>
+          </a:prstGeom>
+        </p:spPr>
+      </p:pic>
+      <p:sp>
+        <p:nvSpPr>
+          <p:cNvPr id="5" name="Text 2"/>
+          <p:cNvSpPr/>
+          <p:nvPr/>
+        </p:nvSpPr>
+        <p:spPr>
+          <a:xfrm>
+            <a:off x="603504" y="256032"/>
+            <a:ext cx="8083296" cy="475488"/>
+          </a:xfrm>
+          <a:prstGeom prst="rect">
+            <a:avLst/>
+          </a:prstGeom>
+          <a:noFill/>
+          <a:ln/>
+        </p:spPr>
+        <p:txBody>
+          <a:bodyPr wrap="square" lIns="0" tIns="0" rIns="0" bIns="0" rtlCol="0" anchor="ctr"/>
+          <a:lstStyle/>
+          <a:p>
+            <a:pPr indent="0" marL="0">
+              <a:buNone/>
+            </a:pPr>
+            <a:r>
+              <a:rPr lang="en-US" sz="2700" b="1" dirty="0">
+                <a:solidFill>
+                  <a:srgbClr val="08407C"/>
+                </a:solidFill>
+                <a:latin typeface="Arial" pitchFamily="34" charset="0"/>
+                <a:ea typeface="Arial" pitchFamily="34" charset="-122"/>
+                <a:cs typeface="Arial" pitchFamily="34" charset="-120"/>
+              </a:rPr>
+              <a:t>El control de todos los días</a:t>
+            </a:r>
+            <a:endParaRPr lang="en-US" sz="2700" dirty="0"/>
+          </a:p>
+        </p:txBody>
+      </p:sp>
+      <p:sp>
+        <p:nvSpPr>
+          <p:cNvPr id="6" name="Text 3"/>
+          <p:cNvSpPr/>
+          <p:nvPr/>
+        </p:nvSpPr>
+        <p:spPr>
+          <a:xfrm>
+            <a:off x="603504" y="749808"/>
+            <a:ext cx="8083296" cy="274320"/>
+          </a:xfrm>
+          <a:prstGeom prst="rect">
+            <a:avLst/>
+          </a:prstGeom>
+          <a:noFill/>
+          <a:ln/>
+        </p:spPr>
+        <p:txBody>
+          <a:bodyPr wrap="square" lIns="0" tIns="0" rIns="0" bIns="0" rtlCol="0" anchor="ctr"/>
+          <a:lstStyle/>
+          <a:p>
+            <a:pPr indent="0" marL="0">
+              <a:buNone/>
+            </a:pPr>
+            <a:r>
+              <a:rPr lang="en-US" sz="1200" i="1" dirty="0">
+                <a:solidFill>
+                  <a:srgbClr val="6A7686"/>
+                </a:solidFill>
+                <a:latin typeface="Arial" pitchFamily="34" charset="0"/>
+                <a:ea typeface="Arial" pitchFamily="34" charset="-122"/>
+                <a:cs typeface="Arial" pitchFamily="34" charset="-120"/>
+              </a:rPr>
+              <a:t>Qué verificar antes de pagar, y qué errores salen más caros.</a:t>
+            </a:r>
+            <a:endParaRPr lang="en-US" sz="1200" dirty="0"/>
+          </a:p>
+        </p:txBody>
+      </p:sp>
+      <p:sp>
+        <p:nvSpPr>
+          <p:cNvPr id="7" name="Shape 4"/>
+          <p:cNvSpPr/>
+          <p:nvPr/>
+        </p:nvSpPr>
+        <p:spPr>
+          <a:xfrm>
+            <a:off x="603504" y="1188720"/>
+            <a:ext cx="3950208" cy="475488"/>
+          </a:xfrm>
+          <a:prstGeom prst="roundRect">
+            <a:avLst>
+              <a:gd name="adj" fmla="val 17308"/>
+            </a:avLst>
+          </a:prstGeom>
+          <a:solidFill>
+            <a:srgbClr val="26AE60"/>
+          </a:solidFill>
+          <a:ln w="12700">
+            <a:solidFill>
+              <a:srgbClr val="26AE60"/>
+            </a:solidFill>
+            <a:prstDash val="solid"/>
+          </a:ln>
+        </p:spPr>
+      </p:sp>
+      <p:sp>
+        <p:nvSpPr>
+          <p:cNvPr id="8" name="Text 5"/>
+          <p:cNvSpPr/>
+          <p:nvPr/>
+        </p:nvSpPr>
+        <p:spPr>
+          <a:xfrm>
+            <a:off x="877824" y="1188720"/>
+            <a:ext cx="3566160" cy="475488"/>
+          </a:xfrm>
+          <a:prstGeom prst="rect">
+            <a:avLst/>
+          </a:prstGeom>
+          <a:noFill/>
+          <a:ln/>
+        </p:spPr>
+        <p:txBody>
+          <a:bodyPr wrap="square" lIns="0" tIns="0" rIns="0" bIns="0" rtlCol="0" anchor="ctr"/>
+          <a:lstStyle/>
+          <a:p>
+            <a:pPr indent="0" marL="0">
+              <a:buNone/>
+            </a:pPr>
+            <a:r>
+              <a:rPr lang="en-US" sz="1150" b="1" spc="100" kern="0" dirty="0">
+                <a:solidFill>
+                  <a:srgbClr val="FFFFFF"/>
+                </a:solidFill>
+                <a:latin typeface="Arial" pitchFamily="34" charset="0"/>
+                <a:ea typeface="Arial" pitchFamily="34" charset="-122"/>
+                <a:cs typeface="Arial" pitchFamily="34" charset="-120"/>
+              </a:rPr>
+              <a:t>SÍ — CONTROLAR SIEMPRE</a:t>
+            </a:r>
+            <a:endParaRPr lang="en-US" sz="1150" dirty="0"/>
+          </a:p>
+        </p:txBody>
+      </p:sp>
+      <p:sp>
+        <p:nvSpPr>
+          <p:cNvPr id="9" name="Shape 6"/>
+          <p:cNvSpPr/>
+          <p:nvPr/>
+        </p:nvSpPr>
+        <p:spPr>
+          <a:xfrm>
+            <a:off x="4736592" y="1188720"/>
+            <a:ext cx="3950208" cy="475488"/>
+          </a:xfrm>
+          <a:prstGeom prst="roundRect">
+            <a:avLst>
+              <a:gd name="adj" fmla="val 17308"/>
+            </a:avLst>
+          </a:prstGeom>
+          <a:solidFill>
+            <a:srgbClr val="E74B3C"/>
+          </a:solidFill>
+          <a:ln w="12700">
+            <a:solidFill>
+              <a:srgbClr val="E74B3C"/>
+            </a:solidFill>
+            <a:prstDash val="solid"/>
+          </a:ln>
+        </p:spPr>
+      </p:sp>
+      <p:sp>
+        <p:nvSpPr>
+          <p:cNvPr id="10" name="Text 7"/>
+          <p:cNvSpPr/>
+          <p:nvPr/>
+        </p:nvSpPr>
+        <p:spPr>
+          <a:xfrm>
+            <a:off x="5010912" y="1188720"/>
+            <a:ext cx="3566160" cy="475488"/>
+          </a:xfrm>
+          <a:prstGeom prst="rect">
+            <a:avLst/>
+          </a:prstGeom>
+          <a:noFill/>
+          <a:ln/>
+        </p:spPr>
+        <p:txBody>
+          <a:bodyPr wrap="square" lIns="0" tIns="0" rIns="0" bIns="0" rtlCol="0" anchor="ctr"/>
+          <a:lstStyle/>
+          <a:p>
+            <a:pPr indent="0" marL="0">
+              <a:buNone/>
+            </a:pPr>
+            <a:r>
+              <a:rPr lang="en-US" sz="1150" b="1" spc="100" kern="0" dirty="0">
+                <a:solidFill>
+                  <a:srgbClr val="FFFFFF"/>
+                </a:solidFill>
+                <a:latin typeface="Arial" pitchFamily="34" charset="0"/>
+                <a:ea typeface="Arial" pitchFamily="34" charset="-122"/>
+                <a:cs typeface="Arial" pitchFamily="34" charset="-120"/>
+              </a:rPr>
+              <a:t>NO — ERRORES QUE SALEN CAROS</a:t>
+            </a:r>
+            <a:endParaRPr lang="en-US" sz="1150" dirty="0"/>
+          </a:p>
+        </p:txBody>
+      </p:sp>
+      <p:sp>
+        <p:nvSpPr>
+          <p:cNvPr id="11" name="Shape 8"/>
+          <p:cNvSpPr/>
+          <p:nvPr/>
+        </p:nvSpPr>
+        <p:spPr>
+          <a:xfrm>
+            <a:off x="603504" y="1828800"/>
+            <a:ext cx="310896" cy="310896"/>
+          </a:xfrm>
+          <a:prstGeom prst="roundRect">
+            <a:avLst>
+              <a:gd name="adj" fmla="val 147059"/>
+            </a:avLst>
+          </a:prstGeom>
+          <a:solidFill>
+            <a:srgbClr val="26AE60"/>
+          </a:solidFill>
+          <a:ln w="12700">
+            <a:solidFill>
+              <a:srgbClr val="26AE60"/>
+            </a:solidFill>
+            <a:prstDash val="solid"/>
+          </a:ln>
+        </p:spPr>
+      </p:sp>
+      <p:sp>
+        <p:nvSpPr>
+          <p:cNvPr id="12" name="Text 9"/>
+          <p:cNvSpPr/>
+          <p:nvPr/>
+        </p:nvSpPr>
+        <p:spPr>
+          <a:xfrm>
+            <a:off x="603504" y="1828800"/>
+            <a:ext cx="310896" cy="310896"/>
+          </a:xfrm>
+          <a:prstGeom prst="rect">
+            <a:avLst/>
+          </a:prstGeom>
+          <a:noFill/>
+          <a:ln/>
+        </p:spPr>
+        <p:txBody>
+          <a:bodyPr wrap="square" lIns="0" tIns="0" rIns="0" bIns="0" rtlCol="0" anchor="ctr"/>
+          <a:lstStyle/>
+          <a:p>
+            <a:pPr algn="ctr" indent="0" marL="0">
+              <a:buNone/>
+            </a:pPr>
+            <a:r>
+              <a:rPr lang="en-US" sz="1200" b="1" dirty="0">
+                <a:solidFill>
+                  <a:srgbClr val="FFFFFF"/>
+                </a:solidFill>
+                <a:latin typeface="Arial" pitchFamily="34" charset="0"/>
+                <a:ea typeface="Arial" pitchFamily="34" charset="-122"/>
+                <a:cs typeface="Arial" pitchFamily="34" charset="-120"/>
+              </a:rPr>
+              <a:t>✓</a:t>
+            </a:r>
+            <a:endParaRPr lang="en-US" sz="1200" dirty="0"/>
+          </a:p>
+        </p:txBody>
+      </p:sp>
+      <p:sp>
+        <p:nvSpPr>
+          <p:cNvPr id="13" name="Text 10"/>
+          <p:cNvSpPr/>
+          <p:nvPr/>
+        </p:nvSpPr>
+        <p:spPr>
+          <a:xfrm>
+            <a:off x="1042416" y="1810512"/>
+            <a:ext cx="3511296" cy="365760"/>
+          </a:xfrm>
+          <a:prstGeom prst="rect">
+            <a:avLst/>
+          </a:prstGeom>
+          <a:noFill/>
+          <a:ln/>
+        </p:spPr>
+        <p:txBody>
+          <a:bodyPr wrap="square" lIns="0" tIns="0" rIns="0" bIns="0" rtlCol="0" anchor="ctr"/>
+          <a:lstStyle/>
+          <a:p>
+            <a:pPr indent="0" marL="0">
+              <a:lnSpc>
+                <a:spcPts val="1300"/>
+              </a:lnSpc>
+              <a:buNone/>
+            </a:pPr>
+            <a:r>
+              <a:rPr lang="en-US" sz="1050" dirty="0">
+                <a:solidFill>
+                  <a:srgbClr val="2E4258"/>
+                </a:solidFill>
+                <a:latin typeface="Arial" pitchFamily="34" charset="0"/>
+                <a:ea typeface="Arial" pitchFamily="34" charset="-122"/>
+                <a:cs typeface="Arial" pitchFamily="34" charset="-120"/>
+              </a:rPr>
+              <a:t>Que el CUIT esté activo y no dado de baja.</a:t>
+            </a:r>
+            <a:endParaRPr lang="en-US" sz="1050" dirty="0"/>
+          </a:p>
+        </p:txBody>
+      </p:sp>
+      <p:sp>
+        <p:nvSpPr>
+          <p:cNvPr id="14" name="Shape 11"/>
+          <p:cNvSpPr/>
+          <p:nvPr/>
+        </p:nvSpPr>
+        <p:spPr>
+          <a:xfrm>
+            <a:off x="603504" y="2340864"/>
+            <a:ext cx="310896" cy="310896"/>
+          </a:xfrm>
+          <a:prstGeom prst="roundRect">
+            <a:avLst>
+              <a:gd name="adj" fmla="val 147059"/>
+            </a:avLst>
+          </a:prstGeom>
+          <a:solidFill>
+            <a:srgbClr val="26AE60"/>
+          </a:solidFill>
+          <a:ln w="12700">
+            <a:solidFill>
+              <a:srgbClr val="26AE60"/>
+            </a:solidFill>
+            <a:prstDash val="solid"/>
+          </a:ln>
+        </p:spPr>
+      </p:sp>
+      <p:sp>
+        <p:nvSpPr>
+          <p:cNvPr id="15" name="Text 12"/>
+          <p:cNvSpPr/>
+          <p:nvPr/>
+        </p:nvSpPr>
+        <p:spPr>
+          <a:xfrm>
+            <a:off x="603504" y="2340864"/>
+            <a:ext cx="310896" cy="310896"/>
+          </a:xfrm>
+          <a:prstGeom prst="rect">
+            <a:avLst/>
+          </a:prstGeom>
+          <a:noFill/>
+          <a:ln/>
+        </p:spPr>
+        <p:txBody>
+          <a:bodyPr wrap="square" lIns="0" tIns="0" rIns="0" bIns="0" rtlCol="0" anchor="ctr"/>
+          <a:lstStyle/>
+          <a:p>
+            <a:pPr algn="ctr" indent="0" marL="0">
+              <a:buNone/>
+            </a:pPr>
+            <a:r>
+              <a:rPr lang="en-US" sz="1200" b="1" dirty="0">
+                <a:solidFill>
+                  <a:srgbClr val="FFFFFF"/>
+                </a:solidFill>
+                <a:latin typeface="Arial" pitchFamily="34" charset="0"/>
+                <a:ea typeface="Arial" pitchFamily="34" charset="-122"/>
+                <a:cs typeface="Arial" pitchFamily="34" charset="-120"/>
+              </a:rPr>
+              <a:t>✓</a:t>
+            </a:r>
+            <a:endParaRPr lang="en-US" sz="1200" dirty="0"/>
+          </a:p>
+        </p:txBody>
+      </p:sp>
+      <p:sp>
+        <p:nvSpPr>
+          <p:cNvPr id="16" name="Text 13"/>
+          <p:cNvSpPr/>
+          <p:nvPr/>
+        </p:nvSpPr>
+        <p:spPr>
+          <a:xfrm>
+            <a:off x="1042416" y="2322576"/>
+            <a:ext cx="3511296" cy="365760"/>
+          </a:xfrm>
+          <a:prstGeom prst="rect">
+            <a:avLst/>
+          </a:prstGeom>
+          <a:noFill/>
+          <a:ln/>
+        </p:spPr>
+        <p:txBody>
+          <a:bodyPr wrap="square" lIns="0" tIns="0" rIns="0" bIns="0" rtlCol="0" anchor="ctr"/>
+          <a:lstStyle/>
+          <a:p>
+            <a:pPr indent="0" marL="0">
+              <a:lnSpc>
+                <a:spcPts val="1300"/>
+              </a:lnSpc>
+              <a:buNone/>
+            </a:pPr>
+            <a:r>
+              <a:rPr lang="en-US" sz="1050" dirty="0">
+                <a:solidFill>
+                  <a:srgbClr val="2E4258"/>
+                </a:solidFill>
+                <a:latin typeface="Arial" pitchFamily="34" charset="0"/>
+                <a:ea typeface="Arial" pitchFamily="34" charset="-122"/>
+                <a:cs typeface="Arial" pitchFamily="34" charset="-120"/>
+              </a:rPr>
+              <a:t>Que la condición de IVA de la constancia coincida con el tipo de factura.</a:t>
+            </a:r>
+            <a:endParaRPr lang="en-US" sz="1050" dirty="0"/>
+          </a:p>
+        </p:txBody>
+      </p:sp>
+      <p:sp>
+        <p:nvSpPr>
+          <p:cNvPr id="17" name="Shape 14"/>
+          <p:cNvSpPr/>
+          <p:nvPr/>
+        </p:nvSpPr>
+        <p:spPr>
+          <a:xfrm>
+            <a:off x="603504" y="2852928"/>
+            <a:ext cx="310896" cy="310896"/>
+          </a:xfrm>
+          <a:prstGeom prst="roundRect">
+            <a:avLst>
+              <a:gd name="adj" fmla="val 147059"/>
+            </a:avLst>
+          </a:prstGeom>
+          <a:solidFill>
+            <a:srgbClr val="26AE60"/>
+          </a:solidFill>
+          <a:ln w="12700">
+            <a:solidFill>
+              <a:srgbClr val="26AE60"/>
+            </a:solidFill>
+            <a:prstDash val="solid"/>
+          </a:ln>
+        </p:spPr>
+      </p:sp>
+      <p:sp>
+        <p:nvSpPr>
+          <p:cNvPr id="18" name="Text 15"/>
+          <p:cNvSpPr/>
+          <p:nvPr/>
+        </p:nvSpPr>
+        <p:spPr>
+          <a:xfrm>
+            <a:off x="603504" y="2852928"/>
+            <a:ext cx="310896" cy="310896"/>
+          </a:xfrm>
+          <a:prstGeom prst="rect">
+            <a:avLst/>
+          </a:prstGeom>
+          <a:noFill/>
+          <a:ln/>
+        </p:spPr>
+        <p:txBody>
+          <a:bodyPr wrap="square" lIns="0" tIns="0" rIns="0" bIns="0" rtlCol="0" anchor="ctr"/>
+          <a:lstStyle/>
+          <a:p>
+            <a:pPr algn="ctr" indent="0" marL="0">
+              <a:buNone/>
+            </a:pPr>
+            <a:r>
+              <a:rPr lang="en-US" sz="1200" b="1" dirty="0">
+                <a:solidFill>
+                  <a:srgbClr val="FFFFFF"/>
+                </a:solidFill>
+                <a:latin typeface="Arial" pitchFamily="34" charset="0"/>
+                <a:ea typeface="Arial" pitchFamily="34" charset="-122"/>
+                <a:cs typeface="Arial" pitchFamily="34" charset="-120"/>
+              </a:rPr>
+              <a:t>✓</a:t>
+            </a:r>
+            <a:endParaRPr lang="en-US" sz="1200" dirty="0"/>
+          </a:p>
+        </p:txBody>
+      </p:sp>
+      <p:sp>
+        <p:nvSpPr>
+          <p:cNvPr id="19" name="Text 16"/>
+          <p:cNvSpPr/>
+          <p:nvPr/>
+        </p:nvSpPr>
+        <p:spPr>
+          <a:xfrm>
+            <a:off x="1042416" y="2834640"/>
+            <a:ext cx="3511296" cy="365760"/>
+          </a:xfrm>
+          <a:prstGeom prst="rect">
+            <a:avLst/>
+          </a:prstGeom>
+          <a:noFill/>
+          <a:ln/>
+        </p:spPr>
+        <p:txBody>
+          <a:bodyPr wrap="square" lIns="0" tIns="0" rIns="0" bIns="0" rtlCol="0" anchor="ctr"/>
+          <a:lstStyle/>
+          <a:p>
+            <a:pPr indent="0" marL="0">
+              <a:lnSpc>
+                <a:spcPts val="1300"/>
+              </a:lnSpc>
+              <a:buNone/>
+            </a:pPr>
+            <a:r>
+              <a:rPr lang="en-US" sz="1050" dirty="0">
+                <a:solidFill>
+                  <a:srgbClr val="2E4258"/>
+                </a:solidFill>
+                <a:latin typeface="Arial" pitchFamily="34" charset="0"/>
+                <a:ea typeface="Arial" pitchFamily="34" charset="-122"/>
+                <a:cs typeface="Arial" pitchFamily="34" charset="-120"/>
+              </a:rPr>
+              <a:t>Que el comprobante tenga CAE vigente.</a:t>
+            </a:r>
+            <a:endParaRPr lang="en-US" sz="1050" dirty="0"/>
+          </a:p>
+        </p:txBody>
+      </p:sp>
+      <p:sp>
+        <p:nvSpPr>
+          <p:cNvPr id="20" name="Shape 17"/>
+          <p:cNvSpPr/>
+          <p:nvPr/>
+        </p:nvSpPr>
+        <p:spPr>
+          <a:xfrm>
+            <a:off x="603504" y="3364992"/>
+            <a:ext cx="310896" cy="310896"/>
+          </a:xfrm>
+          <a:prstGeom prst="roundRect">
+            <a:avLst>
+              <a:gd name="adj" fmla="val 147059"/>
+            </a:avLst>
+          </a:prstGeom>
+          <a:solidFill>
+            <a:srgbClr val="26AE60"/>
+          </a:solidFill>
+          <a:ln w="12700">
+            <a:solidFill>
+              <a:srgbClr val="26AE60"/>
+            </a:solidFill>
+            <a:prstDash val="solid"/>
+          </a:ln>
+        </p:spPr>
+      </p:sp>
+      <p:sp>
+        <p:nvSpPr>
+          <p:cNvPr id="21" name="Text 18"/>
+          <p:cNvSpPr/>
+          <p:nvPr/>
+        </p:nvSpPr>
+        <p:spPr>
+          <a:xfrm>
+            <a:off x="603504" y="3364992"/>
+            <a:ext cx="310896" cy="310896"/>
+          </a:xfrm>
+          <a:prstGeom prst="rect">
+            <a:avLst/>
+          </a:prstGeom>
+          <a:noFill/>
+          <a:ln/>
+        </p:spPr>
+        <p:txBody>
+          <a:bodyPr wrap="square" lIns="0" tIns="0" rIns="0" bIns="0" rtlCol="0" anchor="ctr"/>
+          <a:lstStyle/>
+          <a:p>
+            <a:pPr algn="ctr" indent="0" marL="0">
+              <a:buNone/>
+            </a:pPr>
+            <a:r>
+              <a:rPr lang="en-US" sz="1200" b="1" dirty="0">
+                <a:solidFill>
+                  <a:srgbClr val="FFFFFF"/>
+                </a:solidFill>
+                <a:latin typeface="Arial" pitchFamily="34" charset="0"/>
+                <a:ea typeface="Arial" pitchFamily="34" charset="-122"/>
+                <a:cs typeface="Arial" pitchFamily="34" charset="-120"/>
+              </a:rPr>
+              <a:t>✓</a:t>
+            </a:r>
+            <a:endParaRPr lang="en-US" sz="1200" dirty="0"/>
+          </a:p>
+        </p:txBody>
+      </p:sp>
+      <p:sp>
+        <p:nvSpPr>
+          <p:cNvPr id="22" name="Text 19"/>
+          <p:cNvSpPr/>
+          <p:nvPr/>
+        </p:nvSpPr>
+        <p:spPr>
+          <a:xfrm>
+            <a:off x="1042416" y="3346704"/>
+            <a:ext cx="3511296" cy="365760"/>
+          </a:xfrm>
+          <a:prstGeom prst="rect">
+            <a:avLst/>
+          </a:prstGeom>
+          <a:noFill/>
+          <a:ln/>
+        </p:spPr>
+        <p:txBody>
+          <a:bodyPr wrap="square" lIns="0" tIns="0" rIns="0" bIns="0" rtlCol="0" anchor="ctr"/>
+          <a:lstStyle/>
+          <a:p>
+            <a:pPr indent="0" marL="0">
+              <a:lnSpc>
+                <a:spcPts val="1300"/>
+              </a:lnSpc>
+              <a:buNone/>
+            </a:pPr>
+            <a:r>
+              <a:rPr lang="en-US" sz="1050" dirty="0">
+                <a:solidFill>
+                  <a:srgbClr val="2E4258"/>
+                </a:solidFill>
+                <a:latin typeface="Arial" pitchFamily="34" charset="0"/>
+                <a:ea typeface="Arial" pitchFamily="34" charset="-122"/>
+                <a:cs typeface="Arial" pitchFamily="34" charset="-120"/>
+              </a:rPr>
+              <a:t>Que el CBU esté a nombre del mismo CUIT que factura.</a:t>
+            </a:r>
+            <a:endParaRPr lang="en-US" sz="1050" dirty="0"/>
+          </a:p>
+        </p:txBody>
+      </p:sp>
+      <p:sp>
+        <p:nvSpPr>
+          <p:cNvPr id="23" name="Shape 20"/>
+          <p:cNvSpPr/>
+          <p:nvPr/>
+        </p:nvSpPr>
+        <p:spPr>
+          <a:xfrm>
+            <a:off x="603504" y="3877056"/>
+            <a:ext cx="310896" cy="310896"/>
+          </a:xfrm>
+          <a:prstGeom prst="roundRect">
+            <a:avLst>
+              <a:gd name="adj" fmla="val 147059"/>
+            </a:avLst>
+          </a:prstGeom>
+          <a:solidFill>
+            <a:srgbClr val="26AE60"/>
+          </a:solidFill>
+          <a:ln w="12700">
+            <a:solidFill>
+              <a:srgbClr val="26AE60"/>
+            </a:solidFill>
+            <a:prstDash val="solid"/>
+          </a:ln>
+        </p:spPr>
+      </p:sp>
+      <p:sp>
+        <p:nvSpPr>
+          <p:cNvPr id="24" name="Text 21"/>
+          <p:cNvSpPr/>
+          <p:nvPr/>
+        </p:nvSpPr>
+        <p:spPr>
+          <a:xfrm>
+            <a:off x="603504" y="3877056"/>
+            <a:ext cx="310896" cy="310896"/>
+          </a:xfrm>
+          <a:prstGeom prst="rect">
+            <a:avLst/>
+          </a:prstGeom>
+          <a:noFill/>
+          <a:ln/>
+        </p:spPr>
+        <p:txBody>
+          <a:bodyPr wrap="square" lIns="0" tIns="0" rIns="0" bIns="0" rtlCol="0" anchor="ctr"/>
+          <a:lstStyle/>
+          <a:p>
+            <a:pPr algn="ctr" indent="0" marL="0">
+              <a:buNone/>
+            </a:pPr>
+            <a:r>
+              <a:rPr lang="en-US" sz="1200" b="1" dirty="0">
+                <a:solidFill>
+                  <a:srgbClr val="FFFFFF"/>
+                </a:solidFill>
+                <a:latin typeface="Arial" pitchFamily="34" charset="0"/>
+                <a:ea typeface="Arial" pitchFamily="34" charset="-122"/>
+                <a:cs typeface="Arial" pitchFamily="34" charset="-120"/>
+              </a:rPr>
+              <a:t>✓</a:t>
+            </a:r>
+            <a:endParaRPr lang="en-US" sz="1200" dirty="0"/>
+          </a:p>
+        </p:txBody>
+      </p:sp>
+      <p:sp>
+        <p:nvSpPr>
+          <p:cNvPr id="25" name="Text 22"/>
+          <p:cNvSpPr/>
+          <p:nvPr/>
+        </p:nvSpPr>
+        <p:spPr>
+          <a:xfrm>
+            <a:off x="1042416" y="3858768"/>
+            <a:ext cx="3511296" cy="365760"/>
+          </a:xfrm>
+          <a:prstGeom prst="rect">
+            <a:avLst/>
+          </a:prstGeom>
+          <a:noFill/>
+          <a:ln/>
+        </p:spPr>
+        <p:txBody>
+          <a:bodyPr wrap="square" lIns="0" tIns="0" rIns="0" bIns="0" rtlCol="0" anchor="ctr"/>
+          <a:lstStyle/>
+          <a:p>
+            <a:pPr indent="0" marL="0">
+              <a:lnSpc>
+                <a:spcPts val="1300"/>
+              </a:lnSpc>
+              <a:buNone/>
+            </a:pPr>
+            <a:r>
+              <a:rPr lang="en-US" sz="1050" dirty="0">
+                <a:solidFill>
+                  <a:srgbClr val="2E4258"/>
+                </a:solidFill>
+                <a:latin typeface="Arial" pitchFamily="34" charset="0"/>
+                <a:ea typeface="Arial" pitchFamily="34" charset="-122"/>
+                <a:cs typeface="Arial" pitchFamily="34" charset="-120"/>
+              </a:rPr>
+              <a:t>Que el contrato de alquiler esté sellado antes de firmar.</a:t>
+            </a:r>
+            <a:endParaRPr lang="en-US" sz="1050" dirty="0"/>
+          </a:p>
+        </p:txBody>
+      </p:sp>
+      <p:sp>
+        <p:nvSpPr>
+          <p:cNvPr id="26" name="Shape 23"/>
+          <p:cNvSpPr/>
+          <p:nvPr/>
+        </p:nvSpPr>
+        <p:spPr>
+          <a:xfrm>
+            <a:off x="4736592" y="1828800"/>
+            <a:ext cx="310896" cy="310896"/>
+          </a:xfrm>
+          <a:prstGeom prst="roundRect">
+            <a:avLst>
+              <a:gd name="adj" fmla="val 147059"/>
+            </a:avLst>
+          </a:prstGeom>
+          <a:solidFill>
+            <a:srgbClr val="E74B3C"/>
+          </a:solidFill>
+          <a:ln w="12700">
+            <a:solidFill>
+              <a:srgbClr val="E74B3C"/>
+            </a:solidFill>
+            <a:prstDash val="solid"/>
+          </a:ln>
+        </p:spPr>
+      </p:sp>
+      <p:sp>
+        <p:nvSpPr>
+          <p:cNvPr id="27" name="Text 24"/>
+          <p:cNvSpPr/>
+          <p:nvPr/>
+        </p:nvSpPr>
+        <p:spPr>
+          <a:xfrm>
+            <a:off x="4736592" y="1828800"/>
+            <a:ext cx="310896" cy="310896"/>
+          </a:xfrm>
+          <a:prstGeom prst="rect">
+            <a:avLst/>
+          </a:prstGeom>
+          <a:noFill/>
+          <a:ln/>
+        </p:spPr>
+        <p:txBody>
+          <a:bodyPr wrap="square" lIns="0" tIns="0" rIns="0" bIns="0" rtlCol="0" anchor="ctr"/>
+          <a:lstStyle/>
+          <a:p>
+            <a:pPr algn="ctr" indent="0" marL="0">
+              <a:buNone/>
+            </a:pPr>
+            <a:r>
+              <a:rPr lang="en-US" sz="1100" b="1" dirty="0">
+                <a:solidFill>
+                  <a:srgbClr val="FFFFFF"/>
+                </a:solidFill>
+                <a:latin typeface="Arial" pitchFamily="34" charset="0"/>
+                <a:ea typeface="Arial" pitchFamily="34" charset="-122"/>
+                <a:cs typeface="Arial" pitchFamily="34" charset="-120"/>
+              </a:rPr>
+              <a:t>✕</a:t>
+            </a:r>
+            <a:endParaRPr lang="en-US" sz="1100" dirty="0"/>
+          </a:p>
+        </p:txBody>
+      </p:sp>
+      <p:sp>
+        <p:nvSpPr>
+          <p:cNvPr id="28" name="Text 25"/>
+          <p:cNvSpPr/>
+          <p:nvPr/>
+        </p:nvSpPr>
+        <p:spPr>
+          <a:xfrm>
+            <a:off x="5175504" y="1810512"/>
+            <a:ext cx="3511296" cy="365760"/>
+          </a:xfrm>
+          <a:prstGeom prst="rect">
+            <a:avLst/>
+          </a:prstGeom>
+          <a:noFill/>
+          <a:ln/>
+        </p:spPr>
+        <p:txBody>
+          <a:bodyPr wrap="square" lIns="0" tIns="0" rIns="0" bIns="0" rtlCol="0" anchor="ctr"/>
+          <a:lstStyle/>
+          <a:p>
+            <a:pPr indent="0" marL="0">
+              <a:lnSpc>
+                <a:spcPts val="1300"/>
+              </a:lnSpc>
+              <a:buNone/>
+            </a:pPr>
+            <a:r>
+              <a:rPr lang="en-US" sz="1050" dirty="0">
+                <a:solidFill>
+                  <a:srgbClr val="2E4258"/>
+                </a:solidFill>
+                <a:latin typeface="Arial" pitchFamily="34" charset="0"/>
+                <a:ea typeface="Arial" pitchFamily="34" charset="-122"/>
+                <a:cs typeface="Arial" pitchFamily="34" charset="-120"/>
+              </a:rPr>
+              <a:t>Pagar una factura sin verificar el CAE.</a:t>
+            </a:r>
+            <a:endParaRPr lang="en-US" sz="1050" dirty="0"/>
+          </a:p>
+        </p:txBody>
+      </p:sp>
+      <p:sp>
+        <p:nvSpPr>
+          <p:cNvPr id="29" name="Shape 26"/>
+          <p:cNvSpPr/>
+          <p:nvPr/>
+        </p:nvSpPr>
+        <p:spPr>
+          <a:xfrm>
+            <a:off x="4736592" y="2340864"/>
+            <a:ext cx="310896" cy="310896"/>
+          </a:xfrm>
+          <a:prstGeom prst="roundRect">
+            <a:avLst>
+              <a:gd name="adj" fmla="val 147059"/>
+            </a:avLst>
+          </a:prstGeom>
+          <a:solidFill>
+            <a:srgbClr val="E74B3C"/>
+          </a:solidFill>
+          <a:ln w="12700">
+            <a:solidFill>
+              <a:srgbClr val="E74B3C"/>
+            </a:solidFill>
+            <a:prstDash val="solid"/>
+          </a:ln>
+        </p:spPr>
+      </p:sp>
+      <p:sp>
+        <p:nvSpPr>
+          <p:cNvPr id="30" name="Text 27"/>
+          <p:cNvSpPr/>
+          <p:nvPr/>
+        </p:nvSpPr>
+        <p:spPr>
+          <a:xfrm>
+            <a:off x="4736592" y="2340864"/>
+            <a:ext cx="310896" cy="310896"/>
+          </a:xfrm>
+          <a:prstGeom prst="rect">
+            <a:avLst/>
+          </a:prstGeom>
+          <a:noFill/>
+          <a:ln/>
+        </p:spPr>
+        <p:txBody>
+          <a:bodyPr wrap="square" lIns="0" tIns="0" rIns="0" bIns="0" rtlCol="0" anchor="ctr"/>
+          <a:lstStyle/>
+          <a:p>
+            <a:pPr algn="ctr" indent="0" marL="0">
+              <a:buNone/>
+            </a:pPr>
+            <a:r>
+              <a:rPr lang="en-US" sz="1100" b="1" dirty="0">
+                <a:solidFill>
+                  <a:srgbClr val="FFFFFF"/>
+                </a:solidFill>
+                <a:latin typeface="Arial" pitchFamily="34" charset="0"/>
+                <a:ea typeface="Arial" pitchFamily="34" charset="-122"/>
+                <a:cs typeface="Arial" pitchFamily="34" charset="-120"/>
+              </a:rPr>
+              <a:t>✕</a:t>
+            </a:r>
+            <a:endParaRPr lang="en-US" sz="1100" dirty="0"/>
+          </a:p>
+        </p:txBody>
+      </p:sp>
+      <p:sp>
+        <p:nvSpPr>
+          <p:cNvPr id="31" name="Text 28"/>
+          <p:cNvSpPr/>
+          <p:nvPr/>
+        </p:nvSpPr>
+        <p:spPr>
+          <a:xfrm>
+            <a:off x="5175504" y="2322576"/>
+            <a:ext cx="3511296" cy="365760"/>
+          </a:xfrm>
+          <a:prstGeom prst="rect">
+            <a:avLst/>
+          </a:prstGeom>
+          <a:noFill/>
+          <a:ln/>
+        </p:spPr>
+        <p:txBody>
+          <a:bodyPr wrap="square" lIns="0" tIns="0" rIns="0" bIns="0" rtlCol="0" anchor="ctr"/>
+          <a:lstStyle/>
+          <a:p>
+            <a:pPr indent="0" marL="0">
+              <a:lnSpc>
+                <a:spcPts val="1300"/>
+              </a:lnSpc>
+              <a:buNone/>
+            </a:pPr>
+            <a:r>
+              <a:rPr lang="en-US" sz="1050" dirty="0">
+                <a:solidFill>
+                  <a:srgbClr val="2E4258"/>
+                </a:solidFill>
+                <a:latin typeface="Arial" pitchFamily="34" charset="0"/>
+                <a:ea typeface="Arial" pitchFamily="34" charset="-122"/>
+                <a:cs typeface="Arial" pitchFamily="34" charset="-120"/>
+              </a:rPr>
+              <a:t>No presentar la DDJJ por no tener actividad en el período.</a:t>
+            </a:r>
+            <a:endParaRPr lang="en-US" sz="1050" dirty="0"/>
+          </a:p>
+        </p:txBody>
+      </p:sp>
+      <p:sp>
+        <p:nvSpPr>
+          <p:cNvPr id="32" name="Shape 29"/>
+          <p:cNvSpPr/>
+          <p:nvPr/>
+        </p:nvSpPr>
+        <p:spPr>
+          <a:xfrm>
+            <a:off x="4736592" y="2852928"/>
+            <a:ext cx="310896" cy="310896"/>
+          </a:xfrm>
+          <a:prstGeom prst="roundRect">
+            <a:avLst>
+              <a:gd name="adj" fmla="val 147059"/>
+            </a:avLst>
+          </a:prstGeom>
+          <a:solidFill>
+            <a:srgbClr val="E74B3C"/>
+          </a:solidFill>
+          <a:ln w="12700">
+            <a:solidFill>
+              <a:srgbClr val="E74B3C"/>
+            </a:solidFill>
+            <a:prstDash val="solid"/>
+          </a:ln>
+        </p:spPr>
+      </p:sp>
+      <p:sp>
+        <p:nvSpPr>
+          <p:cNvPr id="33" name="Text 30"/>
+          <p:cNvSpPr/>
+          <p:nvPr/>
+        </p:nvSpPr>
+        <p:spPr>
+          <a:xfrm>
+            <a:off x="4736592" y="2852928"/>
+            <a:ext cx="310896" cy="310896"/>
+          </a:xfrm>
+          <a:prstGeom prst="rect">
+            <a:avLst/>
+          </a:prstGeom>
+          <a:noFill/>
+          <a:ln/>
+        </p:spPr>
+        <p:txBody>
+          <a:bodyPr wrap="square" lIns="0" tIns="0" rIns="0" bIns="0" rtlCol="0" anchor="ctr"/>
+          <a:lstStyle/>
+          <a:p>
+            <a:pPr algn="ctr" indent="0" marL="0">
+              <a:buNone/>
+            </a:pPr>
+            <a:r>
+              <a:rPr lang="en-US" sz="1100" b="1" dirty="0">
+                <a:solidFill>
+                  <a:srgbClr val="FFFFFF"/>
+                </a:solidFill>
+                <a:latin typeface="Arial" pitchFamily="34" charset="0"/>
+                <a:ea typeface="Arial" pitchFamily="34" charset="-122"/>
+                <a:cs typeface="Arial" pitchFamily="34" charset="-120"/>
+              </a:rPr>
+              <a:t>✕</a:t>
+            </a:r>
+            <a:endParaRPr lang="en-US" sz="1100" dirty="0"/>
+          </a:p>
+        </p:txBody>
+      </p:sp>
+      <p:sp>
+        <p:nvSpPr>
+          <p:cNvPr id="34" name="Text 31"/>
+          <p:cNvSpPr/>
+          <p:nvPr/>
+        </p:nvSpPr>
+        <p:spPr>
+          <a:xfrm>
+            <a:off x="5175504" y="2834640"/>
+            <a:ext cx="3511296" cy="365760"/>
+          </a:xfrm>
+          <a:prstGeom prst="rect">
+            <a:avLst/>
+          </a:prstGeom>
+          <a:noFill/>
+          <a:ln/>
+        </p:spPr>
+        <p:txBody>
+          <a:bodyPr wrap="square" lIns="0" tIns="0" rIns="0" bIns="0" rtlCol="0" anchor="ctr"/>
+          <a:lstStyle/>
+          <a:p>
+            <a:pPr indent="0" marL="0">
+              <a:lnSpc>
+                <a:spcPts val="1300"/>
+              </a:lnSpc>
+              <a:buNone/>
+            </a:pPr>
+            <a:r>
+              <a:rPr lang="en-US" sz="1050" dirty="0">
+                <a:solidFill>
+                  <a:srgbClr val="2E4258"/>
+                </a:solidFill>
+                <a:latin typeface="Arial" pitchFamily="34" charset="0"/>
+                <a:ea typeface="Arial" pitchFamily="34" charset="-122"/>
+                <a:cs typeface="Arial" pitchFamily="34" charset="-120"/>
+              </a:rPr>
+              <a:t>No recategorizar el Monotributo en febrero y agosto.</a:t>
+            </a:r>
+            <a:endParaRPr lang="en-US" sz="1050" dirty="0"/>
+          </a:p>
+        </p:txBody>
+      </p:sp>
+      <p:sp>
+        <p:nvSpPr>
+          <p:cNvPr id="35" name="Shape 32"/>
+          <p:cNvSpPr/>
+          <p:nvPr/>
+        </p:nvSpPr>
+        <p:spPr>
+          <a:xfrm>
+            <a:off x="4736592" y="3364992"/>
+            <a:ext cx="310896" cy="310896"/>
+          </a:xfrm>
+          <a:prstGeom prst="roundRect">
+            <a:avLst>
+              <a:gd name="adj" fmla="val 147059"/>
+            </a:avLst>
+          </a:prstGeom>
+          <a:solidFill>
+            <a:srgbClr val="E74B3C"/>
+          </a:solidFill>
+          <a:ln w="12700">
+            <a:solidFill>
+              <a:srgbClr val="E74B3C"/>
+            </a:solidFill>
+            <a:prstDash val="solid"/>
+          </a:ln>
+        </p:spPr>
+      </p:sp>
+      <p:sp>
+        <p:nvSpPr>
+          <p:cNvPr id="36" name="Text 33"/>
+          <p:cNvSpPr/>
+          <p:nvPr/>
+        </p:nvSpPr>
+        <p:spPr>
+          <a:xfrm>
+            <a:off x="4736592" y="3364992"/>
+            <a:ext cx="310896" cy="310896"/>
+          </a:xfrm>
+          <a:prstGeom prst="rect">
+            <a:avLst/>
+          </a:prstGeom>
+          <a:noFill/>
+          <a:ln/>
+        </p:spPr>
+        <p:txBody>
+          <a:bodyPr wrap="square" lIns="0" tIns="0" rIns="0" bIns="0" rtlCol="0" anchor="ctr"/>
+          <a:lstStyle/>
+          <a:p>
+            <a:pPr algn="ctr" indent="0" marL="0">
+              <a:buNone/>
+            </a:pPr>
+            <a:r>
+              <a:rPr lang="en-US" sz="1100" b="1" dirty="0">
+                <a:solidFill>
+                  <a:srgbClr val="FFFFFF"/>
+                </a:solidFill>
+                <a:latin typeface="Arial" pitchFamily="34" charset="0"/>
+                <a:ea typeface="Arial" pitchFamily="34" charset="-122"/>
+                <a:cs typeface="Arial" pitchFamily="34" charset="-120"/>
+              </a:rPr>
+              <a:t>✕</a:t>
+            </a:r>
+            <a:endParaRPr lang="en-US" sz="1100" dirty="0"/>
+          </a:p>
+        </p:txBody>
+      </p:sp>
+      <p:sp>
+        <p:nvSpPr>
+          <p:cNvPr id="37" name="Text 34"/>
+          <p:cNvSpPr/>
+          <p:nvPr/>
+        </p:nvSpPr>
+        <p:spPr>
+          <a:xfrm>
+            <a:off x="5175504" y="3346704"/>
+            <a:ext cx="3511296" cy="365760"/>
+          </a:xfrm>
+          <a:prstGeom prst="rect">
+            <a:avLst/>
+          </a:prstGeom>
+          <a:noFill/>
+          <a:ln/>
+        </p:spPr>
+        <p:txBody>
+          <a:bodyPr wrap="square" lIns="0" tIns="0" rIns="0" bIns="0" rtlCol="0" anchor="ctr"/>
+          <a:lstStyle/>
+          <a:p>
+            <a:pPr indent="0" marL="0">
+              <a:lnSpc>
+                <a:spcPts val="1300"/>
+              </a:lnSpc>
+              <a:buNone/>
+            </a:pPr>
+            <a:r>
+              <a:rPr lang="en-US" sz="1050" dirty="0">
+                <a:solidFill>
+                  <a:srgbClr val="2E4258"/>
+                </a:solidFill>
+                <a:latin typeface="Arial" pitchFamily="34" charset="0"/>
+                <a:ea typeface="Arial" pitchFamily="34" charset="-122"/>
+                <a:cs typeface="Arial" pitchFamily="34" charset="-120"/>
+              </a:rPr>
+              <a:t>Operar con un proveedor de alto riesgo fiscal.</a:t>
+            </a:r>
+            <a:endParaRPr lang="en-US" sz="1050" dirty="0"/>
+          </a:p>
+        </p:txBody>
+      </p:sp>
+      <p:sp>
+        <p:nvSpPr>
+          <p:cNvPr id="38" name="Shape 35"/>
+          <p:cNvSpPr/>
+          <p:nvPr/>
+        </p:nvSpPr>
+        <p:spPr>
+          <a:xfrm>
+            <a:off x="4736592" y="3877056"/>
+            <a:ext cx="310896" cy="310896"/>
+          </a:xfrm>
+          <a:prstGeom prst="roundRect">
+            <a:avLst>
+              <a:gd name="adj" fmla="val 147059"/>
+            </a:avLst>
+          </a:prstGeom>
+          <a:solidFill>
+            <a:srgbClr val="E74B3C"/>
+          </a:solidFill>
+          <a:ln w="12700">
+            <a:solidFill>
+              <a:srgbClr val="E74B3C"/>
+            </a:solidFill>
+            <a:prstDash val="solid"/>
+          </a:ln>
+        </p:spPr>
+      </p:sp>
+      <p:sp>
+        <p:nvSpPr>
+          <p:cNvPr id="39" name="Text 36"/>
+          <p:cNvSpPr/>
+          <p:nvPr/>
+        </p:nvSpPr>
+        <p:spPr>
+          <a:xfrm>
+            <a:off x="4736592" y="3877056"/>
+            <a:ext cx="310896" cy="310896"/>
+          </a:xfrm>
+          <a:prstGeom prst="rect">
+            <a:avLst/>
+          </a:prstGeom>
+          <a:noFill/>
+          <a:ln/>
+        </p:spPr>
+        <p:txBody>
+          <a:bodyPr wrap="square" lIns="0" tIns="0" rIns="0" bIns="0" rtlCol="0" anchor="ctr"/>
+          <a:lstStyle/>
+          <a:p>
+            <a:pPr algn="ctr" indent="0" marL="0">
+              <a:buNone/>
+            </a:pPr>
+            <a:r>
+              <a:rPr lang="en-US" sz="1100" b="1" dirty="0">
+                <a:solidFill>
+                  <a:srgbClr val="FFFFFF"/>
+                </a:solidFill>
+                <a:latin typeface="Arial" pitchFamily="34" charset="0"/>
+                <a:ea typeface="Arial" pitchFamily="34" charset="-122"/>
+                <a:cs typeface="Arial" pitchFamily="34" charset="-120"/>
+              </a:rPr>
+              <a:t>✕</a:t>
+            </a:r>
+            <a:endParaRPr lang="en-US" sz="1100" dirty="0"/>
+          </a:p>
+        </p:txBody>
+      </p:sp>
+      <p:sp>
+        <p:nvSpPr>
+          <p:cNvPr id="40" name="Text 37"/>
+          <p:cNvSpPr/>
+          <p:nvPr/>
+        </p:nvSpPr>
+        <p:spPr>
+          <a:xfrm>
+            <a:off x="5175504" y="3858768"/>
+            <a:ext cx="3511296" cy="365760"/>
+          </a:xfrm>
+          <a:prstGeom prst="rect">
+            <a:avLst/>
+          </a:prstGeom>
+          <a:noFill/>
+          <a:ln/>
+        </p:spPr>
+        <p:txBody>
+          <a:bodyPr wrap="square" lIns="0" tIns="0" rIns="0" bIns="0" rtlCol="0" anchor="ctr"/>
+          <a:lstStyle/>
+          <a:p>
+            <a:pPr indent="0" marL="0">
+              <a:lnSpc>
+                <a:spcPts val="1300"/>
+              </a:lnSpc>
+              <a:buNone/>
+            </a:pPr>
+            <a:r>
+              <a:rPr lang="en-US" sz="1050" dirty="0">
+                <a:solidFill>
+                  <a:srgbClr val="2E4258"/>
+                </a:solidFill>
+                <a:latin typeface="Arial" pitchFamily="34" charset="0"/>
+                <a:ea typeface="Arial" pitchFamily="34" charset="-122"/>
+                <a:cs typeface="Arial" pitchFamily="34" charset="-120"/>
+              </a:rPr>
+              <a:t>Firmar un contrato de alquiler sin sellar.</a:t>
+            </a:r>
+            <a:endParaRPr lang="en-US" sz="1050" dirty="0"/>
+          </a:p>
+        </p:txBody>
+      </p:sp>
+      <p:sp>
+        <p:nvSpPr>
+          <p:cNvPr id="41" name="Shape 38"/>
+          <p:cNvSpPr/>
+          <p:nvPr/>
+        </p:nvSpPr>
+        <p:spPr>
+          <a:xfrm>
+            <a:off x="603504" y="4352544"/>
+            <a:ext cx="8083296" cy="658368"/>
+          </a:xfrm>
+          <a:prstGeom prst="roundRect">
+            <a:avLst>
+              <a:gd name="adj" fmla="val 12500"/>
+            </a:avLst>
+          </a:prstGeom>
+          <a:solidFill>
+            <a:srgbClr val="08407C"/>
+          </a:solidFill>
+          <a:ln w="12700">
+            <a:solidFill>
+              <a:srgbClr val="08407C"/>
+            </a:solidFill>
+            <a:prstDash val="solid"/>
+          </a:ln>
+        </p:spPr>
+      </p:sp>
+      <p:sp>
+        <p:nvSpPr>
+          <p:cNvPr id="42" name="Text 39"/>
+          <p:cNvSpPr/>
+          <p:nvPr/>
+        </p:nvSpPr>
+        <p:spPr>
+          <a:xfrm>
+            <a:off x="841248" y="4425696"/>
+            <a:ext cx="7626096" cy="201168"/>
+          </a:xfrm>
+          <a:prstGeom prst="rect">
+            <a:avLst/>
+          </a:prstGeom>
+          <a:noFill/>
+          <a:ln/>
+        </p:spPr>
+        <p:txBody>
+          <a:bodyPr wrap="square" lIns="0" tIns="0" rIns="0" bIns="0" rtlCol="0" anchor="ctr"/>
+          <a:lstStyle/>
+          <a:p>
+            <a:pPr indent="0" marL="0">
+              <a:buNone/>
+            </a:pPr>
+            <a:r>
+              <a:rPr lang="en-US" sz="950" b="1" spc="120" kern="0" dirty="0">
+                <a:solidFill>
+                  <a:srgbClr val="FFFFFF"/>
+                </a:solidFill>
+                <a:latin typeface="Arial" pitchFamily="34" charset="0"/>
+                <a:ea typeface="Arial" pitchFamily="34" charset="-122"/>
+                <a:cs typeface="Arial" pitchFamily="34" charset="-120"/>
+              </a:rPr>
+              <a:t>PARA DAR DE ALTA A UN PROVEEDOR</a:t>
+            </a:r>
+            <a:endParaRPr lang="en-US" sz="950" dirty="0"/>
+          </a:p>
+        </p:txBody>
+      </p:sp>
+      <p:sp>
+        <p:nvSpPr>
+          <p:cNvPr id="43" name="Text 40"/>
+          <p:cNvSpPr/>
+          <p:nvPr/>
+        </p:nvSpPr>
+        <p:spPr>
+          <a:xfrm>
+            <a:off x="841248" y="4617720"/>
+            <a:ext cx="7607808" cy="329184"/>
+          </a:xfrm>
+          <a:prstGeom prst="rect">
+            <a:avLst/>
+          </a:prstGeom>
+          <a:noFill/>
+          <a:ln/>
+        </p:spPr>
+        <p:txBody>
+          <a:bodyPr wrap="square" lIns="0" tIns="0" rIns="0" bIns="0" rtlCol="0" anchor="ctr"/>
+          <a:lstStyle/>
+          <a:p>
+            <a:pPr indent="0" marL="0">
+              <a:lnSpc>
+                <a:spcPts val="1400"/>
+              </a:lnSpc>
+              <a:buNone/>
+            </a:pPr>
+            <a:r>
+              <a:rPr lang="en-US" sz="1150" dirty="0">
+                <a:solidFill>
+                  <a:srgbClr val="FFFFFF"/>
+                </a:solidFill>
+                <a:latin typeface="Arial" pitchFamily="34" charset="0"/>
+                <a:ea typeface="Arial" pitchFamily="34" charset="-122"/>
+                <a:cs typeface="Arial" pitchFamily="34" charset="-120"/>
+              </a:rPr>
+              <a:t>Constancia de inscripción actualizada, CBU a nombre del mismo CUIT, condición frente al IVA y certificado de ART vigente si tiene personal a cargo.</a:t>
+            </a:r>
+            <a:endParaRPr lang="en-US" sz="1150" dirty="0"/>
+          </a:p>
+        </p:txBody>
+      </p:sp>
+    </p:spTree>
+  </p:cSld>
+  <p:clrMapOvr>
+    <a:masterClrMapping/>
+  </p:clrMapOvr>
+</p:sld>
+</file>
+
+<file path=ppt/slides/slide13.xml><?xml version="1.0" encoding="utf-8"?>
+<p:sld xmlns:a="http://schemas.openxmlformats.org/drawingml/2006/main" xmlns:r="http://schemas.openxmlformats.org/officeDocument/2006/relationships" xmlns:p="http://schemas.openxmlformats.org/presentationml/2006/main">
+  <p:cSld name="Slide 13">
+    <p:bg>
+      <p:bgPr>
+        <a:blipFill dpi="0" rotWithShape="1">
+          <a:blip r:embed="rId1">
+            <a:lum/>
+          </a:blip>
+          <a:srcRect/>
+          <a:stretch>
+            <a:fillRect/>
+          </a:stretch>
+        </a:blipFill>
+        <a:effectLst/>
+      </p:bgPr>
+    </p:bg>
+    <p:spTree>
+      <p:nvGrpSpPr>
+        <p:cNvPr id="1" name=""/>
+        <p:cNvGrpSpPr/>
+        <p:nvPr/>
+      </p:nvGrpSpPr>
+      <p:grpSpPr>
+        <a:xfrm>
+          <a:off x="0" y="0"/>
+          <a:ext cx="0" cy="0"/>
+          <a:chOff x="0" y="0"/>
+          <a:chExt cx="0" cy="0"/>
+        </a:xfrm>
+      </p:grpSpPr>
+      <p:pic>
+        <p:nvPicPr>
+          <p:cNvPr id="2" name="Image 0" descr="/home/user/KrakRealEstate/capacitaciones/impuestos/brand/logo_stack.png">    </p:cNvPr>
           <p:cNvPicPr>
             <a:picLocks noChangeAspect="1"/>
           </p:cNvPicPr>
@@ -4647,7 +5763,7 @@
       </p:sp>
       <p:pic>
         <p:nvPicPr>
-          <p:cNvPr id="4" name="Image 0" descr="/tmp/claude-0/-home-user-KrakRealEstate/26f90231-47e0-5521-93d0-854de4e1add2/scratchpad/brand/iso_white.png">    </p:cNvPr>
+          <p:cNvPr id="4" name="Image 0" descr="/home/user/KrakRealEstate/capacitaciones/impuestos/brand/iso_white.png">    </p:cNvPr>
           <p:cNvPicPr>
             <a:picLocks noChangeAspect="1"/>
           </p:cNvPicPr>
@@ -5696,7 +6812,7 @@
       </p:sp>
       <p:pic>
         <p:nvPicPr>
-          <p:cNvPr id="4" name="Image 0" descr="/tmp/claude-0/-home-user-KrakRealEstate/26f90231-47e0-5521-93d0-854de4e1add2/scratchpad/brand/iso_white.png">    </p:cNvPr>
+          <p:cNvPr id="4" name="Image 0" descr="/home/user/KrakRealEstate/capacitaciones/impuestos/brand/iso_white.png">    </p:cNvPr>
           <p:cNvPicPr>
             <a:picLocks noChangeAspect="1"/>
           </p:cNvPicPr>
@@ -6691,7 +7807,7 @@
       </p:sp>
       <p:pic>
         <p:nvPicPr>
-          <p:cNvPr id="4" name="Image 0" descr="/tmp/claude-0/-home-user-KrakRealEstate/26f90231-47e0-5521-93d0-854de4e1add2/scratchpad/brand/iso_white.png">    </p:cNvPr>
+          <p:cNvPr id="4" name="Image 0" descr="/home/user/KrakRealEstate/capacitaciones/impuestos/brand/iso_white.png">    </p:cNvPr>
           <p:cNvPicPr>
             <a:picLocks noChangeAspect="1"/>
           </p:cNvPicPr>
@@ -7827,7 +8943,7 @@
       </p:sp>
       <p:pic>
         <p:nvPicPr>
-          <p:cNvPr id="4" name="Image 0" descr="/tmp/claude-0/-home-user-KrakRealEstate/26f90231-47e0-5521-93d0-854de4e1add2/scratchpad/brand/iso_white.png">    </p:cNvPr>
+          <p:cNvPr id="4" name="Image 0" descr="/home/user/KrakRealEstate/capacitaciones/impuestos/brand/iso_white.png">    </p:cNvPr>
           <p:cNvPicPr>
             <a:picLocks noChangeAspect="1"/>
           </p:cNvPicPr>
@@ -9611,7 +10727,7 @@
       </p:sp>
       <p:pic>
         <p:nvPicPr>
-          <p:cNvPr id="4" name="Image 0" descr="/tmp/claude-0/-home-user-KrakRealEstate/26f90231-47e0-5521-93d0-854de4e1add2/scratchpad/brand/iso_white.png">    </p:cNvPr>
+          <p:cNvPr id="4" name="Image 0" descr="/home/user/KrakRealEstate/capacitaciones/impuestos/brand/iso_white.png">    </p:cNvPr>
           <p:cNvPicPr>
             <a:picLocks noChangeAspect="1"/>
           </p:cNvPicPr>
@@ -10587,7 +11703,7 @@
       </p:sp>
       <p:pic>
         <p:nvPicPr>
-          <p:cNvPr id="4" name="Image 0" descr="/tmp/claude-0/-home-user-KrakRealEstate/26f90231-47e0-5521-93d0-854de4e1add2/scratchpad/brand/iso_white.png">    </p:cNvPr>
+          <p:cNvPr id="4" name="Image 0" descr="/home/user/KrakRealEstate/capacitaciones/impuestos/brand/iso_white.png">    </p:cNvPr>
           <p:cNvPicPr>
             <a:picLocks noChangeAspect="1"/>
           </p:cNvPicPr>
@@ -11549,7 +12665,7 @@
       </p:sp>
       <p:pic>
         <p:nvPicPr>
-          <p:cNvPr id="4" name="Image 0" descr="/tmp/claude-0/-home-user-KrakRealEstate/26f90231-47e0-5521-93d0-854de4e1add2/scratchpad/brand/iso_white.png">    </p:cNvPr>
+          <p:cNvPr id="4" name="Image 0" descr="/home/user/KrakRealEstate/capacitaciones/impuestos/brand/iso_white.png">    </p:cNvPr>
           <p:cNvPicPr>
             <a:picLocks noChangeAspect="1"/>
           </p:cNvPicPr>
@@ -11604,7 +12720,7 @@
                 <a:ea typeface="Arial" pitchFamily="34" charset="-122"/>
                 <a:cs typeface="Arial" pitchFamily="34" charset="-120"/>
               </a:rPr>
-              <a:t>Ingresos Brutos: el que más duele</a:t>
+              <a:t>Las escalas de Ganancias</a:t>
             </a:r>
             <a:endParaRPr lang="en-US" sz="2700" dirty="0"/>
           </a:p>
@@ -11643,7 +12759,7 @@
                 <a:ea typeface="Arial" pitchFamily="34" charset="-122"/>
                 <a:cs typeface="Arial" pitchFamily="34" charset="-120"/>
               </a:rPr>
-              <a:t>Provincial, mensual y calculado sobre lo facturado — exista o no ganancia.</a:t>
+              <a:t>Son dos regímenes distintos, y para la venta de un inmueble hay un tercero.</a:t>
             </a:r>
             <a:endParaRPr lang="en-US" sz="1200" dirty="0"/>
           </a:p>
@@ -11657,12 +12773,12 @@
         </p:nvSpPr>
         <p:spPr>
           <a:xfrm>
-            <a:off x="603504" y="1188720"/>
-            <a:ext cx="3950208" cy="2103120"/>
+            <a:off x="603504" y="1170432"/>
+            <a:ext cx="3950208" cy="1737360"/>
           </a:xfrm>
           <a:prstGeom prst="roundRect">
             <a:avLst>
-              <a:gd name="adj" fmla="val 3913"/>
+              <a:gd name="adj" fmla="val 4737"/>
             </a:avLst>
           </a:prstGeom>
           <a:solidFill>
@@ -11684,27 +12800,105 @@
         </p:nvSpPr>
         <p:spPr>
           <a:xfrm>
-            <a:off x="859536" y="1371600"/>
-            <a:ext cx="3438144" cy="731520"/>
-          </a:xfrm>
-          <a:prstGeom prst="rect">
-            <a:avLst/>
-          </a:prstGeom>
-          <a:noFill/>
-          <a:ln/>
-        </p:spPr>
-        <p:txBody>
-          <a:bodyPr wrap="square" lIns="0" tIns="0" rIns="0" bIns="0" rtlCol="0" anchor="t"/>
+            <a:off x="859536" y="1316736"/>
+            <a:ext cx="3383280" cy="292608"/>
+          </a:xfrm>
+          <a:prstGeom prst="rect">
+            <a:avLst/>
+          </a:prstGeom>
+          <a:noFill/>
+          <a:ln/>
+        </p:spPr>
+        <p:txBody>
+          <a:bodyPr wrap="square" lIns="0" tIns="0" rIns="0" bIns="0" rtlCol="0" anchor="ctr"/>
+          <a:lstStyle/>
+          <a:p>
+            <a:pPr indent="0" marL="0">
+              <a:buNone/>
+            </a:pPr>
+            <a:r>
+              <a:rPr lang="en-US" sz="1700" b="1" dirty="0">
+                <a:solidFill>
+                  <a:srgbClr val="FFFFFF"/>
+                </a:solidFill>
+                <a:latin typeface="Arial" pitchFamily="34" charset="0"/>
+                <a:ea typeface="Arial" pitchFamily="34" charset="-122"/>
+                <a:cs typeface="Arial" pitchFamily="34" charset="-120"/>
+              </a:rPr>
+              <a:t>Sociedades</a:t>
+            </a:r>
+            <a:endParaRPr lang="en-US" sz="1700" dirty="0"/>
+          </a:p>
+        </p:txBody>
+      </p:sp>
+      <p:sp>
+        <p:nvSpPr>
+          <p:cNvPr id="9" name="Text 6"/>
+          <p:cNvSpPr/>
+          <p:nvPr/>
+        </p:nvSpPr>
+        <p:spPr>
+          <a:xfrm>
+            <a:off x="859536" y="1645920"/>
+            <a:ext cx="3456432" cy="402336"/>
+          </a:xfrm>
+          <a:prstGeom prst="rect">
+            <a:avLst/>
+          </a:prstGeom>
+          <a:noFill/>
+          <a:ln/>
+        </p:spPr>
+        <p:txBody>
+          <a:bodyPr wrap="square" lIns="0" tIns="0" rIns="0" bIns="0" rtlCol="0" anchor="ctr"/>
           <a:lstStyle/>
           <a:p>
             <a:pPr indent="0" marL="0">
               <a:lnSpc>
-                <a:spcPts val="2200"/>
+                <a:spcPts val="1300"/>
               </a:lnSpc>
               <a:buNone/>
             </a:pPr>
             <a:r>
-              <a:rPr lang="en-US" sz="1700" b="1" dirty="0">
+              <a:rPr lang="en-US" sz="1000" dirty="0">
+                <a:solidFill>
+                  <a:srgbClr val="DCE6F2"/>
+                </a:solidFill>
+                <a:latin typeface="Arial" pitchFamily="34" charset="0"/>
+                <a:ea typeface="Arial" pitchFamily="34" charset="-122"/>
+                <a:cs typeface="Arial" pitchFamily="34" charset="-120"/>
+              </a:rPr>
+              <a:t>Tres tramos sobre la ganancia neta acumulada. Cada alícuota se aplica solo sobre el excedente del tramo.</a:t>
+            </a:r>
+            <a:endParaRPr lang="en-US" sz="1000" dirty="0"/>
+          </a:p>
+        </p:txBody>
+      </p:sp>
+      <p:sp>
+        <p:nvSpPr>
+          <p:cNvPr id="10" name="Text 7"/>
+          <p:cNvSpPr/>
+          <p:nvPr/>
+        </p:nvSpPr>
+        <p:spPr>
+          <a:xfrm>
+            <a:off x="859536" y="2084832"/>
+            <a:ext cx="1097280" cy="365760"/>
+          </a:xfrm>
+          <a:prstGeom prst="rect">
+            <a:avLst/>
+          </a:prstGeom>
+          <a:noFill/>
+          <a:ln/>
+        </p:spPr>
+        <p:txBody>
+          <a:bodyPr wrap="square" lIns="0" tIns="0" rIns="0" bIns="0" rtlCol="0" anchor="ctr"/>
+          <a:lstStyle/>
+          <a:p>
+            <a:pPr indent="0" marL="0">
+              <a:buNone/>
+            </a:pPr>
+            <a:r>
+              <a:rPr lang="en-US" sz="2200" b="1" dirty="0">
                 <a:solidFill>
                   <a:srgbClr val="FFFFFF"/>
                 </a:solidFill>
@@ -11712,68 +12906,260 @@
                 <a:ea typeface="Arial" pitchFamily="34" charset="-122"/>
                 <a:cs typeface="Arial" pitchFamily="34" charset="-120"/>
               </a:rPr>
-              <a:t>Se paga sobre la facturación, no sobre la rentabilidad.</a:t>
-            </a:r>
-            <a:endParaRPr lang="en-US" sz="1700" dirty="0"/>
-          </a:p>
-        </p:txBody>
-      </p:sp>
-      <p:sp>
-        <p:nvSpPr>
-          <p:cNvPr id="9" name="Text 6"/>
-          <p:cNvSpPr/>
-          <p:nvPr/>
-        </p:nvSpPr>
-        <p:spPr>
-          <a:xfrm>
-            <a:off x="859536" y="2212848"/>
-            <a:ext cx="3438144" cy="914400"/>
-          </a:xfrm>
-          <a:prstGeom prst="rect">
-            <a:avLst/>
-          </a:prstGeom>
-          <a:noFill/>
-          <a:ln/>
-        </p:spPr>
-        <p:txBody>
-          <a:bodyPr wrap="square" lIns="0" tIns="0" rIns="0" bIns="0" rtlCol="0" anchor="ctr"/>
-          <a:lstStyle/>
-          <a:p>
-            <a:pPr indent="0" marL="0">
-              <a:lnSpc>
-                <a:spcPts val="1500"/>
-              </a:lnSpc>
-              <a:buNone/>
-            </a:pPr>
-            <a:r>
-              <a:rPr lang="en-US" sz="1050" dirty="0">
-                <a:solidFill>
-                  <a:srgbClr val="DCE6F2"/>
-                </a:solidFill>
-                <a:latin typeface="Arial" pitchFamily="34" charset="0"/>
-                <a:ea typeface="Arial" pitchFamily="34" charset="-122"/>
-                <a:cs typeface="Arial" pitchFamily="34" charset="-120"/>
-              </a:rPr>
-              <a:t>Cada provincia fija su propia alícuota según el rubro: la de real estate no es la misma que la de venta de herramientas o marketing. Se liquida mensualmente ante ARBA, AGIP u otra provincia.</a:t>
-            </a:r>
-            <a:endParaRPr lang="en-US" sz="1050" dirty="0"/>
-          </a:p>
-        </p:txBody>
-      </p:sp>
-      <p:sp>
-        <p:nvSpPr>
-          <p:cNvPr id="10" name="Shape 7"/>
-          <p:cNvSpPr/>
-          <p:nvPr/>
-        </p:nvSpPr>
-        <p:spPr>
-          <a:xfrm>
-            <a:off x="4736592" y="1188720"/>
-            <a:ext cx="3950208" cy="2103120"/>
+              <a:t>25%</a:t>
+            </a:r>
+            <a:endParaRPr lang="en-US" sz="2200" dirty="0"/>
+          </a:p>
+        </p:txBody>
+      </p:sp>
+      <p:sp>
+        <p:nvSpPr>
+          <p:cNvPr id="11" name="Text 8"/>
+          <p:cNvSpPr/>
+          <p:nvPr/>
+        </p:nvSpPr>
+        <p:spPr>
+          <a:xfrm>
+            <a:off x="859536" y="2450592"/>
+            <a:ext cx="1097280" cy="201168"/>
+          </a:xfrm>
+          <a:prstGeom prst="rect">
+            <a:avLst/>
+          </a:prstGeom>
+          <a:noFill/>
+          <a:ln/>
+        </p:spPr>
+        <p:txBody>
+          <a:bodyPr wrap="square" lIns="0" tIns="0" rIns="0" bIns="0" rtlCol="0" anchor="ctr"/>
+          <a:lstStyle/>
+          <a:p>
+            <a:pPr indent="0" marL="0">
+              <a:buNone/>
+            </a:pPr>
+            <a:r>
+              <a:rPr lang="en-US" sz="900" dirty="0">
+                <a:solidFill>
+                  <a:srgbClr val="C9D6E6"/>
+                </a:solidFill>
+                <a:latin typeface="Arial" pitchFamily="34" charset="0"/>
+                <a:ea typeface="Arial" pitchFamily="34" charset="-122"/>
+                <a:cs typeface="Arial" pitchFamily="34" charset="-120"/>
+              </a:rPr>
+              <a:t>1.er tramo</a:t>
+            </a:r>
+            <a:endParaRPr lang="en-US" sz="900" dirty="0"/>
+          </a:p>
+        </p:txBody>
+      </p:sp>
+      <p:sp>
+        <p:nvSpPr>
+          <p:cNvPr id="12" name="Text 9"/>
+          <p:cNvSpPr/>
+          <p:nvPr/>
+        </p:nvSpPr>
+        <p:spPr>
+          <a:xfrm>
+            <a:off x="2029968" y="2084832"/>
+            <a:ext cx="1097280" cy="365760"/>
+          </a:xfrm>
+          <a:prstGeom prst="rect">
+            <a:avLst/>
+          </a:prstGeom>
+          <a:noFill/>
+          <a:ln/>
+        </p:spPr>
+        <p:txBody>
+          <a:bodyPr wrap="square" lIns="0" tIns="0" rIns="0" bIns="0" rtlCol="0" anchor="ctr"/>
+          <a:lstStyle/>
+          <a:p>
+            <a:pPr indent="0" marL="0">
+              <a:buNone/>
+            </a:pPr>
+            <a:r>
+              <a:rPr lang="en-US" sz="2200" b="1" dirty="0">
+                <a:solidFill>
+                  <a:srgbClr val="FFFFFF"/>
+                </a:solidFill>
+                <a:latin typeface="Arial" pitchFamily="34" charset="0"/>
+                <a:ea typeface="Arial" pitchFamily="34" charset="-122"/>
+                <a:cs typeface="Arial" pitchFamily="34" charset="-120"/>
+              </a:rPr>
+              <a:t>30%</a:t>
+            </a:r>
+            <a:endParaRPr lang="en-US" sz="2200" dirty="0"/>
+          </a:p>
+        </p:txBody>
+      </p:sp>
+      <p:sp>
+        <p:nvSpPr>
+          <p:cNvPr id="13" name="Text 10"/>
+          <p:cNvSpPr/>
+          <p:nvPr/>
+        </p:nvSpPr>
+        <p:spPr>
+          <a:xfrm>
+            <a:off x="2029968" y="2450592"/>
+            <a:ext cx="1097280" cy="201168"/>
+          </a:xfrm>
+          <a:prstGeom prst="rect">
+            <a:avLst/>
+          </a:prstGeom>
+          <a:noFill/>
+          <a:ln/>
+        </p:spPr>
+        <p:txBody>
+          <a:bodyPr wrap="square" lIns="0" tIns="0" rIns="0" bIns="0" rtlCol="0" anchor="ctr"/>
+          <a:lstStyle/>
+          <a:p>
+            <a:pPr indent="0" marL="0">
+              <a:buNone/>
+            </a:pPr>
+            <a:r>
+              <a:rPr lang="en-US" sz="900" dirty="0">
+                <a:solidFill>
+                  <a:srgbClr val="C9D6E6"/>
+                </a:solidFill>
+                <a:latin typeface="Arial" pitchFamily="34" charset="0"/>
+                <a:ea typeface="Arial" pitchFamily="34" charset="-122"/>
+                <a:cs typeface="Arial" pitchFamily="34" charset="-120"/>
+              </a:rPr>
+              <a:t>2.º tramo</a:t>
+            </a:r>
+            <a:endParaRPr lang="en-US" sz="900" dirty="0"/>
+          </a:p>
+        </p:txBody>
+      </p:sp>
+      <p:sp>
+        <p:nvSpPr>
+          <p:cNvPr id="14" name="Text 11"/>
+          <p:cNvSpPr/>
+          <p:nvPr/>
+        </p:nvSpPr>
+        <p:spPr>
+          <a:xfrm>
+            <a:off x="3200400" y="2084832"/>
+            <a:ext cx="1097280" cy="365760"/>
+          </a:xfrm>
+          <a:prstGeom prst="rect">
+            <a:avLst/>
+          </a:prstGeom>
+          <a:noFill/>
+          <a:ln/>
+        </p:spPr>
+        <p:txBody>
+          <a:bodyPr wrap="square" lIns="0" tIns="0" rIns="0" bIns="0" rtlCol="0" anchor="ctr"/>
+          <a:lstStyle/>
+          <a:p>
+            <a:pPr indent="0" marL="0">
+              <a:buNone/>
+            </a:pPr>
+            <a:r>
+              <a:rPr lang="en-US" sz="2200" b="1" dirty="0">
+                <a:solidFill>
+                  <a:srgbClr val="FFFFFF"/>
+                </a:solidFill>
+                <a:latin typeface="Arial" pitchFamily="34" charset="0"/>
+                <a:ea typeface="Arial" pitchFamily="34" charset="-122"/>
+                <a:cs typeface="Arial" pitchFamily="34" charset="-120"/>
+              </a:rPr>
+              <a:t>35%</a:t>
+            </a:r>
+            <a:endParaRPr lang="en-US" sz="2200" dirty="0"/>
+          </a:p>
+        </p:txBody>
+      </p:sp>
+      <p:sp>
+        <p:nvSpPr>
+          <p:cNvPr id="15" name="Text 12"/>
+          <p:cNvSpPr/>
+          <p:nvPr/>
+        </p:nvSpPr>
+        <p:spPr>
+          <a:xfrm>
+            <a:off x="3200400" y="2450592"/>
+            <a:ext cx="1097280" cy="201168"/>
+          </a:xfrm>
+          <a:prstGeom prst="rect">
+            <a:avLst/>
+          </a:prstGeom>
+          <a:noFill/>
+          <a:ln/>
+        </p:spPr>
+        <p:txBody>
+          <a:bodyPr wrap="square" lIns="0" tIns="0" rIns="0" bIns="0" rtlCol="0" anchor="ctr"/>
+          <a:lstStyle/>
+          <a:p>
+            <a:pPr indent="0" marL="0">
+              <a:buNone/>
+            </a:pPr>
+            <a:r>
+              <a:rPr lang="en-US" sz="900" dirty="0">
+                <a:solidFill>
+                  <a:srgbClr val="C9D6E6"/>
+                </a:solidFill>
+                <a:latin typeface="Arial" pitchFamily="34" charset="0"/>
+                <a:ea typeface="Arial" pitchFamily="34" charset="-122"/>
+                <a:cs typeface="Arial" pitchFamily="34" charset="-120"/>
+              </a:rPr>
+              <a:t>3.er tramo</a:t>
+            </a:r>
+            <a:endParaRPr lang="en-US" sz="900" dirty="0"/>
+          </a:p>
+        </p:txBody>
+      </p:sp>
+      <p:sp>
+        <p:nvSpPr>
+          <p:cNvPr id="16" name="Text 13"/>
+          <p:cNvSpPr/>
+          <p:nvPr/>
+        </p:nvSpPr>
+        <p:spPr>
+          <a:xfrm>
+            <a:off x="859536" y="2615184"/>
+            <a:ext cx="3456432" cy="219456"/>
+          </a:xfrm>
+          <a:prstGeom prst="rect">
+            <a:avLst/>
+          </a:prstGeom>
+          <a:noFill/>
+          <a:ln/>
+        </p:spPr>
+        <p:txBody>
+          <a:bodyPr wrap="square" lIns="0" tIns="0" rIns="0" bIns="0" rtlCol="0" anchor="ctr"/>
+          <a:lstStyle/>
+          <a:p>
+            <a:pPr indent="0" marL="0">
+              <a:buNone/>
+            </a:pPr>
+            <a:r>
+              <a:rPr lang="en-US" sz="950" b="1" dirty="0">
+                <a:solidFill>
+                  <a:srgbClr val="FFFFFF"/>
+                </a:solidFill>
+                <a:latin typeface="Arial" pitchFamily="34" charset="0"/>
+                <a:ea typeface="Arial" pitchFamily="34" charset="-122"/>
+                <a:cs typeface="Arial" pitchFamily="34" charset="-120"/>
+              </a:rPr>
+              <a:t>+ 7% adicional si la utilidad se distribuye como dividendo.</a:t>
+            </a:r>
+            <a:endParaRPr lang="en-US" sz="950" dirty="0"/>
+          </a:p>
+        </p:txBody>
+      </p:sp>
+      <p:sp>
+        <p:nvSpPr>
+          <p:cNvPr id="17" name="Shape 14"/>
+          <p:cNvSpPr/>
+          <p:nvPr/>
+        </p:nvSpPr>
+        <p:spPr>
+          <a:xfrm>
+            <a:off x="4736592" y="1170432"/>
+            <a:ext cx="3950208" cy="1737360"/>
           </a:xfrm>
           <a:prstGeom prst="roundRect">
             <a:avLst>
-              <a:gd name="adj" fmla="val 3913"/>
+              <a:gd name="adj" fmla="val 4737"/>
             </a:avLst>
           </a:prstGeom>
           <a:solidFill>
@@ -11789,14 +13175,14 @@
       </p:sp>
       <p:sp>
         <p:nvSpPr>
-          <p:cNvPr id="11" name="Text 8"/>
-          <p:cNvSpPr/>
-          <p:nvPr/>
-        </p:nvSpPr>
-        <p:spPr>
-          <a:xfrm>
-            <a:off x="4992624" y="1371600"/>
-            <a:ext cx="3438144" cy="329184"/>
+          <p:cNvPr id="18" name="Text 15"/>
+          <p:cNvSpPr/>
+          <p:nvPr/>
+        </p:nvSpPr>
+        <p:spPr>
+          <a:xfrm>
+            <a:off x="4992624" y="1316736"/>
+            <a:ext cx="3383280" cy="292608"/>
           </a:xfrm>
           <a:prstGeom prst="rect">
             <a:avLst/>
@@ -11820,7 +13206,7 @@
                 <a:ea typeface="Arial" pitchFamily="34" charset="-122"/>
                 <a:cs typeface="Arial" pitchFamily="34" charset="-120"/>
               </a:rPr>
-              <a:t>Convenio Multilateral</a:t>
+              <a:t>Personas humanas</a:t>
             </a:r>
             <a:endParaRPr lang="en-US" sz="1700" dirty="0"/>
           </a:p>
@@ -11828,14 +13214,14 @@
       </p:sp>
       <p:sp>
         <p:nvSpPr>
-          <p:cNvPr id="12" name="Text 9"/>
-          <p:cNvSpPr/>
-          <p:nvPr/>
-        </p:nvSpPr>
-        <p:spPr>
-          <a:xfrm>
-            <a:off x="4992624" y="1773936"/>
-            <a:ext cx="3438144" cy="822960"/>
+          <p:cNvPr id="19" name="Text 16"/>
+          <p:cNvSpPr/>
+          <p:nvPr/>
+        </p:nvSpPr>
+        <p:spPr>
+          <a:xfrm>
+            <a:off x="4992624" y="1645920"/>
+            <a:ext cx="3456432" cy="402336"/>
           </a:xfrm>
           <a:prstGeom prst="rect">
             <a:avLst/>
@@ -11849,12 +13235,12 @@
           <a:p>
             <a:pPr indent="0" marL="0">
               <a:lnSpc>
-                <a:spcPts val="1400"/>
+                <a:spcPts val="1300"/>
               </a:lnSpc>
               <a:buNone/>
             </a:pPr>
             <a:r>
-              <a:rPr lang="en-US" sz="1050" dirty="0">
+              <a:rPr lang="en-US" sz="1000" dirty="0">
                 <a:solidFill>
                   <a:srgbClr val="F0F2F5"/>
                 </a:solidFill>
@@ -11862,95 +13248,185 @@
                 <a:ea typeface="Arial" pitchFamily="34" charset="-122"/>
                 <a:cs typeface="Arial" pitchFamily="34" charset="-120"/>
               </a:rPr>
-              <a:t>Si la inmobiliaria factura en CABA y en PBA, no paga Ingresos Brutos completo en cada jurisdicción por el mismo ingreso: el Convenio reparte la base imponible entre ambas.</a:t>
-            </a:r>
-            <a:endParaRPr lang="en-US" sz="1050" dirty="0"/>
-          </a:p>
-        </p:txBody>
-      </p:sp>
-      <p:sp>
-        <p:nvSpPr>
-          <p:cNvPr id="13" name="Shape 10"/>
-          <p:cNvSpPr/>
-          <p:nvPr/>
-        </p:nvSpPr>
-        <p:spPr>
-          <a:xfrm>
-            <a:off x="4992624" y="2615184"/>
-            <a:ext cx="3438144" cy="548640"/>
+              <a:t>Sueldos en relación de dependencia, lo que factura un agente como autónomo y los alquileres cobrados.</a:t>
+            </a:r>
+            <a:endParaRPr lang="en-US" sz="1000" dirty="0"/>
+          </a:p>
+        </p:txBody>
+      </p:sp>
+      <p:sp>
+        <p:nvSpPr>
+          <p:cNvPr id="20" name="Text 17"/>
+          <p:cNvSpPr/>
+          <p:nvPr/>
+        </p:nvSpPr>
+        <p:spPr>
+          <a:xfrm>
+            <a:off x="4992624" y="2084832"/>
+            <a:ext cx="2011680" cy="384048"/>
+          </a:xfrm>
+          <a:prstGeom prst="rect">
+            <a:avLst/>
+          </a:prstGeom>
+          <a:noFill/>
+          <a:ln/>
+        </p:spPr>
+        <p:txBody>
+          <a:bodyPr wrap="square" lIns="0" tIns="0" rIns="0" bIns="0" rtlCol="0" anchor="ctr"/>
+          <a:lstStyle/>
+          <a:p>
+            <a:pPr indent="0" marL="0">
+              <a:buNone/>
+            </a:pPr>
+            <a:r>
+              <a:rPr lang="en-US" sz="2400" b="1" dirty="0">
+                <a:solidFill>
+                  <a:srgbClr val="FFFFFF"/>
+                </a:solidFill>
+                <a:latin typeface="Arial" pitchFamily="34" charset="0"/>
+                <a:ea typeface="Arial" pitchFamily="34" charset="-122"/>
+                <a:cs typeface="Arial" pitchFamily="34" charset="-120"/>
+              </a:rPr>
+              <a:t>5% → 35%</a:t>
+            </a:r>
+            <a:endParaRPr lang="en-US" sz="2400" dirty="0"/>
+          </a:p>
+        </p:txBody>
+      </p:sp>
+      <p:sp>
+        <p:nvSpPr>
+          <p:cNvPr id="21" name="Text 18"/>
+          <p:cNvSpPr/>
+          <p:nvPr/>
+        </p:nvSpPr>
+        <p:spPr>
+          <a:xfrm>
+            <a:off x="4992624" y="2468880"/>
+            <a:ext cx="2194560" cy="201168"/>
+          </a:xfrm>
+          <a:prstGeom prst="rect">
+            <a:avLst/>
+          </a:prstGeom>
+          <a:noFill/>
+          <a:ln/>
+        </p:spPr>
+        <p:txBody>
+          <a:bodyPr wrap="square" lIns="0" tIns="0" rIns="0" bIns="0" rtlCol="0" anchor="ctr"/>
+          <a:lstStyle/>
+          <a:p>
+            <a:pPr indent="0" marL="0">
+              <a:buNone/>
+            </a:pPr>
+            <a:r>
+              <a:rPr lang="en-US" sz="900" dirty="0">
+                <a:solidFill>
+                  <a:srgbClr val="E4E7EC"/>
+                </a:solidFill>
+                <a:latin typeface="Arial" pitchFamily="34" charset="0"/>
+                <a:ea typeface="Arial" pitchFamily="34" charset="-122"/>
+                <a:cs typeface="Arial" pitchFamily="34" charset="-120"/>
+              </a:rPr>
+              <a:t>Nueve tramos progresivos</a:t>
+            </a:r>
+            <a:endParaRPr lang="en-US" sz="900" dirty="0"/>
+          </a:p>
+        </p:txBody>
+      </p:sp>
+      <p:sp>
+        <p:nvSpPr>
+          <p:cNvPr id="22" name="Text 19"/>
+          <p:cNvSpPr/>
+          <p:nvPr/>
+        </p:nvSpPr>
+        <p:spPr>
+          <a:xfrm>
+            <a:off x="6912864" y="2084832"/>
+            <a:ext cx="1554480" cy="603504"/>
+          </a:xfrm>
+          <a:prstGeom prst="rect">
+            <a:avLst/>
+          </a:prstGeom>
+          <a:noFill/>
+          <a:ln/>
+        </p:spPr>
+        <p:txBody>
+          <a:bodyPr wrap="square" lIns="0" tIns="0" rIns="0" bIns="0" rtlCol="0" anchor="ctr"/>
+          <a:lstStyle/>
+          <a:p>
+            <a:pPr indent="0" marL="0">
+              <a:lnSpc>
+                <a:spcPts val="1100"/>
+              </a:lnSpc>
+              <a:buNone/>
+            </a:pPr>
+            <a:r>
+              <a:rPr lang="en-US" sz="900" dirty="0">
+                <a:solidFill>
+                  <a:srgbClr val="F0F2F5"/>
+                </a:solidFill>
+                <a:latin typeface="Arial" pitchFamily="34" charset="0"/>
+                <a:ea typeface="Arial" pitchFamily="34" charset="-122"/>
+                <a:cs typeface="Arial" pitchFamily="34" charset="-120"/>
+              </a:rPr>
+              <a:t>ARCA publica una tabla para enero–junio y otra para julio–diciembre.</a:t>
+            </a:r>
+            <a:endParaRPr lang="en-US" sz="900" dirty="0"/>
+          </a:p>
+        </p:txBody>
+      </p:sp>
+      <p:sp>
+        <p:nvSpPr>
+          <p:cNvPr id="23" name="Text 20"/>
+          <p:cNvSpPr/>
+          <p:nvPr/>
+        </p:nvSpPr>
+        <p:spPr>
+          <a:xfrm>
+            <a:off x="603504" y="2980944"/>
+            <a:ext cx="8083296" cy="256032"/>
+          </a:xfrm>
+          <a:prstGeom prst="rect">
+            <a:avLst/>
+          </a:prstGeom>
+          <a:noFill/>
+          <a:ln/>
+        </p:spPr>
+        <p:txBody>
+          <a:bodyPr wrap="square" lIns="0" tIns="0" rIns="0" bIns="0" rtlCol="0" anchor="ctr"/>
+          <a:lstStyle/>
+          <a:p>
+            <a:pPr indent="0" marL="0">
+              <a:buNone/>
+            </a:pPr>
+            <a:r>
+              <a:rPr lang="en-US" sz="1250" b="1" dirty="0">
+                <a:solidFill>
+                  <a:srgbClr val="08407C"/>
+                </a:solidFill>
+                <a:latin typeface="Arial" pitchFamily="34" charset="0"/>
+                <a:ea typeface="Arial" pitchFamily="34" charset="-122"/>
+                <a:cs typeface="Arial" pitchFamily="34" charset="-120"/>
+              </a:rPr>
+              <a:t>Cuando se vende un inmueble, la fecha de compra define el impuesto</a:t>
+            </a:r>
+            <a:endParaRPr lang="en-US" sz="1250" dirty="0"/>
+          </a:p>
+        </p:txBody>
+      </p:sp>
+      <p:sp>
+        <p:nvSpPr>
+          <p:cNvPr id="24" name="Shape 21"/>
+          <p:cNvSpPr/>
+          <p:nvPr/>
+        </p:nvSpPr>
+        <p:spPr>
+          <a:xfrm>
+            <a:off x="603504" y="3291840"/>
+            <a:ext cx="2560320" cy="1188720"/>
           </a:xfrm>
           <a:prstGeom prst="roundRect">
             <a:avLst>
-              <a:gd name="adj" fmla="val 15000"/>
-            </a:avLst>
-          </a:prstGeom>
-          <a:solidFill>
-            <a:srgbClr val="4E586E"/>
-          </a:solidFill>
-          <a:ln w="12700">
-            <a:solidFill>
-              <a:srgbClr val="4E586E"/>
-            </a:solidFill>
-            <a:prstDash val="solid"/>
-          </a:ln>
-        </p:spPr>
-      </p:sp>
-      <p:sp>
-        <p:nvSpPr>
-          <p:cNvPr id="14" name="Text 11"/>
-          <p:cNvSpPr/>
-          <p:nvPr/>
-        </p:nvSpPr>
-        <p:spPr>
-          <a:xfrm>
-            <a:off x="5138928" y="2615184"/>
-            <a:ext cx="3154680" cy="548640"/>
-          </a:xfrm>
-          <a:prstGeom prst="rect">
-            <a:avLst/>
-          </a:prstGeom>
-          <a:noFill/>
-          <a:ln/>
-        </p:spPr>
-        <p:txBody>
-          <a:bodyPr wrap="square" lIns="0" tIns="0" rIns="0" bIns="0" rtlCol="0" anchor="ctr"/>
-          <a:lstStyle/>
-          <a:p>
-            <a:pPr indent="0" marL="0">
-              <a:lnSpc>
-                <a:spcPts val="1200"/>
-              </a:lnSpc>
-              <a:buNone/>
-            </a:pPr>
-            <a:r>
-              <a:rPr lang="en-US" sz="1000" dirty="0">
-                <a:solidFill>
-                  <a:srgbClr val="FFFFFF"/>
-                </a:solidFill>
-                <a:latin typeface="Arial" pitchFamily="34" charset="0"/>
-                <a:ea typeface="Arial" pitchFamily="34" charset="-122"/>
-                <a:cs typeface="Arial" pitchFamily="34" charset="-120"/>
-              </a:rPr>
-              <a:t>Una única DDJJ mensual (SIFERE) + el CM05 anual al cierre del ejercicio.</a:t>
-            </a:r>
-            <a:endParaRPr lang="en-US" sz="1000" dirty="0"/>
-          </a:p>
-        </p:txBody>
-      </p:sp>
-      <p:sp>
-        <p:nvSpPr>
-          <p:cNvPr id="15" name="Shape 12"/>
-          <p:cNvSpPr/>
-          <p:nvPr/>
-        </p:nvSpPr>
-        <p:spPr>
-          <a:xfrm>
-            <a:off x="603504" y="3456432"/>
-            <a:ext cx="3950208" cy="1005840"/>
-          </a:xfrm>
-          <a:prstGeom prst="roundRect">
-            <a:avLst>
-              <a:gd name="adj" fmla="val 8182"/>
+              <a:gd name="adj" fmla="val 6923"/>
             </a:avLst>
           </a:prstGeom>
           <a:solidFill>
@@ -11966,30 +13442,69 @@
       </p:sp>
       <p:sp>
         <p:nvSpPr>
-          <p:cNvPr id="16" name="Text 13"/>
-          <p:cNvSpPr/>
-          <p:nvPr/>
-        </p:nvSpPr>
-        <p:spPr>
-          <a:xfrm>
-            <a:off x="822960" y="3566160"/>
-            <a:ext cx="1554480" cy="256032"/>
-          </a:xfrm>
-          <a:prstGeom prst="rect">
-            <a:avLst/>
-          </a:prstGeom>
-          <a:noFill/>
-          <a:ln/>
-        </p:spPr>
-        <p:txBody>
-          <a:bodyPr wrap="square" lIns="0" tIns="0" rIns="0" bIns="0" rtlCol="0" anchor="ctr"/>
-          <a:lstStyle/>
-          <a:p>
-            <a:pPr indent="0" marL="0">
-              <a:buNone/>
-            </a:pPr>
-            <a:r>
-              <a:rPr lang="en-US" sz="1250" b="1" dirty="0">
+          <p:cNvPr id="25" name="Text 22"/>
+          <p:cNvSpPr/>
+          <p:nvPr/>
+        </p:nvSpPr>
+        <p:spPr>
+          <a:xfrm>
+            <a:off x="804672" y="3401568"/>
+            <a:ext cx="2194560" cy="182880"/>
+          </a:xfrm>
+          <a:prstGeom prst="rect">
+            <a:avLst/>
+          </a:prstGeom>
+          <a:noFill/>
+          <a:ln/>
+        </p:spPr>
+        <p:txBody>
+          <a:bodyPr wrap="square" lIns="0" tIns="0" rIns="0" bIns="0" rtlCol="0" anchor="ctr"/>
+          <a:lstStyle/>
+          <a:p>
+            <a:pPr indent="0" marL="0">
+              <a:buNone/>
+            </a:pPr>
+            <a:r>
+              <a:rPr lang="en-US" sz="850" b="1" spc="80" kern="0" dirty="0">
+                <a:solidFill>
+                  <a:srgbClr val="6A7686"/>
+                </a:solidFill>
+                <a:latin typeface="Arial" pitchFamily="34" charset="0"/>
+                <a:ea typeface="Arial" pitchFamily="34" charset="-122"/>
+                <a:cs typeface="Arial" pitchFamily="34" charset="-120"/>
+              </a:rPr>
+              <a:t>ITI</a:t>
+            </a:r>
+            <a:endParaRPr lang="en-US" sz="850" dirty="0"/>
+          </a:p>
+        </p:txBody>
+      </p:sp>
+      <p:sp>
+        <p:nvSpPr>
+          <p:cNvPr id="26" name="Text 23"/>
+          <p:cNvSpPr/>
+          <p:nvPr/>
+        </p:nvSpPr>
+        <p:spPr>
+          <a:xfrm>
+            <a:off x="804672" y="3602736"/>
+            <a:ext cx="2194560" cy="347472"/>
+          </a:xfrm>
+          <a:prstGeom prst="rect">
+            <a:avLst/>
+          </a:prstGeom>
+          <a:noFill/>
+          <a:ln/>
+        </p:spPr>
+        <p:txBody>
+          <a:bodyPr wrap="square" lIns="0" tIns="0" rIns="0" bIns="0" rtlCol="0" anchor="ctr"/>
+          <a:lstStyle/>
+          <a:p>
+            <a:pPr indent="0" marL="0">
+              <a:buNone/>
+            </a:pPr>
+            <a:r>
+              <a:rPr lang="en-US" sz="2000" b="1" dirty="0">
                 <a:solidFill>
                   <a:srgbClr val="08407C"/>
                 </a:solidFill>
@@ -11997,61 +13512,22 @@
                 <a:ea typeface="Arial" pitchFamily="34" charset="-122"/>
                 <a:cs typeface="Arial" pitchFamily="34" charset="-120"/>
               </a:rPr>
-              <a:t>Retención</a:t>
-            </a:r>
-            <a:endParaRPr lang="en-US" sz="1250" dirty="0"/>
-          </a:p>
-        </p:txBody>
-      </p:sp>
-      <p:sp>
-        <p:nvSpPr>
-          <p:cNvPr id="17" name="Text 14"/>
-          <p:cNvSpPr/>
-          <p:nvPr/>
-        </p:nvSpPr>
-        <p:spPr>
-          <a:xfrm>
-            <a:off x="2340864" y="3566160"/>
-            <a:ext cx="2011680" cy="256032"/>
-          </a:xfrm>
-          <a:prstGeom prst="rect">
-            <a:avLst/>
-          </a:prstGeom>
-          <a:noFill/>
-          <a:ln/>
-        </p:spPr>
-        <p:txBody>
-          <a:bodyPr wrap="square" lIns="0" tIns="0" rIns="0" bIns="0" rtlCol="0" anchor="ctr"/>
-          <a:lstStyle/>
-          <a:p>
-            <a:pPr algn="r" indent="0" marL="0">
-              <a:buNone/>
-            </a:pPr>
-            <a:r>
-              <a:rPr lang="en-US" sz="850" b="1" spc="80" kern="0" dirty="0">
-                <a:solidFill>
-                  <a:srgbClr val="6A7686"/>
-                </a:solidFill>
-                <a:latin typeface="Arial" pitchFamily="34" charset="0"/>
-                <a:ea typeface="Arial" pitchFamily="34" charset="-122"/>
-                <a:cs typeface="Arial" pitchFamily="34" charset="-120"/>
-              </a:rPr>
-              <a:t>LA COBRA QUIEN PAGA</a:t>
-            </a:r>
-            <a:endParaRPr lang="en-US" sz="850" dirty="0"/>
-          </a:p>
-        </p:txBody>
-      </p:sp>
-      <p:sp>
-        <p:nvSpPr>
-          <p:cNvPr id="18" name="Text 15"/>
-          <p:cNvSpPr/>
-          <p:nvPr/>
-        </p:nvSpPr>
-        <p:spPr>
-          <a:xfrm>
-            <a:off x="822960" y="3840480"/>
-            <a:ext cx="3529584" cy="512064"/>
+              <a:t>1,5%</a:t>
+            </a:r>
+            <a:endParaRPr lang="en-US" sz="2000" dirty="0"/>
+          </a:p>
+        </p:txBody>
+      </p:sp>
+      <p:sp>
+        <p:nvSpPr>
+          <p:cNvPr id="27" name="Text 24"/>
+          <p:cNvSpPr/>
+          <p:nvPr/>
+        </p:nvSpPr>
+        <p:spPr>
+          <a:xfrm>
+            <a:off x="804672" y="3986784"/>
+            <a:ext cx="2231136" cy="420624"/>
           </a:xfrm>
           <a:prstGeom prst="rect">
             <a:avLst/>
@@ -12078,7 +13554,7 @@
                 <a:ea typeface="Arial" pitchFamily="34" charset="-122"/>
                 <a:cs typeface="Arial" pitchFamily="34" charset="-120"/>
               </a:rPr>
-              <a:t>Descuenta un porcentaje de la factura del proveedor y lo deposita al fisco a cuenta de ese proveedor, que recibe un certificado.</a:t>
+              <a:t>Comprado hasta el 31/12/2017. Se calcula sobre el precio de venta, no sobre la ganancia.</a:t>
             </a:r>
             <a:endParaRPr lang="en-US" sz="950" dirty="0"/>
           </a:p>
@@ -12086,18 +13562,18 @@
       </p:sp>
       <p:sp>
         <p:nvSpPr>
-          <p:cNvPr id="19" name="Shape 16"/>
-          <p:cNvSpPr/>
-          <p:nvPr/>
-        </p:nvSpPr>
-        <p:spPr>
-          <a:xfrm>
-            <a:off x="4736592" y="3456432"/>
-            <a:ext cx="3950208" cy="1005840"/>
+          <p:cNvPr id="28" name="Shape 25"/>
+          <p:cNvSpPr/>
+          <p:nvPr/>
+        </p:nvSpPr>
+        <p:spPr>
+          <a:xfrm>
+            <a:off x="3364992" y="3291840"/>
+            <a:ext cx="2560320" cy="1188720"/>
           </a:xfrm>
           <a:prstGeom prst="roundRect">
             <a:avLst>
-              <a:gd name="adj" fmla="val 8182"/>
+              <a:gd name="adj" fmla="val 6923"/>
             </a:avLst>
           </a:prstGeom>
           <a:solidFill>
@@ -12113,30 +13589,69 @@
       </p:sp>
       <p:sp>
         <p:nvSpPr>
-          <p:cNvPr id="20" name="Text 17"/>
-          <p:cNvSpPr/>
-          <p:nvPr/>
-        </p:nvSpPr>
-        <p:spPr>
-          <a:xfrm>
-            <a:off x="4956048" y="3566160"/>
-            <a:ext cx="1554480" cy="256032"/>
-          </a:xfrm>
-          <a:prstGeom prst="rect">
-            <a:avLst/>
-          </a:prstGeom>
-          <a:noFill/>
-          <a:ln/>
-        </p:spPr>
-        <p:txBody>
-          <a:bodyPr wrap="square" lIns="0" tIns="0" rIns="0" bIns="0" rtlCol="0" anchor="ctr"/>
-          <a:lstStyle/>
-          <a:p>
-            <a:pPr indent="0" marL="0">
-              <a:buNone/>
-            </a:pPr>
-            <a:r>
-              <a:rPr lang="en-US" sz="1250" b="1" dirty="0">
+          <p:cNvPr id="29" name="Text 26"/>
+          <p:cNvSpPr/>
+          <p:nvPr/>
+        </p:nvSpPr>
+        <p:spPr>
+          <a:xfrm>
+            <a:off x="3566160" y="3401568"/>
+            <a:ext cx="2194560" cy="182880"/>
+          </a:xfrm>
+          <a:prstGeom prst="rect">
+            <a:avLst/>
+          </a:prstGeom>
+          <a:noFill/>
+          <a:ln/>
+        </p:spPr>
+        <p:txBody>
+          <a:bodyPr wrap="square" lIns="0" tIns="0" rIns="0" bIns="0" rtlCol="0" anchor="ctr"/>
+          <a:lstStyle/>
+          <a:p>
+            <a:pPr indent="0" marL="0">
+              <a:buNone/>
+            </a:pPr>
+            <a:r>
+              <a:rPr lang="en-US" sz="850" b="1" spc="80" kern="0" dirty="0">
+                <a:solidFill>
+                  <a:srgbClr val="6A7686"/>
+                </a:solidFill>
+                <a:latin typeface="Arial" pitchFamily="34" charset="0"/>
+                <a:ea typeface="Arial" pitchFamily="34" charset="-122"/>
+                <a:cs typeface="Arial" pitchFamily="34" charset="-120"/>
+              </a:rPr>
+              <a:t>IMPUESTO CEDULAR</a:t>
+            </a:r>
+            <a:endParaRPr lang="en-US" sz="850" dirty="0"/>
+          </a:p>
+        </p:txBody>
+      </p:sp>
+      <p:sp>
+        <p:nvSpPr>
+          <p:cNvPr id="30" name="Text 27"/>
+          <p:cNvSpPr/>
+          <p:nvPr/>
+        </p:nvSpPr>
+        <p:spPr>
+          <a:xfrm>
+            <a:off x="3566160" y="3602736"/>
+            <a:ext cx="2194560" cy="347472"/>
+          </a:xfrm>
+          <a:prstGeom prst="rect">
+            <a:avLst/>
+          </a:prstGeom>
+          <a:noFill/>
+          <a:ln/>
+        </p:spPr>
+        <p:txBody>
+          <a:bodyPr wrap="square" lIns="0" tIns="0" rIns="0" bIns="0" rtlCol="0" anchor="ctr"/>
+          <a:lstStyle/>
+          <a:p>
+            <a:pPr indent="0" marL="0">
+              <a:buNone/>
+            </a:pPr>
+            <a:r>
+              <a:rPr lang="en-US" sz="2000" b="1" dirty="0">
                 <a:solidFill>
                   <a:srgbClr val="08407C"/>
                 </a:solidFill>
@@ -12144,61 +13659,22 @@
                 <a:ea typeface="Arial" pitchFamily="34" charset="-122"/>
                 <a:cs typeface="Arial" pitchFamily="34" charset="-120"/>
               </a:rPr>
-              <a:t>Percepción</a:t>
-            </a:r>
-            <a:endParaRPr lang="en-US" sz="1250" dirty="0"/>
-          </a:p>
-        </p:txBody>
-      </p:sp>
-      <p:sp>
-        <p:nvSpPr>
-          <p:cNvPr id="21" name="Text 18"/>
-          <p:cNvSpPr/>
-          <p:nvPr/>
-        </p:nvSpPr>
-        <p:spPr>
-          <a:xfrm>
-            <a:off x="6473952" y="3566160"/>
-            <a:ext cx="2011680" cy="256032"/>
-          </a:xfrm>
-          <a:prstGeom prst="rect">
-            <a:avLst/>
-          </a:prstGeom>
-          <a:noFill/>
-          <a:ln/>
-        </p:spPr>
-        <p:txBody>
-          <a:bodyPr wrap="square" lIns="0" tIns="0" rIns="0" bIns="0" rtlCol="0" anchor="ctr"/>
-          <a:lstStyle/>
-          <a:p>
-            <a:pPr algn="r" indent="0" marL="0">
-              <a:buNone/>
-            </a:pPr>
-            <a:r>
-              <a:rPr lang="en-US" sz="850" b="1" spc="80" kern="0" dirty="0">
-                <a:solidFill>
-                  <a:srgbClr val="6A7686"/>
-                </a:solidFill>
-                <a:latin typeface="Arial" pitchFamily="34" charset="0"/>
-                <a:ea typeface="Arial" pitchFamily="34" charset="-122"/>
-                <a:cs typeface="Arial" pitchFamily="34" charset="-120"/>
-              </a:rPr>
-              <a:t>LA COBRA QUIEN VENDE</a:t>
-            </a:r>
-            <a:endParaRPr lang="en-US" sz="850" dirty="0"/>
-          </a:p>
-        </p:txBody>
-      </p:sp>
-      <p:sp>
-        <p:nvSpPr>
-          <p:cNvPr id="22" name="Text 19"/>
-          <p:cNvSpPr/>
-          <p:nvPr/>
-        </p:nvSpPr>
-        <p:spPr>
-          <a:xfrm>
-            <a:off x="4956048" y="3840480"/>
-            <a:ext cx="3529584" cy="512064"/>
+              <a:t>15%</a:t>
+            </a:r>
+            <a:endParaRPr lang="en-US" sz="2000" dirty="0"/>
+          </a:p>
+        </p:txBody>
+      </p:sp>
+      <p:sp>
+        <p:nvSpPr>
+          <p:cNvPr id="31" name="Text 28"/>
+          <p:cNvSpPr/>
+          <p:nvPr/>
+        </p:nvSpPr>
+        <p:spPr>
+          <a:xfrm>
+            <a:off x="3566160" y="3986784"/>
+            <a:ext cx="2231136" cy="420624"/>
           </a:xfrm>
           <a:prstGeom prst="rect">
             <a:avLst/>
@@ -12225,7 +13701,193 @@
                 <a:ea typeface="Arial" pitchFamily="34" charset="-122"/>
                 <a:cs typeface="Arial" pitchFamily="34" charset="-120"/>
               </a:rPr>
-              <a:t>Suma un importe por encima del precio y lo deposita al fisco a cuenta de las obligaciones futuras del comprador.</a:t>
+              <a:t>Comprado desde el 1/1/2018. Sobre la ganancia: precio menos costo actualizado y gastos.</a:t>
+            </a:r>
+            <a:endParaRPr lang="en-US" sz="950" dirty="0"/>
+          </a:p>
+        </p:txBody>
+      </p:sp>
+      <p:sp>
+        <p:nvSpPr>
+          <p:cNvPr id="32" name="Shape 29"/>
+          <p:cNvSpPr/>
+          <p:nvPr/>
+        </p:nvSpPr>
+        <p:spPr>
+          <a:xfrm>
+            <a:off x="6126480" y="3291840"/>
+            <a:ext cx="2560320" cy="1188720"/>
+          </a:xfrm>
+          <a:prstGeom prst="roundRect">
+            <a:avLst>
+              <a:gd name="adj" fmla="val 6923"/>
+            </a:avLst>
+          </a:prstGeom>
+          <a:solidFill>
+            <a:srgbClr val="F2F4F7"/>
+          </a:solidFill>
+          <a:ln w="12700">
+            <a:solidFill>
+              <a:srgbClr val="F2F4F7"/>
+            </a:solidFill>
+            <a:prstDash val="solid"/>
+          </a:ln>
+        </p:spPr>
+      </p:sp>
+      <p:sp>
+        <p:nvSpPr>
+          <p:cNvPr id="33" name="Text 30"/>
+          <p:cNvSpPr/>
+          <p:nvPr/>
+        </p:nvSpPr>
+        <p:spPr>
+          <a:xfrm>
+            <a:off x="6327648" y="3401568"/>
+            <a:ext cx="2194560" cy="182880"/>
+          </a:xfrm>
+          <a:prstGeom prst="rect">
+            <a:avLst/>
+          </a:prstGeom>
+          <a:noFill/>
+          <a:ln/>
+        </p:spPr>
+        <p:txBody>
+          <a:bodyPr wrap="square" lIns="0" tIns="0" rIns="0" bIns="0" rtlCol="0" anchor="ctr"/>
+          <a:lstStyle/>
+          <a:p>
+            <a:pPr indent="0" marL="0">
+              <a:buNone/>
+            </a:pPr>
+            <a:r>
+              <a:rPr lang="en-US" sz="850" b="1" spc="80" kern="0" dirty="0">
+                <a:solidFill>
+                  <a:srgbClr val="6A7686"/>
+                </a:solidFill>
+                <a:latin typeface="Arial" pitchFamily="34" charset="0"/>
+                <a:ea typeface="Arial" pitchFamily="34" charset="-122"/>
+                <a:cs typeface="Arial" pitchFamily="34" charset="-120"/>
+              </a:rPr>
+              <a:t>CASA-HABITACIÓN</a:t>
+            </a:r>
+            <a:endParaRPr lang="en-US" sz="850" dirty="0"/>
+          </a:p>
+        </p:txBody>
+      </p:sp>
+      <p:sp>
+        <p:nvSpPr>
+          <p:cNvPr id="34" name="Text 31"/>
+          <p:cNvSpPr/>
+          <p:nvPr/>
+        </p:nvSpPr>
+        <p:spPr>
+          <a:xfrm>
+            <a:off x="6327648" y="3602736"/>
+            <a:ext cx="2194560" cy="347472"/>
+          </a:xfrm>
+          <a:prstGeom prst="rect">
+            <a:avLst/>
+          </a:prstGeom>
+          <a:noFill/>
+          <a:ln/>
+        </p:spPr>
+        <p:txBody>
+          <a:bodyPr wrap="square" lIns="0" tIns="0" rIns="0" bIns="0" rtlCol="0" anchor="ctr"/>
+          <a:lstStyle/>
+          <a:p>
+            <a:pPr indent="0" marL="0">
+              <a:buNone/>
+            </a:pPr>
+            <a:r>
+              <a:rPr lang="en-US" sz="2000" b="1" dirty="0">
+                <a:solidFill>
+                  <a:srgbClr val="08407C"/>
+                </a:solidFill>
+                <a:latin typeface="Arial" pitchFamily="34" charset="0"/>
+                <a:ea typeface="Arial" pitchFamily="34" charset="-122"/>
+                <a:cs typeface="Arial" pitchFamily="34" charset="-120"/>
+              </a:rPr>
+              <a:t>Exenta</a:t>
+            </a:r>
+            <a:endParaRPr lang="en-US" sz="2000" dirty="0"/>
+          </a:p>
+        </p:txBody>
+      </p:sp>
+      <p:sp>
+        <p:nvSpPr>
+          <p:cNvPr id="35" name="Text 32"/>
+          <p:cNvSpPr/>
+          <p:nvPr/>
+        </p:nvSpPr>
+        <p:spPr>
+          <a:xfrm>
+            <a:off x="6327648" y="3986784"/>
+            <a:ext cx="2231136" cy="420624"/>
+          </a:xfrm>
+          <a:prstGeom prst="rect">
+            <a:avLst/>
+          </a:prstGeom>
+          <a:noFill/>
+          <a:ln/>
+        </p:spPr>
+        <p:txBody>
+          <a:bodyPr wrap="square" lIns="0" tIns="0" rIns="0" bIns="0" rtlCol="0" anchor="ctr"/>
+          <a:lstStyle/>
+          <a:p>
+            <a:pPr indent="0" marL="0">
+              <a:lnSpc>
+                <a:spcPts val="1200"/>
+              </a:lnSpc>
+              <a:buNone/>
+            </a:pPr>
+            <a:r>
+              <a:rPr lang="en-US" sz="950" dirty="0">
+                <a:solidFill>
+                  <a:srgbClr val="2E4258"/>
+                </a:solidFill>
+                <a:latin typeface="Arial" pitchFamily="34" charset="0"/>
+                <a:ea typeface="Arial" pitchFamily="34" charset="-122"/>
+                <a:cs typeface="Arial" pitchFamily="34" charset="-120"/>
+              </a:rPr>
+              <a:t>La vivienda única de residencia permanente no paga, en ninguno de los dos regímenes.</a:t>
+            </a:r>
+            <a:endParaRPr lang="en-US" sz="950" dirty="0"/>
+          </a:p>
+        </p:txBody>
+      </p:sp>
+      <p:sp>
+        <p:nvSpPr>
+          <p:cNvPr id="36" name="Text 33"/>
+          <p:cNvSpPr/>
+          <p:nvPr/>
+        </p:nvSpPr>
+        <p:spPr>
+          <a:xfrm>
+            <a:off x="603504" y="4562856"/>
+            <a:ext cx="8083296" cy="274320"/>
+          </a:xfrm>
+          <a:prstGeom prst="rect">
+            <a:avLst/>
+          </a:prstGeom>
+          <a:noFill/>
+          <a:ln/>
+        </p:spPr>
+        <p:txBody>
+          <a:bodyPr wrap="square" lIns="0" tIns="0" rIns="0" bIns="0" rtlCol="0" anchor="ctr"/>
+          <a:lstStyle/>
+          <a:p>
+            <a:pPr indent="0" marL="0">
+              <a:buNone/>
+            </a:pPr>
+            <a:r>
+              <a:rPr lang="en-US" sz="950" i="1" dirty="0">
+                <a:solidFill>
+                  <a:srgbClr val="6A7686"/>
+                </a:solidFill>
+                <a:latin typeface="Arial" pitchFamily="34" charset="0"/>
+                <a:ea typeface="Arial" pitchFamily="34" charset="-122"/>
+                <a:cs typeface="Arial" pitchFamily="34" charset="-120"/>
+              </a:rPr>
+              <a:t>Las alícuotas las fija la ley, pero los montos de cada tramo se actualizan todos los años: confirmar siempre los valores vigentes en arca.gob.ar antes de hacer un número.</a:t>
             </a:r>
             <a:endParaRPr lang="en-US" sz="950" dirty="0"/>
           </a:p>
@@ -12322,7 +13984,7 @@
       </p:sp>
       <p:pic>
         <p:nvPicPr>
-          <p:cNvPr id="4" name="Image 0" descr="/tmp/claude-0/-home-user-KrakRealEstate/26f90231-47e0-5521-93d0-854de4e1add2/scratchpad/brand/iso_white.png">    </p:cNvPr>
+          <p:cNvPr id="4" name="Image 0" descr="/home/user/KrakRealEstate/capacitaciones/impuestos/brand/iso_white.png">    </p:cNvPr>
           <p:cNvPicPr>
             <a:picLocks noChangeAspect="1"/>
           </p:cNvPicPr>
@@ -12377,7 +14039,7 @@
                 <a:ea typeface="Arial" pitchFamily="34" charset="-122"/>
                 <a:cs typeface="Arial" pitchFamily="34" charset="-120"/>
               </a:rPr>
-              <a:t>Sellos: el impuesto de la firma</a:t>
+              <a:t>Ingresos Brutos: el que más duele</a:t>
             </a:r>
             <a:endParaRPr lang="en-US" sz="2700" dirty="0"/>
           </a:p>
@@ -12416,7 +14078,7 @@
                 <a:ea typeface="Arial" pitchFamily="34" charset="-122"/>
                 <a:cs typeface="Arial" pitchFamily="34" charset="-120"/>
               </a:rPr>
-              <a:t>Impuesto provincial sobre la instrumentación de actos y contratos.</a:t>
+              <a:t>Provincial, mensual y calculado sobre lo facturado — exista o no ganancia.</a:t>
             </a:r>
             <a:endParaRPr lang="en-US" sz="1200" dirty="0"/>
           </a:p>
@@ -12431,11 +14093,11 @@
         <p:spPr>
           <a:xfrm>
             <a:off x="603504" y="1188720"/>
-            <a:ext cx="3200400" cy="3246120"/>
+            <a:ext cx="3950208" cy="2103120"/>
           </a:xfrm>
           <a:prstGeom prst="roundRect">
             <a:avLst>
-              <a:gd name="adj" fmla="val 2571"/>
+              <a:gd name="adj" fmla="val 3913"/>
             </a:avLst>
           </a:prstGeom>
           <a:solidFill>
@@ -12457,8 +14119,8 @@
         </p:nvSpPr>
         <p:spPr>
           <a:xfrm>
-            <a:off x="859536" y="1417320"/>
-            <a:ext cx="2697480" cy="1005840"/>
+            <a:off x="859536" y="1371600"/>
+            <a:ext cx="3438144" cy="731520"/>
           </a:xfrm>
           <a:prstGeom prst="rect">
             <a:avLst/>
@@ -12472,7 +14134,7 @@
           <a:p>
             <a:pPr indent="0" marL="0">
               <a:lnSpc>
-                <a:spcPts val="2300"/>
+                <a:spcPts val="2200"/>
               </a:lnSpc>
               <a:buNone/>
             </a:pPr>
@@ -12485,7 +14147,7 @@
                 <a:ea typeface="Arial" pitchFamily="34" charset="-122"/>
                 <a:cs typeface="Arial" pitchFamily="34" charset="-120"/>
               </a:rPr>
-              <a:t>Se paga una sola vez, al firmar, sobre el valor total del acto.</a:t>
+              <a:t>Se paga sobre la facturación, no sobre la rentabilidad.</a:t>
             </a:r>
             <a:endParaRPr lang="en-US" sz="1700" dirty="0"/>
           </a:p>
@@ -12499,8 +14161,8 @@
         </p:nvSpPr>
         <p:spPr>
           <a:xfrm>
-            <a:off x="859536" y="2514600"/>
-            <a:ext cx="2697480" cy="1737360"/>
+            <a:off x="859536" y="2212848"/>
+            <a:ext cx="3438144" cy="914400"/>
           </a:xfrm>
           <a:prstGeom prst="rect">
             <a:avLst/>
@@ -12514,12 +14176,12 @@
           <a:p>
             <a:pPr indent="0" marL="0">
               <a:lnSpc>
-                <a:spcPts val="1600"/>
+                <a:spcPts val="1500"/>
               </a:lnSpc>
               <a:buNone/>
             </a:pPr>
             <a:r>
-              <a:rPr lang="en-US" sz="1100" dirty="0">
+              <a:rPr lang="en-US" sz="1050" dirty="0">
                 <a:solidFill>
                   <a:srgbClr val="DCE6F2"/>
                 </a:solidFill>
@@ -12527,38 +14189,9 @@
                 <a:ea typeface="Arial" pitchFamily="34" charset="-122"/>
                 <a:cs typeface="Arial" pitchFamily="34" charset="-120"/>
               </a:rPr>
-              <a:t>Alcanza alquileres, boletos de compraventa y contratos comerciales o societarios.</a:t>
-            </a:r>
-            <a:endParaRPr lang="en-US" sz="1100" dirty="0"/>
-          </a:p>
-          <a:p>
-            <a:pPr indent="0" marL="0">
-              <a:lnSpc>
-                <a:spcPts val="1600"/>
-              </a:lnSpc>
-              <a:buNone/>
-            </a:pPr>
-            <a:endParaRPr lang="en-US" sz="1100" dirty="0"/>
-          </a:p>
-          <a:p>
-            <a:pPr indent="0" marL="0">
-              <a:lnSpc>
-                <a:spcPts val="1600"/>
-              </a:lnSpc>
-              <a:buNone/>
-            </a:pPr>
-            <a:r>
-              <a:rPr lang="en-US" sz="1100" dirty="0">
-                <a:solidFill>
-                  <a:srgbClr val="DCE6F2"/>
-                </a:solidFill>
-                <a:latin typeface="Arial" pitchFamily="34" charset="0"/>
-                <a:ea typeface="Arial" pitchFamily="34" charset="-122"/>
-                <a:cs typeface="Arial" pitchFamily="34" charset="-120"/>
-              </a:rPr>
-              <a:t>A diferencia de Ingresos Brutos, que se liquida mes a mes, Sellos es un pago único al momento de la firma.</a:t>
-            </a:r>
-            <a:endParaRPr lang="en-US" sz="1100" dirty="0"/>
+              <a:t>Cada provincia fija su propia alícuota según el rubro: la de real estate no es la misma que la de venta de herramientas o marketing. Se liquida mensualmente ante ARBA, AGIP u otra provincia.</a:t>
+            </a:r>
+            <a:endParaRPr lang="en-US" sz="1050" dirty="0"/>
           </a:p>
         </p:txBody>
       </p:sp>
@@ -12570,12 +14203,189 @@
         </p:nvSpPr>
         <p:spPr>
           <a:xfrm>
-            <a:off x="4005072" y="1188720"/>
-            <a:ext cx="4681728" cy="731520"/>
+            <a:off x="4736592" y="1188720"/>
+            <a:ext cx="3950208" cy="2103120"/>
           </a:xfrm>
           <a:prstGeom prst="roundRect">
             <a:avLst>
-              <a:gd name="adj" fmla="val 11250"/>
+              <a:gd name="adj" fmla="val 3913"/>
+            </a:avLst>
+          </a:prstGeom>
+          <a:solidFill>
+            <a:srgbClr val="7C8594"/>
+          </a:solidFill>
+          <a:ln w="12700">
+            <a:solidFill>
+              <a:srgbClr val="7C8594"/>
+            </a:solidFill>
+            <a:prstDash val="solid"/>
+          </a:ln>
+        </p:spPr>
+      </p:sp>
+      <p:sp>
+        <p:nvSpPr>
+          <p:cNvPr id="11" name="Text 8"/>
+          <p:cNvSpPr/>
+          <p:nvPr/>
+        </p:nvSpPr>
+        <p:spPr>
+          <a:xfrm>
+            <a:off x="4992624" y="1371600"/>
+            <a:ext cx="3438144" cy="329184"/>
+          </a:xfrm>
+          <a:prstGeom prst="rect">
+            <a:avLst/>
+          </a:prstGeom>
+          <a:noFill/>
+          <a:ln/>
+        </p:spPr>
+        <p:txBody>
+          <a:bodyPr wrap="square" lIns="0" tIns="0" rIns="0" bIns="0" rtlCol="0" anchor="ctr"/>
+          <a:lstStyle/>
+          <a:p>
+            <a:pPr indent="0" marL="0">
+              <a:buNone/>
+            </a:pPr>
+            <a:r>
+              <a:rPr lang="en-US" sz="1700" b="1" dirty="0">
+                <a:solidFill>
+                  <a:srgbClr val="FFFFFF"/>
+                </a:solidFill>
+                <a:latin typeface="Arial" pitchFamily="34" charset="0"/>
+                <a:ea typeface="Arial" pitchFamily="34" charset="-122"/>
+                <a:cs typeface="Arial" pitchFamily="34" charset="-120"/>
+              </a:rPr>
+              <a:t>Convenio Multilateral</a:t>
+            </a:r>
+            <a:endParaRPr lang="en-US" sz="1700" dirty="0"/>
+          </a:p>
+        </p:txBody>
+      </p:sp>
+      <p:sp>
+        <p:nvSpPr>
+          <p:cNvPr id="12" name="Text 9"/>
+          <p:cNvSpPr/>
+          <p:nvPr/>
+        </p:nvSpPr>
+        <p:spPr>
+          <a:xfrm>
+            <a:off x="4992624" y="1773936"/>
+            <a:ext cx="3438144" cy="822960"/>
+          </a:xfrm>
+          <a:prstGeom prst="rect">
+            <a:avLst/>
+          </a:prstGeom>
+          <a:noFill/>
+          <a:ln/>
+        </p:spPr>
+        <p:txBody>
+          <a:bodyPr wrap="square" lIns="0" tIns="0" rIns="0" bIns="0" rtlCol="0" anchor="ctr"/>
+          <a:lstStyle/>
+          <a:p>
+            <a:pPr indent="0" marL="0">
+              <a:lnSpc>
+                <a:spcPts val="1400"/>
+              </a:lnSpc>
+              <a:buNone/>
+            </a:pPr>
+            <a:r>
+              <a:rPr lang="en-US" sz="1050" dirty="0">
+                <a:solidFill>
+                  <a:srgbClr val="F0F2F5"/>
+                </a:solidFill>
+                <a:latin typeface="Arial" pitchFamily="34" charset="0"/>
+                <a:ea typeface="Arial" pitchFamily="34" charset="-122"/>
+                <a:cs typeface="Arial" pitchFamily="34" charset="-120"/>
+              </a:rPr>
+              <a:t>Si la inmobiliaria factura en CABA y en PBA, no paga Ingresos Brutos completo en cada jurisdicción por el mismo ingreso: el Convenio reparte la base imponible entre ambas.</a:t>
+            </a:r>
+            <a:endParaRPr lang="en-US" sz="1050" dirty="0"/>
+          </a:p>
+        </p:txBody>
+      </p:sp>
+      <p:sp>
+        <p:nvSpPr>
+          <p:cNvPr id="13" name="Shape 10"/>
+          <p:cNvSpPr/>
+          <p:nvPr/>
+        </p:nvSpPr>
+        <p:spPr>
+          <a:xfrm>
+            <a:off x="4992624" y="2615184"/>
+            <a:ext cx="3438144" cy="548640"/>
+          </a:xfrm>
+          <a:prstGeom prst="roundRect">
+            <a:avLst>
+              <a:gd name="adj" fmla="val 15000"/>
+            </a:avLst>
+          </a:prstGeom>
+          <a:solidFill>
+            <a:srgbClr val="4E586E"/>
+          </a:solidFill>
+          <a:ln w="12700">
+            <a:solidFill>
+              <a:srgbClr val="4E586E"/>
+            </a:solidFill>
+            <a:prstDash val="solid"/>
+          </a:ln>
+        </p:spPr>
+      </p:sp>
+      <p:sp>
+        <p:nvSpPr>
+          <p:cNvPr id="14" name="Text 11"/>
+          <p:cNvSpPr/>
+          <p:nvPr/>
+        </p:nvSpPr>
+        <p:spPr>
+          <a:xfrm>
+            <a:off x="5138928" y="2615184"/>
+            <a:ext cx="3154680" cy="548640"/>
+          </a:xfrm>
+          <a:prstGeom prst="rect">
+            <a:avLst/>
+          </a:prstGeom>
+          <a:noFill/>
+          <a:ln/>
+        </p:spPr>
+        <p:txBody>
+          <a:bodyPr wrap="square" lIns="0" tIns="0" rIns="0" bIns="0" rtlCol="0" anchor="ctr"/>
+          <a:lstStyle/>
+          <a:p>
+            <a:pPr indent="0" marL="0">
+              <a:lnSpc>
+                <a:spcPts val="1200"/>
+              </a:lnSpc>
+              <a:buNone/>
+            </a:pPr>
+            <a:r>
+              <a:rPr lang="en-US" sz="1000" dirty="0">
+                <a:solidFill>
+                  <a:srgbClr val="FFFFFF"/>
+                </a:solidFill>
+                <a:latin typeface="Arial" pitchFamily="34" charset="0"/>
+                <a:ea typeface="Arial" pitchFamily="34" charset="-122"/>
+                <a:cs typeface="Arial" pitchFamily="34" charset="-120"/>
+              </a:rPr>
+              <a:t>Una única DDJJ mensual (SIFERE) + el CM05 anual al cierre del ejercicio.</a:t>
+            </a:r>
+            <a:endParaRPr lang="en-US" sz="1000" dirty="0"/>
+          </a:p>
+        </p:txBody>
+      </p:sp>
+      <p:sp>
+        <p:nvSpPr>
+          <p:cNvPr id="15" name="Shape 12"/>
+          <p:cNvSpPr/>
+          <p:nvPr/>
+        </p:nvSpPr>
+        <p:spPr>
+          <a:xfrm>
+            <a:off x="603504" y="3456432"/>
+            <a:ext cx="3950208" cy="1005840"/>
+          </a:xfrm>
+          <a:prstGeom prst="roundRect">
+            <a:avLst>
+              <a:gd name="adj" fmla="val 8182"/>
             </a:avLst>
           </a:prstGeom>
           <a:solidFill>
@@ -12591,96 +14401,30 @@
       </p:sp>
       <p:sp>
         <p:nvSpPr>
-          <p:cNvPr id="11" name="Shape 8"/>
-          <p:cNvSpPr/>
-          <p:nvPr/>
-        </p:nvSpPr>
-        <p:spPr>
-          <a:xfrm>
-            <a:off x="4206240" y="1389888"/>
-            <a:ext cx="329184" cy="329184"/>
-          </a:xfrm>
-          <a:prstGeom prst="roundRect">
-            <a:avLst>
-              <a:gd name="adj" fmla="val 138889"/>
-            </a:avLst>
-          </a:prstGeom>
-          <a:solidFill>
-            <a:srgbClr val="08407C"/>
-          </a:solidFill>
-          <a:ln w="12700">
-            <a:solidFill>
-              <a:srgbClr val="08407C"/>
-            </a:solidFill>
-            <a:prstDash val="solid"/>
-          </a:ln>
-        </p:spPr>
-      </p:sp>
-      <p:sp>
-        <p:nvSpPr>
-          <p:cNvPr id="12" name="Text 9"/>
-          <p:cNvSpPr/>
-          <p:nvPr/>
-        </p:nvSpPr>
-        <p:spPr>
-          <a:xfrm>
-            <a:off x="4206240" y="1389888"/>
-            <a:ext cx="329184" cy="329184"/>
-          </a:xfrm>
-          <a:prstGeom prst="rect">
-            <a:avLst/>
-          </a:prstGeom>
-          <a:noFill/>
-          <a:ln/>
-        </p:spPr>
-        <p:txBody>
-          <a:bodyPr wrap="square" lIns="0" tIns="0" rIns="0" bIns="0" rtlCol="0" anchor="ctr"/>
-          <a:lstStyle/>
-          <a:p>
-            <a:pPr algn="ctr" indent="0" marL="0">
-              <a:buNone/>
-            </a:pPr>
-            <a:r>
-              <a:rPr lang="en-US" sz="1050" b="1" dirty="0">
-                <a:solidFill>
-                  <a:srgbClr val="FFFFFF"/>
-                </a:solidFill>
-                <a:latin typeface="Arial" pitchFamily="34" charset="0"/>
-                <a:ea typeface="Arial" pitchFamily="34" charset="-122"/>
-                <a:cs typeface="Arial" pitchFamily="34" charset="-120"/>
-              </a:rPr>
-              <a:t>1</a:t>
-            </a:r>
-            <a:endParaRPr lang="en-US" sz="1050" dirty="0"/>
-          </a:p>
-        </p:txBody>
-      </p:sp>
-      <p:sp>
-        <p:nvSpPr>
-          <p:cNvPr id="13" name="Text 10"/>
-          <p:cNvSpPr/>
-          <p:nvPr/>
-        </p:nvSpPr>
-        <p:spPr>
-          <a:xfrm>
-            <a:off x="4663440" y="1280160"/>
-            <a:ext cx="3913632" cy="237744"/>
-          </a:xfrm>
-          <a:prstGeom prst="rect">
-            <a:avLst/>
-          </a:prstGeom>
-          <a:noFill/>
-          <a:ln/>
-        </p:spPr>
-        <p:txBody>
-          <a:bodyPr wrap="square" lIns="0" tIns="0" rIns="0" bIns="0" rtlCol="0" anchor="ctr"/>
-          <a:lstStyle/>
-          <a:p>
-            <a:pPr indent="0" marL="0">
-              <a:buNone/>
-            </a:pPr>
-            <a:r>
-              <a:rPr lang="en-US" sz="1150" b="1" dirty="0">
+          <p:cNvPr id="16" name="Text 13"/>
+          <p:cNvSpPr/>
+          <p:nvPr/>
+        </p:nvSpPr>
+        <p:spPr>
+          <a:xfrm>
+            <a:off x="822960" y="3566160"/>
+            <a:ext cx="1554480" cy="256032"/>
+          </a:xfrm>
+          <a:prstGeom prst="rect">
+            <a:avLst/>
+          </a:prstGeom>
+          <a:noFill/>
+          <a:ln/>
+        </p:spPr>
+        <p:txBody>
+          <a:bodyPr wrap="square" lIns="0" tIns="0" rIns="0" bIns="0" rtlCol="0" anchor="ctr"/>
+          <a:lstStyle/>
+          <a:p>
+            <a:pPr indent="0" marL="0">
+              <a:buNone/>
+            </a:pPr>
+            <a:r>
+              <a:rPr lang="en-US" sz="1250" b="1" dirty="0">
                 <a:solidFill>
                   <a:srgbClr val="08407C"/>
                 </a:solidFill>
@@ -12688,22 +14432,61 @@
                 <a:ea typeface="Arial" pitchFamily="34" charset="-122"/>
                 <a:cs typeface="Arial" pitchFamily="34" charset="-120"/>
               </a:rPr>
-              <a:t>La base es el valor total del acto</a:t>
-            </a:r>
-            <a:endParaRPr lang="en-US" sz="1150" dirty="0"/>
-          </a:p>
-        </p:txBody>
-      </p:sp>
-      <p:sp>
-        <p:nvSpPr>
-          <p:cNvPr id="14" name="Text 11"/>
-          <p:cNvSpPr/>
-          <p:nvPr/>
-        </p:nvSpPr>
-        <p:spPr>
-          <a:xfrm>
-            <a:off x="4663440" y="1527048"/>
-            <a:ext cx="3913632" cy="329184"/>
+              <a:t>Retención</a:t>
+            </a:r>
+            <a:endParaRPr lang="en-US" sz="1250" dirty="0"/>
+          </a:p>
+        </p:txBody>
+      </p:sp>
+      <p:sp>
+        <p:nvSpPr>
+          <p:cNvPr id="17" name="Text 14"/>
+          <p:cNvSpPr/>
+          <p:nvPr/>
+        </p:nvSpPr>
+        <p:spPr>
+          <a:xfrm>
+            <a:off x="2340864" y="3566160"/>
+            <a:ext cx="2011680" cy="256032"/>
+          </a:xfrm>
+          <a:prstGeom prst="rect">
+            <a:avLst/>
+          </a:prstGeom>
+          <a:noFill/>
+          <a:ln/>
+        </p:spPr>
+        <p:txBody>
+          <a:bodyPr wrap="square" lIns="0" tIns="0" rIns="0" bIns="0" rtlCol="0" anchor="ctr"/>
+          <a:lstStyle/>
+          <a:p>
+            <a:pPr algn="r" indent="0" marL="0">
+              <a:buNone/>
+            </a:pPr>
+            <a:r>
+              <a:rPr lang="en-US" sz="850" b="1" spc="80" kern="0" dirty="0">
+                <a:solidFill>
+                  <a:srgbClr val="6A7686"/>
+                </a:solidFill>
+                <a:latin typeface="Arial" pitchFamily="34" charset="0"/>
+                <a:ea typeface="Arial" pitchFamily="34" charset="-122"/>
+                <a:cs typeface="Arial" pitchFamily="34" charset="-120"/>
+              </a:rPr>
+              <a:t>LA COBRA QUIEN PAGA</a:t>
+            </a:r>
+            <a:endParaRPr lang="en-US" sz="850" dirty="0"/>
+          </a:p>
+        </p:txBody>
+      </p:sp>
+      <p:sp>
+        <p:nvSpPr>
+          <p:cNvPr id="18" name="Text 15"/>
+          <p:cNvSpPr/>
+          <p:nvPr/>
+        </p:nvSpPr>
+        <p:spPr>
+          <a:xfrm>
+            <a:off x="822960" y="3840480"/>
+            <a:ext cx="3529584" cy="512064"/>
           </a:xfrm>
           <a:prstGeom prst="rect">
             <a:avLst/>
@@ -12730,7 +14513,7 @@
                 <a:ea typeface="Arial" pitchFamily="34" charset="-122"/>
                 <a:cs typeface="Arial" pitchFamily="34" charset="-120"/>
               </a:rPr>
-              <a:t>En un alquiler, la suma de todos los meses del contrato — no un mes suelto.</a:t>
+              <a:t>Descuenta un porcentaje de la factura del proveedor y lo deposita al fisco a cuenta de ese proveedor, que recibe un certificado.</a:t>
             </a:r>
             <a:endParaRPr lang="en-US" sz="950" dirty="0"/>
           </a:p>
@@ -12738,18 +14521,18 @@
       </p:sp>
       <p:sp>
         <p:nvSpPr>
-          <p:cNvPr id="15" name="Shape 12"/>
-          <p:cNvSpPr/>
-          <p:nvPr/>
-        </p:nvSpPr>
-        <p:spPr>
-          <a:xfrm>
-            <a:off x="4005072" y="2029968"/>
-            <a:ext cx="4681728" cy="731520"/>
+          <p:cNvPr id="19" name="Shape 16"/>
+          <p:cNvSpPr/>
+          <p:nvPr/>
+        </p:nvSpPr>
+        <p:spPr>
+          <a:xfrm>
+            <a:off x="4736592" y="3456432"/>
+            <a:ext cx="3950208" cy="1005840"/>
           </a:xfrm>
           <a:prstGeom prst="roundRect">
             <a:avLst>
-              <a:gd name="adj" fmla="val 11250"/>
+              <a:gd name="adj" fmla="val 8182"/>
             </a:avLst>
           </a:prstGeom>
           <a:solidFill>
@@ -12765,96 +14548,30 @@
       </p:sp>
       <p:sp>
         <p:nvSpPr>
-          <p:cNvPr id="16" name="Shape 13"/>
-          <p:cNvSpPr/>
-          <p:nvPr/>
-        </p:nvSpPr>
-        <p:spPr>
-          <a:xfrm>
-            <a:off x="4206240" y="2231136"/>
-            <a:ext cx="329184" cy="329184"/>
-          </a:xfrm>
-          <a:prstGeom prst="roundRect">
-            <a:avLst>
-              <a:gd name="adj" fmla="val 138889"/>
-            </a:avLst>
-          </a:prstGeom>
-          <a:solidFill>
-            <a:srgbClr val="08407C"/>
-          </a:solidFill>
-          <a:ln w="12700">
-            <a:solidFill>
-              <a:srgbClr val="08407C"/>
-            </a:solidFill>
-            <a:prstDash val="solid"/>
-          </a:ln>
-        </p:spPr>
-      </p:sp>
-      <p:sp>
-        <p:nvSpPr>
-          <p:cNvPr id="17" name="Text 14"/>
-          <p:cNvSpPr/>
-          <p:nvPr/>
-        </p:nvSpPr>
-        <p:spPr>
-          <a:xfrm>
-            <a:off x="4206240" y="2231136"/>
-            <a:ext cx="329184" cy="329184"/>
-          </a:xfrm>
-          <a:prstGeom prst="rect">
-            <a:avLst/>
-          </a:prstGeom>
-          <a:noFill/>
-          <a:ln/>
-        </p:spPr>
-        <p:txBody>
-          <a:bodyPr wrap="square" lIns="0" tIns="0" rIns="0" bIns="0" rtlCol="0" anchor="ctr"/>
-          <a:lstStyle/>
-          <a:p>
-            <a:pPr algn="ctr" indent="0" marL="0">
-              <a:buNone/>
-            </a:pPr>
-            <a:r>
-              <a:rPr lang="en-US" sz="1050" b="1" dirty="0">
-                <a:solidFill>
-                  <a:srgbClr val="FFFFFF"/>
-                </a:solidFill>
-                <a:latin typeface="Arial" pitchFamily="34" charset="0"/>
-                <a:ea typeface="Arial" pitchFamily="34" charset="-122"/>
-                <a:cs typeface="Arial" pitchFamily="34" charset="-120"/>
-              </a:rPr>
-              <a:t>2</a:t>
-            </a:r>
-            <a:endParaRPr lang="en-US" sz="1050" dirty="0"/>
-          </a:p>
-        </p:txBody>
-      </p:sp>
-      <p:sp>
-        <p:nvSpPr>
-          <p:cNvPr id="18" name="Text 15"/>
-          <p:cNvSpPr/>
-          <p:nvPr/>
-        </p:nvSpPr>
-        <p:spPr>
-          <a:xfrm>
-            <a:off x="4663440" y="2121408"/>
-            <a:ext cx="3913632" cy="237744"/>
-          </a:xfrm>
-          <a:prstGeom prst="rect">
-            <a:avLst/>
-          </a:prstGeom>
-          <a:noFill/>
-          <a:ln/>
-        </p:spPr>
-        <p:txBody>
-          <a:bodyPr wrap="square" lIns="0" tIns="0" rIns="0" bIns="0" rtlCol="0" anchor="ctr"/>
-          <a:lstStyle/>
-          <a:p>
-            <a:pPr indent="0" marL="0">
-              <a:buNone/>
-            </a:pPr>
-            <a:r>
-              <a:rPr lang="en-US" sz="1150" b="1" dirty="0">
+          <p:cNvPr id="20" name="Text 17"/>
+          <p:cNvSpPr/>
+          <p:nvPr/>
+        </p:nvSpPr>
+        <p:spPr>
+          <a:xfrm>
+            <a:off x="4956048" y="3566160"/>
+            <a:ext cx="1554480" cy="256032"/>
+          </a:xfrm>
+          <a:prstGeom prst="rect">
+            <a:avLst/>
+          </a:prstGeom>
+          <a:noFill/>
+          <a:ln/>
+        </p:spPr>
+        <p:txBody>
+          <a:bodyPr wrap="square" lIns="0" tIns="0" rIns="0" bIns="0" rtlCol="0" anchor="ctr"/>
+          <a:lstStyle/>
+          <a:p>
+            <a:pPr indent="0" marL="0">
+              <a:buNone/>
+            </a:pPr>
+            <a:r>
+              <a:rPr lang="en-US" sz="1250" b="1" dirty="0">
                 <a:solidFill>
                   <a:srgbClr val="08407C"/>
                 </a:solidFill>
@@ -12862,22 +14579,61 @@
                 <a:ea typeface="Arial" pitchFamily="34" charset="-122"/>
                 <a:cs typeface="Arial" pitchFamily="34" charset="-120"/>
               </a:rPr>
-              <a:t>Impacta la rentabilidad neta</a:t>
-            </a:r>
-            <a:endParaRPr lang="en-US" sz="1150" dirty="0"/>
-          </a:p>
-        </p:txBody>
-      </p:sp>
-      <p:sp>
-        <p:nvSpPr>
-          <p:cNvPr id="19" name="Text 16"/>
-          <p:cNvSpPr/>
-          <p:nvPr/>
-        </p:nvSpPr>
-        <p:spPr>
-          <a:xfrm>
-            <a:off x="4663440" y="2368296"/>
-            <a:ext cx="3913632" cy="329184"/>
+              <a:t>Percepción</a:t>
+            </a:r>
+            <a:endParaRPr lang="en-US" sz="1250" dirty="0"/>
+          </a:p>
+        </p:txBody>
+      </p:sp>
+      <p:sp>
+        <p:nvSpPr>
+          <p:cNvPr id="21" name="Text 18"/>
+          <p:cNvSpPr/>
+          <p:nvPr/>
+        </p:nvSpPr>
+        <p:spPr>
+          <a:xfrm>
+            <a:off x="6473952" y="3566160"/>
+            <a:ext cx="2011680" cy="256032"/>
+          </a:xfrm>
+          <a:prstGeom prst="rect">
+            <a:avLst/>
+          </a:prstGeom>
+          <a:noFill/>
+          <a:ln/>
+        </p:spPr>
+        <p:txBody>
+          <a:bodyPr wrap="square" lIns="0" tIns="0" rIns="0" bIns="0" rtlCol="0" anchor="ctr"/>
+          <a:lstStyle/>
+          <a:p>
+            <a:pPr algn="r" indent="0" marL="0">
+              <a:buNone/>
+            </a:pPr>
+            <a:r>
+              <a:rPr lang="en-US" sz="850" b="1" spc="80" kern="0" dirty="0">
+                <a:solidFill>
+                  <a:srgbClr val="6A7686"/>
+                </a:solidFill>
+                <a:latin typeface="Arial" pitchFamily="34" charset="0"/>
+                <a:ea typeface="Arial" pitchFamily="34" charset="-122"/>
+                <a:cs typeface="Arial" pitchFamily="34" charset="-120"/>
+              </a:rPr>
+              <a:t>LA COBRA QUIEN VENDE</a:t>
+            </a:r>
+            <a:endParaRPr lang="en-US" sz="850" dirty="0"/>
+          </a:p>
+        </p:txBody>
+      </p:sp>
+      <p:sp>
+        <p:nvSpPr>
+          <p:cNvPr id="22" name="Text 19"/>
+          <p:cNvSpPr/>
+          <p:nvPr/>
+        </p:nvSpPr>
+        <p:spPr>
+          <a:xfrm>
+            <a:off x="4956048" y="3840480"/>
+            <a:ext cx="3529584" cy="512064"/>
           </a:xfrm>
           <a:prstGeom prst="rect">
             <a:avLst/>
@@ -12904,355 +14660,7 @@
                 <a:ea typeface="Arial" pitchFamily="34" charset="-122"/>
                 <a:cs typeface="Arial" pitchFamily="34" charset="-120"/>
               </a:rPr>
-              <a:t>Sellos es un costo de la operación: hay que sumarlo al cálculo, no mirar solo la comisión.</a:t>
-            </a:r>
-            <a:endParaRPr lang="en-US" sz="950" dirty="0"/>
-          </a:p>
-        </p:txBody>
-      </p:sp>
-      <p:sp>
-        <p:nvSpPr>
-          <p:cNvPr id="20" name="Shape 17"/>
-          <p:cNvSpPr/>
-          <p:nvPr/>
-        </p:nvSpPr>
-        <p:spPr>
-          <a:xfrm>
-            <a:off x="4005072" y="2871216"/>
-            <a:ext cx="4681728" cy="731520"/>
-          </a:xfrm>
-          <a:prstGeom prst="roundRect">
-            <a:avLst>
-              <a:gd name="adj" fmla="val 11250"/>
-            </a:avLst>
-          </a:prstGeom>
-          <a:solidFill>
-            <a:srgbClr val="F2F4F7"/>
-          </a:solidFill>
-          <a:ln w="12700">
-            <a:solidFill>
-              <a:srgbClr val="F2F4F7"/>
-            </a:solidFill>
-            <a:prstDash val="solid"/>
-          </a:ln>
-        </p:spPr>
-      </p:sp>
-      <p:sp>
-        <p:nvSpPr>
-          <p:cNvPr id="21" name="Shape 18"/>
-          <p:cNvSpPr/>
-          <p:nvPr/>
-        </p:nvSpPr>
-        <p:spPr>
-          <a:xfrm>
-            <a:off x="4206240" y="3072384"/>
-            <a:ext cx="329184" cy="329184"/>
-          </a:xfrm>
-          <a:prstGeom prst="roundRect">
-            <a:avLst>
-              <a:gd name="adj" fmla="val 138889"/>
-            </a:avLst>
-          </a:prstGeom>
-          <a:solidFill>
-            <a:srgbClr val="08407C"/>
-          </a:solidFill>
-          <a:ln w="12700">
-            <a:solidFill>
-              <a:srgbClr val="08407C"/>
-            </a:solidFill>
-            <a:prstDash val="solid"/>
-          </a:ln>
-        </p:spPr>
-      </p:sp>
-      <p:sp>
-        <p:nvSpPr>
-          <p:cNvPr id="22" name="Text 19"/>
-          <p:cNvSpPr/>
-          <p:nvPr/>
-        </p:nvSpPr>
-        <p:spPr>
-          <a:xfrm>
-            <a:off x="4206240" y="3072384"/>
-            <a:ext cx="329184" cy="329184"/>
-          </a:xfrm>
-          <a:prstGeom prst="rect">
-            <a:avLst/>
-          </a:prstGeom>
-          <a:noFill/>
-          <a:ln/>
-        </p:spPr>
-        <p:txBody>
-          <a:bodyPr wrap="square" lIns="0" tIns="0" rIns="0" bIns="0" rtlCol="0" anchor="ctr"/>
-          <a:lstStyle/>
-          <a:p>
-            <a:pPr algn="ctr" indent="0" marL="0">
-              <a:buNone/>
-            </a:pPr>
-            <a:r>
-              <a:rPr lang="en-US" sz="1050" b="1" dirty="0">
-                <a:solidFill>
-                  <a:srgbClr val="FFFFFF"/>
-                </a:solidFill>
-                <a:latin typeface="Arial" pitchFamily="34" charset="0"/>
-                <a:ea typeface="Arial" pitchFamily="34" charset="-122"/>
-                <a:cs typeface="Arial" pitchFamily="34" charset="-120"/>
-              </a:rPr>
-              <a:t>3</a:t>
-            </a:r>
-            <a:endParaRPr lang="en-US" sz="1050" dirty="0"/>
-          </a:p>
-        </p:txBody>
-      </p:sp>
-      <p:sp>
-        <p:nvSpPr>
-          <p:cNvPr id="23" name="Text 20"/>
-          <p:cNvSpPr/>
-          <p:nvPr/>
-        </p:nvSpPr>
-        <p:spPr>
-          <a:xfrm>
-            <a:off x="4663440" y="2962656"/>
-            <a:ext cx="3913632" cy="237744"/>
-          </a:xfrm>
-          <a:prstGeom prst="rect">
-            <a:avLst/>
-          </a:prstGeom>
-          <a:noFill/>
-          <a:ln/>
-        </p:spPr>
-        <p:txBody>
-          <a:bodyPr wrap="square" lIns="0" tIns="0" rIns="0" bIns="0" rtlCol="0" anchor="ctr"/>
-          <a:lstStyle/>
-          <a:p>
-            <a:pPr indent="0" marL="0">
-              <a:buNone/>
-            </a:pPr>
-            <a:r>
-              <a:rPr lang="en-US" sz="1150" b="1" dirty="0">
-                <a:solidFill>
-                  <a:srgbClr val="08407C"/>
-                </a:solidFill>
-                <a:latin typeface="Arial" pitchFamily="34" charset="0"/>
-                <a:ea typeface="Arial" pitchFamily="34" charset="-122"/>
-                <a:cs typeface="Arial" pitchFamily="34" charset="-120"/>
-              </a:rPr>
-              <a:t>El sellado da fecha cierta</a:t>
-            </a:r>
-            <a:endParaRPr lang="en-US" sz="1150" dirty="0"/>
-          </a:p>
-        </p:txBody>
-      </p:sp>
-      <p:sp>
-        <p:nvSpPr>
-          <p:cNvPr id="24" name="Text 21"/>
-          <p:cNvSpPr/>
-          <p:nvPr/>
-        </p:nvSpPr>
-        <p:spPr>
-          <a:xfrm>
-            <a:off x="4663440" y="3209544"/>
-            <a:ext cx="3913632" cy="329184"/>
-          </a:xfrm>
-          <a:prstGeom prst="rect">
-            <a:avLst/>
-          </a:prstGeom>
-          <a:noFill/>
-          <a:ln/>
-        </p:spPr>
-        <p:txBody>
-          <a:bodyPr wrap="square" lIns="0" tIns="0" rIns="0" bIns="0" rtlCol="0" anchor="ctr"/>
-          <a:lstStyle/>
-          <a:p>
-            <a:pPr indent="0" marL="0">
-              <a:lnSpc>
-                <a:spcPts val="1200"/>
-              </a:lnSpc>
-              <a:buNone/>
-            </a:pPr>
-            <a:r>
-              <a:rPr lang="en-US" sz="950" dirty="0">
-                <a:solidFill>
-                  <a:srgbClr val="2E4258"/>
-                </a:solidFill>
-                <a:latin typeface="Arial" pitchFamily="34" charset="0"/>
-                <a:ea typeface="Arial" pitchFamily="34" charset="-122"/>
-                <a:cs typeface="Arial" pitchFamily="34" charset="-120"/>
-              </a:rPr>
-              <a:t>Sin sellar, el contrato pierde fuerza probatoria ante el fisco y ante la contraparte.</a:t>
-            </a:r>
-            <a:endParaRPr lang="en-US" sz="950" dirty="0"/>
-          </a:p>
-        </p:txBody>
-      </p:sp>
-      <p:sp>
-        <p:nvSpPr>
-          <p:cNvPr id="25" name="Shape 22"/>
-          <p:cNvSpPr/>
-          <p:nvPr/>
-        </p:nvSpPr>
-        <p:spPr>
-          <a:xfrm>
-            <a:off x="4005072" y="3712464"/>
-            <a:ext cx="4681728" cy="731520"/>
-          </a:xfrm>
-          <a:prstGeom prst="roundRect">
-            <a:avLst>
-              <a:gd name="adj" fmla="val 11250"/>
-            </a:avLst>
-          </a:prstGeom>
-          <a:solidFill>
-            <a:srgbClr val="F2F4F7"/>
-          </a:solidFill>
-          <a:ln w="12700">
-            <a:solidFill>
-              <a:srgbClr val="F2F4F7"/>
-            </a:solidFill>
-            <a:prstDash val="solid"/>
-          </a:ln>
-        </p:spPr>
-      </p:sp>
-      <p:sp>
-        <p:nvSpPr>
-          <p:cNvPr id="26" name="Shape 23"/>
-          <p:cNvSpPr/>
-          <p:nvPr/>
-        </p:nvSpPr>
-        <p:spPr>
-          <a:xfrm>
-            <a:off x="4206240" y="3913632"/>
-            <a:ext cx="329184" cy="329184"/>
-          </a:xfrm>
-          <a:prstGeom prst="roundRect">
-            <a:avLst>
-              <a:gd name="adj" fmla="val 138889"/>
-            </a:avLst>
-          </a:prstGeom>
-          <a:solidFill>
-            <a:srgbClr val="08407C"/>
-          </a:solidFill>
-          <a:ln w="12700">
-            <a:solidFill>
-              <a:srgbClr val="08407C"/>
-            </a:solidFill>
-            <a:prstDash val="solid"/>
-          </a:ln>
-        </p:spPr>
-      </p:sp>
-      <p:sp>
-        <p:nvSpPr>
-          <p:cNvPr id="27" name="Text 24"/>
-          <p:cNvSpPr/>
-          <p:nvPr/>
-        </p:nvSpPr>
-        <p:spPr>
-          <a:xfrm>
-            <a:off x="4206240" y="3913632"/>
-            <a:ext cx="329184" cy="329184"/>
-          </a:xfrm>
-          <a:prstGeom prst="rect">
-            <a:avLst/>
-          </a:prstGeom>
-          <a:noFill/>
-          <a:ln/>
-        </p:spPr>
-        <p:txBody>
-          <a:bodyPr wrap="square" lIns="0" tIns="0" rIns="0" bIns="0" rtlCol="0" anchor="ctr"/>
-          <a:lstStyle/>
-          <a:p>
-            <a:pPr algn="ctr" indent="0" marL="0">
-              <a:buNone/>
-            </a:pPr>
-            <a:r>
-              <a:rPr lang="en-US" sz="1050" b="1" dirty="0">
-                <a:solidFill>
-                  <a:srgbClr val="FFFFFF"/>
-                </a:solidFill>
-                <a:latin typeface="Arial" pitchFamily="34" charset="0"/>
-                <a:ea typeface="Arial" pitchFamily="34" charset="-122"/>
-                <a:cs typeface="Arial" pitchFamily="34" charset="-120"/>
-              </a:rPr>
-              <a:t>4</a:t>
-            </a:r>
-            <a:endParaRPr lang="en-US" sz="1050" dirty="0"/>
-          </a:p>
-        </p:txBody>
-      </p:sp>
-      <p:sp>
-        <p:nvSpPr>
-          <p:cNvPr id="28" name="Text 25"/>
-          <p:cNvSpPr/>
-          <p:nvPr/>
-        </p:nvSpPr>
-        <p:spPr>
-          <a:xfrm>
-            <a:off x="4663440" y="3803904"/>
-            <a:ext cx="3913632" cy="237744"/>
-          </a:xfrm>
-          <a:prstGeom prst="rect">
-            <a:avLst/>
-          </a:prstGeom>
-          <a:noFill/>
-          <a:ln/>
-        </p:spPr>
-        <p:txBody>
-          <a:bodyPr wrap="square" lIns="0" tIns="0" rIns="0" bIns="0" rtlCol="0" anchor="ctr"/>
-          <a:lstStyle/>
-          <a:p>
-            <a:pPr indent="0" marL="0">
-              <a:buNone/>
-            </a:pPr>
-            <a:r>
-              <a:rPr lang="en-US" sz="1150" b="1" dirty="0">
-                <a:solidFill>
-                  <a:srgbClr val="08407C"/>
-                </a:solidFill>
-                <a:latin typeface="Arial" pitchFamily="34" charset="0"/>
-                <a:ea typeface="Arial" pitchFamily="34" charset="-122"/>
-                <a:cs typeface="Arial" pitchFamily="34" charset="-120"/>
-              </a:rPr>
-              <a:t>Se coordina antes de firmar</a:t>
-            </a:r>
-            <a:endParaRPr lang="en-US" sz="1150" dirty="0"/>
-          </a:p>
-        </p:txBody>
-      </p:sp>
-      <p:sp>
-        <p:nvSpPr>
-          <p:cNvPr id="29" name="Text 26"/>
-          <p:cNvSpPr/>
-          <p:nvPr/>
-        </p:nvSpPr>
-        <p:spPr>
-          <a:xfrm>
-            <a:off x="4663440" y="4050792"/>
-            <a:ext cx="3913632" cy="329184"/>
-          </a:xfrm>
-          <a:prstGeom prst="rect">
-            <a:avLst/>
-          </a:prstGeom>
-          <a:noFill/>
-          <a:ln/>
-        </p:spPr>
-        <p:txBody>
-          <a:bodyPr wrap="square" lIns="0" tIns="0" rIns="0" bIns="0" rtlCol="0" anchor="ctr"/>
-          <a:lstStyle/>
-          <a:p>
-            <a:pPr indent="0" marL="0">
-              <a:lnSpc>
-                <a:spcPts val="1200"/>
-              </a:lnSpc>
-              <a:buNone/>
-            </a:pPr>
-            <a:r>
-              <a:rPr lang="en-US" sz="950" dirty="0">
-                <a:solidFill>
-                  <a:srgbClr val="2E4258"/>
-                </a:solidFill>
-                <a:latin typeface="Arial" pitchFamily="34" charset="0"/>
-                <a:ea typeface="Arial" pitchFamily="34" charset="-122"/>
-                <a:cs typeface="Arial" pitchFamily="34" charset="-120"/>
-              </a:rPr>
-              <a:t>Conviene resolver el trámite ante ARBA o AGIP para no atrasar la firma.</a:t>
+              <a:t>Suma un importe por encima del precio y lo deposita al fisco a cuenta de las obligaciones futuras del comprador.</a:t>
             </a:r>
             <a:endParaRPr lang="en-US" sz="950" dirty="0"/>
           </a:p>

--- a/capacitaciones/impuestos/Capacitacion-Impuestos-Agentes-Inmobiliarios.pptx
+++ b/capacitaciones/impuestos/Capacitacion-Impuestos-Agentes-Inmobiliarios.pptx
@@ -1482,7 +1482,7 @@
           <a:p>
             <a:r>
               <a:rPr lang="en-US" dirty="0"/>
-              <a:t>Ganancias no es una alícuota única, y esa es la confusión más común. En sociedades son tres tramos (25%, 30% y 35%) que se aplican solo sobre el excedente de cada uno, más un 7% si la utilidad se distribuye como dividendo; si se reinvierte, ese 7% no se paga. En personas humanas es una escala de nueve tramos del 5% al 35%. Lo más útil para el equipo es el tercer bloque: al vender un inmueble, la fecha de compra define todo. Hasta el 31/12/2017 corresponde ITI, 1,5% sobre el precio de venta, se haya ganado o perdido. Desde el 1/1/2018 es el impuesto cedular del 15%, pero sobre la ganancia real. Y la casa-habitación —vivienda única de residencia permanente— está exenta en los dos casos. Los montos de los tramos en pesos se actualizan por IPC todos los años, así que nunca hay que citarlos de memoria.</a:t>
+              <a:t>Ganancias no es una alícuota única, y esa es la confusión más común. En sociedades son tres tramos (25%, 30% y 35%) que se aplican solo sobre el excedente de cada uno, más un 7% si la utilidad se distribuye como dividendo; si se reinvierte, ese 7% no se paga. En personas humanas es una escala de nueve tramos del 5% al 35%. Lo más útil para el equipo es el tercer bloque: al vender un inmueble, la fecha de compra define todo. Si se compró hasta el 31/12/2017 hoy no se paga nada: el ITI, que era el 1,5% sobre el precio de venta, fue derogado por el artículo 67 de la Ley 27.743 en julio de 2024, y el escribano ya no retiene por ese concepto. Si se compró desde el 1/1/2018 corresponde el impuesto cedular del 15%, pero sobre la ganancia real, no sobre el precio. Y la casa-habitación —vivienda única de residencia permanente— está exenta del cedular. Los montos de los tramos en pesos se actualizan por IPC todos los años, así que nunca hay que citarlos de memoria.</a:t>
             </a:r>
             <a:endParaRPr lang="en-US" dirty="0"/>
           </a:p>
@@ -13473,7 +13473,7 @@
                 <a:ea typeface="Arial" pitchFamily="34" charset="-122"/>
                 <a:cs typeface="Arial" pitchFamily="34" charset="-120"/>
               </a:rPr>
-              <a:t>ITI</a:t>
+              <a:t>COMPRADO HASTA EL 31/12/2017</a:t>
             </a:r>
             <a:endParaRPr lang="en-US" sz="850" dirty="0"/>
           </a:p>
@@ -13512,7 +13512,7 @@
                 <a:ea typeface="Arial" pitchFamily="34" charset="-122"/>
                 <a:cs typeface="Arial" pitchFamily="34" charset="-120"/>
               </a:rPr>
-              <a:t>1,5%</a:t>
+              <a:t>No paga</a:t>
             </a:r>
             <a:endParaRPr lang="en-US" sz="2000" dirty="0"/>
           </a:p>
@@ -13554,7 +13554,7 @@
                 <a:ea typeface="Arial" pitchFamily="34" charset="-122"/>
                 <a:cs typeface="Arial" pitchFamily="34" charset="-120"/>
               </a:rPr>
-              <a:t>Comprado hasta el 31/12/2017. Se calcula sobre el precio de venta, no sobre la ganancia.</a:t>
+              <a:t>El ITI de 1,5% quedó derogado por la Ley 27.743 en julio de 2024.</a:t>
             </a:r>
             <a:endParaRPr lang="en-US" sz="950" dirty="0"/>
           </a:p>
@@ -13620,7 +13620,7 @@
                 <a:ea typeface="Arial" pitchFamily="34" charset="-122"/>
                 <a:cs typeface="Arial" pitchFamily="34" charset="-120"/>
               </a:rPr>
-              <a:t>IMPUESTO CEDULAR</a:t>
+              <a:t>COMPRADO DESDE EL 1/1/2018</a:t>
             </a:r>
             <a:endParaRPr lang="en-US" sz="850" dirty="0"/>
           </a:p>
@@ -13701,7 +13701,7 @@
                 <a:ea typeface="Arial" pitchFamily="34" charset="-122"/>
                 <a:cs typeface="Arial" pitchFamily="34" charset="-120"/>
               </a:rPr>
-              <a:t>Comprado desde el 1/1/2018. Sobre la ganancia: precio menos costo actualizado y gastos.</a:t>
+              <a:t>Impuesto cedular sobre la ganancia: precio menos costo actualizado y gastos.</a:t>
             </a:r>
             <a:endParaRPr lang="en-US" sz="950" dirty="0"/>
           </a:p>
@@ -13848,7 +13848,7 @@
                 <a:ea typeface="Arial" pitchFamily="34" charset="-122"/>
                 <a:cs typeface="Arial" pitchFamily="34" charset="-120"/>
               </a:rPr>
-              <a:t>La vivienda única de residencia permanente no paga, en ninguno de los dos regímenes.</a:t>
+              <a:t>La vivienda única de residencia permanente no tributa el cedular.</a:t>
             </a:r>
             <a:endParaRPr lang="en-US" sz="950" dirty="0"/>
           </a:p>

--- a/capacitaciones/impuestos/Capacitacion-Impuestos-Agentes-Inmobiliarios.pptx
+++ b/capacitaciones/impuestos/Capacitacion-Impuestos-Agentes-Inmobiliarios.pptx
@@ -2003,9 +2003,9 @@
                 <a:solidFill>
                   <a:srgbClr val="FFFFFF"/>
                 </a:solidFill>
-                <a:latin typeface="Arial" pitchFamily="34" charset="0"/>
-                <a:ea typeface="Arial" pitchFamily="34" charset="-122"/>
-                <a:cs typeface="Arial" pitchFamily="34" charset="-120"/>
+                <a:latin typeface="Inter" pitchFamily="34" charset="0"/>
+                <a:ea typeface="Inter" pitchFamily="34" charset="-122"/>
+                <a:cs typeface="Inter" pitchFamily="34" charset="-120"/>
               </a:rPr>
               <a:t>Capacitaciones Krak Real Estate</a:t>
             </a:r>
@@ -2045,9 +2045,9 @@
                 <a:solidFill>
                   <a:srgbClr val="FFFFFF"/>
                 </a:solidFill>
-                <a:latin typeface="Arial" pitchFamily="34" charset="0"/>
-                <a:ea typeface="Arial" pitchFamily="34" charset="-122"/>
-                <a:cs typeface="Arial" pitchFamily="34" charset="-120"/>
+                <a:latin typeface="Inter" pitchFamily="34" charset="0"/>
+                <a:ea typeface="Inter" pitchFamily="34" charset="-122"/>
+                <a:cs typeface="Inter" pitchFamily="34" charset="-120"/>
               </a:rPr>
               <a:t>Impuestos para Agentes Inmobiliarios</a:t>
             </a:r>
@@ -2193,17 +2193,17 @@
               <a:buNone/>
             </a:pPr>
             <a:r>
-              <a:rPr lang="en-US" sz="2700" b="1" dirty="0">
+              <a:rPr lang="en-US" sz="2600" b="1" dirty="0">
                 <a:solidFill>
                   <a:srgbClr val="08407C"/>
                 </a:solidFill>
-                <a:latin typeface="Arial" pitchFamily="34" charset="0"/>
-                <a:ea typeface="Arial" pitchFamily="34" charset="-122"/>
-                <a:cs typeface="Arial" pitchFamily="34" charset="-120"/>
+                <a:latin typeface="Inter" pitchFamily="34" charset="0"/>
+                <a:ea typeface="Inter" pitchFamily="34" charset="-122"/>
+                <a:cs typeface="Inter" pitchFamily="34" charset="-120"/>
               </a:rPr>
               <a:t>Sellos: el impuesto de la firma</a:t>
             </a:r>
-            <a:endParaRPr lang="en-US" sz="2700" dirty="0"/>
+            <a:endParaRPr lang="en-US" sz="2600" dirty="0"/>
           </a:p>
         </p:txBody>
       </p:sp>
@@ -2236,9 +2236,9 @@
                 <a:solidFill>
                   <a:srgbClr val="6A7686"/>
                 </a:solidFill>
-                <a:latin typeface="Arial" pitchFamily="34" charset="0"/>
-                <a:ea typeface="Arial" pitchFamily="34" charset="-122"/>
-                <a:cs typeface="Arial" pitchFamily="34" charset="-120"/>
+                <a:latin typeface="Inter" pitchFamily="34" charset="0"/>
+                <a:ea typeface="Inter" pitchFamily="34" charset="-122"/>
+                <a:cs typeface="Inter" pitchFamily="34" charset="-120"/>
               </a:rPr>
               <a:t>Impuesto provincial sobre la instrumentación de actos y contratos.</a:t>
             </a:r>
@@ -2305,9 +2305,9 @@
                 <a:solidFill>
                   <a:srgbClr val="FFFFFF"/>
                 </a:solidFill>
-                <a:latin typeface="Arial" pitchFamily="34" charset="0"/>
-                <a:ea typeface="Arial" pitchFamily="34" charset="-122"/>
-                <a:cs typeface="Arial" pitchFamily="34" charset="-120"/>
+                <a:latin typeface="Inter" pitchFamily="34" charset="0"/>
+                <a:ea typeface="Inter" pitchFamily="34" charset="-122"/>
+                <a:cs typeface="Inter" pitchFamily="34" charset="-120"/>
               </a:rPr>
               <a:t>Se paga una sola vez, al firmar, sobre el valor total del acto.</a:t>
             </a:r>
@@ -2347,9 +2347,9 @@
                 <a:solidFill>
                   <a:srgbClr val="DCE6F2"/>
                 </a:solidFill>
-                <a:latin typeface="Arial" pitchFamily="34" charset="0"/>
-                <a:ea typeface="Arial" pitchFamily="34" charset="-122"/>
-                <a:cs typeface="Arial" pitchFamily="34" charset="-120"/>
+                <a:latin typeface="Inter" pitchFamily="34" charset="0"/>
+                <a:ea typeface="Inter" pitchFamily="34" charset="-122"/>
+                <a:cs typeface="Inter" pitchFamily="34" charset="-120"/>
               </a:rPr>
               <a:t>Alcanza alquileres, boletos de compraventa y contratos comerciales o societarios.</a:t>
             </a:r>
@@ -2376,9 +2376,9 @@
                 <a:solidFill>
                   <a:srgbClr val="DCE6F2"/>
                 </a:solidFill>
-                <a:latin typeface="Arial" pitchFamily="34" charset="0"/>
-                <a:ea typeface="Arial" pitchFamily="34" charset="-122"/>
-                <a:cs typeface="Arial" pitchFamily="34" charset="-120"/>
+                <a:latin typeface="Inter" pitchFamily="34" charset="0"/>
+                <a:ea typeface="Inter" pitchFamily="34" charset="-122"/>
+                <a:cs typeface="Inter" pitchFamily="34" charset="-120"/>
               </a:rPr>
               <a:t>A diferencia de Ingresos Brutos, que se liquida mes a mes, Sellos es un pago único al momento de la firma.</a:t>
             </a:r>
@@ -2469,9 +2469,9 @@
                 <a:solidFill>
                   <a:srgbClr val="FFFFFF"/>
                 </a:solidFill>
-                <a:latin typeface="Arial" pitchFamily="34" charset="0"/>
-                <a:ea typeface="Arial" pitchFamily="34" charset="-122"/>
-                <a:cs typeface="Arial" pitchFamily="34" charset="-120"/>
+                <a:latin typeface="Inter" pitchFamily="34" charset="0"/>
+                <a:ea typeface="Inter" pitchFamily="34" charset="-122"/>
+                <a:cs typeface="Inter" pitchFamily="34" charset="-120"/>
               </a:rPr>
               <a:t>1</a:t>
             </a:r>
@@ -2508,9 +2508,9 @@
                 <a:solidFill>
                   <a:srgbClr val="08407C"/>
                 </a:solidFill>
-                <a:latin typeface="Arial" pitchFamily="34" charset="0"/>
-                <a:ea typeface="Arial" pitchFamily="34" charset="-122"/>
-                <a:cs typeface="Arial" pitchFamily="34" charset="-120"/>
+                <a:latin typeface="Inter" pitchFamily="34" charset="0"/>
+                <a:ea typeface="Inter" pitchFamily="34" charset="-122"/>
+                <a:cs typeface="Inter" pitchFamily="34" charset="-120"/>
               </a:rPr>
               <a:t>La base es el valor total del acto</a:t>
             </a:r>
@@ -2550,9 +2550,9 @@
                 <a:solidFill>
                   <a:srgbClr val="2E4258"/>
                 </a:solidFill>
-                <a:latin typeface="Arial" pitchFamily="34" charset="0"/>
-                <a:ea typeface="Arial" pitchFamily="34" charset="-122"/>
-                <a:cs typeface="Arial" pitchFamily="34" charset="-120"/>
+                <a:latin typeface="Inter" pitchFamily="34" charset="0"/>
+                <a:ea typeface="Inter" pitchFamily="34" charset="-122"/>
+                <a:cs typeface="Inter" pitchFamily="34" charset="-120"/>
               </a:rPr>
               <a:t>En un alquiler, la suma de todos los meses del contrato — no un mes suelto.</a:t>
             </a:r>
@@ -2643,9 +2643,9 @@
                 <a:solidFill>
                   <a:srgbClr val="FFFFFF"/>
                 </a:solidFill>
-                <a:latin typeface="Arial" pitchFamily="34" charset="0"/>
-                <a:ea typeface="Arial" pitchFamily="34" charset="-122"/>
-                <a:cs typeface="Arial" pitchFamily="34" charset="-120"/>
+                <a:latin typeface="Inter" pitchFamily="34" charset="0"/>
+                <a:ea typeface="Inter" pitchFamily="34" charset="-122"/>
+                <a:cs typeface="Inter" pitchFamily="34" charset="-120"/>
               </a:rPr>
               <a:t>2</a:t>
             </a:r>
@@ -2682,9 +2682,9 @@
                 <a:solidFill>
                   <a:srgbClr val="08407C"/>
                 </a:solidFill>
-                <a:latin typeface="Arial" pitchFamily="34" charset="0"/>
-                <a:ea typeface="Arial" pitchFamily="34" charset="-122"/>
-                <a:cs typeface="Arial" pitchFamily="34" charset="-120"/>
+                <a:latin typeface="Inter" pitchFamily="34" charset="0"/>
+                <a:ea typeface="Inter" pitchFamily="34" charset="-122"/>
+                <a:cs typeface="Inter" pitchFamily="34" charset="-120"/>
               </a:rPr>
               <a:t>Impacta la rentabilidad neta</a:t>
             </a:r>
@@ -2724,9 +2724,9 @@
                 <a:solidFill>
                   <a:srgbClr val="2E4258"/>
                 </a:solidFill>
-                <a:latin typeface="Arial" pitchFamily="34" charset="0"/>
-                <a:ea typeface="Arial" pitchFamily="34" charset="-122"/>
-                <a:cs typeface="Arial" pitchFamily="34" charset="-120"/>
+                <a:latin typeface="Inter" pitchFamily="34" charset="0"/>
+                <a:ea typeface="Inter" pitchFamily="34" charset="-122"/>
+                <a:cs typeface="Inter" pitchFamily="34" charset="-120"/>
               </a:rPr>
               <a:t>Sellos es un costo de la operación: hay que sumarlo al cálculo, no mirar solo la comisión.</a:t>
             </a:r>
@@ -2817,9 +2817,9 @@
                 <a:solidFill>
                   <a:srgbClr val="FFFFFF"/>
                 </a:solidFill>
-                <a:latin typeface="Arial" pitchFamily="34" charset="0"/>
-                <a:ea typeface="Arial" pitchFamily="34" charset="-122"/>
-                <a:cs typeface="Arial" pitchFamily="34" charset="-120"/>
+                <a:latin typeface="Inter" pitchFamily="34" charset="0"/>
+                <a:ea typeface="Inter" pitchFamily="34" charset="-122"/>
+                <a:cs typeface="Inter" pitchFamily="34" charset="-120"/>
               </a:rPr>
               <a:t>3</a:t>
             </a:r>
@@ -2856,9 +2856,9 @@
                 <a:solidFill>
                   <a:srgbClr val="08407C"/>
                 </a:solidFill>
-                <a:latin typeface="Arial" pitchFamily="34" charset="0"/>
-                <a:ea typeface="Arial" pitchFamily="34" charset="-122"/>
-                <a:cs typeface="Arial" pitchFamily="34" charset="-120"/>
+                <a:latin typeface="Inter" pitchFamily="34" charset="0"/>
+                <a:ea typeface="Inter" pitchFamily="34" charset="-122"/>
+                <a:cs typeface="Inter" pitchFamily="34" charset="-120"/>
               </a:rPr>
               <a:t>El sellado da fecha cierta</a:t>
             </a:r>
@@ -2898,9 +2898,9 @@
                 <a:solidFill>
                   <a:srgbClr val="2E4258"/>
                 </a:solidFill>
-                <a:latin typeface="Arial" pitchFamily="34" charset="0"/>
-                <a:ea typeface="Arial" pitchFamily="34" charset="-122"/>
-                <a:cs typeface="Arial" pitchFamily="34" charset="-120"/>
+                <a:latin typeface="Inter" pitchFamily="34" charset="0"/>
+                <a:ea typeface="Inter" pitchFamily="34" charset="-122"/>
+                <a:cs typeface="Inter" pitchFamily="34" charset="-120"/>
               </a:rPr>
               <a:t>Sin sellar, el contrato pierde fuerza probatoria ante el fisco y ante la contraparte.</a:t>
             </a:r>
@@ -2991,9 +2991,9 @@
                 <a:solidFill>
                   <a:srgbClr val="FFFFFF"/>
                 </a:solidFill>
-                <a:latin typeface="Arial" pitchFamily="34" charset="0"/>
-                <a:ea typeface="Arial" pitchFamily="34" charset="-122"/>
-                <a:cs typeface="Arial" pitchFamily="34" charset="-120"/>
+                <a:latin typeface="Inter" pitchFamily="34" charset="0"/>
+                <a:ea typeface="Inter" pitchFamily="34" charset="-122"/>
+                <a:cs typeface="Inter" pitchFamily="34" charset="-120"/>
               </a:rPr>
               <a:t>4</a:t>
             </a:r>
@@ -3030,9 +3030,9 @@
                 <a:solidFill>
                   <a:srgbClr val="08407C"/>
                 </a:solidFill>
-                <a:latin typeface="Arial" pitchFamily="34" charset="0"/>
-                <a:ea typeface="Arial" pitchFamily="34" charset="-122"/>
-                <a:cs typeface="Arial" pitchFamily="34" charset="-120"/>
+                <a:latin typeface="Inter" pitchFamily="34" charset="0"/>
+                <a:ea typeface="Inter" pitchFamily="34" charset="-122"/>
+                <a:cs typeface="Inter" pitchFamily="34" charset="-120"/>
               </a:rPr>
               <a:t>Se coordina antes de firmar</a:t>
             </a:r>
@@ -3072,9 +3072,9 @@
                 <a:solidFill>
                   <a:srgbClr val="2E4258"/>
                 </a:solidFill>
-                <a:latin typeface="Arial" pitchFamily="34" charset="0"/>
-                <a:ea typeface="Arial" pitchFamily="34" charset="-122"/>
-                <a:cs typeface="Arial" pitchFamily="34" charset="-120"/>
+                <a:latin typeface="Inter" pitchFamily="34" charset="0"/>
+                <a:ea typeface="Inter" pitchFamily="34" charset="-122"/>
+                <a:cs typeface="Inter" pitchFamily="34" charset="-120"/>
               </a:rPr>
               <a:t>Conviene resolver el trámite ante ARBA o AGIP para no atrasar la firma.</a:t>
             </a:r>
@@ -3220,17 +3220,17 @@
               <a:buNone/>
             </a:pPr>
             <a:r>
-              <a:rPr lang="en-US" sz="2700" b="1" dirty="0">
+              <a:rPr lang="en-US" sz="2600" b="1" dirty="0">
                 <a:solidFill>
                   <a:srgbClr val="08407C"/>
                 </a:solidFill>
-                <a:latin typeface="Arial" pitchFamily="34" charset="0"/>
-                <a:ea typeface="Arial" pitchFamily="34" charset="-122"/>
-                <a:cs typeface="Arial" pitchFamily="34" charset="-120"/>
+                <a:latin typeface="Inter" pitchFamily="34" charset="0"/>
+                <a:ea typeface="Inter" pitchFamily="34" charset="-122"/>
+                <a:cs typeface="Inter" pitchFamily="34" charset="-120"/>
               </a:rPr>
               <a:t>Los impuestos del inmueble</a:t>
             </a:r>
-            <a:endParaRPr lang="en-US" sz="2700" dirty="0"/>
+            <a:endParaRPr lang="en-US" sz="2600" dirty="0"/>
           </a:p>
         </p:txBody>
       </p:sp>
@@ -3263,9 +3263,9 @@
                 <a:solidFill>
                   <a:srgbClr val="6A7686"/>
                 </a:solidFill>
-                <a:latin typeface="Arial" pitchFamily="34" charset="0"/>
-                <a:ea typeface="Arial" pitchFamily="34" charset="-122"/>
-                <a:cs typeface="Arial" pitchFamily="34" charset="-120"/>
+                <a:latin typeface="Inter" pitchFamily="34" charset="0"/>
+                <a:ea typeface="Inter" pitchFamily="34" charset="-122"/>
+                <a:cs typeface="Inter" pitchFamily="34" charset="-120"/>
               </a:rPr>
               <a:t>Lo que paga el propietario — y lo que hay que saber leer para tasar y asesorar.</a:t>
             </a:r>
@@ -3332,9 +3332,9 @@
                 <a:solidFill>
                   <a:srgbClr val="FFFFFF"/>
                 </a:solidFill>
-                <a:latin typeface="Arial" pitchFamily="34" charset="0"/>
-                <a:ea typeface="Arial" pitchFamily="34" charset="-122"/>
-                <a:cs typeface="Arial" pitchFamily="34" charset="-120"/>
+                <a:latin typeface="Inter" pitchFamily="34" charset="0"/>
+                <a:ea typeface="Inter" pitchFamily="34" charset="-122"/>
+                <a:cs typeface="Inter" pitchFamily="34" charset="-120"/>
               </a:rPr>
               <a:t>Impuesto Inmobiliario</a:t>
             </a:r>
@@ -3371,9 +3371,9 @@
                 <a:solidFill>
                   <a:srgbClr val="C9D6E6"/>
                 </a:solidFill>
-                <a:latin typeface="Arial" pitchFamily="34" charset="0"/>
-                <a:ea typeface="Arial" pitchFamily="34" charset="-122"/>
-                <a:cs typeface="Arial" pitchFamily="34" charset="-120"/>
+                <a:latin typeface="Inter" pitchFamily="34" charset="0"/>
+                <a:ea typeface="Inter" pitchFamily="34" charset="-122"/>
+                <a:cs typeface="Inter" pitchFamily="34" charset="-120"/>
               </a:rPr>
               <a:t>ARBA (PBA)</a:t>
             </a:r>
@@ -3413,9 +3413,9 @@
                 <a:solidFill>
                   <a:srgbClr val="EAEFF5"/>
                 </a:solidFill>
-                <a:latin typeface="Arial" pitchFamily="34" charset="0"/>
-                <a:ea typeface="Arial" pitchFamily="34" charset="-122"/>
-                <a:cs typeface="Arial" pitchFamily="34" charset="-120"/>
+                <a:latin typeface="Inter" pitchFamily="34" charset="0"/>
+                <a:ea typeface="Inter" pitchFamily="34" charset="-122"/>
+                <a:cs typeface="Inter" pitchFamily="34" charset="-120"/>
               </a:rPr>
               <a:t>Sobre la titularidad del inmueble, calculado sobre la valuación fiscal. Vencimientos bimestrales o trimestrales. En CABA no existe por separado: va dentro del ABL.</a:t>
             </a:r>
@@ -3482,9 +3482,9 @@
                 <a:solidFill>
                   <a:srgbClr val="FFFFFF"/>
                 </a:solidFill>
-                <a:latin typeface="Arial" pitchFamily="34" charset="0"/>
-                <a:ea typeface="Arial" pitchFamily="34" charset="-122"/>
-                <a:cs typeface="Arial" pitchFamily="34" charset="-120"/>
+                <a:latin typeface="Inter" pitchFamily="34" charset="0"/>
+                <a:ea typeface="Inter" pitchFamily="34" charset="-122"/>
+                <a:cs typeface="Inter" pitchFamily="34" charset="-120"/>
               </a:rPr>
               <a:t>ABL / TSU</a:t>
             </a:r>
@@ -3521,9 +3521,9 @@
                 <a:solidFill>
                   <a:srgbClr val="C9D6E6"/>
                 </a:solidFill>
-                <a:latin typeface="Arial" pitchFamily="34" charset="0"/>
-                <a:ea typeface="Arial" pitchFamily="34" charset="-122"/>
-                <a:cs typeface="Arial" pitchFamily="34" charset="-120"/>
+                <a:latin typeface="Inter" pitchFamily="34" charset="0"/>
+                <a:ea typeface="Inter" pitchFamily="34" charset="-122"/>
+                <a:cs typeface="Inter" pitchFamily="34" charset="-120"/>
               </a:rPr>
               <a:t>AGIP · MUNICIPIO</a:t>
             </a:r>
@@ -3563,9 +3563,9 @@
                 <a:solidFill>
                   <a:srgbClr val="EAEFF5"/>
                 </a:solidFill>
-                <a:latin typeface="Arial" pitchFamily="34" charset="0"/>
-                <a:ea typeface="Arial" pitchFamily="34" charset="-122"/>
-                <a:cs typeface="Arial" pitchFamily="34" charset="-120"/>
+                <a:latin typeface="Inter" pitchFamily="34" charset="0"/>
+                <a:ea typeface="Inter" pitchFamily="34" charset="-122"/>
+                <a:cs typeface="Inter" pitchFamily="34" charset="-120"/>
               </a:rPr>
               <a:t>Alumbrado, Barrido y Limpieza en CABA; fuera, cada municipio tiene su Tasa de Servicios Urbanos. Retribuye servicios urbanos sobre el inmueble.</a:t>
             </a:r>
@@ -3632,9 +3632,9 @@
                 <a:solidFill>
                   <a:srgbClr val="FFFFFF"/>
                 </a:solidFill>
-                <a:latin typeface="Arial" pitchFamily="34" charset="0"/>
-                <a:ea typeface="Arial" pitchFamily="34" charset="-122"/>
-                <a:cs typeface="Arial" pitchFamily="34" charset="-120"/>
+                <a:latin typeface="Inter" pitchFamily="34" charset="0"/>
+                <a:ea typeface="Inter" pitchFamily="34" charset="-122"/>
+                <a:cs typeface="Inter" pitchFamily="34" charset="-120"/>
               </a:rPr>
               <a:t>Patentes</a:t>
             </a:r>
@@ -3671,9 +3671,9 @@
                 <a:solidFill>
                   <a:srgbClr val="C9D6E6"/>
                 </a:solidFill>
-                <a:latin typeface="Arial" pitchFamily="34" charset="0"/>
-                <a:ea typeface="Arial" pitchFamily="34" charset="-122"/>
-                <a:cs typeface="Arial" pitchFamily="34" charset="-120"/>
+                <a:latin typeface="Inter" pitchFamily="34" charset="0"/>
+                <a:ea typeface="Inter" pitchFamily="34" charset="-122"/>
+                <a:cs typeface="Inter" pitchFamily="34" charset="-120"/>
               </a:rPr>
               <a:t>ARBA · AGIP</a:t>
             </a:r>
@@ -3713,9 +3713,9 @@
                 <a:solidFill>
                   <a:srgbClr val="EAEFF5"/>
                 </a:solidFill>
-                <a:latin typeface="Arial" pitchFamily="34" charset="0"/>
-                <a:ea typeface="Arial" pitchFamily="34" charset="-122"/>
-                <a:cs typeface="Arial" pitchFamily="34" charset="-120"/>
+                <a:latin typeface="Inter" pitchFamily="34" charset="0"/>
+                <a:ea typeface="Inter" pitchFamily="34" charset="-122"/>
+                <a:cs typeface="Inter" pitchFamily="34" charset="-120"/>
               </a:rPr>
               <a:t>Sobre la titularidad de un vehículo, según valuación fiscal por marca, modelo y año. En PBA se cobra habitualmente en cinco cuotas anuales.</a:t>
             </a:r>
@@ -3782,9 +3782,9 @@
                 <a:solidFill>
                   <a:srgbClr val="FFFFFF"/>
                 </a:solidFill>
-                <a:latin typeface="Arial" pitchFamily="34" charset="0"/>
-                <a:ea typeface="Arial" pitchFamily="34" charset="-122"/>
-                <a:cs typeface="Arial" pitchFamily="34" charset="-120"/>
+                <a:latin typeface="Inter" pitchFamily="34" charset="0"/>
+                <a:ea typeface="Inter" pitchFamily="34" charset="-122"/>
+                <a:cs typeface="Inter" pitchFamily="34" charset="-120"/>
               </a:rPr>
               <a:t>Seguridad e Higiene</a:t>
             </a:r>
@@ -3821,9 +3821,9 @@
                 <a:solidFill>
                   <a:srgbClr val="C9D6E6"/>
                 </a:solidFill>
-                <a:latin typeface="Arial" pitchFamily="34" charset="0"/>
-                <a:ea typeface="Arial" pitchFamily="34" charset="-122"/>
-                <a:cs typeface="Arial" pitchFamily="34" charset="-120"/>
+                <a:latin typeface="Inter" pitchFamily="34" charset="0"/>
+                <a:ea typeface="Inter" pitchFamily="34" charset="-122"/>
+                <a:cs typeface="Inter" pitchFamily="34" charset="-120"/>
               </a:rPr>
               <a:t>MUNICIPIO</a:t>
             </a:r>
@@ -3863,9 +3863,9 @@
                 <a:solidFill>
                   <a:srgbClr val="EAEFF5"/>
                 </a:solidFill>
-                <a:latin typeface="Arial" pitchFamily="34" charset="0"/>
-                <a:ea typeface="Arial" pitchFamily="34" charset="-122"/>
-                <a:cs typeface="Arial" pitchFamily="34" charset="-120"/>
+                <a:latin typeface="Inter" pitchFamily="34" charset="0"/>
+                <a:ea typeface="Inter" pitchFamily="34" charset="-122"/>
+                <a:cs typeface="Inter" pitchFamily="34" charset="-120"/>
               </a:rPr>
               <a:t>Tasa municipal por desarrollar actividad comercial en un local. Base variable: ingresos, superficie o ambas. Va de la mano de la habilitación.</a:t>
             </a:r>
@@ -3908,7 +3908,7 @@
         </p:nvSpPr>
         <p:spPr>
           <a:xfrm>
-            <a:off x="841248" y="4078224"/>
+            <a:off x="841248" y="4050792"/>
             <a:ext cx="7626096" cy="201168"/>
           </a:xfrm>
           <a:prstGeom prst="rect">
@@ -3925,17 +3925,17 @@
               <a:buNone/>
             </a:pPr>
             <a:r>
-              <a:rPr lang="en-US" sz="950" b="1" spc="120" kern="0" dirty="0">
+              <a:rPr lang="en-US" sz="900" b="1" spc="120" kern="0" dirty="0">
                 <a:solidFill>
                   <a:srgbClr val="FFFFFF"/>
                 </a:solidFill>
-                <a:latin typeface="Arial" pitchFamily="34" charset="0"/>
-                <a:ea typeface="Arial" pitchFamily="34" charset="-122"/>
-                <a:cs typeface="Arial" pitchFamily="34" charset="-120"/>
+                <a:latin typeface="Inter" pitchFamily="34" charset="0"/>
+                <a:ea typeface="Inter" pitchFamily="34" charset="-122"/>
+                <a:cs typeface="Inter" pitchFamily="34" charset="-120"/>
               </a:rPr>
               <a:t>IMPUESTO NO ES LO MISMO QUE TASA</a:t>
             </a:r>
-            <a:endParaRPr lang="en-US" sz="950" dirty="0"/>
+            <a:endParaRPr lang="en-US" sz="900" dirty="0"/>
           </a:p>
         </p:txBody>
       </p:sp>
@@ -3947,8 +3947,8 @@
         </p:nvSpPr>
         <p:spPr>
           <a:xfrm>
-            <a:off x="841248" y="4270248"/>
-            <a:ext cx="7607808" cy="329184"/>
+            <a:off x="841248" y="4251960"/>
+            <a:ext cx="7607808" cy="347472"/>
           </a:xfrm>
           <a:prstGeom prst="rect">
             <a:avLst/>
@@ -3967,17 +3967,17 @@
               <a:buNone/>
             </a:pPr>
             <a:r>
-              <a:rPr lang="en-US" sz="1150" dirty="0">
+              <a:rPr lang="en-US" sz="1100" dirty="0">
                 <a:solidFill>
                   <a:srgbClr val="FFFFFF"/>
                 </a:solidFill>
-                <a:latin typeface="Arial" pitchFamily="34" charset="0"/>
-                <a:ea typeface="Arial" pitchFamily="34" charset="-122"/>
-                <a:cs typeface="Arial" pitchFamily="34" charset="-120"/>
+                <a:latin typeface="Inter" pitchFamily="34" charset="0"/>
+                <a:ea typeface="Inter" pitchFamily="34" charset="-122"/>
+                <a:cs typeface="Inter" pitchFamily="34" charset="-120"/>
               </a:rPr>
               <a:t>El impuesto no tiene contraprestación directa (Ganancias, IVA). La tasa siempre retribuye un servicio concreto: alumbrado, inspecciones, habilitación.</a:t>
             </a:r>
-            <a:endParaRPr lang="en-US" sz="1150" dirty="0"/>
+            <a:endParaRPr lang="en-US" sz="1100" dirty="0"/>
           </a:p>
         </p:txBody>
       </p:sp>
@@ -4119,17 +4119,17 @@
               <a:buNone/>
             </a:pPr>
             <a:r>
-              <a:rPr lang="en-US" sz="2700" b="1" dirty="0">
+              <a:rPr lang="en-US" sz="2600" b="1" dirty="0">
                 <a:solidFill>
                   <a:srgbClr val="08407C"/>
                 </a:solidFill>
-                <a:latin typeface="Arial" pitchFamily="34" charset="0"/>
-                <a:ea typeface="Arial" pitchFamily="34" charset="-122"/>
-                <a:cs typeface="Arial" pitchFamily="34" charset="-120"/>
+                <a:latin typeface="Inter" pitchFamily="34" charset="0"/>
+                <a:ea typeface="Inter" pitchFamily="34" charset="-122"/>
+                <a:cs typeface="Inter" pitchFamily="34" charset="-120"/>
               </a:rPr>
               <a:t>El control de todos los días</a:t>
             </a:r>
-            <a:endParaRPr lang="en-US" sz="2700" dirty="0"/>
+            <a:endParaRPr lang="en-US" sz="2600" dirty="0"/>
           </a:p>
         </p:txBody>
       </p:sp>
@@ -4162,9 +4162,9 @@
                 <a:solidFill>
                   <a:srgbClr val="6A7686"/>
                 </a:solidFill>
-                <a:latin typeface="Arial" pitchFamily="34" charset="0"/>
-                <a:ea typeface="Arial" pitchFamily="34" charset="-122"/>
-                <a:cs typeface="Arial" pitchFamily="34" charset="-120"/>
+                <a:latin typeface="Inter" pitchFamily="34" charset="0"/>
+                <a:ea typeface="Inter" pitchFamily="34" charset="-122"/>
+                <a:cs typeface="Inter" pitchFamily="34" charset="-120"/>
               </a:rPr>
               <a:t>Qué verificar antes de pagar, y qué errores salen más caros.</a:t>
             </a:r>
@@ -4228,9 +4228,9 @@
                 <a:solidFill>
                   <a:srgbClr val="FFFFFF"/>
                 </a:solidFill>
-                <a:latin typeface="Arial" pitchFamily="34" charset="0"/>
-                <a:ea typeface="Arial" pitchFamily="34" charset="-122"/>
-                <a:cs typeface="Arial" pitchFamily="34" charset="-120"/>
+                <a:latin typeface="Inter" pitchFamily="34" charset="0"/>
+                <a:ea typeface="Inter" pitchFamily="34" charset="-122"/>
+                <a:cs typeface="Inter" pitchFamily="34" charset="-120"/>
               </a:rPr>
               <a:t>SÍ — CONTROLAR SIEMPRE</a:t>
             </a:r>
@@ -4294,9 +4294,9 @@
                 <a:solidFill>
                   <a:srgbClr val="FFFFFF"/>
                 </a:solidFill>
-                <a:latin typeface="Arial" pitchFamily="34" charset="0"/>
-                <a:ea typeface="Arial" pitchFamily="34" charset="-122"/>
-                <a:cs typeface="Arial" pitchFamily="34" charset="-120"/>
+                <a:latin typeface="Inter" pitchFamily="34" charset="0"/>
+                <a:ea typeface="Inter" pitchFamily="34" charset="-122"/>
+                <a:cs typeface="Inter" pitchFamily="34" charset="-120"/>
               </a:rPr>
               <a:t>NO — ERRORES QUE SALEN CAROS</a:t>
             </a:r>
@@ -4360,9 +4360,9 @@
                 <a:solidFill>
                   <a:srgbClr val="FFFFFF"/>
                 </a:solidFill>
-                <a:latin typeface="Arial" pitchFamily="34" charset="0"/>
-                <a:ea typeface="Arial" pitchFamily="34" charset="-122"/>
-                <a:cs typeface="Arial" pitchFamily="34" charset="-120"/>
+                <a:latin typeface="Inter" pitchFamily="34" charset="0"/>
+                <a:ea typeface="Inter" pitchFamily="34" charset="-122"/>
+                <a:cs typeface="Inter" pitchFamily="34" charset="-120"/>
               </a:rPr>
               <a:t>✓</a:t>
             </a:r>
@@ -4402,9 +4402,9 @@
                 <a:solidFill>
                   <a:srgbClr val="2E4258"/>
                 </a:solidFill>
-                <a:latin typeface="Arial" pitchFamily="34" charset="0"/>
-                <a:ea typeface="Arial" pitchFamily="34" charset="-122"/>
-                <a:cs typeface="Arial" pitchFamily="34" charset="-120"/>
+                <a:latin typeface="Inter" pitchFamily="34" charset="0"/>
+                <a:ea typeface="Inter" pitchFamily="34" charset="-122"/>
+                <a:cs typeface="Inter" pitchFamily="34" charset="-120"/>
               </a:rPr>
               <a:t>Que el CUIT esté activo y no dado de baja.</a:t>
             </a:r>
@@ -4468,9 +4468,9 @@
                 <a:solidFill>
                   <a:srgbClr val="FFFFFF"/>
                 </a:solidFill>
-                <a:latin typeface="Arial" pitchFamily="34" charset="0"/>
-                <a:ea typeface="Arial" pitchFamily="34" charset="-122"/>
-                <a:cs typeface="Arial" pitchFamily="34" charset="-120"/>
+                <a:latin typeface="Inter" pitchFamily="34" charset="0"/>
+                <a:ea typeface="Inter" pitchFamily="34" charset="-122"/>
+                <a:cs typeface="Inter" pitchFamily="34" charset="-120"/>
               </a:rPr>
               <a:t>✓</a:t>
             </a:r>
@@ -4510,9 +4510,9 @@
                 <a:solidFill>
                   <a:srgbClr val="2E4258"/>
                 </a:solidFill>
-                <a:latin typeface="Arial" pitchFamily="34" charset="0"/>
-                <a:ea typeface="Arial" pitchFamily="34" charset="-122"/>
-                <a:cs typeface="Arial" pitchFamily="34" charset="-120"/>
+                <a:latin typeface="Inter" pitchFamily="34" charset="0"/>
+                <a:ea typeface="Inter" pitchFamily="34" charset="-122"/>
+                <a:cs typeface="Inter" pitchFamily="34" charset="-120"/>
               </a:rPr>
               <a:t>Que la condición de IVA de la constancia coincida con el tipo de factura.</a:t>
             </a:r>
@@ -4576,9 +4576,9 @@
                 <a:solidFill>
                   <a:srgbClr val="FFFFFF"/>
                 </a:solidFill>
-                <a:latin typeface="Arial" pitchFamily="34" charset="0"/>
-                <a:ea typeface="Arial" pitchFamily="34" charset="-122"/>
-                <a:cs typeface="Arial" pitchFamily="34" charset="-120"/>
+                <a:latin typeface="Inter" pitchFamily="34" charset="0"/>
+                <a:ea typeface="Inter" pitchFamily="34" charset="-122"/>
+                <a:cs typeface="Inter" pitchFamily="34" charset="-120"/>
               </a:rPr>
               <a:t>✓</a:t>
             </a:r>
@@ -4618,9 +4618,9 @@
                 <a:solidFill>
                   <a:srgbClr val="2E4258"/>
                 </a:solidFill>
-                <a:latin typeface="Arial" pitchFamily="34" charset="0"/>
-                <a:ea typeface="Arial" pitchFamily="34" charset="-122"/>
-                <a:cs typeface="Arial" pitchFamily="34" charset="-120"/>
+                <a:latin typeface="Inter" pitchFamily="34" charset="0"/>
+                <a:ea typeface="Inter" pitchFamily="34" charset="-122"/>
+                <a:cs typeface="Inter" pitchFamily="34" charset="-120"/>
               </a:rPr>
               <a:t>Que el comprobante tenga CAE vigente.</a:t>
             </a:r>
@@ -4684,9 +4684,9 @@
                 <a:solidFill>
                   <a:srgbClr val="FFFFFF"/>
                 </a:solidFill>
-                <a:latin typeface="Arial" pitchFamily="34" charset="0"/>
-                <a:ea typeface="Arial" pitchFamily="34" charset="-122"/>
-                <a:cs typeface="Arial" pitchFamily="34" charset="-120"/>
+                <a:latin typeface="Inter" pitchFamily="34" charset="0"/>
+                <a:ea typeface="Inter" pitchFamily="34" charset="-122"/>
+                <a:cs typeface="Inter" pitchFamily="34" charset="-120"/>
               </a:rPr>
               <a:t>✓</a:t>
             </a:r>
@@ -4726,9 +4726,9 @@
                 <a:solidFill>
                   <a:srgbClr val="2E4258"/>
                 </a:solidFill>
-                <a:latin typeface="Arial" pitchFamily="34" charset="0"/>
-                <a:ea typeface="Arial" pitchFamily="34" charset="-122"/>
-                <a:cs typeface="Arial" pitchFamily="34" charset="-120"/>
+                <a:latin typeface="Inter" pitchFamily="34" charset="0"/>
+                <a:ea typeface="Inter" pitchFamily="34" charset="-122"/>
+                <a:cs typeface="Inter" pitchFamily="34" charset="-120"/>
               </a:rPr>
               <a:t>Que el CBU esté a nombre del mismo CUIT que factura.</a:t>
             </a:r>
@@ -4792,9 +4792,9 @@
                 <a:solidFill>
                   <a:srgbClr val="FFFFFF"/>
                 </a:solidFill>
-                <a:latin typeface="Arial" pitchFamily="34" charset="0"/>
-                <a:ea typeface="Arial" pitchFamily="34" charset="-122"/>
-                <a:cs typeface="Arial" pitchFamily="34" charset="-120"/>
+                <a:latin typeface="Inter" pitchFamily="34" charset="0"/>
+                <a:ea typeface="Inter" pitchFamily="34" charset="-122"/>
+                <a:cs typeface="Inter" pitchFamily="34" charset="-120"/>
               </a:rPr>
               <a:t>✓</a:t>
             </a:r>
@@ -4834,9 +4834,9 @@
                 <a:solidFill>
                   <a:srgbClr val="2E4258"/>
                 </a:solidFill>
-                <a:latin typeface="Arial" pitchFamily="34" charset="0"/>
-                <a:ea typeface="Arial" pitchFamily="34" charset="-122"/>
-                <a:cs typeface="Arial" pitchFamily="34" charset="-120"/>
+                <a:latin typeface="Inter" pitchFamily="34" charset="0"/>
+                <a:ea typeface="Inter" pitchFamily="34" charset="-122"/>
+                <a:cs typeface="Inter" pitchFamily="34" charset="-120"/>
               </a:rPr>
               <a:t>Que el contrato de alquiler esté sellado antes de firmar.</a:t>
             </a:r>
@@ -4900,9 +4900,9 @@
                 <a:solidFill>
                   <a:srgbClr val="FFFFFF"/>
                 </a:solidFill>
-                <a:latin typeface="Arial" pitchFamily="34" charset="0"/>
-                <a:ea typeface="Arial" pitchFamily="34" charset="-122"/>
-                <a:cs typeface="Arial" pitchFamily="34" charset="-120"/>
+                <a:latin typeface="Inter" pitchFamily="34" charset="0"/>
+                <a:ea typeface="Inter" pitchFamily="34" charset="-122"/>
+                <a:cs typeface="Inter" pitchFamily="34" charset="-120"/>
               </a:rPr>
               <a:t>✕</a:t>
             </a:r>
@@ -4942,9 +4942,9 @@
                 <a:solidFill>
                   <a:srgbClr val="2E4258"/>
                 </a:solidFill>
-                <a:latin typeface="Arial" pitchFamily="34" charset="0"/>
-                <a:ea typeface="Arial" pitchFamily="34" charset="-122"/>
-                <a:cs typeface="Arial" pitchFamily="34" charset="-120"/>
+                <a:latin typeface="Inter" pitchFamily="34" charset="0"/>
+                <a:ea typeface="Inter" pitchFamily="34" charset="-122"/>
+                <a:cs typeface="Inter" pitchFamily="34" charset="-120"/>
               </a:rPr>
               <a:t>Pagar una factura sin verificar el CAE.</a:t>
             </a:r>
@@ -5008,9 +5008,9 @@
                 <a:solidFill>
                   <a:srgbClr val="FFFFFF"/>
                 </a:solidFill>
-                <a:latin typeface="Arial" pitchFamily="34" charset="0"/>
-                <a:ea typeface="Arial" pitchFamily="34" charset="-122"/>
-                <a:cs typeface="Arial" pitchFamily="34" charset="-120"/>
+                <a:latin typeface="Inter" pitchFamily="34" charset="0"/>
+                <a:ea typeface="Inter" pitchFamily="34" charset="-122"/>
+                <a:cs typeface="Inter" pitchFamily="34" charset="-120"/>
               </a:rPr>
               <a:t>✕</a:t>
             </a:r>
@@ -5050,9 +5050,9 @@
                 <a:solidFill>
                   <a:srgbClr val="2E4258"/>
                 </a:solidFill>
-                <a:latin typeface="Arial" pitchFamily="34" charset="0"/>
-                <a:ea typeface="Arial" pitchFamily="34" charset="-122"/>
-                <a:cs typeface="Arial" pitchFamily="34" charset="-120"/>
+                <a:latin typeface="Inter" pitchFamily="34" charset="0"/>
+                <a:ea typeface="Inter" pitchFamily="34" charset="-122"/>
+                <a:cs typeface="Inter" pitchFamily="34" charset="-120"/>
               </a:rPr>
               <a:t>No presentar la DDJJ por no tener actividad en el período.</a:t>
             </a:r>
@@ -5116,9 +5116,9 @@
                 <a:solidFill>
                   <a:srgbClr val="FFFFFF"/>
                 </a:solidFill>
-                <a:latin typeface="Arial" pitchFamily="34" charset="0"/>
-                <a:ea typeface="Arial" pitchFamily="34" charset="-122"/>
-                <a:cs typeface="Arial" pitchFamily="34" charset="-120"/>
+                <a:latin typeface="Inter" pitchFamily="34" charset="0"/>
+                <a:ea typeface="Inter" pitchFamily="34" charset="-122"/>
+                <a:cs typeface="Inter" pitchFamily="34" charset="-120"/>
               </a:rPr>
               <a:t>✕</a:t>
             </a:r>
@@ -5158,9 +5158,9 @@
                 <a:solidFill>
                   <a:srgbClr val="2E4258"/>
                 </a:solidFill>
-                <a:latin typeface="Arial" pitchFamily="34" charset="0"/>
-                <a:ea typeface="Arial" pitchFamily="34" charset="-122"/>
-                <a:cs typeface="Arial" pitchFamily="34" charset="-120"/>
+                <a:latin typeface="Inter" pitchFamily="34" charset="0"/>
+                <a:ea typeface="Inter" pitchFamily="34" charset="-122"/>
+                <a:cs typeface="Inter" pitchFamily="34" charset="-120"/>
               </a:rPr>
               <a:t>No recategorizar el Monotributo en febrero y agosto.</a:t>
             </a:r>
@@ -5224,9 +5224,9 @@
                 <a:solidFill>
                   <a:srgbClr val="FFFFFF"/>
                 </a:solidFill>
-                <a:latin typeface="Arial" pitchFamily="34" charset="0"/>
-                <a:ea typeface="Arial" pitchFamily="34" charset="-122"/>
-                <a:cs typeface="Arial" pitchFamily="34" charset="-120"/>
+                <a:latin typeface="Inter" pitchFamily="34" charset="0"/>
+                <a:ea typeface="Inter" pitchFamily="34" charset="-122"/>
+                <a:cs typeface="Inter" pitchFamily="34" charset="-120"/>
               </a:rPr>
               <a:t>✕</a:t>
             </a:r>
@@ -5266,9 +5266,9 @@
                 <a:solidFill>
                   <a:srgbClr val="2E4258"/>
                 </a:solidFill>
-                <a:latin typeface="Arial" pitchFamily="34" charset="0"/>
-                <a:ea typeface="Arial" pitchFamily="34" charset="-122"/>
-                <a:cs typeface="Arial" pitchFamily="34" charset="-120"/>
+                <a:latin typeface="Inter" pitchFamily="34" charset="0"/>
+                <a:ea typeface="Inter" pitchFamily="34" charset="-122"/>
+                <a:cs typeface="Inter" pitchFamily="34" charset="-120"/>
               </a:rPr>
               <a:t>Operar con un proveedor de alto riesgo fiscal.</a:t>
             </a:r>
@@ -5332,9 +5332,9 @@
                 <a:solidFill>
                   <a:srgbClr val="FFFFFF"/>
                 </a:solidFill>
-                <a:latin typeface="Arial" pitchFamily="34" charset="0"/>
-                <a:ea typeface="Arial" pitchFamily="34" charset="-122"/>
-                <a:cs typeface="Arial" pitchFamily="34" charset="-120"/>
+                <a:latin typeface="Inter" pitchFamily="34" charset="0"/>
+                <a:ea typeface="Inter" pitchFamily="34" charset="-122"/>
+                <a:cs typeface="Inter" pitchFamily="34" charset="-120"/>
               </a:rPr>
               <a:t>✕</a:t>
             </a:r>
@@ -5374,9 +5374,9 @@
                 <a:solidFill>
                   <a:srgbClr val="2E4258"/>
                 </a:solidFill>
-                <a:latin typeface="Arial" pitchFamily="34" charset="0"/>
-                <a:ea typeface="Arial" pitchFamily="34" charset="-122"/>
-                <a:cs typeface="Arial" pitchFamily="34" charset="-120"/>
+                <a:latin typeface="Inter" pitchFamily="34" charset="0"/>
+                <a:ea typeface="Inter" pitchFamily="34" charset="-122"/>
+                <a:cs typeface="Inter" pitchFamily="34" charset="-120"/>
               </a:rPr>
               <a:t>Firmar un contrato de alquiler sin sellar.</a:t>
             </a:r>
@@ -5419,7 +5419,7 @@
         </p:nvSpPr>
         <p:spPr>
           <a:xfrm>
-            <a:off x="841248" y="4425696"/>
+            <a:off x="841248" y="4398264"/>
             <a:ext cx="7626096" cy="201168"/>
           </a:xfrm>
           <a:prstGeom prst="rect">
@@ -5436,17 +5436,17 @@
               <a:buNone/>
             </a:pPr>
             <a:r>
-              <a:rPr lang="en-US" sz="950" b="1" spc="120" kern="0" dirty="0">
+              <a:rPr lang="en-US" sz="900" b="1" spc="120" kern="0" dirty="0">
                 <a:solidFill>
                   <a:srgbClr val="FFFFFF"/>
                 </a:solidFill>
-                <a:latin typeface="Arial" pitchFamily="34" charset="0"/>
-                <a:ea typeface="Arial" pitchFamily="34" charset="-122"/>
-                <a:cs typeface="Arial" pitchFamily="34" charset="-120"/>
+                <a:latin typeface="Inter" pitchFamily="34" charset="0"/>
+                <a:ea typeface="Inter" pitchFamily="34" charset="-122"/>
+                <a:cs typeface="Inter" pitchFamily="34" charset="-120"/>
               </a:rPr>
               <a:t>PARA DAR DE ALTA A UN PROVEEDOR</a:t>
             </a:r>
-            <a:endParaRPr lang="en-US" sz="950" dirty="0"/>
+            <a:endParaRPr lang="en-US" sz="900" dirty="0"/>
           </a:p>
         </p:txBody>
       </p:sp>
@@ -5458,8 +5458,8 @@
         </p:nvSpPr>
         <p:spPr>
           <a:xfrm>
-            <a:off x="841248" y="4617720"/>
-            <a:ext cx="7607808" cy="329184"/>
+            <a:off x="841248" y="4599432"/>
+            <a:ext cx="7607808" cy="347472"/>
           </a:xfrm>
           <a:prstGeom prst="rect">
             <a:avLst/>
@@ -5478,17 +5478,17 @@
               <a:buNone/>
             </a:pPr>
             <a:r>
-              <a:rPr lang="en-US" sz="1150" dirty="0">
+              <a:rPr lang="en-US" sz="1100" dirty="0">
                 <a:solidFill>
                   <a:srgbClr val="FFFFFF"/>
                 </a:solidFill>
-                <a:latin typeface="Arial" pitchFamily="34" charset="0"/>
-                <a:ea typeface="Arial" pitchFamily="34" charset="-122"/>
-                <a:cs typeface="Arial" pitchFamily="34" charset="-120"/>
+                <a:latin typeface="Inter" pitchFamily="34" charset="0"/>
+                <a:ea typeface="Inter" pitchFamily="34" charset="-122"/>
+                <a:cs typeface="Inter" pitchFamily="34" charset="-120"/>
               </a:rPr>
               <a:t>Constancia de inscripción actualizada, CBU a nombre del mismo CUIT, condición frente al IVA y certificado de ART vigente si tiene personal a cargo.</a:t>
             </a:r>
-            <a:endParaRPr lang="en-US" sz="1150" dirty="0"/>
+            <a:endParaRPr lang="en-US" sz="1100" dirty="0"/>
           </a:p>
         </p:txBody>
       </p:sp>
@@ -5584,9 +5584,9 @@
                 <a:solidFill>
                   <a:srgbClr val="08407C"/>
                 </a:solidFill>
-                <a:latin typeface="Arial" pitchFamily="34" charset="0"/>
-                <a:ea typeface="Arial" pitchFamily="34" charset="-122"/>
-                <a:cs typeface="Arial" pitchFamily="34" charset="-120"/>
+                <a:latin typeface="Inter" pitchFamily="34" charset="0"/>
+                <a:ea typeface="Inter" pitchFamily="34" charset="-122"/>
+                <a:cs typeface="Inter" pitchFamily="34" charset="-120"/>
               </a:rPr>
               <a:t>Muchas gracias.</a:t>
             </a:r>
@@ -5623,9 +5623,9 @@
                 <a:solidFill>
                   <a:srgbClr val="4E586E"/>
                 </a:solidFill>
-                <a:latin typeface="Arial" pitchFamily="34" charset="0"/>
-                <a:ea typeface="Arial" pitchFamily="34" charset="-122"/>
-                <a:cs typeface="Arial" pitchFamily="34" charset="-120"/>
+                <a:latin typeface="Inter" pitchFamily="34" charset="0"/>
+                <a:ea typeface="Inter" pitchFamily="34" charset="-122"/>
+                <a:cs typeface="Inter" pitchFamily="34" charset="-120"/>
               </a:rPr>
               <a:t>Ante la duda: preguntar antes de pagar, nunca después.</a:t>
             </a:r>
@@ -5662,9 +5662,9 @@
                 <a:solidFill>
                   <a:srgbClr val="6A7686"/>
                 </a:solidFill>
-                <a:latin typeface="Arial" pitchFamily="34" charset="0"/>
-                <a:ea typeface="Arial" pitchFamily="34" charset="-122"/>
-                <a:cs typeface="Arial" pitchFamily="34" charset="-120"/>
+                <a:latin typeface="Inter" pitchFamily="34" charset="0"/>
+                <a:ea typeface="Inter" pitchFamily="34" charset="-122"/>
+                <a:cs typeface="Inter" pitchFamily="34" charset="-120"/>
               </a:rPr>
               <a:t>Capacitaciones Krak Real Estate · 2026 · Material de consulta: Manual de Impuestos para Administrativos en Argentina</a:t>
             </a:r>
@@ -5810,17 +5810,17 @@
               <a:buNone/>
             </a:pPr>
             <a:r>
-              <a:rPr lang="en-US" sz="2700" b="1" dirty="0">
+              <a:rPr lang="en-US" sz="2600" b="1" dirty="0">
                 <a:solidFill>
                   <a:srgbClr val="08407C"/>
                 </a:solidFill>
-                <a:latin typeface="Arial" pitchFamily="34" charset="0"/>
-                <a:ea typeface="Arial" pitchFamily="34" charset="-122"/>
-                <a:cs typeface="Arial" pitchFamily="34" charset="-120"/>
+                <a:latin typeface="Inter" pitchFamily="34" charset="0"/>
+                <a:ea typeface="Inter" pitchFamily="34" charset="-122"/>
+                <a:cs typeface="Inter" pitchFamily="34" charset="-120"/>
               </a:rPr>
               <a:t>El sistema tributario argentino</a:t>
             </a:r>
-            <a:endParaRPr lang="en-US" sz="2700" dirty="0"/>
+            <a:endParaRPr lang="en-US" sz="2600" dirty="0"/>
           </a:p>
         </p:txBody>
       </p:sp>
@@ -5853,9 +5853,9 @@
                 <a:solidFill>
                   <a:srgbClr val="6A7686"/>
                 </a:solidFill>
-                <a:latin typeface="Arial" pitchFamily="34" charset="0"/>
-                <a:ea typeface="Arial" pitchFamily="34" charset="-122"/>
-                <a:cs typeface="Arial" pitchFamily="34" charset="-120"/>
+                <a:latin typeface="Inter" pitchFamily="34" charset="0"/>
+                <a:ea typeface="Inter" pitchFamily="34" charset="-122"/>
+                <a:cs typeface="Inter" pitchFamily="34" charset="-120"/>
               </a:rPr>
               <a:t>Argentina es federal: tres niveles cobran, cada uno con su organismo y su calendario.</a:t>
             </a:r>
@@ -5919,9 +5919,9 @@
                 <a:solidFill>
                   <a:srgbClr val="FFFFFF"/>
                 </a:solidFill>
-                <a:latin typeface="Arial" pitchFamily="34" charset="0"/>
-                <a:ea typeface="Arial" pitchFamily="34" charset="-122"/>
-                <a:cs typeface="Arial" pitchFamily="34" charset="-120"/>
+                <a:latin typeface="Inter" pitchFamily="34" charset="0"/>
+                <a:ea typeface="Inter" pitchFamily="34" charset="-122"/>
+                <a:cs typeface="Inter" pitchFamily="34" charset="-120"/>
               </a:rPr>
               <a:t>NACIÓN</a:t>
             </a:r>
@@ -5958,9 +5958,9 @@
                 <a:solidFill>
                   <a:srgbClr val="FFFFFF"/>
                 </a:solidFill>
-                <a:latin typeface="Arial" pitchFamily="34" charset="0"/>
-                <a:ea typeface="Arial" pitchFamily="34" charset="-122"/>
-                <a:cs typeface="Arial" pitchFamily="34" charset="-120"/>
+                <a:latin typeface="Inter" pitchFamily="34" charset="0"/>
+                <a:ea typeface="Inter" pitchFamily="34" charset="-122"/>
+                <a:cs typeface="Inter" pitchFamily="34" charset="-120"/>
               </a:rPr>
               <a:t>ARCA (ex AFIP)</a:t>
             </a:r>
@@ -6001,9 +6001,9 @@
                 <a:solidFill>
                   <a:srgbClr val="FFFFFF"/>
                 </a:solidFill>
-                <a:latin typeface="Arial" pitchFamily="34" charset="0"/>
-                <a:ea typeface="Arial" pitchFamily="34" charset="-122"/>
-                <a:cs typeface="Arial" pitchFamily="34" charset="-120"/>
+                <a:latin typeface="Inter" pitchFamily="34" charset="0"/>
+                <a:ea typeface="Inter" pitchFamily="34" charset="-122"/>
+                <a:cs typeface="Inter" pitchFamily="34" charset="-120"/>
               </a:rPr>
               <a:t>IVA</a:t>
             </a:r>
@@ -6022,9 +6022,9 @@
                 <a:solidFill>
                   <a:srgbClr val="FFFFFF"/>
                 </a:solidFill>
-                <a:latin typeface="Arial" pitchFamily="34" charset="0"/>
-                <a:ea typeface="Arial" pitchFamily="34" charset="-122"/>
-                <a:cs typeface="Arial" pitchFamily="34" charset="-120"/>
+                <a:latin typeface="Inter" pitchFamily="34" charset="0"/>
+                <a:ea typeface="Inter" pitchFamily="34" charset="-122"/>
+                <a:cs typeface="Inter" pitchFamily="34" charset="-120"/>
               </a:rPr>
               <a:t>Ganancias</a:t>
             </a:r>
@@ -6043,9 +6043,9 @@
                 <a:solidFill>
                   <a:srgbClr val="FFFFFF"/>
                 </a:solidFill>
-                <a:latin typeface="Arial" pitchFamily="34" charset="0"/>
-                <a:ea typeface="Arial" pitchFamily="34" charset="-122"/>
-                <a:cs typeface="Arial" pitchFamily="34" charset="-120"/>
+                <a:latin typeface="Inter" pitchFamily="34" charset="0"/>
+                <a:ea typeface="Inter" pitchFamily="34" charset="-122"/>
+                <a:cs typeface="Inter" pitchFamily="34" charset="-120"/>
               </a:rPr>
               <a:t>Bienes Personales</a:t>
             </a:r>
@@ -6064,9 +6064,9 @@
                 <a:solidFill>
                   <a:srgbClr val="FFFFFF"/>
                 </a:solidFill>
-                <a:latin typeface="Arial" pitchFamily="34" charset="0"/>
-                <a:ea typeface="Arial" pitchFamily="34" charset="-122"/>
-                <a:cs typeface="Arial" pitchFamily="34" charset="-120"/>
+                <a:latin typeface="Inter" pitchFamily="34" charset="0"/>
+                <a:ea typeface="Inter" pitchFamily="34" charset="-122"/>
+                <a:cs typeface="Inter" pitchFamily="34" charset="-120"/>
               </a:rPr>
               <a:t>Monotributo y Autónomos</a:t>
             </a:r>
@@ -6103,9 +6103,9 @@
                 <a:solidFill>
                   <a:srgbClr val="D9E2EE"/>
                 </a:solidFill>
-                <a:latin typeface="Arial" pitchFamily="34" charset="0"/>
-                <a:ea typeface="Arial" pitchFamily="34" charset="-122"/>
-                <a:cs typeface="Arial" pitchFamily="34" charset="-120"/>
+                <a:latin typeface="Inter" pitchFamily="34" charset="0"/>
+                <a:ea typeface="Inter" pitchFamily="34" charset="-122"/>
+                <a:cs typeface="Inter" pitchFamily="34" charset="-120"/>
               </a:rPr>
               <a:t>arca.gob.ar</a:t>
             </a:r>
@@ -6169,9 +6169,9 @@
                 <a:solidFill>
                   <a:srgbClr val="FFFFFF"/>
                 </a:solidFill>
-                <a:latin typeface="Arial" pitchFamily="34" charset="0"/>
-                <a:ea typeface="Arial" pitchFamily="34" charset="-122"/>
-                <a:cs typeface="Arial" pitchFamily="34" charset="-120"/>
+                <a:latin typeface="Inter" pitchFamily="34" charset="0"/>
+                <a:ea typeface="Inter" pitchFamily="34" charset="-122"/>
+                <a:cs typeface="Inter" pitchFamily="34" charset="-120"/>
               </a:rPr>
               <a:t>PROVINCIA / CABA</a:t>
             </a:r>
@@ -6208,9 +6208,9 @@
                 <a:solidFill>
                   <a:srgbClr val="FFFFFF"/>
                 </a:solidFill>
-                <a:latin typeface="Arial" pitchFamily="34" charset="0"/>
-                <a:ea typeface="Arial" pitchFamily="34" charset="-122"/>
-                <a:cs typeface="Arial" pitchFamily="34" charset="-120"/>
+                <a:latin typeface="Inter" pitchFamily="34" charset="0"/>
+                <a:ea typeface="Inter" pitchFamily="34" charset="-122"/>
+                <a:cs typeface="Inter" pitchFamily="34" charset="-120"/>
               </a:rPr>
               <a:t>ARBA · AGIP</a:t>
             </a:r>
@@ -6251,9 +6251,9 @@
                 <a:solidFill>
                   <a:srgbClr val="FFFFFF"/>
                 </a:solidFill>
-                <a:latin typeface="Arial" pitchFamily="34" charset="0"/>
-                <a:ea typeface="Arial" pitchFamily="34" charset="-122"/>
-                <a:cs typeface="Arial" pitchFamily="34" charset="-120"/>
+                <a:latin typeface="Inter" pitchFamily="34" charset="0"/>
+                <a:ea typeface="Inter" pitchFamily="34" charset="-122"/>
+                <a:cs typeface="Inter" pitchFamily="34" charset="-120"/>
               </a:rPr>
               <a:t>Ingresos Brutos</a:t>
             </a:r>
@@ -6272,9 +6272,9 @@
                 <a:solidFill>
                   <a:srgbClr val="FFFFFF"/>
                 </a:solidFill>
-                <a:latin typeface="Arial" pitchFamily="34" charset="0"/>
-                <a:ea typeface="Arial" pitchFamily="34" charset="-122"/>
-                <a:cs typeface="Arial" pitchFamily="34" charset="-120"/>
+                <a:latin typeface="Inter" pitchFamily="34" charset="0"/>
+                <a:ea typeface="Inter" pitchFamily="34" charset="-122"/>
+                <a:cs typeface="Inter" pitchFamily="34" charset="-120"/>
               </a:rPr>
               <a:t>Sellos</a:t>
             </a:r>
@@ -6293,9 +6293,9 @@
                 <a:solidFill>
                   <a:srgbClr val="FFFFFF"/>
                 </a:solidFill>
-                <a:latin typeface="Arial" pitchFamily="34" charset="0"/>
-                <a:ea typeface="Arial" pitchFamily="34" charset="-122"/>
-                <a:cs typeface="Arial" pitchFamily="34" charset="-120"/>
+                <a:latin typeface="Inter" pitchFamily="34" charset="0"/>
+                <a:ea typeface="Inter" pitchFamily="34" charset="-122"/>
+                <a:cs typeface="Inter" pitchFamily="34" charset="-120"/>
               </a:rPr>
               <a:t>Impuesto Inmobiliario</a:t>
             </a:r>
@@ -6314,9 +6314,9 @@
                 <a:solidFill>
                   <a:srgbClr val="FFFFFF"/>
                 </a:solidFill>
-                <a:latin typeface="Arial" pitchFamily="34" charset="0"/>
-                <a:ea typeface="Arial" pitchFamily="34" charset="-122"/>
-                <a:cs typeface="Arial" pitchFamily="34" charset="-120"/>
+                <a:latin typeface="Inter" pitchFamily="34" charset="0"/>
+                <a:ea typeface="Inter" pitchFamily="34" charset="-122"/>
+                <a:cs typeface="Inter" pitchFamily="34" charset="-120"/>
               </a:rPr>
               <a:t>Patentes · ABL en CABA</a:t>
             </a:r>
@@ -6353,9 +6353,9 @@
                 <a:solidFill>
                   <a:srgbClr val="D9E2EE"/>
                 </a:solidFill>
-                <a:latin typeface="Arial" pitchFamily="34" charset="0"/>
-                <a:ea typeface="Arial" pitchFamily="34" charset="-122"/>
-                <a:cs typeface="Arial" pitchFamily="34" charset="-120"/>
+                <a:latin typeface="Inter" pitchFamily="34" charset="0"/>
+                <a:ea typeface="Inter" pitchFamily="34" charset="-122"/>
+                <a:cs typeface="Inter" pitchFamily="34" charset="-120"/>
               </a:rPr>
               <a:t>arba.gob.ar · agip.gob.ar</a:t>
             </a:r>
@@ -6419,9 +6419,9 @@
                 <a:solidFill>
                   <a:srgbClr val="FFFFFF"/>
                 </a:solidFill>
-                <a:latin typeface="Arial" pitchFamily="34" charset="0"/>
-                <a:ea typeface="Arial" pitchFamily="34" charset="-122"/>
-                <a:cs typeface="Arial" pitchFamily="34" charset="-120"/>
+                <a:latin typeface="Inter" pitchFamily="34" charset="0"/>
+                <a:ea typeface="Inter" pitchFamily="34" charset="-122"/>
+                <a:cs typeface="Inter" pitchFamily="34" charset="-120"/>
               </a:rPr>
               <a:t>MUNICIPIO</a:t>
             </a:r>
@@ -6458,9 +6458,9 @@
                 <a:solidFill>
                   <a:srgbClr val="FFFFFF"/>
                 </a:solidFill>
-                <a:latin typeface="Arial" pitchFamily="34" charset="0"/>
-                <a:ea typeface="Arial" pitchFamily="34" charset="-122"/>
-                <a:cs typeface="Arial" pitchFamily="34" charset="-120"/>
+                <a:latin typeface="Inter" pitchFamily="34" charset="0"/>
+                <a:ea typeface="Inter" pitchFamily="34" charset="-122"/>
+                <a:cs typeface="Inter" pitchFamily="34" charset="-120"/>
               </a:rPr>
               <a:t>Rentas municipales</a:t>
             </a:r>
@@ -6501,9 +6501,9 @@
                 <a:solidFill>
                   <a:srgbClr val="FFFFFF"/>
                 </a:solidFill>
-                <a:latin typeface="Arial" pitchFamily="34" charset="0"/>
-                <a:ea typeface="Arial" pitchFamily="34" charset="-122"/>
-                <a:cs typeface="Arial" pitchFamily="34" charset="-120"/>
+                <a:latin typeface="Inter" pitchFamily="34" charset="0"/>
+                <a:ea typeface="Inter" pitchFamily="34" charset="-122"/>
+                <a:cs typeface="Inter" pitchFamily="34" charset="-120"/>
               </a:rPr>
               <a:t>Seguridad e Higiene</a:t>
             </a:r>
@@ -6522,9 +6522,9 @@
                 <a:solidFill>
                   <a:srgbClr val="FFFFFF"/>
                 </a:solidFill>
-                <a:latin typeface="Arial" pitchFamily="34" charset="0"/>
-                <a:ea typeface="Arial" pitchFamily="34" charset="-122"/>
-                <a:cs typeface="Arial" pitchFamily="34" charset="-120"/>
+                <a:latin typeface="Inter" pitchFamily="34" charset="0"/>
+                <a:ea typeface="Inter" pitchFamily="34" charset="-122"/>
+                <a:cs typeface="Inter" pitchFamily="34" charset="-120"/>
               </a:rPr>
               <a:t>ABL / Tasa de Servicios Urbanos</a:t>
             </a:r>
@@ -6543,9 +6543,9 @@
                 <a:solidFill>
                   <a:srgbClr val="FFFFFF"/>
                 </a:solidFill>
-                <a:latin typeface="Arial" pitchFamily="34" charset="0"/>
-                <a:ea typeface="Arial" pitchFamily="34" charset="-122"/>
-                <a:cs typeface="Arial" pitchFamily="34" charset="-120"/>
+                <a:latin typeface="Inter" pitchFamily="34" charset="0"/>
+                <a:ea typeface="Inter" pitchFamily="34" charset="-122"/>
+                <a:cs typeface="Inter" pitchFamily="34" charset="-120"/>
               </a:rPr>
               <a:t>Habilitaciones</a:t>
             </a:r>
@@ -6564,9 +6564,9 @@
                 <a:solidFill>
                   <a:srgbClr val="FFFFFF"/>
                 </a:solidFill>
-                <a:latin typeface="Arial" pitchFamily="34" charset="0"/>
-                <a:ea typeface="Arial" pitchFamily="34" charset="-122"/>
-                <a:cs typeface="Arial" pitchFamily="34" charset="-120"/>
+                <a:latin typeface="Inter" pitchFamily="34" charset="0"/>
+                <a:ea typeface="Inter" pitchFamily="34" charset="-122"/>
+                <a:cs typeface="Inter" pitchFamily="34" charset="-120"/>
               </a:rPr>
               <a:t>Tasa vial y publicidad</a:t>
             </a:r>
@@ -6603,9 +6603,9 @@
                 <a:solidFill>
                   <a:srgbClr val="D9E2EE"/>
                 </a:solidFill>
-                <a:latin typeface="Arial" pitchFamily="34" charset="0"/>
-                <a:ea typeface="Arial" pitchFamily="34" charset="-122"/>
-                <a:cs typeface="Arial" pitchFamily="34" charset="-120"/>
+                <a:latin typeface="Inter" pitchFamily="34" charset="0"/>
+                <a:ea typeface="Inter" pitchFamily="34" charset="-122"/>
+                <a:cs typeface="Inter" pitchFamily="34" charset="-120"/>
               </a:rPr>
               <a:t>El portal de cada municipio</a:t>
             </a:r>
@@ -6648,7 +6648,7 @@
         </p:nvSpPr>
         <p:spPr>
           <a:xfrm>
-            <a:off x="841248" y="4078224"/>
+            <a:off x="841248" y="4050792"/>
             <a:ext cx="7626096" cy="201168"/>
           </a:xfrm>
           <a:prstGeom prst="rect">
@@ -6665,17 +6665,17 @@
               <a:buNone/>
             </a:pPr>
             <a:r>
-              <a:rPr lang="en-US" sz="950" b="1" spc="120" kern="0" dirty="0">
+              <a:rPr lang="en-US" sz="900" b="1" spc="120" kern="0" dirty="0">
                 <a:solidFill>
                   <a:srgbClr val="FFFFFF"/>
                 </a:solidFill>
-                <a:latin typeface="Arial" pitchFamily="34" charset="0"/>
-                <a:ea typeface="Arial" pitchFamily="34" charset="-122"/>
-                <a:cs typeface="Arial" pitchFamily="34" charset="-120"/>
+                <a:latin typeface="Inter" pitchFamily="34" charset="0"/>
+                <a:ea typeface="Inter" pitchFamily="34" charset="-122"/>
+                <a:cs typeface="Inter" pitchFamily="34" charset="-120"/>
               </a:rPr>
               <a:t>EN LA PRÁCTICA</a:t>
             </a:r>
-            <a:endParaRPr lang="en-US" sz="950" dirty="0"/>
+            <a:endParaRPr lang="en-US" sz="900" dirty="0"/>
           </a:p>
         </p:txBody>
       </p:sp>
@@ -6687,8 +6687,8 @@
         </p:nvSpPr>
         <p:spPr>
           <a:xfrm>
-            <a:off x="841248" y="4270248"/>
-            <a:ext cx="7607808" cy="329184"/>
+            <a:off x="841248" y="4251960"/>
+            <a:ext cx="7607808" cy="347472"/>
           </a:xfrm>
           <a:prstGeom prst="rect">
             <a:avLst/>
@@ -6707,17 +6707,17 @@
               <a:buNone/>
             </a:pPr>
             <a:r>
-              <a:rPr lang="en-US" sz="1150" dirty="0">
+              <a:rPr lang="en-US" sz="1100" dirty="0">
                 <a:solidFill>
                   <a:srgbClr val="FFFFFF"/>
                 </a:solidFill>
-                <a:latin typeface="Arial" pitchFamily="34" charset="0"/>
-                <a:ea typeface="Arial" pitchFamily="34" charset="-122"/>
-                <a:cs typeface="Arial" pitchFamily="34" charset="-120"/>
+                <a:latin typeface="Inter" pitchFamily="34" charset="0"/>
+                <a:ea typeface="Inter" pitchFamily="34" charset="-122"/>
+                <a:cs typeface="Inter" pitchFamily="34" charset="-120"/>
               </a:rPr>
               <a:t>Alquilar una oficina en PBA activa los tres niveles a la vez: Sellos e Ingresos Brutos en ARBA, el Inmobiliario del propietario y la tasa municipal del local.</a:t>
             </a:r>
-            <a:endParaRPr lang="en-US" sz="1150" dirty="0"/>
+            <a:endParaRPr lang="en-US" sz="1100" dirty="0"/>
           </a:p>
         </p:txBody>
       </p:sp>
@@ -6859,17 +6859,17 @@
               <a:buNone/>
             </a:pPr>
             <a:r>
-              <a:rPr lang="en-US" sz="2700" b="1" dirty="0">
+              <a:rPr lang="en-US" sz="2600" b="1" dirty="0">
                 <a:solidFill>
                   <a:srgbClr val="08407C"/>
                 </a:solidFill>
-                <a:latin typeface="Arial" pitchFamily="34" charset="0"/>
-                <a:ea typeface="Arial" pitchFamily="34" charset="-122"/>
-                <a:cs typeface="Arial" pitchFamily="34" charset="-120"/>
+                <a:latin typeface="Inter" pitchFamily="34" charset="0"/>
+                <a:ea typeface="Inter" pitchFamily="34" charset="-122"/>
+                <a:cs typeface="Inter" pitchFamily="34" charset="-120"/>
               </a:rPr>
               <a:t>Tu identidad fiscal</a:t>
             </a:r>
-            <a:endParaRPr lang="en-US" sz="2700" dirty="0"/>
+            <a:endParaRPr lang="en-US" sz="2600" dirty="0"/>
           </a:p>
         </p:txBody>
       </p:sp>
@@ -6902,9 +6902,9 @@
                 <a:solidFill>
                   <a:srgbClr val="6A7686"/>
                 </a:solidFill>
-                <a:latin typeface="Arial" pitchFamily="34" charset="0"/>
-                <a:ea typeface="Arial" pitchFamily="34" charset="-122"/>
-                <a:cs typeface="Arial" pitchFamily="34" charset="-120"/>
+                <a:latin typeface="Inter" pitchFamily="34" charset="0"/>
+                <a:ea typeface="Inter" pitchFamily="34" charset="-122"/>
+                <a:cs typeface="Inter" pitchFamily="34" charset="-120"/>
               </a:rPr>
               <a:t>Los cuatro elementos sin los cuales no se puede facturar ni operar.</a:t>
             </a:r>
@@ -6995,9 +6995,9 @@
                 <a:solidFill>
                   <a:srgbClr val="08407C"/>
                 </a:solidFill>
-                <a:latin typeface="Arial" pitchFamily="34" charset="0"/>
-                <a:ea typeface="Arial" pitchFamily="34" charset="-122"/>
-                <a:cs typeface="Arial" pitchFamily="34" charset="-120"/>
+                <a:latin typeface="Inter" pitchFamily="34" charset="0"/>
+                <a:ea typeface="Inter" pitchFamily="34" charset="-122"/>
+                <a:cs typeface="Inter" pitchFamily="34" charset="-120"/>
               </a:rPr>
               <a:t>1</a:t>
             </a:r>
@@ -7034,9 +7034,9 @@
                 <a:solidFill>
                   <a:srgbClr val="FFFFFF"/>
                 </a:solidFill>
-                <a:latin typeface="Arial" pitchFamily="34" charset="0"/>
-                <a:ea typeface="Arial" pitchFamily="34" charset="-122"/>
-                <a:cs typeface="Arial" pitchFamily="34" charset="-120"/>
+                <a:latin typeface="Inter" pitchFamily="34" charset="0"/>
+                <a:ea typeface="Inter" pitchFamily="34" charset="-122"/>
+                <a:cs typeface="Inter" pitchFamily="34" charset="-120"/>
               </a:rPr>
               <a:t>CUIT</a:t>
             </a:r>
@@ -7076,9 +7076,9 @@
                 <a:solidFill>
                   <a:srgbClr val="EAEFF5"/>
                 </a:solidFill>
-                <a:latin typeface="Arial" pitchFamily="34" charset="0"/>
-                <a:ea typeface="Arial" pitchFamily="34" charset="-122"/>
-                <a:cs typeface="Arial" pitchFamily="34" charset="-120"/>
+                <a:latin typeface="Inter" pitchFamily="34" charset="0"/>
+                <a:ea typeface="Inter" pitchFamily="34" charset="-122"/>
+                <a:cs typeface="Inter" pitchFamily="34" charset="-120"/>
               </a:rPr>
               <a:t>11 dígitos que identifican ante todos los organismos, no solo ARCA. Prefijo 20/23/24/27 personas humanas, 30/33/34 sociedades. Es el mismo número de por vida.</a:t>
             </a:r>
@@ -7169,9 +7169,9 @@
                 <a:solidFill>
                   <a:srgbClr val="4E586E"/>
                 </a:solidFill>
-                <a:latin typeface="Arial" pitchFamily="34" charset="0"/>
-                <a:ea typeface="Arial" pitchFamily="34" charset="-122"/>
-                <a:cs typeface="Arial" pitchFamily="34" charset="-120"/>
+                <a:latin typeface="Inter" pitchFamily="34" charset="0"/>
+                <a:ea typeface="Inter" pitchFamily="34" charset="-122"/>
+                <a:cs typeface="Inter" pitchFamily="34" charset="-120"/>
               </a:rPr>
               <a:t>2</a:t>
             </a:r>
@@ -7208,9 +7208,9 @@
                 <a:solidFill>
                   <a:srgbClr val="FFFFFF"/>
                 </a:solidFill>
-                <a:latin typeface="Arial" pitchFamily="34" charset="0"/>
-                <a:ea typeface="Arial" pitchFamily="34" charset="-122"/>
-                <a:cs typeface="Arial" pitchFamily="34" charset="-120"/>
+                <a:latin typeface="Inter" pitchFamily="34" charset="0"/>
+                <a:ea typeface="Inter" pitchFamily="34" charset="-122"/>
+                <a:cs typeface="Inter" pitchFamily="34" charset="-120"/>
               </a:rPr>
               <a:t>Clave Fiscal</a:t>
             </a:r>
@@ -7250,9 +7250,9 @@
                 <a:solidFill>
                   <a:srgbClr val="EAEFF5"/>
                 </a:solidFill>
-                <a:latin typeface="Arial" pitchFamily="34" charset="0"/>
-                <a:ea typeface="Arial" pitchFamily="34" charset="-122"/>
-                <a:cs typeface="Arial" pitchFamily="34" charset="-120"/>
+                <a:latin typeface="Inter" pitchFamily="34" charset="0"/>
+                <a:ea typeface="Inter" pitchFamily="34" charset="-122"/>
+                <a:cs typeface="Inter" pitchFamily="34" charset="-120"/>
               </a:rPr>
               <a:t>La contraseña para operar en ARCA. La mayoría de los trámites exige nivel 3. Desde ahí se delegan permisos al estudio contable sin compartir la clave.</a:t>
             </a:r>
@@ -7343,9 +7343,9 @@
                 <a:solidFill>
                   <a:srgbClr val="08407C"/>
                 </a:solidFill>
-                <a:latin typeface="Arial" pitchFamily="34" charset="0"/>
-                <a:ea typeface="Arial" pitchFamily="34" charset="-122"/>
-                <a:cs typeface="Arial" pitchFamily="34" charset="-120"/>
+                <a:latin typeface="Inter" pitchFamily="34" charset="0"/>
+                <a:ea typeface="Inter" pitchFamily="34" charset="-122"/>
+                <a:cs typeface="Inter" pitchFamily="34" charset="-120"/>
               </a:rPr>
               <a:t>3</a:t>
             </a:r>
@@ -7382,9 +7382,9 @@
                 <a:solidFill>
                   <a:srgbClr val="FFFFFF"/>
                 </a:solidFill>
-                <a:latin typeface="Arial" pitchFamily="34" charset="0"/>
-                <a:ea typeface="Arial" pitchFamily="34" charset="-122"/>
-                <a:cs typeface="Arial" pitchFamily="34" charset="-120"/>
+                <a:latin typeface="Inter" pitchFamily="34" charset="0"/>
+                <a:ea typeface="Inter" pitchFamily="34" charset="-122"/>
+                <a:cs typeface="Inter" pitchFamily="34" charset="-120"/>
               </a:rPr>
               <a:t>Domicilio Fiscal Electrónico</a:t>
             </a:r>
@@ -7424,9 +7424,9 @@
                 <a:solidFill>
                   <a:srgbClr val="EAEFF5"/>
                 </a:solidFill>
-                <a:latin typeface="Arial" pitchFamily="34" charset="0"/>
-                <a:ea typeface="Arial" pitchFamily="34" charset="-122"/>
-                <a:cs typeface="Arial" pitchFamily="34" charset="-120"/>
+                <a:latin typeface="Inter" pitchFamily="34" charset="0"/>
+                <a:ea typeface="Inter" pitchFamily="34" charset="-122"/>
+                <a:cs typeface="Inter" pitchFamily="34" charset="-120"/>
               </a:rPr>
               <a:t>Buzón digital obligatorio. Una intimación queda notificada apenas se deposita ahí, se haya leído o no. Hay que revisarlo con periodicidad.</a:t>
             </a:r>
@@ -7517,9 +7517,9 @@
                 <a:solidFill>
                   <a:srgbClr val="4E586E"/>
                 </a:solidFill>
-                <a:latin typeface="Arial" pitchFamily="34" charset="0"/>
-                <a:ea typeface="Arial" pitchFamily="34" charset="-122"/>
-                <a:cs typeface="Arial" pitchFamily="34" charset="-120"/>
+                <a:latin typeface="Inter" pitchFamily="34" charset="0"/>
+                <a:ea typeface="Inter" pitchFamily="34" charset="-122"/>
+                <a:cs typeface="Inter" pitchFamily="34" charset="-120"/>
               </a:rPr>
               <a:t>4</a:t>
             </a:r>
@@ -7556,9 +7556,9 @@
                 <a:solidFill>
                   <a:srgbClr val="FFFFFF"/>
                 </a:solidFill>
-                <a:latin typeface="Arial" pitchFamily="34" charset="0"/>
-                <a:ea typeface="Arial" pitchFamily="34" charset="-122"/>
-                <a:cs typeface="Arial" pitchFamily="34" charset="-120"/>
+                <a:latin typeface="Inter" pitchFamily="34" charset="0"/>
+                <a:ea typeface="Inter" pitchFamily="34" charset="-122"/>
+                <a:cs typeface="Inter" pitchFamily="34" charset="-120"/>
               </a:rPr>
               <a:t>Constancia de inscripción</a:t>
             </a:r>
@@ -7598,9 +7598,9 @@
                 <a:solidFill>
                   <a:srgbClr val="EAEFF5"/>
                 </a:solidFill>
-                <a:latin typeface="Arial" pitchFamily="34" charset="0"/>
-                <a:ea typeface="Arial" pitchFamily="34" charset="-122"/>
-                <a:cs typeface="Arial" pitchFamily="34" charset="-120"/>
+                <a:latin typeface="Inter" pitchFamily="34" charset="0"/>
+                <a:ea typeface="Inter" pitchFamily="34" charset="-122"/>
+                <a:cs typeface="Inter" pitchFamily="34" charset="-120"/>
               </a:rPr>
               <a:t>Resume la situación fiscal de un CUIT: en qué impuestos está inscripto, su categoría y desde cuándo. Se descarga gratis con solo cargar el CUIT.</a:t>
             </a:r>
@@ -7643,7 +7643,7 @@
         </p:nvSpPr>
         <p:spPr>
           <a:xfrm>
-            <a:off x="841248" y="4443984"/>
+            <a:off x="841248" y="4416552"/>
             <a:ext cx="7626096" cy="201168"/>
           </a:xfrm>
           <a:prstGeom prst="rect">
@@ -7660,17 +7660,17 @@
               <a:buNone/>
             </a:pPr>
             <a:r>
-              <a:rPr lang="en-US" sz="950" b="1" spc="120" kern="0" dirty="0">
+              <a:rPr lang="en-US" sz="900" b="1" spc="120" kern="0" dirty="0">
                 <a:solidFill>
                   <a:srgbClr val="FFFFFF"/>
                 </a:solidFill>
-                <a:latin typeface="Arial" pitchFamily="34" charset="0"/>
-                <a:ea typeface="Arial" pitchFamily="34" charset="-122"/>
-                <a:cs typeface="Arial" pitchFamily="34" charset="-120"/>
+                <a:latin typeface="Inter" pitchFamily="34" charset="0"/>
+                <a:ea typeface="Inter" pitchFamily="34" charset="-122"/>
+                <a:cs typeface="Inter" pitchFamily="34" charset="-120"/>
               </a:rPr>
               <a:t>REGLA</a:t>
             </a:r>
-            <a:endParaRPr lang="en-US" sz="950" dirty="0"/>
+            <a:endParaRPr lang="en-US" sz="900" dirty="0"/>
           </a:p>
         </p:txBody>
       </p:sp>
@@ -7682,8 +7682,8 @@
         </p:nvSpPr>
         <p:spPr>
           <a:xfrm>
-            <a:off x="841248" y="4636008"/>
-            <a:ext cx="7607808" cy="329184"/>
+            <a:off x="841248" y="4617720"/>
+            <a:ext cx="7607808" cy="347472"/>
           </a:xfrm>
           <a:prstGeom prst="rect">
             <a:avLst/>
@@ -7702,17 +7702,17 @@
               <a:buNone/>
             </a:pPr>
             <a:r>
-              <a:rPr lang="en-US" sz="1150" dirty="0">
+              <a:rPr lang="en-US" sz="1100" dirty="0">
                 <a:solidFill>
                   <a:srgbClr val="FFFFFF"/>
                 </a:solidFill>
-                <a:latin typeface="Arial" pitchFamily="34" charset="0"/>
-                <a:ea typeface="Arial" pitchFamily="34" charset="-122"/>
-                <a:cs typeface="Arial" pitchFamily="34" charset="-120"/>
+                <a:latin typeface="Inter" pitchFamily="34" charset="0"/>
+                <a:ea typeface="Inter" pitchFamily="34" charset="-122"/>
+                <a:cs typeface="Inter" pitchFamily="34" charset="-120"/>
               </a:rPr>
               <a:t>Constancia de inscripción + CBU a nombre del mismo CUIT: es lo primero que se le pide a todo proveedor o cliente nuevo.</a:t>
             </a:r>
-            <a:endParaRPr lang="en-US" sz="1150" dirty="0"/>
+            <a:endParaRPr lang="en-US" sz="1100" dirty="0"/>
           </a:p>
         </p:txBody>
       </p:sp>
@@ -7854,17 +7854,17 @@
               <a:buNone/>
             </a:pPr>
             <a:r>
-              <a:rPr lang="en-US" sz="2700" b="1" dirty="0">
+              <a:rPr lang="en-US" sz="2600" b="1" dirty="0">
                 <a:solidFill>
                   <a:srgbClr val="08407C"/>
                 </a:solidFill>
-                <a:latin typeface="Arial" pitchFamily="34" charset="0"/>
-                <a:ea typeface="Arial" pitchFamily="34" charset="-122"/>
-                <a:cs typeface="Arial" pitchFamily="34" charset="-120"/>
+                <a:latin typeface="Inter" pitchFamily="34" charset="0"/>
+                <a:ea typeface="Inter" pitchFamily="34" charset="-122"/>
+                <a:cs typeface="Inter" pitchFamily="34" charset="-120"/>
               </a:rPr>
               <a:t>Monotributo o Responsable Inscripto</a:t>
             </a:r>
-            <a:endParaRPr lang="en-US" sz="2700" dirty="0"/>
+            <a:endParaRPr lang="en-US" sz="2600" dirty="0"/>
           </a:p>
         </p:txBody>
       </p:sp>
@@ -7897,9 +7897,9 @@
                 <a:solidFill>
                   <a:srgbClr val="6A7686"/>
                 </a:solidFill>
-                <a:latin typeface="Arial" pitchFamily="34" charset="0"/>
-                <a:ea typeface="Arial" pitchFamily="34" charset="-122"/>
-                <a:cs typeface="Arial" pitchFamily="34" charset="-120"/>
+                <a:latin typeface="Inter" pitchFamily="34" charset="0"/>
+                <a:ea typeface="Inter" pitchFamily="34" charset="-122"/>
+                <a:cs typeface="Inter" pitchFamily="34" charset="-120"/>
               </a:rPr>
               <a:t>Define qué factura emite tu cliente, tu proveedor y vos mismo.</a:t>
             </a:r>
@@ -7936,9 +7936,9 @@
                 <a:solidFill>
                   <a:srgbClr val="6A7686"/>
                 </a:solidFill>
-                <a:latin typeface="Arial" pitchFamily="34" charset="0"/>
-                <a:ea typeface="Arial" pitchFamily="34" charset="-122"/>
-                <a:cs typeface="Arial" pitchFamily="34" charset="-120"/>
+                <a:latin typeface="Inter" pitchFamily="34" charset="0"/>
+                <a:ea typeface="Inter" pitchFamily="34" charset="-122"/>
+                <a:cs typeface="Inter" pitchFamily="34" charset="-120"/>
               </a:rPr>
               <a:t>ASPECTO</a:t>
             </a:r>
@@ -8002,9 +8002,9 @@
                 <a:solidFill>
                   <a:srgbClr val="FFFFFF"/>
                 </a:solidFill>
-                <a:latin typeface="Arial" pitchFamily="34" charset="0"/>
-                <a:ea typeface="Arial" pitchFamily="34" charset="-122"/>
-                <a:cs typeface="Arial" pitchFamily="34" charset="-120"/>
+                <a:latin typeface="Inter" pitchFamily="34" charset="0"/>
+                <a:ea typeface="Inter" pitchFamily="34" charset="-122"/>
+                <a:cs typeface="Inter" pitchFamily="34" charset="-120"/>
               </a:rPr>
               <a:t>MONOTRIBUTO</a:t>
             </a:r>
@@ -8068,9 +8068,9 @@
                 <a:solidFill>
                   <a:srgbClr val="FFFFFF"/>
                 </a:solidFill>
-                <a:latin typeface="Arial" pitchFamily="34" charset="0"/>
-                <a:ea typeface="Arial" pitchFamily="34" charset="-122"/>
-                <a:cs typeface="Arial" pitchFamily="34" charset="-120"/>
+                <a:latin typeface="Inter" pitchFamily="34" charset="0"/>
+                <a:ea typeface="Inter" pitchFamily="34" charset="-122"/>
+                <a:cs typeface="Inter" pitchFamily="34" charset="-120"/>
               </a:rPr>
               <a:t>RESPONSABLE INSCRIPTO</a:t>
             </a:r>
@@ -8134,9 +8134,9 @@
                 <a:solidFill>
                   <a:srgbClr val="08407C"/>
                 </a:solidFill>
-                <a:latin typeface="Arial" pitchFamily="34" charset="0"/>
-                <a:ea typeface="Arial" pitchFamily="34" charset="-122"/>
-                <a:cs typeface="Arial" pitchFamily="34" charset="-120"/>
+                <a:latin typeface="Inter" pitchFamily="34" charset="0"/>
+                <a:ea typeface="Inter" pitchFamily="34" charset="-122"/>
+                <a:cs typeface="Inter" pitchFamily="34" charset="-120"/>
               </a:rPr>
               <a:t>Facturación</a:t>
             </a:r>
@@ -8173,9 +8173,9 @@
                 <a:solidFill>
                   <a:srgbClr val="2E4258"/>
                 </a:solidFill>
-                <a:latin typeface="Arial" pitchFamily="34" charset="0"/>
-                <a:ea typeface="Arial" pitchFamily="34" charset="-122"/>
-                <a:cs typeface="Arial" pitchFamily="34" charset="-120"/>
+                <a:latin typeface="Inter" pitchFamily="34" charset="0"/>
+                <a:ea typeface="Inter" pitchFamily="34" charset="-122"/>
+                <a:cs typeface="Inter" pitchFamily="34" charset="-120"/>
               </a:rPr>
               <a:t>Tope de la categoría K</a:t>
             </a:r>
@@ -8212,9 +8212,9 @@
                 <a:solidFill>
                   <a:srgbClr val="2E4258"/>
                 </a:solidFill>
-                <a:latin typeface="Arial" pitchFamily="34" charset="0"/>
-                <a:ea typeface="Arial" pitchFamily="34" charset="-122"/>
-                <a:cs typeface="Arial" pitchFamily="34" charset="-120"/>
+                <a:latin typeface="Inter" pitchFamily="34" charset="0"/>
+                <a:ea typeface="Inter" pitchFamily="34" charset="-122"/>
+                <a:cs typeface="Inter" pitchFamily="34" charset="-120"/>
               </a:rPr>
               <a:t>Sin tope</a:t>
             </a:r>
@@ -8251,9 +8251,9 @@
                 <a:solidFill>
                   <a:srgbClr val="08407C"/>
                 </a:solidFill>
-                <a:latin typeface="Arial" pitchFamily="34" charset="0"/>
-                <a:ea typeface="Arial" pitchFamily="34" charset="-122"/>
-                <a:cs typeface="Arial" pitchFamily="34" charset="-120"/>
+                <a:latin typeface="Inter" pitchFamily="34" charset="0"/>
+                <a:ea typeface="Inter" pitchFamily="34" charset="-122"/>
+                <a:cs typeface="Inter" pitchFamily="34" charset="-120"/>
               </a:rPr>
               <a:t>IVA</a:t>
             </a:r>
@@ -8290,9 +8290,9 @@
                 <a:solidFill>
                   <a:srgbClr val="2E4258"/>
                 </a:solidFill>
-                <a:latin typeface="Arial" pitchFamily="34" charset="0"/>
-                <a:ea typeface="Arial" pitchFamily="34" charset="-122"/>
-                <a:cs typeface="Arial" pitchFamily="34" charset="-120"/>
+                <a:latin typeface="Inter" pitchFamily="34" charset="0"/>
+                <a:ea typeface="Inter" pitchFamily="34" charset="-122"/>
+                <a:cs typeface="Inter" pitchFamily="34" charset="-120"/>
               </a:rPr>
               <a:t>No lo discrimina (va incluido)</a:t>
             </a:r>
@@ -8329,9 +8329,9 @@
                 <a:solidFill>
                   <a:srgbClr val="2E4258"/>
                 </a:solidFill>
-                <a:latin typeface="Arial" pitchFamily="34" charset="0"/>
-                <a:ea typeface="Arial" pitchFamily="34" charset="-122"/>
-                <a:cs typeface="Arial" pitchFamily="34" charset="-120"/>
+                <a:latin typeface="Inter" pitchFamily="34" charset="0"/>
+                <a:ea typeface="Inter" pitchFamily="34" charset="-122"/>
+                <a:cs typeface="Inter" pitchFamily="34" charset="-120"/>
               </a:rPr>
               <a:t>Discrimina 21% / 10,5% / 27%</a:t>
             </a:r>
@@ -8395,9 +8395,9 @@
                 <a:solidFill>
                   <a:srgbClr val="08407C"/>
                 </a:solidFill>
-                <a:latin typeface="Arial" pitchFamily="34" charset="0"/>
-                <a:ea typeface="Arial" pitchFamily="34" charset="-122"/>
-                <a:cs typeface="Arial" pitchFamily="34" charset="-120"/>
+                <a:latin typeface="Inter" pitchFamily="34" charset="0"/>
+                <a:ea typeface="Inter" pitchFamily="34" charset="-122"/>
+                <a:cs typeface="Inter" pitchFamily="34" charset="-120"/>
               </a:rPr>
               <a:t>Ganancias</a:t>
             </a:r>
@@ -8434,9 +8434,9 @@
                 <a:solidFill>
                   <a:srgbClr val="2E4258"/>
                 </a:solidFill>
-                <a:latin typeface="Arial" pitchFamily="34" charset="0"/>
-                <a:ea typeface="Arial" pitchFamily="34" charset="-122"/>
-                <a:cs typeface="Arial" pitchFamily="34" charset="-120"/>
+                <a:latin typeface="Inter" pitchFamily="34" charset="0"/>
+                <a:ea typeface="Inter" pitchFamily="34" charset="-122"/>
+                <a:cs typeface="Inter" pitchFamily="34" charset="-120"/>
               </a:rPr>
               <a:t>Incluido en la cuota fija</a:t>
             </a:r>
@@ -8473,9 +8473,9 @@
                 <a:solidFill>
                   <a:srgbClr val="2E4258"/>
                 </a:solidFill>
-                <a:latin typeface="Arial" pitchFamily="34" charset="0"/>
-                <a:ea typeface="Arial" pitchFamily="34" charset="-122"/>
-                <a:cs typeface="Arial" pitchFamily="34" charset="-120"/>
+                <a:latin typeface="Inter" pitchFamily="34" charset="0"/>
+                <a:ea typeface="Inter" pitchFamily="34" charset="-122"/>
+                <a:cs typeface="Inter" pitchFamily="34" charset="-120"/>
               </a:rPr>
               <a:t>DDJJ anual + anticipos</a:t>
             </a:r>
@@ -8512,9 +8512,9 @@
                 <a:solidFill>
                   <a:srgbClr val="08407C"/>
                 </a:solidFill>
-                <a:latin typeface="Arial" pitchFamily="34" charset="0"/>
-                <a:ea typeface="Arial" pitchFamily="34" charset="-122"/>
-                <a:cs typeface="Arial" pitchFamily="34" charset="-120"/>
+                <a:latin typeface="Inter" pitchFamily="34" charset="0"/>
+                <a:ea typeface="Inter" pitchFamily="34" charset="-122"/>
+                <a:cs typeface="Inter" pitchFamily="34" charset="-120"/>
               </a:rPr>
               <a:t>Aportes jubilatorios</a:t>
             </a:r>
@@ -8551,9 +8551,9 @@
                 <a:solidFill>
                   <a:srgbClr val="2E4258"/>
                 </a:solidFill>
-                <a:latin typeface="Arial" pitchFamily="34" charset="0"/>
-                <a:ea typeface="Arial" pitchFamily="34" charset="-122"/>
-                <a:cs typeface="Arial" pitchFamily="34" charset="-120"/>
+                <a:latin typeface="Inter" pitchFamily="34" charset="0"/>
+                <a:ea typeface="Inter" pitchFamily="34" charset="-122"/>
+                <a:cs typeface="Inter" pitchFamily="34" charset="-120"/>
               </a:rPr>
               <a:t>Incluidos en la cuota</a:t>
             </a:r>
@@ -8590,9 +8590,9 @@
                 <a:solidFill>
                   <a:srgbClr val="2E4258"/>
                 </a:solidFill>
-                <a:latin typeface="Arial" pitchFamily="34" charset="0"/>
-                <a:ea typeface="Arial" pitchFamily="34" charset="-122"/>
-                <a:cs typeface="Arial" pitchFamily="34" charset="-120"/>
+                <a:latin typeface="Inter" pitchFamily="34" charset="0"/>
+                <a:ea typeface="Inter" pitchFamily="34" charset="-122"/>
+                <a:cs typeface="Inter" pitchFamily="34" charset="-120"/>
               </a:rPr>
               <a:t>Régimen de Autónomos, aparte</a:t>
             </a:r>
@@ -8656,9 +8656,9 @@
                 <a:solidFill>
                   <a:srgbClr val="08407C"/>
                 </a:solidFill>
-                <a:latin typeface="Arial" pitchFamily="34" charset="0"/>
-                <a:ea typeface="Arial" pitchFamily="34" charset="-122"/>
-                <a:cs typeface="Arial" pitchFamily="34" charset="-120"/>
+                <a:latin typeface="Inter" pitchFamily="34" charset="0"/>
+                <a:ea typeface="Inter" pitchFamily="34" charset="-122"/>
+                <a:cs typeface="Inter" pitchFamily="34" charset="-120"/>
               </a:rPr>
               <a:t>Tipo de factura</a:t>
             </a:r>
@@ -8695,9 +8695,9 @@
                 <a:solidFill>
                   <a:srgbClr val="2E4258"/>
                 </a:solidFill>
-                <a:latin typeface="Arial" pitchFamily="34" charset="0"/>
-                <a:ea typeface="Arial" pitchFamily="34" charset="-122"/>
-                <a:cs typeface="Arial" pitchFamily="34" charset="-120"/>
+                <a:latin typeface="Inter" pitchFamily="34" charset="0"/>
+                <a:ea typeface="Inter" pitchFamily="34" charset="-122"/>
+                <a:cs typeface="Inter" pitchFamily="34" charset="-120"/>
               </a:rPr>
               <a:t>C</a:t>
             </a:r>
@@ -8734,9 +8734,9 @@
                 <a:solidFill>
                   <a:srgbClr val="2E4258"/>
                 </a:solidFill>
-                <a:latin typeface="Arial" pitchFamily="34" charset="0"/>
-                <a:ea typeface="Arial" pitchFamily="34" charset="-122"/>
-                <a:cs typeface="Arial" pitchFamily="34" charset="-120"/>
+                <a:latin typeface="Inter" pitchFamily="34" charset="0"/>
+                <a:ea typeface="Inter" pitchFamily="34" charset="-122"/>
+                <a:cs typeface="Inter" pitchFamily="34" charset="-120"/>
               </a:rPr>
               <a:t>A o B</a:t>
             </a:r>
@@ -8779,7 +8779,7 @@
         </p:nvSpPr>
         <p:spPr>
           <a:xfrm>
-            <a:off x="841248" y="4334256"/>
+            <a:off x="841248" y="4306824"/>
             <a:ext cx="7626096" cy="201168"/>
           </a:xfrm>
           <a:prstGeom prst="rect">
@@ -8796,17 +8796,17 @@
               <a:buNone/>
             </a:pPr>
             <a:r>
-              <a:rPr lang="en-US" sz="950" b="1" spc="120" kern="0" dirty="0">
+              <a:rPr lang="en-US" sz="900" b="1" spc="120" kern="0" dirty="0">
                 <a:solidFill>
                   <a:srgbClr val="FFFFFF"/>
                 </a:solidFill>
-                <a:latin typeface="Arial" pitchFamily="34" charset="0"/>
-                <a:ea typeface="Arial" pitchFamily="34" charset="-122"/>
-                <a:cs typeface="Arial" pitchFamily="34" charset="-120"/>
+                <a:latin typeface="Inter" pitchFamily="34" charset="0"/>
+                <a:ea typeface="Inter" pitchFamily="34" charset="-122"/>
+                <a:cs typeface="Inter" pitchFamily="34" charset="-120"/>
               </a:rPr>
               <a:t>OJO CON LAS FECHAS</a:t>
             </a:r>
-            <a:endParaRPr lang="en-US" sz="950" dirty="0"/>
+            <a:endParaRPr lang="en-US" sz="900" dirty="0"/>
           </a:p>
         </p:txBody>
       </p:sp>
@@ -8818,8 +8818,8 @@
         </p:nvSpPr>
         <p:spPr>
           <a:xfrm>
-            <a:off x="841248" y="4526280"/>
-            <a:ext cx="7607808" cy="329184"/>
+            <a:off x="841248" y="4507992"/>
+            <a:ext cx="7607808" cy="347472"/>
           </a:xfrm>
           <a:prstGeom prst="rect">
             <a:avLst/>
@@ -8838,17 +8838,17 @@
               <a:buNone/>
             </a:pPr>
             <a:r>
-              <a:rPr lang="en-US" sz="1150" dirty="0">
+              <a:rPr lang="en-US" sz="1100" dirty="0">
                 <a:solidFill>
                   <a:srgbClr val="FFFFFF"/>
                 </a:solidFill>
-                <a:latin typeface="Arial" pitchFamily="34" charset="0"/>
-                <a:ea typeface="Arial" pitchFamily="34" charset="-122"/>
-                <a:cs typeface="Arial" pitchFamily="34" charset="-120"/>
+                <a:latin typeface="Inter" pitchFamily="34" charset="0"/>
+                <a:ea typeface="Inter" pitchFamily="34" charset="-122"/>
+                <a:cs typeface="Inter" pitchFamily="34" charset="-120"/>
               </a:rPr>
               <a:t>La recategorización del Monotributo es obligatoria en febrero y en agosto, aunque no cambie la categoría. Si no se hace, ARCA recategoriza de oficio.</a:t>
             </a:r>
-            <a:endParaRPr lang="en-US" sz="1150" dirty="0"/>
+            <a:endParaRPr lang="en-US" sz="1100" dirty="0"/>
           </a:p>
         </p:txBody>
       </p:sp>
@@ -8990,17 +8990,17 @@
               <a:buNone/>
             </a:pPr>
             <a:r>
-              <a:rPr lang="en-US" sz="2700" b="1" dirty="0">
+              <a:rPr lang="en-US" sz="2600" b="1" dirty="0">
                 <a:solidFill>
                   <a:srgbClr val="08407C"/>
                 </a:solidFill>
-                <a:latin typeface="Arial" pitchFamily="34" charset="0"/>
-                <a:ea typeface="Arial" pitchFamily="34" charset="-122"/>
-                <a:cs typeface="Arial" pitchFamily="34" charset="-120"/>
+                <a:latin typeface="Inter" pitchFamily="34" charset="0"/>
+                <a:ea typeface="Inter" pitchFamily="34" charset="-122"/>
+                <a:cs typeface="Inter" pitchFamily="34" charset="-120"/>
               </a:rPr>
               <a:t>Qué factura corresponde</a:t>
             </a:r>
-            <a:endParaRPr lang="en-US" sz="2700" dirty="0"/>
+            <a:endParaRPr lang="en-US" sz="2600" dirty="0"/>
           </a:p>
         </p:txBody>
       </p:sp>
@@ -9033,9 +9033,9 @@
                 <a:solidFill>
                   <a:srgbClr val="6A7686"/>
                 </a:solidFill>
-                <a:latin typeface="Arial" pitchFamily="34" charset="0"/>
-                <a:ea typeface="Arial" pitchFamily="34" charset="-122"/>
-                <a:cs typeface="Arial" pitchFamily="34" charset="-120"/>
+                <a:latin typeface="Inter" pitchFamily="34" charset="0"/>
+                <a:ea typeface="Inter" pitchFamily="34" charset="-122"/>
+                <a:cs typeface="Inter" pitchFamily="34" charset="-120"/>
               </a:rPr>
               <a:t>El tipo de comprobante depende de la condición fiscal del emisor y del receptor.</a:t>
             </a:r>
@@ -9126,9 +9126,9 @@
                 <a:solidFill>
                   <a:srgbClr val="08407C"/>
                 </a:solidFill>
-                <a:latin typeface="Arial" pitchFamily="34" charset="0"/>
-                <a:ea typeface="Arial" pitchFamily="34" charset="-122"/>
-                <a:cs typeface="Arial" pitchFamily="34" charset="-120"/>
+                <a:latin typeface="Inter" pitchFamily="34" charset="0"/>
+                <a:ea typeface="Inter" pitchFamily="34" charset="-122"/>
+                <a:cs typeface="Inter" pitchFamily="34" charset="-120"/>
               </a:rPr>
               <a:t>A</a:t>
             </a:r>
@@ -9165,9 +9165,9 @@
                 <a:solidFill>
                   <a:srgbClr val="C9D6E6"/>
                 </a:solidFill>
-                <a:latin typeface="Arial" pitchFamily="34" charset="0"/>
-                <a:ea typeface="Arial" pitchFamily="34" charset="-122"/>
-                <a:cs typeface="Arial" pitchFamily="34" charset="-120"/>
+                <a:latin typeface="Inter" pitchFamily="34" charset="0"/>
+                <a:ea typeface="Inter" pitchFamily="34" charset="-122"/>
+                <a:cs typeface="Inter" pitchFamily="34" charset="-120"/>
               </a:rPr>
               <a:t>EMITE</a:t>
             </a:r>
@@ -9207,9 +9207,9 @@
                 <a:solidFill>
                   <a:srgbClr val="FFFFFF"/>
                 </a:solidFill>
-                <a:latin typeface="Arial" pitchFamily="34" charset="0"/>
-                <a:ea typeface="Arial" pitchFamily="34" charset="-122"/>
-                <a:cs typeface="Arial" pitchFamily="34" charset="-120"/>
+                <a:latin typeface="Inter" pitchFamily="34" charset="0"/>
+                <a:ea typeface="Inter" pitchFamily="34" charset="-122"/>
+                <a:cs typeface="Inter" pitchFamily="34" charset="-120"/>
               </a:rPr>
               <a:t>Resp. Inscripto</a:t>
             </a:r>
@@ -9246,9 +9246,9 @@
                 <a:solidFill>
                   <a:srgbClr val="C9D6E6"/>
                 </a:solidFill>
-                <a:latin typeface="Arial" pitchFamily="34" charset="0"/>
-                <a:ea typeface="Arial" pitchFamily="34" charset="-122"/>
-                <a:cs typeface="Arial" pitchFamily="34" charset="-120"/>
+                <a:latin typeface="Inter" pitchFamily="34" charset="0"/>
+                <a:ea typeface="Inter" pitchFamily="34" charset="-122"/>
+                <a:cs typeface="Inter" pitchFamily="34" charset="-120"/>
               </a:rPr>
               <a:t>RECIBE</a:t>
             </a:r>
@@ -9288,9 +9288,9 @@
                 <a:solidFill>
                   <a:srgbClr val="FFFFFF"/>
                 </a:solidFill>
-                <a:latin typeface="Arial" pitchFamily="34" charset="0"/>
-                <a:ea typeface="Arial" pitchFamily="34" charset="-122"/>
-                <a:cs typeface="Arial" pitchFamily="34" charset="-120"/>
+                <a:latin typeface="Inter" pitchFamily="34" charset="0"/>
+                <a:ea typeface="Inter" pitchFamily="34" charset="-122"/>
+                <a:cs typeface="Inter" pitchFamily="34" charset="-120"/>
               </a:rPr>
               <a:t>Resp. Inscripto</a:t>
             </a:r>
@@ -9330,9 +9330,9 @@
                 <a:solidFill>
                   <a:srgbClr val="DCE6F2"/>
                 </a:solidFill>
-                <a:latin typeface="Arial" pitchFamily="34" charset="0"/>
-                <a:ea typeface="Arial" pitchFamily="34" charset="-122"/>
-                <a:cs typeface="Arial" pitchFamily="34" charset="-120"/>
+                <a:latin typeface="Inter" pitchFamily="34" charset="0"/>
+                <a:ea typeface="Inter" pitchFamily="34" charset="-122"/>
+                <a:cs typeface="Inter" pitchFamily="34" charset="-120"/>
               </a:rPr>
               <a:t>IVA discriminado</a:t>
             </a:r>
@@ -9423,9 +9423,9 @@
                 <a:solidFill>
                   <a:srgbClr val="4E586E"/>
                 </a:solidFill>
-                <a:latin typeface="Arial" pitchFamily="34" charset="0"/>
-                <a:ea typeface="Arial" pitchFamily="34" charset="-122"/>
-                <a:cs typeface="Arial" pitchFamily="34" charset="-120"/>
+                <a:latin typeface="Inter" pitchFamily="34" charset="0"/>
+                <a:ea typeface="Inter" pitchFamily="34" charset="-122"/>
+                <a:cs typeface="Inter" pitchFamily="34" charset="-120"/>
               </a:rPr>
               <a:t>B</a:t>
             </a:r>
@@ -9462,9 +9462,9 @@
                 <a:solidFill>
                   <a:srgbClr val="C9D6E6"/>
                 </a:solidFill>
-                <a:latin typeface="Arial" pitchFamily="34" charset="0"/>
-                <a:ea typeface="Arial" pitchFamily="34" charset="-122"/>
-                <a:cs typeface="Arial" pitchFamily="34" charset="-120"/>
+                <a:latin typeface="Inter" pitchFamily="34" charset="0"/>
+                <a:ea typeface="Inter" pitchFamily="34" charset="-122"/>
+                <a:cs typeface="Inter" pitchFamily="34" charset="-120"/>
               </a:rPr>
               <a:t>EMITE</a:t>
             </a:r>
@@ -9504,9 +9504,9 @@
                 <a:solidFill>
                   <a:srgbClr val="FFFFFF"/>
                 </a:solidFill>
-                <a:latin typeface="Arial" pitchFamily="34" charset="0"/>
-                <a:ea typeface="Arial" pitchFamily="34" charset="-122"/>
-                <a:cs typeface="Arial" pitchFamily="34" charset="-120"/>
+                <a:latin typeface="Inter" pitchFamily="34" charset="0"/>
+                <a:ea typeface="Inter" pitchFamily="34" charset="-122"/>
+                <a:cs typeface="Inter" pitchFamily="34" charset="-120"/>
               </a:rPr>
               <a:t>Resp. Inscripto</a:t>
             </a:r>
@@ -9543,9 +9543,9 @@
                 <a:solidFill>
                   <a:srgbClr val="C9D6E6"/>
                 </a:solidFill>
-                <a:latin typeface="Arial" pitchFamily="34" charset="0"/>
-                <a:ea typeface="Arial" pitchFamily="34" charset="-122"/>
-                <a:cs typeface="Arial" pitchFamily="34" charset="-120"/>
+                <a:latin typeface="Inter" pitchFamily="34" charset="0"/>
+                <a:ea typeface="Inter" pitchFamily="34" charset="-122"/>
+                <a:cs typeface="Inter" pitchFamily="34" charset="-120"/>
               </a:rPr>
               <a:t>RECIBE</a:t>
             </a:r>
@@ -9585,9 +9585,9 @@
                 <a:solidFill>
                   <a:srgbClr val="FFFFFF"/>
                 </a:solidFill>
-                <a:latin typeface="Arial" pitchFamily="34" charset="0"/>
-                <a:ea typeface="Arial" pitchFamily="34" charset="-122"/>
-                <a:cs typeface="Arial" pitchFamily="34" charset="-120"/>
+                <a:latin typeface="Inter" pitchFamily="34" charset="0"/>
+                <a:ea typeface="Inter" pitchFamily="34" charset="-122"/>
+                <a:cs typeface="Inter" pitchFamily="34" charset="-120"/>
               </a:rPr>
               <a:t>Cons. final o Monotributista</a:t>
             </a:r>
@@ -9627,9 +9627,9 @@
                 <a:solidFill>
                   <a:srgbClr val="DCE6F2"/>
                 </a:solidFill>
-                <a:latin typeface="Arial" pitchFamily="34" charset="0"/>
-                <a:ea typeface="Arial" pitchFamily="34" charset="-122"/>
-                <a:cs typeface="Arial" pitchFamily="34" charset="-120"/>
+                <a:latin typeface="Inter" pitchFamily="34" charset="0"/>
+                <a:ea typeface="Inter" pitchFamily="34" charset="-122"/>
+                <a:cs typeface="Inter" pitchFamily="34" charset="-120"/>
               </a:rPr>
               <a:t>IVA incluido</a:t>
             </a:r>
@@ -9720,9 +9720,9 @@
                 <a:solidFill>
                   <a:srgbClr val="4E586E"/>
                 </a:solidFill>
-                <a:latin typeface="Arial" pitchFamily="34" charset="0"/>
-                <a:ea typeface="Arial" pitchFamily="34" charset="-122"/>
-                <a:cs typeface="Arial" pitchFamily="34" charset="-120"/>
+                <a:latin typeface="Inter" pitchFamily="34" charset="0"/>
+                <a:ea typeface="Inter" pitchFamily="34" charset="-122"/>
+                <a:cs typeface="Inter" pitchFamily="34" charset="-120"/>
               </a:rPr>
               <a:t>C</a:t>
             </a:r>
@@ -9759,9 +9759,9 @@
                 <a:solidFill>
                   <a:srgbClr val="C9D6E6"/>
                 </a:solidFill>
-                <a:latin typeface="Arial" pitchFamily="34" charset="0"/>
-                <a:ea typeface="Arial" pitchFamily="34" charset="-122"/>
-                <a:cs typeface="Arial" pitchFamily="34" charset="-120"/>
+                <a:latin typeface="Inter" pitchFamily="34" charset="0"/>
+                <a:ea typeface="Inter" pitchFamily="34" charset="-122"/>
+                <a:cs typeface="Inter" pitchFamily="34" charset="-120"/>
               </a:rPr>
               <a:t>EMITE</a:t>
             </a:r>
@@ -9801,9 +9801,9 @@
                 <a:solidFill>
                   <a:srgbClr val="FFFFFF"/>
                 </a:solidFill>
-                <a:latin typeface="Arial" pitchFamily="34" charset="0"/>
-                <a:ea typeface="Arial" pitchFamily="34" charset="-122"/>
-                <a:cs typeface="Arial" pitchFamily="34" charset="-120"/>
+                <a:latin typeface="Inter" pitchFamily="34" charset="0"/>
+                <a:ea typeface="Inter" pitchFamily="34" charset="-122"/>
+                <a:cs typeface="Inter" pitchFamily="34" charset="-120"/>
               </a:rPr>
               <a:t>Monotributista</a:t>
             </a:r>
@@ -9840,9 +9840,9 @@
                 <a:solidFill>
                   <a:srgbClr val="C9D6E6"/>
                 </a:solidFill>
-                <a:latin typeface="Arial" pitchFamily="34" charset="0"/>
-                <a:ea typeface="Arial" pitchFamily="34" charset="-122"/>
-                <a:cs typeface="Arial" pitchFamily="34" charset="-120"/>
+                <a:latin typeface="Inter" pitchFamily="34" charset="0"/>
+                <a:ea typeface="Inter" pitchFamily="34" charset="-122"/>
+                <a:cs typeface="Inter" pitchFamily="34" charset="-120"/>
               </a:rPr>
               <a:t>RECIBE</a:t>
             </a:r>
@@ -9882,9 +9882,9 @@
                 <a:solidFill>
                   <a:srgbClr val="FFFFFF"/>
                 </a:solidFill>
-                <a:latin typeface="Arial" pitchFamily="34" charset="0"/>
-                <a:ea typeface="Arial" pitchFamily="34" charset="-122"/>
-                <a:cs typeface="Arial" pitchFamily="34" charset="-120"/>
+                <a:latin typeface="Inter" pitchFamily="34" charset="0"/>
+                <a:ea typeface="Inter" pitchFamily="34" charset="-122"/>
+                <a:cs typeface="Inter" pitchFamily="34" charset="-120"/>
               </a:rPr>
               <a:t>Cualquiera</a:t>
             </a:r>
@@ -9924,9 +9924,9 @@
                 <a:solidFill>
                   <a:srgbClr val="DCE6F2"/>
                 </a:solidFill>
-                <a:latin typeface="Arial" pitchFamily="34" charset="0"/>
-                <a:ea typeface="Arial" pitchFamily="34" charset="-122"/>
-                <a:cs typeface="Arial" pitchFamily="34" charset="-120"/>
+                <a:latin typeface="Inter" pitchFamily="34" charset="0"/>
+                <a:ea typeface="Inter" pitchFamily="34" charset="-122"/>
+                <a:cs typeface="Inter" pitchFamily="34" charset="-120"/>
               </a:rPr>
               <a:t>Nunca discrimina IVA</a:t>
             </a:r>
@@ -10017,9 +10017,9 @@
                 <a:solidFill>
                   <a:srgbClr val="4E586E"/>
                 </a:solidFill>
-                <a:latin typeface="Arial" pitchFamily="34" charset="0"/>
-                <a:ea typeface="Arial" pitchFamily="34" charset="-122"/>
-                <a:cs typeface="Arial" pitchFamily="34" charset="-120"/>
+                <a:latin typeface="Inter" pitchFamily="34" charset="0"/>
+                <a:ea typeface="Inter" pitchFamily="34" charset="-122"/>
+                <a:cs typeface="Inter" pitchFamily="34" charset="-120"/>
               </a:rPr>
               <a:t>E</a:t>
             </a:r>
@@ -10056,9 +10056,9 @@
                 <a:solidFill>
                   <a:srgbClr val="C9D6E6"/>
                 </a:solidFill>
-                <a:latin typeface="Arial" pitchFamily="34" charset="0"/>
-                <a:ea typeface="Arial" pitchFamily="34" charset="-122"/>
-                <a:cs typeface="Arial" pitchFamily="34" charset="-120"/>
+                <a:latin typeface="Inter" pitchFamily="34" charset="0"/>
+                <a:ea typeface="Inter" pitchFamily="34" charset="-122"/>
+                <a:cs typeface="Inter" pitchFamily="34" charset="-120"/>
               </a:rPr>
               <a:t>EMITE</a:t>
             </a:r>
@@ -10098,9 +10098,9 @@
                 <a:solidFill>
                   <a:srgbClr val="FFFFFF"/>
                 </a:solidFill>
-                <a:latin typeface="Arial" pitchFamily="34" charset="0"/>
-                <a:ea typeface="Arial" pitchFamily="34" charset="-122"/>
-                <a:cs typeface="Arial" pitchFamily="34" charset="-120"/>
+                <a:latin typeface="Inter" pitchFamily="34" charset="0"/>
+                <a:ea typeface="Inter" pitchFamily="34" charset="-122"/>
+                <a:cs typeface="Inter" pitchFamily="34" charset="-120"/>
               </a:rPr>
               <a:t>Exportador</a:t>
             </a:r>
@@ -10137,9 +10137,9 @@
                 <a:solidFill>
                   <a:srgbClr val="C9D6E6"/>
                 </a:solidFill>
-                <a:latin typeface="Arial" pitchFamily="34" charset="0"/>
-                <a:ea typeface="Arial" pitchFamily="34" charset="-122"/>
-                <a:cs typeface="Arial" pitchFamily="34" charset="-120"/>
+                <a:latin typeface="Inter" pitchFamily="34" charset="0"/>
+                <a:ea typeface="Inter" pitchFamily="34" charset="-122"/>
+                <a:cs typeface="Inter" pitchFamily="34" charset="-120"/>
               </a:rPr>
               <a:t>RECIBE</a:t>
             </a:r>
@@ -10179,9 +10179,9 @@
                 <a:solidFill>
                   <a:srgbClr val="FFFFFF"/>
                 </a:solidFill>
-                <a:latin typeface="Arial" pitchFamily="34" charset="0"/>
-                <a:ea typeface="Arial" pitchFamily="34" charset="-122"/>
-                <a:cs typeface="Arial" pitchFamily="34" charset="-120"/>
+                <a:latin typeface="Inter" pitchFamily="34" charset="0"/>
+                <a:ea typeface="Inter" pitchFamily="34" charset="-122"/>
+                <a:cs typeface="Inter" pitchFamily="34" charset="-120"/>
               </a:rPr>
               <a:t>Cliente del exterior</a:t>
             </a:r>
@@ -10221,9 +10221,9 @@
                 <a:solidFill>
                   <a:srgbClr val="DCE6F2"/>
                 </a:solidFill>
-                <a:latin typeface="Arial" pitchFamily="34" charset="0"/>
-                <a:ea typeface="Arial" pitchFamily="34" charset="-122"/>
-                <a:cs typeface="Arial" pitchFamily="34" charset="-120"/>
+                <a:latin typeface="Inter" pitchFamily="34" charset="0"/>
+                <a:ea typeface="Inter" pitchFamily="34" charset="-122"/>
+                <a:cs typeface="Inter" pitchFamily="34" charset="-120"/>
               </a:rPr>
               <a:t>No aplica</a:t>
             </a:r>
@@ -10314,9 +10314,9 @@
                 <a:solidFill>
                   <a:srgbClr val="4E586E"/>
                 </a:solidFill>
-                <a:latin typeface="Arial" pitchFamily="34" charset="0"/>
-                <a:ea typeface="Arial" pitchFamily="34" charset="-122"/>
-                <a:cs typeface="Arial" pitchFamily="34" charset="-120"/>
+                <a:latin typeface="Inter" pitchFamily="34" charset="0"/>
+                <a:ea typeface="Inter" pitchFamily="34" charset="-122"/>
+                <a:cs typeface="Inter" pitchFamily="34" charset="-120"/>
               </a:rPr>
               <a:t>M</a:t>
             </a:r>
@@ -10353,9 +10353,9 @@
                 <a:solidFill>
                   <a:srgbClr val="C9D6E6"/>
                 </a:solidFill>
-                <a:latin typeface="Arial" pitchFamily="34" charset="0"/>
-                <a:ea typeface="Arial" pitchFamily="34" charset="-122"/>
-                <a:cs typeface="Arial" pitchFamily="34" charset="-120"/>
+                <a:latin typeface="Inter" pitchFamily="34" charset="0"/>
+                <a:ea typeface="Inter" pitchFamily="34" charset="-122"/>
+                <a:cs typeface="Inter" pitchFamily="34" charset="-120"/>
               </a:rPr>
               <a:t>EMITE</a:t>
             </a:r>
@@ -10395,9 +10395,9 @@
                 <a:solidFill>
                   <a:srgbClr val="FFFFFF"/>
                 </a:solidFill>
-                <a:latin typeface="Arial" pitchFamily="34" charset="0"/>
-                <a:ea typeface="Arial" pitchFamily="34" charset="-122"/>
-                <a:cs typeface="Arial" pitchFamily="34" charset="-120"/>
+                <a:latin typeface="Inter" pitchFamily="34" charset="0"/>
+                <a:ea typeface="Inter" pitchFamily="34" charset="-122"/>
+                <a:cs typeface="Inter" pitchFamily="34" charset="-120"/>
               </a:rPr>
               <a:t>Sin solvencia verificada</a:t>
             </a:r>
@@ -10434,9 +10434,9 @@
                 <a:solidFill>
                   <a:srgbClr val="C9D6E6"/>
                 </a:solidFill>
-                <a:latin typeface="Arial" pitchFamily="34" charset="0"/>
-                <a:ea typeface="Arial" pitchFamily="34" charset="-122"/>
-                <a:cs typeface="Arial" pitchFamily="34" charset="-120"/>
+                <a:latin typeface="Inter" pitchFamily="34" charset="0"/>
+                <a:ea typeface="Inter" pitchFamily="34" charset="-122"/>
+                <a:cs typeface="Inter" pitchFamily="34" charset="-120"/>
               </a:rPr>
               <a:t>RECIBE</a:t>
             </a:r>
@@ -10476,9 +10476,9 @@
                 <a:solidFill>
                   <a:srgbClr val="FFFFFF"/>
                 </a:solidFill>
-                <a:latin typeface="Arial" pitchFamily="34" charset="0"/>
-                <a:ea typeface="Arial" pitchFamily="34" charset="-122"/>
-                <a:cs typeface="Arial" pitchFamily="34" charset="-120"/>
+                <a:latin typeface="Inter" pitchFamily="34" charset="0"/>
+                <a:ea typeface="Inter" pitchFamily="34" charset="-122"/>
+                <a:cs typeface="Inter" pitchFamily="34" charset="-120"/>
               </a:rPr>
               <a:t>Resp. Inscripto</a:t>
             </a:r>
@@ -10518,9 +10518,9 @@
                 <a:solidFill>
                   <a:srgbClr val="DCE6F2"/>
                 </a:solidFill>
-                <a:latin typeface="Arial" pitchFamily="34" charset="0"/>
-                <a:ea typeface="Arial" pitchFamily="34" charset="-122"/>
-                <a:cs typeface="Arial" pitchFamily="34" charset="-120"/>
+                <a:latin typeface="Inter" pitchFamily="34" charset="0"/>
+                <a:ea typeface="Inter" pitchFamily="34" charset="-122"/>
+                <a:cs typeface="Inter" pitchFamily="34" charset="-120"/>
               </a:rPr>
               <a:t>IVA + retención extra</a:t>
             </a:r>
@@ -10563,7 +10563,7 @@
         </p:nvSpPr>
         <p:spPr>
           <a:xfrm>
-            <a:off x="841248" y="4078224"/>
+            <a:off x="841248" y="4050792"/>
             <a:ext cx="7626096" cy="201168"/>
           </a:xfrm>
           <a:prstGeom prst="rect">
@@ -10580,17 +10580,17 @@
               <a:buNone/>
             </a:pPr>
             <a:r>
-              <a:rPr lang="en-US" sz="950" b="1" spc="120" kern="0" dirty="0">
+              <a:rPr lang="en-US" sz="900" b="1" spc="120" kern="0" dirty="0">
                 <a:solidFill>
                   <a:srgbClr val="FFFFFF"/>
                 </a:solidFill>
-                <a:latin typeface="Arial" pitchFamily="34" charset="0"/>
-                <a:ea typeface="Arial" pitchFamily="34" charset="-122"/>
-                <a:cs typeface="Arial" pitchFamily="34" charset="-120"/>
+                <a:latin typeface="Inter" pitchFamily="34" charset="0"/>
+                <a:ea typeface="Inter" pitchFamily="34" charset="-122"/>
+                <a:cs typeface="Inter" pitchFamily="34" charset="-120"/>
               </a:rPr>
               <a:t>SEÑAL DE ALERTA</a:t>
             </a:r>
-            <a:endParaRPr lang="en-US" sz="950" dirty="0"/>
+            <a:endParaRPr lang="en-US" sz="900" dirty="0"/>
           </a:p>
         </p:txBody>
       </p:sp>
@@ -10602,8 +10602,8 @@
         </p:nvSpPr>
         <p:spPr>
           <a:xfrm>
-            <a:off x="841248" y="4270248"/>
-            <a:ext cx="7607808" cy="329184"/>
+            <a:off x="841248" y="4251960"/>
+            <a:ext cx="7607808" cy="347472"/>
           </a:xfrm>
           <a:prstGeom prst="rect">
             <a:avLst/>
@@ -10622,17 +10622,17 @@
               <a:buNone/>
             </a:pPr>
             <a:r>
-              <a:rPr lang="en-US" sz="1150" dirty="0">
+              <a:rPr lang="en-US" sz="1100" dirty="0">
                 <a:solidFill>
                   <a:srgbClr val="FFFFFF"/>
                 </a:solidFill>
-                <a:latin typeface="Arial" pitchFamily="34" charset="0"/>
-                <a:ea typeface="Arial" pitchFamily="34" charset="-122"/>
-                <a:cs typeface="Arial" pitchFamily="34" charset="-120"/>
+                <a:latin typeface="Inter" pitchFamily="34" charset="0"/>
+                <a:ea typeface="Inter" pitchFamily="34" charset="-122"/>
+                <a:cs typeface="Inter" pitchFamily="34" charset="-120"/>
               </a:rPr>
               <a:t>Si el tipo de factura no coincide con la condición fiscal del emisor, algo está mal: hay que frenar y revisar la constancia antes de pagar.</a:t>
             </a:r>
-            <a:endParaRPr lang="en-US" sz="1150" dirty="0"/>
+            <a:endParaRPr lang="en-US" sz="1100" dirty="0"/>
           </a:p>
         </p:txBody>
       </p:sp>
@@ -10774,17 +10774,17 @@
               <a:buNone/>
             </a:pPr>
             <a:r>
-              <a:rPr lang="en-US" sz="2700" b="1" dirty="0">
+              <a:rPr lang="en-US" sz="2600" b="1" dirty="0">
                 <a:solidFill>
                   <a:srgbClr val="08407C"/>
                 </a:solidFill>
-                <a:latin typeface="Arial" pitchFamily="34" charset="0"/>
-                <a:ea typeface="Arial" pitchFamily="34" charset="-122"/>
-                <a:cs typeface="Arial" pitchFamily="34" charset="-120"/>
+                <a:latin typeface="Inter" pitchFamily="34" charset="0"/>
+                <a:ea typeface="Inter" pitchFamily="34" charset="-122"/>
+                <a:cs typeface="Inter" pitchFamily="34" charset="-120"/>
               </a:rPr>
               <a:t>El CAE: sin eso, no se paga</a:t>
             </a:r>
-            <a:endParaRPr lang="en-US" sz="2700" dirty="0"/>
+            <a:endParaRPr lang="en-US" sz="2600" dirty="0"/>
           </a:p>
         </p:txBody>
       </p:sp>
@@ -10817,9 +10817,9 @@
                 <a:solidFill>
                   <a:srgbClr val="6A7686"/>
                 </a:solidFill>
-                <a:latin typeface="Arial" pitchFamily="34" charset="0"/>
-                <a:ea typeface="Arial" pitchFamily="34" charset="-122"/>
-                <a:cs typeface="Arial" pitchFamily="34" charset="-120"/>
+                <a:latin typeface="Inter" pitchFamily="34" charset="0"/>
+                <a:ea typeface="Inter" pitchFamily="34" charset="-122"/>
+                <a:cs typeface="Inter" pitchFamily="34" charset="-120"/>
               </a:rPr>
               <a:t>Código de Autorización Electrónico — es lo que le da validez fiscal a la factura.</a:t>
             </a:r>
@@ -10883,9 +10883,9 @@
                 <a:solidFill>
                   <a:srgbClr val="FFFFFF"/>
                 </a:solidFill>
-                <a:latin typeface="Arial" pitchFamily="34" charset="0"/>
-                <a:ea typeface="Arial" pitchFamily="34" charset="-122"/>
-                <a:cs typeface="Arial" pitchFamily="34" charset="-120"/>
+                <a:latin typeface="Inter" pitchFamily="34" charset="0"/>
+                <a:ea typeface="Inter" pitchFamily="34" charset="-122"/>
+                <a:cs typeface="Inter" pitchFamily="34" charset="-120"/>
               </a:rPr>
               <a:t>¿Qué es?</a:t>
             </a:r>
@@ -10925,9 +10925,9 @@
                 <a:solidFill>
                   <a:srgbClr val="DCE6F2"/>
                 </a:solidFill>
-                <a:latin typeface="Arial" pitchFamily="34" charset="0"/>
-                <a:ea typeface="Arial" pitchFamily="34" charset="-122"/>
-                <a:cs typeface="Arial" pitchFamily="34" charset="-120"/>
+                <a:latin typeface="Inter" pitchFamily="34" charset="0"/>
+                <a:ea typeface="Inter" pitchFamily="34" charset="-122"/>
+                <a:cs typeface="Inter" pitchFamily="34" charset="-120"/>
               </a:rPr>
               <a:t>El número único que ARCA le asigna a cada comprobante al validarlo. Toda la facturación es electrónica: ya no existe el talonario impreso como opción habitual.</a:t>
             </a:r>
@@ -10954,9 +10954,9 @@
                 <a:solidFill>
                   <a:srgbClr val="DCE6F2"/>
                 </a:solidFill>
-                <a:latin typeface="Arial" pitchFamily="34" charset="0"/>
-                <a:ea typeface="Arial" pitchFamily="34" charset="-122"/>
-                <a:cs typeface="Arial" pitchFamily="34" charset="-120"/>
+                <a:latin typeface="Inter" pitchFamily="34" charset="0"/>
+                <a:ea typeface="Inter" pitchFamily="34" charset="-122"/>
+                <a:cs typeface="Inter" pitchFamily="34" charset="-120"/>
               </a:rPr>
               <a:t>Sin CAE, o con el CAE vencido, el comprobante no tiene respaldo ante el fisco.</a:t>
             </a:r>
@@ -11023,9 +11023,9 @@
                 <a:solidFill>
                   <a:srgbClr val="FFFFFF"/>
                 </a:solidFill>
-                <a:latin typeface="Arial" pitchFamily="34" charset="0"/>
-                <a:ea typeface="Arial" pitchFamily="34" charset="-122"/>
-                <a:cs typeface="Arial" pitchFamily="34" charset="-120"/>
+                <a:latin typeface="Inter" pitchFamily="34" charset="0"/>
+                <a:ea typeface="Inter" pitchFamily="34" charset="-122"/>
+                <a:cs typeface="Inter" pitchFamily="34" charset="-120"/>
               </a:rPr>
               <a:t>Si pagás sin CAE válido, ARCA puede impugnar el gasto en IVA y Ganancias.</a:t>
             </a:r>
@@ -11062,9 +11062,9 @@
                 <a:solidFill>
                   <a:srgbClr val="08407C"/>
                 </a:solidFill>
-                <a:latin typeface="Arial" pitchFamily="34" charset="0"/>
-                <a:ea typeface="Arial" pitchFamily="34" charset="-122"/>
-                <a:cs typeface="Arial" pitchFamily="34" charset="-120"/>
+                <a:latin typeface="Inter" pitchFamily="34" charset="0"/>
+                <a:ea typeface="Inter" pitchFamily="34" charset="-122"/>
+                <a:cs typeface="Inter" pitchFamily="34" charset="-120"/>
               </a:rPr>
               <a:t>Cómo validar el CAE de una factura recibida</a:t>
             </a:r>
@@ -11128,9 +11128,9 @@
                 <a:solidFill>
                   <a:srgbClr val="FFFFFF"/>
                 </a:solidFill>
-                <a:latin typeface="Arial" pitchFamily="34" charset="0"/>
-                <a:ea typeface="Arial" pitchFamily="34" charset="-122"/>
-                <a:cs typeface="Arial" pitchFamily="34" charset="-120"/>
+                <a:latin typeface="Inter" pitchFamily="34" charset="0"/>
+                <a:ea typeface="Inter" pitchFamily="34" charset="-122"/>
+                <a:cs typeface="Inter" pitchFamily="34" charset="-120"/>
               </a:rPr>
               <a:t>1</a:t>
             </a:r>
@@ -11170,9 +11170,9 @@
                 <a:solidFill>
                   <a:srgbClr val="2E4258"/>
                 </a:solidFill>
-                <a:latin typeface="Arial" pitchFamily="34" charset="0"/>
-                <a:ea typeface="Arial" pitchFamily="34" charset="-122"/>
-                <a:cs typeface="Arial" pitchFamily="34" charset="-120"/>
+                <a:latin typeface="Inter" pitchFamily="34" charset="0"/>
+                <a:ea typeface="Inter" pitchFamily="34" charset="-122"/>
+                <a:cs typeface="Inter" pitchFamily="34" charset="-120"/>
               </a:rPr>
               <a:t>Ubicar el CAE y su fecha de vencimiento, al pie del comprobante.</a:t>
             </a:r>
@@ -11236,9 +11236,9 @@
                 <a:solidFill>
                   <a:srgbClr val="FFFFFF"/>
                 </a:solidFill>
-                <a:latin typeface="Arial" pitchFamily="34" charset="0"/>
-                <a:ea typeface="Arial" pitchFamily="34" charset="-122"/>
-                <a:cs typeface="Arial" pitchFamily="34" charset="-120"/>
+                <a:latin typeface="Inter" pitchFamily="34" charset="0"/>
+                <a:ea typeface="Inter" pitchFamily="34" charset="-122"/>
+                <a:cs typeface="Inter" pitchFamily="34" charset="-120"/>
               </a:rPr>
               <a:t>2</a:t>
             </a:r>
@@ -11278,9 +11278,9 @@
                 <a:solidFill>
                   <a:srgbClr val="2E4258"/>
                 </a:solidFill>
-                <a:latin typeface="Arial" pitchFamily="34" charset="0"/>
-                <a:ea typeface="Arial" pitchFamily="34" charset="-122"/>
-                <a:cs typeface="Arial" pitchFamily="34" charset="-120"/>
+                <a:latin typeface="Inter" pitchFamily="34" charset="0"/>
+                <a:ea typeface="Inter" pitchFamily="34" charset="-122"/>
+                <a:cs typeface="Inter" pitchFamily="34" charset="-120"/>
               </a:rPr>
               <a:t>Entrar a arca.gob.ar → Comprobantes en línea.</a:t>
             </a:r>
@@ -11344,9 +11344,9 @@
                 <a:solidFill>
                   <a:srgbClr val="FFFFFF"/>
                 </a:solidFill>
-                <a:latin typeface="Arial" pitchFamily="34" charset="0"/>
-                <a:ea typeface="Arial" pitchFamily="34" charset="-122"/>
-                <a:cs typeface="Arial" pitchFamily="34" charset="-120"/>
+                <a:latin typeface="Inter" pitchFamily="34" charset="0"/>
+                <a:ea typeface="Inter" pitchFamily="34" charset="-122"/>
+                <a:cs typeface="Inter" pitchFamily="34" charset="-120"/>
               </a:rPr>
               <a:t>3</a:t>
             </a:r>
@@ -11386,9 +11386,9 @@
                 <a:solidFill>
                   <a:srgbClr val="2E4258"/>
                 </a:solidFill>
-                <a:latin typeface="Arial" pitchFamily="34" charset="0"/>
-                <a:ea typeface="Arial" pitchFamily="34" charset="-122"/>
-                <a:cs typeface="Arial" pitchFamily="34" charset="-120"/>
+                <a:latin typeface="Inter" pitchFamily="34" charset="0"/>
+                <a:ea typeface="Inter" pitchFamily="34" charset="-122"/>
+                <a:cs typeface="Inter" pitchFamily="34" charset="-120"/>
               </a:rPr>
               <a:t>Cargar el CUIT del emisor y el tipo y número de comprobante.</a:t>
             </a:r>
@@ -11452,9 +11452,9 @@
                 <a:solidFill>
                   <a:srgbClr val="FFFFFF"/>
                 </a:solidFill>
-                <a:latin typeface="Arial" pitchFamily="34" charset="0"/>
-                <a:ea typeface="Arial" pitchFamily="34" charset="-122"/>
-                <a:cs typeface="Arial" pitchFamily="34" charset="-120"/>
+                <a:latin typeface="Inter" pitchFamily="34" charset="0"/>
+                <a:ea typeface="Inter" pitchFamily="34" charset="-122"/>
+                <a:cs typeface="Inter" pitchFamily="34" charset="-120"/>
               </a:rPr>
               <a:t>4</a:t>
             </a:r>
@@ -11494,9 +11494,9 @@
                 <a:solidFill>
                   <a:srgbClr val="2E4258"/>
                 </a:solidFill>
-                <a:latin typeface="Arial" pitchFamily="34" charset="0"/>
-                <a:ea typeface="Arial" pitchFamily="34" charset="-122"/>
-                <a:cs typeface="Arial" pitchFamily="34" charset="-120"/>
+                <a:latin typeface="Inter" pitchFamily="34" charset="0"/>
+                <a:ea typeface="Inter" pitchFamily="34" charset="-122"/>
+                <a:cs typeface="Inter" pitchFamily="34" charset="-120"/>
               </a:rPr>
               <a:t>Verificar que el CAE informado coincida con el de la factura.</a:t>
             </a:r>
@@ -11560,9 +11560,9 @@
                 <a:solidFill>
                   <a:srgbClr val="FFFFFF"/>
                 </a:solidFill>
-                <a:latin typeface="Arial" pitchFamily="34" charset="0"/>
-                <a:ea typeface="Arial" pitchFamily="34" charset="-122"/>
-                <a:cs typeface="Arial" pitchFamily="34" charset="-120"/>
+                <a:latin typeface="Inter" pitchFamily="34" charset="0"/>
+                <a:ea typeface="Inter" pitchFamily="34" charset="-122"/>
+                <a:cs typeface="Inter" pitchFamily="34" charset="-120"/>
               </a:rPr>
               <a:t>5</a:t>
             </a:r>
@@ -11602,9 +11602,9 @@
                 <a:solidFill>
                   <a:srgbClr val="2E4258"/>
                 </a:solidFill>
-                <a:latin typeface="Arial" pitchFamily="34" charset="0"/>
-                <a:ea typeface="Arial" pitchFamily="34" charset="-122"/>
-                <a:cs typeface="Arial" pitchFamily="34" charset="-120"/>
+                <a:latin typeface="Inter" pitchFamily="34" charset="0"/>
+                <a:ea typeface="Inter" pitchFamily="34" charset="-122"/>
+                <a:cs typeface="Inter" pitchFamily="34" charset="-120"/>
               </a:rPr>
               <a:t>Si no coincide o no existe: no pagar y avisar al proveedor.</a:t>
             </a:r>
@@ -11750,17 +11750,17 @@
               <a:buNone/>
             </a:pPr>
             <a:r>
-              <a:rPr lang="en-US" sz="2700" b="1" dirty="0">
+              <a:rPr lang="en-US" sz="2600" b="1" dirty="0">
                 <a:solidFill>
                   <a:srgbClr val="08407C"/>
                 </a:solidFill>
-                <a:latin typeface="Arial" pitchFamily="34" charset="0"/>
-                <a:ea typeface="Arial" pitchFamily="34" charset="-122"/>
-                <a:cs typeface="Arial" pitchFamily="34" charset="-120"/>
+                <a:latin typeface="Inter" pitchFamily="34" charset="0"/>
+                <a:ea typeface="Inter" pitchFamily="34" charset="-122"/>
+                <a:cs typeface="Inter" pitchFamily="34" charset="-120"/>
               </a:rPr>
               <a:t>IVA y Ganancias</a:t>
             </a:r>
-            <a:endParaRPr lang="en-US" sz="2700" dirty="0"/>
+            <a:endParaRPr lang="en-US" sz="2600" dirty="0"/>
           </a:p>
         </p:txBody>
       </p:sp>
@@ -11793,9 +11793,9 @@
                 <a:solidFill>
                   <a:srgbClr val="6A7686"/>
                 </a:solidFill>
-                <a:latin typeface="Arial" pitchFamily="34" charset="0"/>
-                <a:ea typeface="Arial" pitchFamily="34" charset="-122"/>
-                <a:cs typeface="Arial" pitchFamily="34" charset="-120"/>
+                <a:latin typeface="Inter" pitchFamily="34" charset="0"/>
+                <a:ea typeface="Inter" pitchFamily="34" charset="-122"/>
+                <a:cs typeface="Inter" pitchFamily="34" charset="-120"/>
               </a:rPr>
               <a:t>Los dos impuestos nacionales que atraviesan toda la operación.</a:t>
             </a:r>
@@ -11859,9 +11859,9 @@
                 <a:solidFill>
                   <a:srgbClr val="FFFFFF"/>
                 </a:solidFill>
-                <a:latin typeface="Arial" pitchFamily="34" charset="0"/>
-                <a:ea typeface="Arial" pitchFamily="34" charset="-122"/>
-                <a:cs typeface="Arial" pitchFamily="34" charset="-120"/>
+                <a:latin typeface="Inter" pitchFamily="34" charset="0"/>
+                <a:ea typeface="Inter" pitchFamily="34" charset="-122"/>
+                <a:cs typeface="Inter" pitchFamily="34" charset="-120"/>
               </a:rPr>
               <a:t>IVA</a:t>
             </a:r>
@@ -11901,9 +11901,9 @@
                 <a:solidFill>
                   <a:srgbClr val="DCE6F2"/>
                 </a:solidFill>
-                <a:latin typeface="Arial" pitchFamily="34" charset="0"/>
-                <a:ea typeface="Arial" pitchFamily="34" charset="-122"/>
-                <a:cs typeface="Arial" pitchFamily="34" charset="-120"/>
+                <a:latin typeface="Inter" pitchFamily="34" charset="0"/>
+                <a:ea typeface="Inter" pitchFamily="34" charset="-122"/>
+                <a:cs typeface="Inter" pitchFamily="34" charset="-120"/>
               </a:rPr>
               <a:t>Indirecto: lo paga el consumidor final dentro del precio, pero cada eslabón lo liquida ante ARCA. Declaración jurada mensual.</a:t>
             </a:r>
@@ -11940,9 +11940,9 @@
                 <a:solidFill>
                   <a:srgbClr val="FFFFFF"/>
                 </a:solidFill>
-                <a:latin typeface="Arial" pitchFamily="34" charset="0"/>
-                <a:ea typeface="Arial" pitchFamily="34" charset="-122"/>
-                <a:cs typeface="Arial" pitchFamily="34" charset="-120"/>
+                <a:latin typeface="Inter" pitchFamily="34" charset="0"/>
+                <a:ea typeface="Inter" pitchFamily="34" charset="-122"/>
+                <a:cs typeface="Inter" pitchFamily="34" charset="-120"/>
               </a:rPr>
               <a:t>21%</a:t>
             </a:r>
@@ -11982,9 +11982,9 @@
                 <a:solidFill>
                   <a:srgbClr val="C9D6E6"/>
                 </a:solidFill>
-                <a:latin typeface="Arial" pitchFamily="34" charset="0"/>
-                <a:ea typeface="Arial" pitchFamily="34" charset="-122"/>
-                <a:cs typeface="Arial" pitchFamily="34" charset="-120"/>
+                <a:latin typeface="Inter" pitchFamily="34" charset="0"/>
+                <a:ea typeface="Inter" pitchFamily="34" charset="-122"/>
+                <a:cs typeface="Inter" pitchFamily="34" charset="-120"/>
               </a:rPr>
               <a:t>Alícuota general</a:t>
             </a:r>
@@ -12021,9 +12021,9 @@
                 <a:solidFill>
                   <a:srgbClr val="FFFFFF"/>
                 </a:solidFill>
-                <a:latin typeface="Arial" pitchFamily="34" charset="0"/>
-                <a:ea typeface="Arial" pitchFamily="34" charset="-122"/>
-                <a:cs typeface="Arial" pitchFamily="34" charset="-120"/>
+                <a:latin typeface="Inter" pitchFamily="34" charset="0"/>
+                <a:ea typeface="Inter" pitchFamily="34" charset="-122"/>
+                <a:cs typeface="Inter" pitchFamily="34" charset="-120"/>
               </a:rPr>
               <a:t>10,5%</a:t>
             </a:r>
@@ -12063,9 +12063,9 @@
                 <a:solidFill>
                   <a:srgbClr val="C9D6E6"/>
                 </a:solidFill>
-                <a:latin typeface="Arial" pitchFamily="34" charset="0"/>
-                <a:ea typeface="Arial" pitchFamily="34" charset="-122"/>
-                <a:cs typeface="Arial" pitchFamily="34" charset="-120"/>
+                <a:latin typeface="Inter" pitchFamily="34" charset="0"/>
+                <a:ea typeface="Inter" pitchFamily="34" charset="-122"/>
+                <a:cs typeface="Inter" pitchFamily="34" charset="-120"/>
               </a:rPr>
               <a:t>Construcción, transporte, prepagas</a:t>
             </a:r>
@@ -12102,9 +12102,9 @@
                 <a:solidFill>
                   <a:srgbClr val="FFFFFF"/>
                 </a:solidFill>
-                <a:latin typeface="Arial" pitchFamily="34" charset="0"/>
-                <a:ea typeface="Arial" pitchFamily="34" charset="-122"/>
-                <a:cs typeface="Arial" pitchFamily="34" charset="-120"/>
+                <a:latin typeface="Inter" pitchFamily="34" charset="0"/>
+                <a:ea typeface="Inter" pitchFamily="34" charset="-122"/>
+                <a:cs typeface="Inter" pitchFamily="34" charset="-120"/>
               </a:rPr>
               <a:t>27%</a:t>
             </a:r>
@@ -12144,9 +12144,9 @@
                 <a:solidFill>
                   <a:srgbClr val="C9D6E6"/>
                 </a:solidFill>
-                <a:latin typeface="Arial" pitchFamily="34" charset="0"/>
-                <a:ea typeface="Arial" pitchFamily="34" charset="-122"/>
-                <a:cs typeface="Arial" pitchFamily="34" charset="-120"/>
+                <a:latin typeface="Inter" pitchFamily="34" charset="0"/>
+                <a:ea typeface="Inter" pitchFamily="34" charset="-122"/>
+                <a:cs typeface="Inter" pitchFamily="34" charset="-120"/>
               </a:rPr>
               <a:t>Luz, gas y teléfono comerciales</a:t>
             </a:r>
@@ -12213,9 +12213,9 @@
                 <a:solidFill>
                   <a:srgbClr val="FFFFFF"/>
                 </a:solidFill>
-                <a:latin typeface="Arial" pitchFamily="34" charset="0"/>
-                <a:ea typeface="Arial" pitchFamily="34" charset="-122"/>
-                <a:cs typeface="Arial" pitchFamily="34" charset="-120"/>
+                <a:latin typeface="Inter" pitchFamily="34" charset="0"/>
+                <a:ea typeface="Inter" pitchFamily="34" charset="-122"/>
+                <a:cs typeface="Inter" pitchFamily="34" charset="-120"/>
               </a:rPr>
               <a:t>Crédito fiscal es el IVA que pagaste en tus compras; débito fiscal, el que cobraste en tus ventas. Se liquida la diferencia.</a:t>
             </a:r>
@@ -12279,9 +12279,9 @@
                 <a:solidFill>
                   <a:srgbClr val="FFFFFF"/>
                 </a:solidFill>
-                <a:latin typeface="Arial" pitchFamily="34" charset="0"/>
-                <a:ea typeface="Arial" pitchFamily="34" charset="-122"/>
-                <a:cs typeface="Arial" pitchFamily="34" charset="-120"/>
+                <a:latin typeface="Inter" pitchFamily="34" charset="0"/>
+                <a:ea typeface="Inter" pitchFamily="34" charset="-122"/>
+                <a:cs typeface="Inter" pitchFamily="34" charset="-120"/>
               </a:rPr>
               <a:t>Ganancias</a:t>
             </a:r>
@@ -12321,9 +12321,9 @@
                 <a:solidFill>
                   <a:srgbClr val="F0F2F5"/>
                 </a:solidFill>
-                <a:latin typeface="Arial" pitchFamily="34" charset="0"/>
-                <a:ea typeface="Arial" pitchFamily="34" charset="-122"/>
-                <a:cs typeface="Arial" pitchFamily="34" charset="-120"/>
+                <a:latin typeface="Inter" pitchFamily="34" charset="0"/>
+                <a:ea typeface="Inter" pitchFamily="34" charset="-122"/>
+                <a:cs typeface="Inter" pitchFamily="34" charset="-120"/>
               </a:rPr>
               <a:t>Grava la renta de personas y empresas. Declaración jurada anual, con anticipos durante el año.</a:t>
             </a:r>
@@ -12360,9 +12360,9 @@
                 <a:solidFill>
                   <a:srgbClr val="FFFFFF"/>
                 </a:solidFill>
-                <a:latin typeface="Arial" pitchFamily="34" charset="0"/>
-                <a:ea typeface="Arial" pitchFamily="34" charset="-122"/>
-                <a:cs typeface="Arial" pitchFamily="34" charset="-120"/>
+                <a:latin typeface="Inter" pitchFamily="34" charset="0"/>
+                <a:ea typeface="Inter" pitchFamily="34" charset="-122"/>
+                <a:cs typeface="Inter" pitchFamily="34" charset="-120"/>
               </a:rPr>
               <a:t>En relación de dependencia</a:t>
             </a:r>
@@ -12402,9 +12402,9 @@
                 <a:solidFill>
                   <a:srgbClr val="F0F2F5"/>
                 </a:solidFill>
-                <a:latin typeface="Arial" pitchFamily="34" charset="0"/>
-                <a:ea typeface="Arial" pitchFamily="34" charset="-122"/>
-                <a:cs typeface="Arial" pitchFamily="34" charset="-120"/>
+                <a:latin typeface="Inter" pitchFamily="34" charset="0"/>
+                <a:ea typeface="Inter" pitchFamily="34" charset="-122"/>
+                <a:cs typeface="Inter" pitchFamily="34" charset="-120"/>
               </a:rPr>
               <a:t>El empleador retiene del sueldo cuando supera el mínimo no imponible vigente.</a:t>
             </a:r>
@@ -12441,9 +12441,9 @@
                 <a:solidFill>
                   <a:srgbClr val="FFFFFF"/>
                 </a:solidFill>
-                <a:latin typeface="Arial" pitchFamily="34" charset="0"/>
-                <a:ea typeface="Arial" pitchFamily="34" charset="-122"/>
-                <a:cs typeface="Arial" pitchFamily="34" charset="-120"/>
+                <a:latin typeface="Inter" pitchFamily="34" charset="0"/>
+                <a:ea typeface="Inter" pitchFamily="34" charset="-122"/>
+                <a:cs typeface="Inter" pitchFamily="34" charset="-120"/>
               </a:rPr>
               <a:t>En sociedades</a:t>
             </a:r>
@@ -12483,9 +12483,9 @@
                 <a:solidFill>
                   <a:srgbClr val="F0F2F5"/>
                 </a:solidFill>
-                <a:latin typeface="Arial" pitchFamily="34" charset="0"/>
-                <a:ea typeface="Arial" pitchFamily="34" charset="-122"/>
-                <a:cs typeface="Arial" pitchFamily="34" charset="-120"/>
+                <a:latin typeface="Inter" pitchFamily="34" charset="0"/>
+                <a:ea typeface="Inter" pitchFamily="34" charset="-122"/>
+                <a:cs typeface="Inter" pitchFamily="34" charset="-120"/>
               </a:rPr>
               <a:t>Grava la utilidad fiscal, con alícuotas escalonadas según la ganancia y si se reinvierte (Ley 27.630).</a:t>
             </a:r>
@@ -12522,9 +12522,9 @@
                 <a:solidFill>
                   <a:srgbClr val="FFFFFF"/>
                 </a:solidFill>
-                <a:latin typeface="Arial" pitchFamily="34" charset="0"/>
-                <a:ea typeface="Arial" pitchFamily="34" charset="-122"/>
-                <a:cs typeface="Arial" pitchFamily="34" charset="-120"/>
+                <a:latin typeface="Inter" pitchFamily="34" charset="0"/>
+                <a:ea typeface="Inter" pitchFamily="34" charset="-122"/>
+                <a:cs typeface="Inter" pitchFamily="34" charset="-120"/>
               </a:rPr>
               <a:t>Bienes Personales</a:t>
             </a:r>
@@ -12564,9 +12564,9 @@
                 <a:solidFill>
                   <a:srgbClr val="F0F2F5"/>
                 </a:solidFill>
-                <a:latin typeface="Arial" pitchFamily="34" charset="0"/>
-                <a:ea typeface="Arial" pitchFamily="34" charset="-122"/>
-                <a:cs typeface="Arial" pitchFamily="34" charset="-120"/>
+                <a:latin typeface="Inter" pitchFamily="34" charset="0"/>
+                <a:ea typeface="Inter" pitchFamily="34" charset="-122"/>
+                <a:cs typeface="Inter" pitchFamily="34" charset="-120"/>
               </a:rPr>
               <a:t>Impuesto anual al patrimonio al 31/12: inmuebles, vehículos, inversiones y participaciones societarias.</a:t>
             </a:r>
@@ -12712,17 +12712,17 @@
               <a:buNone/>
             </a:pPr>
             <a:r>
-              <a:rPr lang="en-US" sz="2700" b="1" dirty="0">
+              <a:rPr lang="en-US" sz="2600" b="1" dirty="0">
                 <a:solidFill>
                   <a:srgbClr val="08407C"/>
                 </a:solidFill>
-                <a:latin typeface="Arial" pitchFamily="34" charset="0"/>
-                <a:ea typeface="Arial" pitchFamily="34" charset="-122"/>
-                <a:cs typeface="Arial" pitchFamily="34" charset="-120"/>
+                <a:latin typeface="Inter" pitchFamily="34" charset="0"/>
+                <a:ea typeface="Inter" pitchFamily="34" charset="-122"/>
+                <a:cs typeface="Inter" pitchFamily="34" charset="-120"/>
               </a:rPr>
               <a:t>Las escalas de Ganancias</a:t>
             </a:r>
-            <a:endParaRPr lang="en-US" sz="2700" dirty="0"/>
+            <a:endParaRPr lang="en-US" sz="2600" dirty="0"/>
           </a:p>
         </p:txBody>
       </p:sp>
@@ -12755,9 +12755,9 @@
                 <a:solidFill>
                   <a:srgbClr val="6A7686"/>
                 </a:solidFill>
-                <a:latin typeface="Arial" pitchFamily="34" charset="0"/>
-                <a:ea typeface="Arial" pitchFamily="34" charset="-122"/>
-                <a:cs typeface="Arial" pitchFamily="34" charset="-120"/>
+                <a:latin typeface="Inter" pitchFamily="34" charset="0"/>
+                <a:ea typeface="Inter" pitchFamily="34" charset="-122"/>
+                <a:cs typeface="Inter" pitchFamily="34" charset="-120"/>
               </a:rPr>
               <a:t>Son dos regímenes distintos, y para la venta de un inmueble hay un tercero.</a:t>
             </a:r>
@@ -12821,9 +12821,9 @@
                 <a:solidFill>
                   <a:srgbClr val="FFFFFF"/>
                 </a:solidFill>
-                <a:latin typeface="Arial" pitchFamily="34" charset="0"/>
-                <a:ea typeface="Arial" pitchFamily="34" charset="-122"/>
-                <a:cs typeface="Arial" pitchFamily="34" charset="-120"/>
+                <a:latin typeface="Inter" pitchFamily="34" charset="0"/>
+                <a:ea typeface="Inter" pitchFamily="34" charset="-122"/>
+                <a:cs typeface="Inter" pitchFamily="34" charset="-120"/>
               </a:rPr>
               <a:t>Sociedades</a:t>
             </a:r>
@@ -12863,9 +12863,9 @@
                 <a:solidFill>
                   <a:srgbClr val="DCE6F2"/>
                 </a:solidFill>
-                <a:latin typeface="Arial" pitchFamily="34" charset="0"/>
-                <a:ea typeface="Arial" pitchFamily="34" charset="-122"/>
-                <a:cs typeface="Arial" pitchFamily="34" charset="-120"/>
+                <a:latin typeface="Inter" pitchFamily="34" charset="0"/>
+                <a:ea typeface="Inter" pitchFamily="34" charset="-122"/>
+                <a:cs typeface="Inter" pitchFamily="34" charset="-120"/>
               </a:rPr>
               <a:t>Tres tramos sobre la ganancia neta acumulada. Cada alícuota se aplica solo sobre el excedente del tramo.</a:t>
             </a:r>
@@ -12902,9 +12902,9 @@
                 <a:solidFill>
                   <a:srgbClr val="FFFFFF"/>
                 </a:solidFill>
-                <a:latin typeface="Arial" pitchFamily="34" charset="0"/>
-                <a:ea typeface="Arial" pitchFamily="34" charset="-122"/>
-                <a:cs typeface="Arial" pitchFamily="34" charset="-120"/>
+                <a:latin typeface="Inter" pitchFamily="34" charset="0"/>
+                <a:ea typeface="Inter" pitchFamily="34" charset="-122"/>
+                <a:cs typeface="Inter" pitchFamily="34" charset="-120"/>
               </a:rPr>
               <a:t>25%</a:t>
             </a:r>
@@ -12941,9 +12941,9 @@
                 <a:solidFill>
                   <a:srgbClr val="C9D6E6"/>
                 </a:solidFill>
-                <a:latin typeface="Arial" pitchFamily="34" charset="0"/>
-                <a:ea typeface="Arial" pitchFamily="34" charset="-122"/>
-                <a:cs typeface="Arial" pitchFamily="34" charset="-120"/>
+                <a:latin typeface="Inter" pitchFamily="34" charset="0"/>
+                <a:ea typeface="Inter" pitchFamily="34" charset="-122"/>
+                <a:cs typeface="Inter" pitchFamily="34" charset="-120"/>
               </a:rPr>
               <a:t>1.er tramo</a:t>
             </a:r>
@@ -12980,9 +12980,9 @@
                 <a:solidFill>
                   <a:srgbClr val="FFFFFF"/>
                 </a:solidFill>
-                <a:latin typeface="Arial" pitchFamily="34" charset="0"/>
-                <a:ea typeface="Arial" pitchFamily="34" charset="-122"/>
-                <a:cs typeface="Arial" pitchFamily="34" charset="-120"/>
+                <a:latin typeface="Inter" pitchFamily="34" charset="0"/>
+                <a:ea typeface="Inter" pitchFamily="34" charset="-122"/>
+                <a:cs typeface="Inter" pitchFamily="34" charset="-120"/>
               </a:rPr>
               <a:t>30%</a:t>
             </a:r>
@@ -13019,9 +13019,9 @@
                 <a:solidFill>
                   <a:srgbClr val="C9D6E6"/>
                 </a:solidFill>
-                <a:latin typeface="Arial" pitchFamily="34" charset="0"/>
-                <a:ea typeface="Arial" pitchFamily="34" charset="-122"/>
-                <a:cs typeface="Arial" pitchFamily="34" charset="-120"/>
+                <a:latin typeface="Inter" pitchFamily="34" charset="0"/>
+                <a:ea typeface="Inter" pitchFamily="34" charset="-122"/>
+                <a:cs typeface="Inter" pitchFamily="34" charset="-120"/>
               </a:rPr>
               <a:t>2.º tramo</a:t>
             </a:r>
@@ -13058,9 +13058,9 @@
                 <a:solidFill>
                   <a:srgbClr val="FFFFFF"/>
                 </a:solidFill>
-                <a:latin typeface="Arial" pitchFamily="34" charset="0"/>
-                <a:ea typeface="Arial" pitchFamily="34" charset="-122"/>
-                <a:cs typeface="Arial" pitchFamily="34" charset="-120"/>
+                <a:latin typeface="Inter" pitchFamily="34" charset="0"/>
+                <a:ea typeface="Inter" pitchFamily="34" charset="-122"/>
+                <a:cs typeface="Inter" pitchFamily="34" charset="-120"/>
               </a:rPr>
               <a:t>35%</a:t>
             </a:r>
@@ -13097,9 +13097,9 @@
                 <a:solidFill>
                   <a:srgbClr val="C9D6E6"/>
                 </a:solidFill>
-                <a:latin typeface="Arial" pitchFamily="34" charset="0"/>
-                <a:ea typeface="Arial" pitchFamily="34" charset="-122"/>
-                <a:cs typeface="Arial" pitchFamily="34" charset="-120"/>
+                <a:latin typeface="Inter" pitchFamily="34" charset="0"/>
+                <a:ea typeface="Inter" pitchFamily="34" charset="-122"/>
+                <a:cs typeface="Inter" pitchFamily="34" charset="-120"/>
               </a:rPr>
               <a:t>3.er tramo</a:t>
             </a:r>
@@ -13136,9 +13136,9 @@
                 <a:solidFill>
                   <a:srgbClr val="FFFFFF"/>
                 </a:solidFill>
-                <a:latin typeface="Arial" pitchFamily="34" charset="0"/>
-                <a:ea typeface="Arial" pitchFamily="34" charset="-122"/>
-                <a:cs typeface="Arial" pitchFamily="34" charset="-120"/>
+                <a:latin typeface="Inter" pitchFamily="34" charset="0"/>
+                <a:ea typeface="Inter" pitchFamily="34" charset="-122"/>
+                <a:cs typeface="Inter" pitchFamily="34" charset="-120"/>
               </a:rPr>
               <a:t>+ 7% adicional si la utilidad se distribuye como dividendo.</a:t>
             </a:r>
@@ -13202,9 +13202,9 @@
                 <a:solidFill>
                   <a:srgbClr val="FFFFFF"/>
                 </a:solidFill>
-                <a:latin typeface="Arial" pitchFamily="34" charset="0"/>
-                <a:ea typeface="Arial" pitchFamily="34" charset="-122"/>
-                <a:cs typeface="Arial" pitchFamily="34" charset="-120"/>
+                <a:latin typeface="Inter" pitchFamily="34" charset="0"/>
+                <a:ea typeface="Inter" pitchFamily="34" charset="-122"/>
+                <a:cs typeface="Inter" pitchFamily="34" charset="-120"/>
               </a:rPr>
               <a:t>Personas humanas</a:t>
             </a:r>
@@ -13244,9 +13244,9 @@
                 <a:solidFill>
                   <a:srgbClr val="F0F2F5"/>
                 </a:solidFill>
-                <a:latin typeface="Arial" pitchFamily="34" charset="0"/>
-                <a:ea typeface="Arial" pitchFamily="34" charset="-122"/>
-                <a:cs typeface="Arial" pitchFamily="34" charset="-120"/>
+                <a:latin typeface="Inter" pitchFamily="34" charset="0"/>
+                <a:ea typeface="Inter" pitchFamily="34" charset="-122"/>
+                <a:cs typeface="Inter" pitchFamily="34" charset="-120"/>
               </a:rPr>
               <a:t>Sueldos en relación de dependencia, lo que factura un agente como autónomo y los alquileres cobrados.</a:t>
             </a:r>
@@ -13283,9 +13283,9 @@
                 <a:solidFill>
                   <a:srgbClr val="FFFFFF"/>
                 </a:solidFill>
-                <a:latin typeface="Arial" pitchFamily="34" charset="0"/>
-                <a:ea typeface="Arial" pitchFamily="34" charset="-122"/>
-                <a:cs typeface="Arial" pitchFamily="34" charset="-120"/>
+                <a:latin typeface="Inter" pitchFamily="34" charset="0"/>
+                <a:ea typeface="Inter" pitchFamily="34" charset="-122"/>
+                <a:cs typeface="Inter" pitchFamily="34" charset="-120"/>
               </a:rPr>
               <a:t>5% → 35%</a:t>
             </a:r>
@@ -13322,9 +13322,9 @@
                 <a:solidFill>
                   <a:srgbClr val="E4E7EC"/>
                 </a:solidFill>
-                <a:latin typeface="Arial" pitchFamily="34" charset="0"/>
-                <a:ea typeface="Arial" pitchFamily="34" charset="-122"/>
-                <a:cs typeface="Arial" pitchFamily="34" charset="-120"/>
+                <a:latin typeface="Inter" pitchFamily="34" charset="0"/>
+                <a:ea typeface="Inter" pitchFamily="34" charset="-122"/>
+                <a:cs typeface="Inter" pitchFamily="34" charset="-120"/>
               </a:rPr>
               <a:t>Nueve tramos progresivos</a:t>
             </a:r>
@@ -13364,9 +13364,9 @@
                 <a:solidFill>
                   <a:srgbClr val="F0F2F5"/>
                 </a:solidFill>
-                <a:latin typeface="Arial" pitchFamily="34" charset="0"/>
-                <a:ea typeface="Arial" pitchFamily="34" charset="-122"/>
-                <a:cs typeface="Arial" pitchFamily="34" charset="-120"/>
+                <a:latin typeface="Inter" pitchFamily="34" charset="0"/>
+                <a:ea typeface="Inter" pitchFamily="34" charset="-122"/>
+                <a:cs typeface="Inter" pitchFamily="34" charset="-120"/>
               </a:rPr>
               <a:t>ARCA publica una tabla para enero–junio y otra para julio–diciembre.</a:t>
             </a:r>
@@ -13403,9 +13403,9 @@
                 <a:solidFill>
                   <a:srgbClr val="08407C"/>
                 </a:solidFill>
-                <a:latin typeface="Arial" pitchFamily="34" charset="0"/>
-                <a:ea typeface="Arial" pitchFamily="34" charset="-122"/>
-                <a:cs typeface="Arial" pitchFamily="34" charset="-120"/>
+                <a:latin typeface="Inter" pitchFamily="34" charset="0"/>
+                <a:ea typeface="Inter" pitchFamily="34" charset="-122"/>
+                <a:cs typeface="Inter" pitchFamily="34" charset="-120"/>
               </a:rPr>
               <a:t>Cuando se vende un inmueble, la fecha de compra define el impuesto</a:t>
             </a:r>
@@ -13469,9 +13469,9 @@
                 <a:solidFill>
                   <a:srgbClr val="6A7686"/>
                 </a:solidFill>
-                <a:latin typeface="Arial" pitchFamily="34" charset="0"/>
-                <a:ea typeface="Arial" pitchFamily="34" charset="-122"/>
-                <a:cs typeface="Arial" pitchFamily="34" charset="-120"/>
+                <a:latin typeface="Inter" pitchFamily="34" charset="0"/>
+                <a:ea typeface="Inter" pitchFamily="34" charset="-122"/>
+                <a:cs typeface="Inter" pitchFamily="34" charset="-120"/>
               </a:rPr>
               <a:t>COMPRADO HASTA EL 31/12/2017</a:t>
             </a:r>
@@ -13508,9 +13508,9 @@
                 <a:solidFill>
                   <a:srgbClr val="08407C"/>
                 </a:solidFill>
-                <a:latin typeface="Arial" pitchFamily="34" charset="0"/>
-                <a:ea typeface="Arial" pitchFamily="34" charset="-122"/>
-                <a:cs typeface="Arial" pitchFamily="34" charset="-120"/>
+                <a:latin typeface="Inter" pitchFamily="34" charset="0"/>
+                <a:ea typeface="Inter" pitchFamily="34" charset="-122"/>
+                <a:cs typeface="Inter" pitchFamily="34" charset="-120"/>
               </a:rPr>
               <a:t>No paga</a:t>
             </a:r>
@@ -13550,9 +13550,9 @@
                 <a:solidFill>
                   <a:srgbClr val="2E4258"/>
                 </a:solidFill>
-                <a:latin typeface="Arial" pitchFamily="34" charset="0"/>
-                <a:ea typeface="Arial" pitchFamily="34" charset="-122"/>
-                <a:cs typeface="Arial" pitchFamily="34" charset="-120"/>
+                <a:latin typeface="Inter" pitchFamily="34" charset="0"/>
+                <a:ea typeface="Inter" pitchFamily="34" charset="-122"/>
+                <a:cs typeface="Inter" pitchFamily="34" charset="-120"/>
               </a:rPr>
               <a:t>El ITI de 1,5% quedó derogado por la Ley 27.743 en julio de 2024.</a:t>
             </a:r>
@@ -13616,9 +13616,9 @@
                 <a:solidFill>
                   <a:srgbClr val="6A7686"/>
                 </a:solidFill>
-                <a:latin typeface="Arial" pitchFamily="34" charset="0"/>
-                <a:ea typeface="Arial" pitchFamily="34" charset="-122"/>
-                <a:cs typeface="Arial" pitchFamily="34" charset="-120"/>
+                <a:latin typeface="Inter" pitchFamily="34" charset="0"/>
+                <a:ea typeface="Inter" pitchFamily="34" charset="-122"/>
+                <a:cs typeface="Inter" pitchFamily="34" charset="-120"/>
               </a:rPr>
               <a:t>COMPRADO DESDE EL 1/1/2018</a:t>
             </a:r>
@@ -13655,9 +13655,9 @@
                 <a:solidFill>
                   <a:srgbClr val="08407C"/>
                 </a:solidFill>
-                <a:latin typeface="Arial" pitchFamily="34" charset="0"/>
-                <a:ea typeface="Arial" pitchFamily="34" charset="-122"/>
-                <a:cs typeface="Arial" pitchFamily="34" charset="-120"/>
+                <a:latin typeface="Inter" pitchFamily="34" charset="0"/>
+                <a:ea typeface="Inter" pitchFamily="34" charset="-122"/>
+                <a:cs typeface="Inter" pitchFamily="34" charset="-120"/>
               </a:rPr>
               <a:t>15%</a:t>
             </a:r>
@@ -13697,9 +13697,9 @@
                 <a:solidFill>
                   <a:srgbClr val="2E4258"/>
                 </a:solidFill>
-                <a:latin typeface="Arial" pitchFamily="34" charset="0"/>
-                <a:ea typeface="Arial" pitchFamily="34" charset="-122"/>
-                <a:cs typeface="Arial" pitchFamily="34" charset="-120"/>
+                <a:latin typeface="Inter" pitchFamily="34" charset="0"/>
+                <a:ea typeface="Inter" pitchFamily="34" charset="-122"/>
+                <a:cs typeface="Inter" pitchFamily="34" charset="-120"/>
               </a:rPr>
               <a:t>Impuesto cedular sobre la ganancia: precio menos costo actualizado y gastos.</a:t>
             </a:r>
@@ -13763,9 +13763,9 @@
                 <a:solidFill>
                   <a:srgbClr val="6A7686"/>
                 </a:solidFill>
-                <a:latin typeface="Arial" pitchFamily="34" charset="0"/>
-                <a:ea typeface="Arial" pitchFamily="34" charset="-122"/>
-                <a:cs typeface="Arial" pitchFamily="34" charset="-120"/>
+                <a:latin typeface="Inter" pitchFamily="34" charset="0"/>
+                <a:ea typeface="Inter" pitchFamily="34" charset="-122"/>
+                <a:cs typeface="Inter" pitchFamily="34" charset="-120"/>
               </a:rPr>
               <a:t>CASA-HABITACIÓN</a:t>
             </a:r>
@@ -13802,9 +13802,9 @@
                 <a:solidFill>
                   <a:srgbClr val="08407C"/>
                 </a:solidFill>
-                <a:latin typeface="Arial" pitchFamily="34" charset="0"/>
-                <a:ea typeface="Arial" pitchFamily="34" charset="-122"/>
-                <a:cs typeface="Arial" pitchFamily="34" charset="-120"/>
+                <a:latin typeface="Inter" pitchFamily="34" charset="0"/>
+                <a:ea typeface="Inter" pitchFamily="34" charset="-122"/>
+                <a:cs typeface="Inter" pitchFamily="34" charset="-120"/>
               </a:rPr>
               <a:t>Exenta</a:t>
             </a:r>
@@ -13844,9 +13844,9 @@
                 <a:solidFill>
                   <a:srgbClr val="2E4258"/>
                 </a:solidFill>
-                <a:latin typeface="Arial" pitchFamily="34" charset="0"/>
-                <a:ea typeface="Arial" pitchFamily="34" charset="-122"/>
-                <a:cs typeface="Arial" pitchFamily="34" charset="-120"/>
+                <a:latin typeface="Inter" pitchFamily="34" charset="0"/>
+                <a:ea typeface="Inter" pitchFamily="34" charset="-122"/>
+                <a:cs typeface="Inter" pitchFamily="34" charset="-120"/>
               </a:rPr>
               <a:t>La vivienda única de residencia permanente no tributa el cedular.</a:t>
             </a:r>
@@ -13883,9 +13883,9 @@
                 <a:solidFill>
                   <a:srgbClr val="6A7686"/>
                 </a:solidFill>
-                <a:latin typeface="Arial" pitchFamily="34" charset="0"/>
-                <a:ea typeface="Arial" pitchFamily="34" charset="-122"/>
-                <a:cs typeface="Arial" pitchFamily="34" charset="-120"/>
+                <a:latin typeface="Inter" pitchFamily="34" charset="0"/>
+                <a:ea typeface="Inter" pitchFamily="34" charset="-122"/>
+                <a:cs typeface="Inter" pitchFamily="34" charset="-120"/>
               </a:rPr>
               <a:t>Las alícuotas las fija la ley, pero los montos de cada tramo se actualizan todos los años: confirmar siempre los valores vigentes en arca.gob.ar antes de hacer un número.</a:t>
             </a:r>
@@ -14031,17 +14031,17 @@
               <a:buNone/>
             </a:pPr>
             <a:r>
-              <a:rPr lang="en-US" sz="2700" b="1" dirty="0">
+              <a:rPr lang="en-US" sz="2600" b="1" dirty="0">
                 <a:solidFill>
                   <a:srgbClr val="08407C"/>
                 </a:solidFill>
-                <a:latin typeface="Arial" pitchFamily="34" charset="0"/>
-                <a:ea typeface="Arial" pitchFamily="34" charset="-122"/>
-                <a:cs typeface="Arial" pitchFamily="34" charset="-120"/>
+                <a:latin typeface="Inter" pitchFamily="34" charset="0"/>
+                <a:ea typeface="Inter" pitchFamily="34" charset="-122"/>
+                <a:cs typeface="Inter" pitchFamily="34" charset="-120"/>
               </a:rPr>
               <a:t>Ingresos Brutos: el que más duele</a:t>
             </a:r>
-            <a:endParaRPr lang="en-US" sz="2700" dirty="0"/>
+            <a:endParaRPr lang="en-US" sz="2600" dirty="0"/>
           </a:p>
         </p:txBody>
       </p:sp>
@@ -14074,9 +14074,9 @@
                 <a:solidFill>
                   <a:srgbClr val="6A7686"/>
                 </a:solidFill>
-                <a:latin typeface="Arial" pitchFamily="34" charset="0"/>
-                <a:ea typeface="Arial" pitchFamily="34" charset="-122"/>
-                <a:cs typeface="Arial" pitchFamily="34" charset="-120"/>
+                <a:latin typeface="Inter" pitchFamily="34" charset="0"/>
+                <a:ea typeface="Inter" pitchFamily="34" charset="-122"/>
+                <a:cs typeface="Inter" pitchFamily="34" charset="-120"/>
               </a:rPr>
               <a:t>Provincial, mensual y calculado sobre lo facturado — exista o no ganancia.</a:t>
             </a:r>
@@ -14143,9 +14143,9 @@
                 <a:solidFill>
                   <a:srgbClr val="FFFFFF"/>
                 </a:solidFill>
-                <a:latin typeface="Arial" pitchFamily="34" charset="0"/>
-                <a:ea typeface="Arial" pitchFamily="34" charset="-122"/>
-                <a:cs typeface="Arial" pitchFamily="34" charset="-120"/>
+                <a:latin typeface="Inter" pitchFamily="34" charset="0"/>
+                <a:ea typeface="Inter" pitchFamily="34" charset="-122"/>
+                <a:cs typeface="Inter" pitchFamily="34" charset="-120"/>
               </a:rPr>
               <a:t>Se paga sobre la facturación, no sobre la rentabilidad.</a:t>
             </a:r>
@@ -14185,9 +14185,9 @@
                 <a:solidFill>
                   <a:srgbClr val="DCE6F2"/>
                 </a:solidFill>
-                <a:latin typeface="Arial" pitchFamily="34" charset="0"/>
-                <a:ea typeface="Arial" pitchFamily="34" charset="-122"/>
-                <a:cs typeface="Arial" pitchFamily="34" charset="-120"/>
+                <a:latin typeface="Inter" pitchFamily="34" charset="0"/>
+                <a:ea typeface="Inter" pitchFamily="34" charset="-122"/>
+                <a:cs typeface="Inter" pitchFamily="34" charset="-120"/>
               </a:rPr>
               <a:t>Cada provincia fija su propia alícuota según el rubro: la de real estate no es la misma que la de venta de herramientas o marketing. Se liquida mensualmente ante ARBA, AGIP u otra provincia.</a:t>
             </a:r>
@@ -14251,9 +14251,9 @@
                 <a:solidFill>
                   <a:srgbClr val="FFFFFF"/>
                 </a:solidFill>
-                <a:latin typeface="Arial" pitchFamily="34" charset="0"/>
-                <a:ea typeface="Arial" pitchFamily="34" charset="-122"/>
-                <a:cs typeface="Arial" pitchFamily="34" charset="-120"/>
+                <a:latin typeface="Inter" pitchFamily="34" charset="0"/>
+                <a:ea typeface="Inter" pitchFamily="34" charset="-122"/>
+                <a:cs typeface="Inter" pitchFamily="34" charset="-120"/>
               </a:rPr>
               <a:t>Convenio Multilateral</a:t>
             </a:r>
@@ -14293,9 +14293,9 @@
                 <a:solidFill>
                   <a:srgbClr val="F0F2F5"/>
                 </a:solidFill>
-                <a:latin typeface="Arial" pitchFamily="34" charset="0"/>
-                <a:ea typeface="Arial" pitchFamily="34" charset="-122"/>
-                <a:cs typeface="Arial" pitchFamily="34" charset="-120"/>
+                <a:latin typeface="Inter" pitchFamily="34" charset="0"/>
+                <a:ea typeface="Inter" pitchFamily="34" charset="-122"/>
+                <a:cs typeface="Inter" pitchFamily="34" charset="-120"/>
               </a:rPr>
               <a:t>Si la inmobiliaria factura en CABA y en PBA, no paga Ingresos Brutos completo en cada jurisdicción por el mismo ingreso: el Convenio reparte la base imponible entre ambas.</a:t>
             </a:r>
@@ -14362,9 +14362,9 @@
                 <a:solidFill>
                   <a:srgbClr val="FFFFFF"/>
                 </a:solidFill>
-                <a:latin typeface="Arial" pitchFamily="34" charset="0"/>
-                <a:ea typeface="Arial" pitchFamily="34" charset="-122"/>
-                <a:cs typeface="Arial" pitchFamily="34" charset="-120"/>
+                <a:latin typeface="Inter" pitchFamily="34" charset="0"/>
+                <a:ea typeface="Inter" pitchFamily="34" charset="-122"/>
+                <a:cs typeface="Inter" pitchFamily="34" charset="-120"/>
               </a:rPr>
               <a:t>Una única DDJJ mensual (SIFERE) + el CM05 anual al cierre del ejercicio.</a:t>
             </a:r>
@@ -14428,9 +14428,9 @@
                 <a:solidFill>
                   <a:srgbClr val="08407C"/>
                 </a:solidFill>
-                <a:latin typeface="Arial" pitchFamily="34" charset="0"/>
-                <a:ea typeface="Arial" pitchFamily="34" charset="-122"/>
-                <a:cs typeface="Arial" pitchFamily="34" charset="-120"/>
+                <a:latin typeface="Inter" pitchFamily="34" charset="0"/>
+                <a:ea typeface="Inter" pitchFamily="34" charset="-122"/>
+                <a:cs typeface="Inter" pitchFamily="34" charset="-120"/>
               </a:rPr>
               <a:t>Retención</a:t>
             </a:r>
@@ -14467,9 +14467,9 @@
                 <a:solidFill>
                   <a:srgbClr val="6A7686"/>
                 </a:solidFill>
-                <a:latin typeface="Arial" pitchFamily="34" charset="0"/>
-                <a:ea typeface="Arial" pitchFamily="34" charset="-122"/>
-                <a:cs typeface="Arial" pitchFamily="34" charset="-120"/>
+                <a:latin typeface="Inter" pitchFamily="34" charset="0"/>
+                <a:ea typeface="Inter" pitchFamily="34" charset="-122"/>
+                <a:cs typeface="Inter" pitchFamily="34" charset="-120"/>
               </a:rPr>
               <a:t>LA COBRA QUIEN PAGA</a:t>
             </a:r>
@@ -14509,9 +14509,9 @@
                 <a:solidFill>
                   <a:srgbClr val="2E4258"/>
                 </a:solidFill>
-                <a:latin typeface="Arial" pitchFamily="34" charset="0"/>
-                <a:ea typeface="Arial" pitchFamily="34" charset="-122"/>
-                <a:cs typeface="Arial" pitchFamily="34" charset="-120"/>
+                <a:latin typeface="Inter" pitchFamily="34" charset="0"/>
+                <a:ea typeface="Inter" pitchFamily="34" charset="-122"/>
+                <a:cs typeface="Inter" pitchFamily="34" charset="-120"/>
               </a:rPr>
               <a:t>Descuenta un porcentaje de la factura del proveedor y lo deposita al fisco a cuenta de ese proveedor, que recibe un certificado.</a:t>
             </a:r>
@@ -14575,9 +14575,9 @@
                 <a:solidFill>
                   <a:srgbClr val="08407C"/>
                 </a:solidFill>
-                <a:latin typeface="Arial" pitchFamily="34" charset="0"/>
-                <a:ea typeface="Arial" pitchFamily="34" charset="-122"/>
-                <a:cs typeface="Arial" pitchFamily="34" charset="-120"/>
+                <a:latin typeface="Inter" pitchFamily="34" charset="0"/>
+                <a:ea typeface="Inter" pitchFamily="34" charset="-122"/>
+                <a:cs typeface="Inter" pitchFamily="34" charset="-120"/>
               </a:rPr>
               <a:t>Percepción</a:t>
             </a:r>
@@ -14614,9 +14614,9 @@
                 <a:solidFill>
                   <a:srgbClr val="6A7686"/>
                 </a:solidFill>
-                <a:latin typeface="Arial" pitchFamily="34" charset="0"/>
-                <a:ea typeface="Arial" pitchFamily="34" charset="-122"/>
-                <a:cs typeface="Arial" pitchFamily="34" charset="-120"/>
+                <a:latin typeface="Inter" pitchFamily="34" charset="0"/>
+                <a:ea typeface="Inter" pitchFamily="34" charset="-122"/>
+                <a:cs typeface="Inter" pitchFamily="34" charset="-120"/>
               </a:rPr>
               <a:t>LA COBRA QUIEN VENDE</a:t>
             </a:r>
@@ -14656,9 +14656,9 @@
                 <a:solidFill>
                   <a:srgbClr val="2E4258"/>
                 </a:solidFill>
-                <a:latin typeface="Arial" pitchFamily="34" charset="0"/>
-                <a:ea typeface="Arial" pitchFamily="34" charset="-122"/>
-                <a:cs typeface="Arial" pitchFamily="34" charset="-120"/>
+                <a:latin typeface="Inter" pitchFamily="34" charset="0"/>
+                <a:ea typeface="Inter" pitchFamily="34" charset="-122"/>
+                <a:cs typeface="Inter" pitchFamily="34" charset="-120"/>
               </a:rPr>
               <a:t>Suma un importe por encima del precio y lo deposita al fisco a cuenta de las obligaciones futuras del comprador.</a:t>
             </a:r>
